--- a/docs/architecture-overview/Verdikt_Presentation.pptx
+++ b/docs/architecture-overview/Verdikt_Presentation.pptx
@@ -10,6 +10,7 @@
     <p:sldId id="258" r:id="rId9"/>
     <p:sldId id="259" r:id="rId10"/>
     <p:sldId id="260" r:id="rId11"/>
+    <p:sldId id="276" r:id="rId27"/>
     <p:sldId id="261" r:id="rId12"/>
     <p:sldId id="262" r:id="rId13"/>
     <p:sldId id="263" r:id="rId14"/>
@@ -24,6 +25,7 @@
     <p:sldId id="272" r:id="rId23"/>
     <p:sldId id="273" r:id="rId24"/>
     <p:sldId id="274" r:id="rId25"/>
+    <p:sldId id="277" r:id="rId28"/>
     <p:sldId id="275" r:id="rId26"/>
   </p:sldIdLst>
   <p:sldSz cx="12191695" cy="6858000" type="screen4x3"/>
@@ -3648,7 +3650,7 @@
               </a:defRPr>
             </a:pPr>
             <a:r>
-              <a:t>9</a:t>
+              <a:t>11</a:t>
             </a:r>
           </a:p>
         </p:txBody>
@@ -4008,7 +4010,7 @@
               </a:defRPr>
             </a:pPr>
             <a:r>
-              <a:t>10</a:t>
+              <a:t>12</a:t>
             </a:r>
           </a:p>
         </p:txBody>
@@ -4332,7 +4334,7 @@
               </a:defRPr>
             </a:pPr>
             <a:r>
-              <a:t>11</a:t>
+              <a:t>13</a:t>
             </a:r>
           </a:p>
         </p:txBody>
@@ -4508,7 +4510,7 @@
               </a:defRPr>
             </a:pPr>
             <a:r>
-              <a:t>Two complementary modes</a:t>
+              <a:t>Three complementary modes</a:t>
             </a:r>
           </a:p>
         </p:txBody>
@@ -4522,7 +4524,7 @@
         <p:spPr>
           <a:xfrm>
             <a:off x="548640" y="1600200"/>
-            <a:ext cx="5394960" cy="4206240"/>
+            <a:ext cx="3576218" cy="4206240"/>
           </a:xfrm>
           <a:prstGeom prst="roundRect">
             <a:avLst/>
@@ -4573,8 +4575,8 @@
         </p:nvSpPr>
         <p:spPr>
           <a:xfrm>
-            <a:off x="6217920" y="1600200"/>
-            <a:ext cx="5394960" cy="4206240"/>
+            <a:off x="4307738" y="1600200"/>
+            <a:ext cx="3576218" cy="4206240"/>
           </a:xfrm>
           <a:prstGeom prst="roundRect">
             <a:avLst/>
@@ -4626,7 +4628,7 @@
         <p:spPr>
           <a:xfrm>
             <a:off x="777240" y="1783080"/>
-            <a:ext cx="4937760" cy="3840480"/>
+            <a:ext cx="3119018" cy="3840480"/>
           </a:xfrm>
           <a:prstGeom prst="rect">
             <a:avLst/>
@@ -4655,10 +4657,10 @@
               <a:spcAft>
                 <a:spcPts val="800"/>
               </a:spcAft>
-              <a:defRPr sz="1400"/>
-            </a:pPr>
-            <a:r>
-              <a:t>•  On scan completion, Verdikt POSTs structured findings to VGS's ingestion webhook</a:t>
+              <a:defRPr sz="1300"/>
+            </a:pPr>
+            <a:r>
+              <a:t>•  On scan completion, Verdikt POSTs findings to VGS's ingestion webhook</a:t>
             </a:r>
           </a:p>
           <a:p>
@@ -4666,7 +4668,7 @@
               <a:spcAft>
                 <a:spcPts val="800"/>
               </a:spcAft>
-              <a:defRPr sz="1400"/>
+              <a:defRPr sz="1300"/>
             </a:pPr>
             <a:r>
               <a:t>•  Tagged source: ai-multi-agent</a:t>
@@ -4677,10 +4679,10 @@
               <a:spcAft>
                 <a:spcPts val="800"/>
               </a:spcAft>
-              <a:defRPr sz="1400"/>
-            </a:pPr>
-            <a:r>
-              <a:t>•  VGS remains the system of record for governance/remediation tracking</a:t>
+              <a:defRPr sz="1300"/>
+            </a:pPr>
+            <a:r>
+              <a:t>•  VGS stays system of record for governance/remediation</a:t>
             </a:r>
           </a:p>
           <a:p>
@@ -4688,10 +4690,10 @@
               <a:spcAft>
                 <a:spcPts val="800"/>
               </a:spcAft>
-              <a:defRPr sz="1400"/>
-            </a:pPr>
-            <a:r>
-              <a:t>•  Best-effort: one broken webhook config never fails the scan itself</a:t>
+              <a:defRPr sz="1300"/>
+            </a:pPr>
+            <a:r>
+              <a:t>•  Best-effort: a broken webhook never fails the scan</a:t>
             </a:r>
           </a:p>
         </p:txBody>
@@ -4704,8 +4706,8 @@
         </p:nvSpPr>
         <p:spPr>
           <a:xfrm>
-            <a:off x="6446520" y="1783080"/>
-            <a:ext cx="4937760" cy="3840480"/>
+            <a:off x="4536338" y="1783080"/>
+            <a:ext cx="3119018" cy="3840480"/>
           </a:xfrm>
           <a:prstGeom prst="rect">
             <a:avLst/>
@@ -4726,7 +4728,7 @@
               </a:defRPr>
             </a:pPr>
             <a:r>
-              <a:t>Native Report-Builder Port</a:t>
+              <a:t>Native Report-Builder</a:t>
             </a:r>
           </a:p>
           <a:p>
@@ -4734,10 +4736,10 @@
               <a:spcAft>
                 <a:spcPts val="800"/>
               </a:spcAft>
-              <a:defRPr sz="1400"/>
-            </a:pPr>
-            <a:r>
-              <a:t>•  VGS's own manual workflow ported natively into Verdikt as its own workspace</a:t>
+              <a:defRPr sz="1300"/>
+            </a:pPr>
+            <a:r>
+              <a:t>•  VGS's manual workflow, ported into Verdikt as its own workspace</a:t>
             </a:r>
           </a:p>
           <a:p>
@@ -4745,10 +4747,10 @@
               <a:spcAft>
                 <a:spcPts val="800"/>
               </a:spcAft>
-              <a:defRPr sz="1400"/>
-            </a:pPr>
-            <a:r>
-              <a:t>•  Vulnerability Picker: real, scan-confirmed findings, grouped and auto-seeded</a:t>
+              <a:defRPr sz="1300"/>
+            </a:pPr>
+            <a:r>
+              <a:t>•  Vulnerability Picker: confirmed findings, auto-seeded and tracked</a:t>
             </a:r>
           </a:p>
           <a:p>
@@ -4756,10 +4758,10 @@
               <a:spcAft>
                 <a:spcPts val="800"/>
               </a:spcAft>
-              <a:defRPr sz="1400"/>
-            </a:pPr>
-            <a:r>
-              <a:t>•  "Load from PortSwigger" — one-click pull from Web Security Academy topic pages</a:t>
+              <a:defRPr sz="1300"/>
+            </a:pPr>
+            <a:r>
+              <a:t>•  Delete or edit severity; "Load from PortSwigger" one-click pull</a:t>
             </a:r>
           </a:p>
           <a:p>
@@ -4767,10 +4769,167 @@
               <a:spcAft>
                 <a:spcPts val="800"/>
               </a:spcAft>
-              <a:defRPr sz="1400"/>
-            </a:pPr>
-            <a:r>
-              <a:t>•  Evidence editor: numbered steps, screenshots addable at any time</a:t>
+              <a:defRPr sz="1300"/>
+            </a:pPr>
+            <a:r>
+              <a:t>•  Generate Report: same DOCX shape as the original VGS tool</a:t>
+            </a:r>
+          </a:p>
+        </p:txBody>
+      </p:sp>
+      <p:sp>
+        <p:nvSpPr>
+          <p:cNvPr id="9" name="TextBox 8"/>
+          <p:cNvSpPr txBox="1"/>
+          <p:nvPr/>
+        </p:nvSpPr>
+        <p:spPr>
+          <a:xfrm>
+            <a:off x="11094415" y="6400800"/>
+            <a:ext cx="822960" cy="320040"/>
+          </a:xfrm>
+          <a:prstGeom prst="rect">
+            <a:avLst/>
+          </a:prstGeom>
+          <a:noFill/>
+        </p:spPr>
+        <p:txBody>
+          <a:bodyPr wrap="none">
+            <a:spAutoFit/>
+          </a:bodyPr>
+          <a:lstStyle/>
+          <a:p>
+            <a:pPr algn="r">
+              <a:defRPr sz="1000">
+                <a:solidFill>
+                  <a:srgbClr val="5B6270"/>
+                </a:solidFill>
+              </a:defRPr>
+            </a:pPr>
+            <a:r>
+              <a:t>14</a:t>
+            </a:r>
+          </a:p>
+        </p:txBody>
+      </p:sp>
+      <p:sp>
+        <p:nvSpPr>
+          <p:cNvPr id="10" name="TextBox 9"/>
+          <p:cNvSpPr txBox="1"/>
+          <p:nvPr/>
+        </p:nvSpPr>
+        <p:spPr>
+          <a:xfrm>
+            <a:off x="548640" y="6400800"/>
+            <a:ext cx="2743200" cy="320040"/>
+          </a:xfrm>
+          <a:prstGeom prst="rect">
+            <a:avLst/>
+          </a:prstGeom>
+          <a:noFill/>
+        </p:spPr>
+        <p:txBody>
+          <a:bodyPr wrap="none">
+            <a:spAutoFit/>
+          </a:bodyPr>
+          <a:lstStyle/>
+          <a:p>
+            <a:pPr>
+              <a:defRPr sz="1000">
+                <a:solidFill>
+                  <a:srgbClr val="5B6270"/>
+                </a:solidFill>
+              </a:defRPr>
+            </a:pPr>
+            <a:r>
+              <a:t>Verdikt</a:t>
+            </a:r>
+          </a:p>
+        </p:txBody>
+      </p:sp>
+      <p:sp>
+        <p:nvSpPr>
+          <p:cNvPr id="6" name="Rounded Rectangle 5"/>
+          <p:cNvSpPr/>
+          <p:nvPr/>
+        </p:nvSpPr>
+        <p:spPr>
+          <a:xfrm>
+            <a:off x="8066836" y="1600200"/>
+            <a:ext cx="3576218" cy="4206240"/>
+          </a:xfrm>
+          <a:prstGeom prst="roundRect">
+            <a:avLst/>
+          </a:prstGeom>
+          <a:solidFill>
+            <a:srgbClr val="F3EEFB"/>
+          </a:solidFill>
+          <a:ln w="15875">
+            <a:solidFill>
+              <a:srgbClr val="6D28D9"/>
+            </a:solidFill>
+          </a:ln>
+          <a:effectLst/>
+        </p:spPr>
+        <p:style>
+          <a:lnRef idx="1">
+            <a:schemeClr val="accent1"/>
+          </a:lnRef>
+          <a:fillRef idx="3">
+            <a:schemeClr val="accent1"/>
+          </a:fillRef>
+          <a:effectRef idx="2">
+            <a:schemeClr val="accent1"/>
+          </a:effectRef>
+          <a:fontRef idx="minor">
+            <a:schemeClr val="lt1"/>
+          </a:fontRef>
+        </p:style>
+        <p:txBody>
+          <a:bodyPr rtlCol="0" anchor="ctr" wrap="square" lIns="45720" rIns="45720"/>
+          <a:lstStyle/>
+          <a:p>
+            <a:pPr algn="ctr">
+              <a:defRPr sz="1300" b="0">
+                <a:solidFill>
+                  <a:srgbClr val="1C1E21"/>
+                </a:solidFill>
+              </a:defRPr>
+            </a:pPr>
+          </a:p>
+        </p:txBody>
+      </p:sp>
+      <p:sp>
+        <p:nvSpPr>
+          <p:cNvPr id="8" name="TextBox 7"/>
+          <p:cNvSpPr txBox="1"/>
+          <p:nvPr/>
+        </p:nvSpPr>
+        <p:spPr>
+          <a:xfrm>
+            <a:off x="8295436" y="1783080"/>
+            <a:ext cx="3119018" cy="3840480"/>
+          </a:xfrm>
+          <a:prstGeom prst="rect">
+            <a:avLst/>
+          </a:prstGeom>
+          <a:noFill/>
+        </p:spPr>
+        <p:txBody>
+          <a:bodyPr wrap="square">
+            <a:spAutoFit/>
+          </a:bodyPr>
+          <a:lstStyle/>
+          <a:p>
+            <a:pPr>
+              <a:defRPr b="1" sz="1800">
+                <a:solidFill>
+                  <a:srgbClr val="6D28D9"/>
+                </a:solidFill>
+              </a:defRPr>
+            </a:pPr>
+            <a:r>
+              <a:t>Per-Scan-Run Export</a:t>
             </a:r>
           </a:p>
           <a:p>
@@ -4778,80 +4937,43 @@
               <a:spcAft>
                 <a:spcPts val="800"/>
               </a:spcAft>
-              <a:defRPr sz="1400"/>
-            </a:pPr>
-            <a:r>
-              <a:t>•  Generate Report: same DOCX shape as the original VGS tool</a:t>
-            </a:r>
-          </a:p>
-        </p:txBody>
-      </p:sp>
-      <p:sp>
-        <p:nvSpPr>
-          <p:cNvPr id="9" name="TextBox 8"/>
-          <p:cNvSpPr txBox="1"/>
-          <p:nvPr/>
-        </p:nvSpPr>
-        <p:spPr>
-          <a:xfrm>
-            <a:off x="11094415" y="6400800"/>
-            <a:ext cx="822960" cy="320040"/>
-          </a:xfrm>
-          <a:prstGeom prst="rect">
-            <a:avLst/>
-          </a:prstGeom>
-          <a:noFill/>
-        </p:spPr>
-        <p:txBody>
-          <a:bodyPr wrap="none">
-            <a:spAutoFit/>
-          </a:bodyPr>
-          <a:lstStyle/>
-          <a:p>
-            <a:pPr algn="r">
-              <a:defRPr sz="1000">
-                <a:solidFill>
-                  <a:srgbClr val="5B6270"/>
-                </a:solidFill>
-              </a:defRPr>
-            </a:pPr>
-            <a:r>
-              <a:t>12</a:t>
-            </a:r>
-          </a:p>
-        </p:txBody>
-      </p:sp>
-      <p:sp>
-        <p:nvSpPr>
-          <p:cNvPr id="10" name="TextBox 9"/>
-          <p:cNvSpPr txBox="1"/>
-          <p:nvPr/>
-        </p:nvSpPr>
-        <p:spPr>
-          <a:xfrm>
-            <a:off x="548640" y="6400800"/>
-            <a:ext cx="2743200" cy="320040"/>
-          </a:xfrm>
-          <a:prstGeom prst="rect">
-            <a:avLst/>
-          </a:prstGeom>
-          <a:noFill/>
-        </p:spPr>
-        <p:txBody>
-          <a:bodyPr wrap="none">
-            <a:spAutoFit/>
-          </a:bodyPr>
-          <a:lstStyle/>
-          <a:p>
-            <a:pPr>
-              <a:defRPr sz="1000">
-                <a:solidFill>
-                  <a:srgbClr val="5B6270"/>
-                </a:solidFill>
-              </a:defRPr>
-            </a:pPr>
-            <a:r>
-              <a:t>Verdikt</a:t>
+              <a:defRPr sz="1300"/>
+            </a:pPr>
+            <a:r>
+              <a:t>•  One-click report.vgs.docx export scoped to a single scan run</a:t>
+            </a:r>
+          </a:p>
+          <a:p>
+            <a:pPr>
+              <a:spcAft>
+                <a:spcPts val="800"/>
+              </a:spcAft>
+              <a:defRPr sz="1300"/>
+            </a:pPr>
+            <a:r>
+              <a:t>•  Transient — not persisted or tracked like the workspace mode</a:t>
+            </a:r>
+          </a:p>
+          <a:p>
+            <a:pPr>
+              <a:spcAft>
+                <a:spcPts val="800"/>
+              </a:spcAft>
+              <a:defRPr sz="1300"/>
+            </a:pPr>
+            <a:r>
+              <a:t>•  For a quick handoff when a full workspace isn't needed</a:t>
+            </a:r>
+          </a:p>
+          <a:p>
+            <a:pPr>
+              <a:spcAft>
+                <a:spcPts val="800"/>
+              </a:spcAft>
+              <a:defRPr sz="1300"/>
+            </a:pPr>
+            <a:r>
+              <a:t>•  Same VGS-shaped DOCX output as the other two modes</a:t>
             </a:r>
           </a:p>
         </p:txBody>
@@ -5176,7 +5298,7 @@
               </a:defRPr>
             </a:pPr>
             <a:r>
-              <a:t>13</a:t>
+              <a:t>15</a:t>
             </a:r>
           </a:p>
         </p:txBody>
@@ -5446,7 +5568,7 @@
               </a:defRPr>
             </a:pPr>
             <a:r>
-              <a:t>14</a:t>
+              <a:t>16</a:t>
             </a:r>
           </a:p>
         </p:txBody>
@@ -5677,7 +5799,7 @@
               </a:defRPr>
             </a:pPr>
             <a:r>
-              <a:t>41</a:t>
+              <a:t>48</a:t>
             </a:r>
           </a:p>
           <a:p>
@@ -5693,7 +5815,7 @@
             </a:r>
             <a:br/>
             <a:r>
-              <a:t>(24 wired into the scan graph)</a:t>
+              <a:t>(27 wired into the scan graph)</a:t>
             </a:r>
           </a:p>
         </p:txBody>
@@ -5748,7 +5870,7 @@
               </a:defRPr>
             </a:pPr>
             <a:r>
-              <a:t>28</a:t>
+              <a:t>30</a:t>
             </a:r>
           </a:p>
           <a:p>
@@ -5815,7 +5937,7 @@
               </a:defRPr>
             </a:pPr>
             <a:r>
-              <a:t>~30</a:t>
+              <a:t>~34</a:t>
             </a:r>
           </a:p>
           <a:p>
@@ -5949,7 +6071,7 @@
               </a:defRPr>
             </a:pPr>
             <a:r>
-              <a:t>34+</a:t>
+              <a:t>36</a:t>
             </a:r>
           </a:p>
           <a:p>
@@ -6020,7 +6142,7 @@
               </a:defRPr>
             </a:pPr>
             <a:r>
-              <a:t>24</a:t>
+              <a:t>34</a:t>
             </a:r>
           </a:p>
           <a:p>
@@ -6087,7 +6209,7 @@
               </a:defRPr>
             </a:pPr>
             <a:r>
-              <a:t>19×4</a:t>
+              <a:t>20×4</a:t>
             </a:r>
           </a:p>
           <a:p>
@@ -6154,7 +6276,7 @@
               </a:defRPr>
             </a:pPr>
             <a:r>
-              <a:t>527</a:t>
+              <a:t>617</a:t>
             </a:r>
           </a:p>
           <a:p>
@@ -6166,7 +6288,7 @@
               </a:defRPr>
             </a:pPr>
             <a:r>
-              <a:t>tests across 99 files</a:t>
+              <a:t>tests across 111 files</a:t>
             </a:r>
           </a:p>
         </p:txBody>
@@ -6236,7 +6358,7 @@
               </a:defRPr>
             </a:pPr>
             <a:r>
-              <a:t>15</a:t>
+              <a:t>17</a:t>
             </a:r>
           </a:p>
         </p:txBody>
@@ -6595,7 +6717,7 @@
               <a:defRPr sz="1300"/>
             </a:pPr>
             <a:r>
-              <a:t>•  Per-task-type model routing — not built</a:t>
+              <a:t>•  Per-task-type model routing — built, then reverted (twice)</a:t>
             </a:r>
           </a:p>
           <a:p>
@@ -6663,7 +6785,7 @@
               <a:defRPr sz="1300"/>
             </a:pPr>
             <a:r>
-              <a:t>•  VGS native report-builder workspace — spec asked for webhook push only</a:t>
+              <a:t>•  VGS integration — spec asked for webhook push only; shipped three modes (webhook, native workspace, per-scan-run export)</a:t>
             </a:r>
           </a:p>
           <a:p>
@@ -6718,7 +6840,7 @@
               <a:defRPr sz="1300"/>
             </a:pPr>
             <a:r>
-              <a:t>•  RBAC and the AI provider abstraction match spec closely</a:t>
+              <a:t>•  Two independent ways to record a login macro — in-browser VNC stream and a standalone browser extension</a:t>
             </a:r>
           </a:p>
         </p:txBody>
@@ -6753,7 +6875,7 @@
               </a:defRPr>
             </a:pPr>
             <a:r>
-              <a:t>16</a:t>
+              <a:t>18</a:t>
             </a:r>
           </a:p>
         </p:txBody>
@@ -6970,7 +7092,7 @@
               </a:defRPr>
             </a:pPr>
             <a:r>
-              <a:t>•  527 tests across 99 files, confirmed via pytest --collect-only — real fixtures over mocks: local HTTP servers, a real headless browser, real cryptographic round-trips</a:t>
+              <a:t>•  617 tests across 111 files, confirmed via pytest --collect-only — real fixtures over mocks: local HTTP servers, a real headless browser, real cryptographic round-trips</a:t>
             </a:r>
           </a:p>
           <a:p>
@@ -7059,7 +7181,7 @@
               </a:defRPr>
             </a:pPr>
             <a:r>
-              <a:t>17</a:t>
+              <a:t>19</a:t>
             </a:r>
           </a:p>
         </p:txBody>
@@ -7312,7 +7434,7 @@
               </a:defRPr>
             </a:pPr>
             <a:r>
-              <a:t>•  Per-task-type model routing, now that arbitrary per-scan provider selection already exists</a:t>
+              <a:t>•  Per-task-type model routing — tried and reverted once already; revisit only if a concrete case emerges</a:t>
             </a:r>
           </a:p>
           <a:p>
@@ -7383,7 +7505,7 @@
               </a:defRPr>
             </a:pPr>
             <a:r>
-              <a:t>18</a:t>
+              <a:t>20</a:t>
             </a:r>
           </a:p>
         </p:txBody>
@@ -7779,7 +7901,7 @@
               </a:defRPr>
             </a:pPr>
             <a:r>
-              <a:t>1</a:t>
+              <a:t>2</a:t>
             </a:r>
           </a:p>
         </p:txBody>
@@ -7923,6 +8045,656 @@
 </p:sld>
 </file>
 
+<file path=ppt/slides/slide21.xml><?xml version="1.0" encoding="utf-8"?>
+<p:sld xmlns:a="http://schemas.openxmlformats.org/drawingml/2006/main" xmlns:p="http://schemas.openxmlformats.org/presentationml/2006/main" xmlns:r="http://schemas.openxmlformats.org/officeDocument/2006/relationships">
+  <p:cSld>
+    <p:spTree>
+      <p:nvGrpSpPr>
+        <p:cNvPr id="1" name=""/>
+        <p:cNvGrpSpPr/>
+        <p:nvPr/>
+      </p:nvGrpSpPr>
+      <p:grpSpPr/>
+      <p:sp>
+        <p:nvSpPr>
+          <p:cNvPr id="2" name="Rectangle 1"/>
+          <p:cNvSpPr/>
+          <p:nvPr/>
+        </p:nvSpPr>
+        <p:spPr>
+          <a:xfrm>
+            <a:off x="0" y="0"/>
+            <a:ext cx="12191695" cy="128016"/>
+          </a:xfrm>
+          <a:prstGeom prst="rect">
+            <a:avLst/>
+          </a:prstGeom>
+          <a:solidFill>
+            <a:srgbClr val="6D28D9"/>
+          </a:solidFill>
+          <a:ln>
+            <a:noFill/>
+          </a:ln>
+          <a:effectLst/>
+        </p:spPr>
+        <p:style>
+          <a:lnRef idx="1">
+            <a:schemeClr val="accent1"/>
+          </a:lnRef>
+          <a:fillRef idx="3">
+            <a:schemeClr val="accent1"/>
+          </a:fillRef>
+          <a:effectRef idx="2">
+            <a:schemeClr val="accent1"/>
+          </a:effectRef>
+          <a:fontRef idx="minor">
+            <a:schemeClr val="lt1"/>
+          </a:fontRef>
+        </p:style>
+        <p:txBody>
+          <a:bodyPr rtlCol="0" anchor="ctr"/>
+          <a:lstStyle/>
+          <a:p>
+            <a:pPr algn="ctr"/>
+          </a:p>
+        </p:txBody>
+      </p:sp>
+      <p:sp>
+        <p:nvSpPr>
+          <p:cNvPr id="3" name="TextBox 2"/>
+          <p:cNvSpPr txBox="1"/>
+          <p:nvPr/>
+        </p:nvSpPr>
+        <p:spPr>
+          <a:xfrm>
+            <a:off x="548640" y="164592"/>
+            <a:ext cx="7315200" cy="320040"/>
+          </a:xfrm>
+          <a:prstGeom prst="rect">
+            <a:avLst/>
+          </a:prstGeom>
+          <a:noFill/>
+        </p:spPr>
+        <p:txBody>
+          <a:bodyPr wrap="none">
+            <a:spAutoFit/>
+          </a:bodyPr>
+          <a:lstStyle/>
+          <a:p>
+            <a:pPr>
+              <a:defRPr sz="1200" b="1">
+                <a:solidFill>
+                  <a:srgbClr val="6D28D9"/>
+                </a:solidFill>
+              </a:defRPr>
+            </a:pPr>
+            <a:r>
+              <a:t>APP INFO</a:t>
+            </a:r>
+          </a:p>
+        </p:txBody>
+      </p:sp>
+      <p:sp>
+        <p:nvSpPr>
+          <p:cNvPr id="4" name="TextBox 3"/>
+          <p:cNvSpPr txBox="1"/>
+          <p:nvPr/>
+        </p:nvSpPr>
+        <p:spPr>
+          <a:xfrm>
+            <a:off x="548640" y="411480"/>
+            <a:ext cx="11094415" cy="822960"/>
+          </a:xfrm>
+          <a:prstGeom prst="rect">
+            <a:avLst/>
+          </a:prstGeom>
+          <a:noFill/>
+        </p:spPr>
+        <p:txBody>
+          <a:bodyPr wrap="square">
+            <a:spAutoFit/>
+          </a:bodyPr>
+          <a:lstStyle/>
+          <a:p>
+            <a:pPr>
+              <a:defRPr sz="2800" b="1">
+                <a:solidFill>
+                  <a:srgbClr val="1C1E21"/>
+                </a:solidFill>
+                <a:latin typeface="Calibri"/>
+              </a:defRPr>
+            </a:pPr>
+            <a:r>
+              <a:t>What it's built with</a:t>
+            </a:r>
+          </a:p>
+        </p:txBody>
+      </p:sp>
+      <p:sp>
+        <p:nvSpPr>
+          <p:cNvPr id="5" name="TextBox 4"/>
+          <p:cNvSpPr txBox="1"/>
+          <p:nvPr/>
+        </p:nvSpPr>
+        <p:spPr>
+          <a:xfrm>
+            <a:off x="640080" y="1645920"/>
+            <a:ext cx="10911535" cy="4572000"/>
+          </a:xfrm>
+          <a:prstGeom prst="rect">
+            <a:avLst/>
+          </a:prstGeom>
+          <a:noFill/>
+        </p:spPr>
+        <p:txBody>
+          <a:bodyPr wrap="square">
+            <a:spAutoFit/>
+          </a:bodyPr>
+          <a:lstStyle/>
+          <a:p>
+            <a:pPr>
+              <a:lnSpc>
+                <a:spcPct val="120000"/>
+              </a:lnSpc>
+              <a:spcAft>
+                <a:spcPts val="900"/>
+              </a:spcAft>
+              <a:defRPr sz="1600" b="0">
+                <a:solidFill>
+                  <a:srgbClr val="1C1E21"/>
+                </a:solidFill>
+              </a:defRPr>
+            </a:pPr>
+            <a:r>
+              <a:t>•  Frontend — Vite + React + TypeScript + TanStack Query + React Router + Tailwind CSS</a:t>
+            </a:r>
+          </a:p>
+          <a:p>
+            <a:pPr>
+              <a:lnSpc>
+                <a:spcPct val="120000"/>
+              </a:lnSpc>
+              <a:spcAft>
+                <a:spcPts val="900"/>
+              </a:spcAft>
+              <a:defRPr sz="1600" b="0">
+                <a:solidFill>
+                  <a:srgbClr val="1C1E21"/>
+                </a:solidFill>
+              </a:defRPr>
+            </a:pPr>
+            <a:r>
+              <a:t>•  Backend — Python 3.11+, FastAPI, SQLAlchemy 2.0 (async), Alembic, served via uv</a:t>
+            </a:r>
+          </a:p>
+          <a:p>
+            <a:pPr>
+              <a:lnSpc>
+                <a:spcPct val="120000"/>
+              </a:lnSpc>
+              <a:spcAft>
+                <a:spcPts val="900"/>
+              </a:spcAft>
+              <a:defRPr sz="1600" b="0">
+                <a:solidFill>
+                  <a:srgbClr val="1C1E21"/>
+                </a:solidFill>
+              </a:defRPr>
+            </a:pPr>
+            <a:r>
+              <a:t>•  Database — PostgreSQL (dialect-agnostic ORM; test suite runs on ephemeral SQLite)</a:t>
+            </a:r>
+          </a:p>
+          <a:p>
+            <a:pPr>
+              <a:lnSpc>
+                <a:spcPct val="120000"/>
+              </a:lnSpc>
+              <a:spcAft>
+                <a:spcPts val="900"/>
+              </a:spcAft>
+              <a:defRPr sz="1600" b="0">
+                <a:solidFill>
+                  <a:srgbClr val="1C1E21"/>
+                </a:solidFill>
+              </a:defRPr>
+            </a:pPr>
+            <a:r>
+              <a:t>•  AI layer — LangGraph 27-node multi-agent scan DAG; pluggable Claude/OpenAI/Gemini/Grok/custom-endpoint providers</a:t>
+            </a:r>
+          </a:p>
+          <a:p>
+            <a:pPr>
+              <a:lnSpc>
+                <a:spcPct val="120000"/>
+              </a:lnSpc>
+              <a:spcAft>
+                <a:spcPts val="900"/>
+              </a:spcAft>
+              <a:defRPr sz="1600" b="0">
+                <a:solidFill>
+                  <a:srgbClr val="1C1E21"/>
+                </a:solidFill>
+              </a:defRPr>
+            </a:pPr>
+            <a:r>
+              <a:t>•  Browser automation — Playwright (Chromium) for real execution proofs and login-macro recording, streamed live via a Docker-hosted VNC stack</a:t>
+            </a:r>
+          </a:p>
+          <a:p>
+            <a:pPr>
+              <a:lnSpc>
+                <a:spcPct val="120000"/>
+              </a:lnSpc>
+              <a:spcAft>
+                <a:spcPts val="900"/>
+              </a:spcAft>
+              <a:defRPr sz="1600" b="0">
+                <a:solidFill>
+                  <a:srgbClr val="1C1E21"/>
+                </a:solidFill>
+              </a:defRPr>
+            </a:pPr>
+            <a:r>
+              <a:t>•  Deployment &amp; integrations — Docker Compose end to end; Jira/Slack/Teams/Outlook/Burp/CMDB/VGS/SSO integrations, plus a standalone browser extension for native setups</a:t>
+            </a:r>
+          </a:p>
+        </p:txBody>
+      </p:sp>
+      <p:sp>
+        <p:nvSpPr>
+          <p:cNvPr id="6" name="TextBox 5"/>
+          <p:cNvSpPr txBox="1"/>
+          <p:nvPr/>
+        </p:nvSpPr>
+        <p:spPr>
+          <a:xfrm>
+            <a:off x="11094415" y="6400800"/>
+            <a:ext cx="822960" cy="320040"/>
+          </a:xfrm>
+          <a:prstGeom prst="rect">
+            <a:avLst/>
+          </a:prstGeom>
+          <a:noFill/>
+        </p:spPr>
+        <p:txBody>
+          <a:bodyPr wrap="none">
+            <a:spAutoFit/>
+          </a:bodyPr>
+          <a:lstStyle/>
+          <a:p>
+            <a:pPr algn="r">
+              <a:defRPr sz="1000">
+                <a:solidFill>
+                  <a:srgbClr val="5B6270"/>
+                </a:solidFill>
+              </a:defRPr>
+            </a:pPr>
+            <a:r>
+              <a:t>6</a:t>
+            </a:r>
+          </a:p>
+        </p:txBody>
+      </p:sp>
+      <p:sp>
+        <p:nvSpPr>
+          <p:cNvPr id="7" name="TextBox 6"/>
+          <p:cNvSpPr txBox="1"/>
+          <p:nvPr/>
+        </p:nvSpPr>
+        <p:spPr>
+          <a:xfrm>
+            <a:off x="548640" y="6400800"/>
+            <a:ext cx="2743200" cy="320040"/>
+          </a:xfrm>
+          <a:prstGeom prst="rect">
+            <a:avLst/>
+          </a:prstGeom>
+          <a:noFill/>
+        </p:spPr>
+        <p:txBody>
+          <a:bodyPr wrap="none">
+            <a:spAutoFit/>
+          </a:bodyPr>
+          <a:lstStyle/>
+          <a:p>
+            <a:pPr>
+              <a:defRPr sz="1000">
+                <a:solidFill>
+                  <a:srgbClr val="5B6270"/>
+                </a:solidFill>
+              </a:defRPr>
+            </a:pPr>
+            <a:r>
+              <a:t>Verdikt</a:t>
+            </a:r>
+          </a:p>
+        </p:txBody>
+      </p:sp>
+    </p:spTree>
+  </p:cSld>
+  <p:clrMapOvr>
+    <a:masterClrMapping/>
+  </p:clrMapOvr>
+</p:sld>
+</file>
+
+<file path=ppt/slides/slide22.xml><?xml version="1.0" encoding="utf-8"?>
+<p:sld xmlns:a="http://schemas.openxmlformats.org/drawingml/2006/main" xmlns:p="http://schemas.openxmlformats.org/presentationml/2006/main" xmlns:r="http://schemas.openxmlformats.org/officeDocument/2006/relationships">
+  <p:cSld>
+    <p:spTree>
+      <p:nvGrpSpPr>
+        <p:cNvPr id="1" name=""/>
+        <p:cNvGrpSpPr/>
+        <p:nvPr/>
+      </p:nvGrpSpPr>
+      <p:grpSpPr/>
+      <p:sp>
+        <p:nvSpPr>
+          <p:cNvPr id="2" name="Rectangle 1"/>
+          <p:cNvSpPr/>
+          <p:nvPr/>
+        </p:nvSpPr>
+        <p:spPr>
+          <a:xfrm>
+            <a:off x="0" y="0"/>
+            <a:ext cx="12191695" cy="128016"/>
+          </a:xfrm>
+          <a:prstGeom prst="rect">
+            <a:avLst/>
+          </a:prstGeom>
+          <a:solidFill>
+            <a:srgbClr val="6D28D9"/>
+          </a:solidFill>
+          <a:ln>
+            <a:noFill/>
+          </a:ln>
+          <a:effectLst/>
+        </p:spPr>
+        <p:style>
+          <a:lnRef idx="1">
+            <a:schemeClr val="accent1"/>
+          </a:lnRef>
+          <a:fillRef idx="3">
+            <a:schemeClr val="accent1"/>
+          </a:fillRef>
+          <a:effectRef idx="2">
+            <a:schemeClr val="accent1"/>
+          </a:effectRef>
+          <a:fontRef idx="minor">
+            <a:schemeClr val="lt1"/>
+          </a:fontRef>
+        </p:style>
+        <p:txBody>
+          <a:bodyPr rtlCol="0" anchor="ctr"/>
+          <a:lstStyle/>
+          <a:p>
+            <a:pPr algn="ctr"/>
+          </a:p>
+        </p:txBody>
+      </p:sp>
+      <p:sp>
+        <p:nvSpPr>
+          <p:cNvPr id="3" name="TextBox 2"/>
+          <p:cNvSpPr txBox="1"/>
+          <p:nvPr/>
+        </p:nvSpPr>
+        <p:spPr>
+          <a:xfrm>
+            <a:off x="548640" y="164592"/>
+            <a:ext cx="7315200" cy="320040"/>
+          </a:xfrm>
+          <a:prstGeom prst="rect">
+            <a:avLst/>
+          </a:prstGeom>
+          <a:noFill/>
+        </p:spPr>
+        <p:txBody>
+          <a:bodyPr wrap="none">
+            <a:spAutoFit/>
+          </a:bodyPr>
+          <a:lstStyle/>
+          <a:p>
+            <a:pPr>
+              <a:defRPr sz="1200" b="1">
+                <a:solidFill>
+                  <a:srgbClr val="6D28D9"/>
+                </a:solidFill>
+              </a:defRPr>
+            </a:pPr>
+            <a:r>
+              <a:t>COMMON QUESTIONS</a:t>
+            </a:r>
+          </a:p>
+        </p:txBody>
+      </p:sp>
+      <p:sp>
+        <p:nvSpPr>
+          <p:cNvPr id="4" name="TextBox 3"/>
+          <p:cNvSpPr txBox="1"/>
+          <p:nvPr/>
+        </p:nvSpPr>
+        <p:spPr>
+          <a:xfrm>
+            <a:off x="548640" y="411480"/>
+            <a:ext cx="11094415" cy="822960"/>
+          </a:xfrm>
+          <a:prstGeom prst="rect">
+            <a:avLst/>
+          </a:prstGeom>
+          <a:noFill/>
+        </p:spPr>
+        <p:txBody>
+          <a:bodyPr wrap="square">
+            <a:spAutoFit/>
+          </a:bodyPr>
+          <a:lstStyle/>
+          <a:p>
+            <a:pPr>
+              <a:defRPr sz="2800" b="1">
+                <a:solidFill>
+                  <a:srgbClr val="1C1E21"/>
+                </a:solidFill>
+                <a:latin typeface="Calibri"/>
+              </a:defRPr>
+            </a:pPr>
+            <a:r>
+              <a:t>FAQ</a:t>
+            </a:r>
+          </a:p>
+        </p:txBody>
+      </p:sp>
+      <p:sp>
+        <p:nvSpPr>
+          <p:cNvPr id="5" name="TextBox 4"/>
+          <p:cNvSpPr txBox="1"/>
+          <p:nvPr/>
+        </p:nvSpPr>
+        <p:spPr>
+          <a:xfrm>
+            <a:off x="640080" y="1645920"/>
+            <a:ext cx="10911535" cy="4572000"/>
+          </a:xfrm>
+          <a:prstGeom prst="rect">
+            <a:avLst/>
+          </a:prstGeom>
+          <a:noFill/>
+        </p:spPr>
+        <p:txBody>
+          <a:bodyPr wrap="square">
+            <a:spAutoFit/>
+          </a:bodyPr>
+          <a:lstStyle/>
+          <a:p>
+            <a:pPr>
+              <a:lnSpc>
+                <a:spcPct val="115000"/>
+              </a:lnSpc>
+              <a:spcAft>
+                <a:spcPts val="700"/>
+              </a:spcAft>
+              <a:defRPr sz="1400" b="0">
+                <a:solidFill>
+                  <a:srgbClr val="1C1E21"/>
+                </a:solidFill>
+              </a:defRPr>
+            </a:pPr>
+            <a:r>
+              <a:t>•  How does crawling work? — A Playwright-driven crawler discovers pages/forms/API calls within scope; uploaded traffic (HAR/Burp/Zest) supplements live crawling, it doesn't replace it.</a:t>
+            </a:r>
+          </a:p>
+          <a:p>
+            <a:pPr>
+              <a:lnSpc>
+                <a:spcPct val="115000"/>
+              </a:lnSpc>
+              <a:spcAft>
+                <a:spcPts val="700"/>
+              </a:spcAft>
+              <a:defRPr sz="1400" b="0">
+                <a:solidFill>
+                  <a:srgbClr val="1C1E21"/>
+                </a:solidFill>
+              </a:defRPr>
+            </a:pPr>
+            <a:r>
+              <a:t>•  How are vulnerabilities found, and what does AI actually do? — Deterministic HTTP-level probes run first; AI only triages results and helps craft context-aware payloads. AI never single-handedly confirms a finding.</a:t>
+            </a:r>
+          </a:p>
+          <a:p>
+            <a:pPr>
+              <a:lnSpc>
+                <a:spcPct val="115000"/>
+              </a:lnSpc>
+              <a:spcAft>
+                <a:spcPts val="700"/>
+              </a:spcAft>
+              <a:defRPr sz="1400" b="0">
+                <a:solidFill>
+                  <a:srgbClr val="1C1E21"/>
+                </a:solidFill>
+              </a:defRPr>
+            </a:pPr>
+            <a:r>
+              <a:t>•  How is this different from WebInspect or Checkmarx? — Those are single-pass deterministic scanners; Verdikt pairs the same deterministic probing with LLM-assisted triage and adversarial validation, so only confirmed findings reach a report.</a:t>
+            </a:r>
+          </a:p>
+          <a:p>
+            <a:pPr>
+              <a:lnSpc>
+                <a:spcPct val="115000"/>
+              </a:lnSpc>
+              <a:spcAft>
+                <a:spcPts val="700"/>
+              </a:spcAft>
+              <a:defRPr sz="1400" b="0">
+                <a:solidFill>
+                  <a:srgbClr val="1C1E21"/>
+                </a:solidFill>
+              </a:defRPr>
+            </a:pPr>
+            <a:r>
+              <a:t>•  If I upload traffic, does it still crawl the live site? — Yes — uploaded traffic and live crawling both run and combine into one scope.</a:t>
+            </a:r>
+          </a:p>
+          <a:p>
+            <a:pPr>
+              <a:lnSpc>
+                <a:spcPct val="115000"/>
+              </a:lnSpc>
+              <a:spcAft>
+                <a:spcPts val="700"/>
+              </a:spcAft>
+              <a:defRPr sz="1400" b="0">
+                <a:solidFill>
+                  <a:srgbClr val="1C1E21"/>
+                </a:solidFill>
+              </a:defRPr>
+            </a:pPr>
+            <a:r>
+              <a:t>•  What's the architecture, and why AI if scans are deterministic? — A 27-node LangGraph DAG per scan: deterministic probe → AI triage → deterministic re-execution → adversarial AI validation. AI expands and interprets; it never decides alone.</a:t>
+            </a:r>
+          </a:p>
+        </p:txBody>
+      </p:sp>
+      <p:sp>
+        <p:nvSpPr>
+          <p:cNvPr id="6" name="TextBox 5"/>
+          <p:cNvSpPr txBox="1"/>
+          <p:nvPr/>
+        </p:nvSpPr>
+        <p:spPr>
+          <a:xfrm>
+            <a:off x="11094415" y="6400800"/>
+            <a:ext cx="822960" cy="320040"/>
+          </a:xfrm>
+          <a:prstGeom prst="rect">
+            <a:avLst/>
+          </a:prstGeom>
+          <a:noFill/>
+        </p:spPr>
+        <p:txBody>
+          <a:bodyPr wrap="none">
+            <a:spAutoFit/>
+          </a:bodyPr>
+          <a:lstStyle/>
+          <a:p>
+            <a:pPr algn="r">
+              <a:defRPr sz="1000">
+                <a:solidFill>
+                  <a:srgbClr val="5B6270"/>
+                </a:solidFill>
+              </a:defRPr>
+            </a:pPr>
+            <a:r>
+              <a:t>21</a:t>
+            </a:r>
+          </a:p>
+        </p:txBody>
+      </p:sp>
+      <p:sp>
+        <p:nvSpPr>
+          <p:cNvPr id="7" name="TextBox 6"/>
+          <p:cNvSpPr txBox="1"/>
+          <p:nvPr/>
+        </p:nvSpPr>
+        <p:spPr>
+          <a:xfrm>
+            <a:off x="548640" y="6400800"/>
+            <a:ext cx="2743200" cy="320040"/>
+          </a:xfrm>
+          <a:prstGeom prst="rect">
+            <a:avLst/>
+          </a:prstGeom>
+          <a:noFill/>
+        </p:spPr>
+        <p:txBody>
+          <a:bodyPr wrap="none">
+            <a:spAutoFit/>
+          </a:bodyPr>
+          <a:lstStyle/>
+          <a:p>
+            <a:pPr>
+              <a:defRPr sz="1000">
+                <a:solidFill>
+                  <a:srgbClr val="5B6270"/>
+                </a:solidFill>
+              </a:defRPr>
+            </a:pPr>
+            <a:r>
+              <a:t>Verdikt</a:t>
+            </a:r>
+          </a:p>
+        </p:txBody>
+      </p:sp>
+    </p:spTree>
+  </p:cSld>
+  <p:clrMapOvr>
+    <a:masterClrMapping/>
+  </p:clrMapOvr>
+</p:sld>
+</file>
+
 <file path=ppt/slides/slide3.xml><?xml version="1.0" encoding="utf-8"?>
 <p:sld xmlns:a="http://schemas.openxmlformats.org/drawingml/2006/main" xmlns:p="http://schemas.openxmlformats.org/presentationml/2006/main" xmlns:r="http://schemas.openxmlformats.org/officeDocument/2006/relationships">
   <p:cSld>
@@ -8240,7 +9012,7 @@
               </a:defRPr>
             </a:pPr>
             <a:r>
-              <a:t>2</a:t>
+              <a:t>3</a:t>
             </a:r>
           </a:p>
         </p:txBody>
@@ -8721,7 +9493,7 @@
               </a:defRPr>
             </a:pPr>
             <a:r>
-              <a:t>3</a:t>
+              <a:t>4</a:t>
             </a:r>
           </a:p>
         </p:txBody>
@@ -8991,7 +9763,7 @@
               </a:defRPr>
             </a:pPr>
             <a:r>
-              <a:t>4</a:t>
+              <a:t>5</a:t>
             </a:r>
           </a:p>
         </p:txBody>
@@ -9167,7 +9939,7 @@
               </a:defRPr>
             </a:pPr>
             <a:r>
-              <a:t>24 detection agents in the scan graph</a:t>
+              <a:t>27 detection agents in the scan graph</a:t>
             </a:r>
           </a:p>
         </p:txBody>
@@ -9805,7 +10577,7 @@
               </a:defRPr>
             </a:pPr>
             <a:r>
-              <a:t>5</a:t>
+              <a:t>7</a:t>
             </a:r>
           </a:p>
         </p:txBody>
@@ -10075,7 +10847,7 @@
               </a:defRPr>
             </a:pPr>
             <a:r>
-              <a:t>6</a:t>
+              <a:t>8</a:t>
             </a:r>
           </a:p>
         </p:txBody>
@@ -10345,7 +11117,7 @@
               </a:defRPr>
             </a:pPr>
             <a:r>
-              <a:t>7</a:t>
+              <a:t>9</a:t>
             </a:r>
           </a:p>
         </p:txBody>
@@ -10615,7 +11387,7 @@
               </a:defRPr>
             </a:pPr>
             <a:r>
-              <a:t>8</a:t>
+              <a:t>10</a:t>
             </a:r>
           </a:p>
         </p:txBody>

--- a/docs/architecture-overview/Verdikt_Presentation.pptx
+++ b/docs/architecture-overview/Verdikt_Presentation.pptx
@@ -3322,7 +3322,7 @@
               </a:defRPr>
             </a:pPr>
             <a:r>
-              <a:t>COVERAGE</a:t>
+              <a:t>AI PROVIDER ABSTRACTION</a:t>
             </a:r>
           </a:p>
         </p:txBody>
@@ -3335,7 +3335,7 @@
         </p:nvSpPr>
         <p:spPr>
           <a:xfrm>
-            <a:off x="548640" y="411480"/>
+            <a:off x="548640" y="457200"/>
             <a:ext cx="11094415" cy="822960"/>
           </a:xfrm>
           <a:prstGeom prst="rect">
@@ -3350,7 +3350,7 @@
           <a:lstStyle/>
           <a:p>
             <a:pPr>
-              <a:defRPr sz="2400" b="1">
+              <a:defRPr sz="2600" b="1">
                 <a:solidFill>
                   <a:srgbClr val="1C1E21"/>
                 </a:solidFill>
@@ -3358,268 +3358,35 @@
               </a:defRPr>
             </a:pPr>
             <a:r>
-              <a:t>OWASP Top 10 (2025) + PortSwigger Web Security Academy</a:t>
-            </a:r>
-          </a:p>
-        </p:txBody>
-      </p:sp>
-      <p:sp>
-        <p:nvSpPr>
-          <p:cNvPr id="5" name="TextBox 4"/>
-          <p:cNvSpPr txBox="1"/>
-          <p:nvPr/>
-        </p:nvSpPr>
-        <p:spPr>
-          <a:xfrm>
-            <a:off x="640080" y="1417320"/>
-            <a:ext cx="10911535" cy="4800600"/>
-          </a:xfrm>
-          <a:prstGeom prst="rect">
-            <a:avLst/>
-          </a:prstGeom>
-          <a:noFill/>
-        </p:spPr>
-        <p:txBody>
-          <a:bodyPr wrap="square">
-            <a:spAutoFit/>
-          </a:bodyPr>
-          <a:lstStyle/>
-          <a:p>
-            <a:pPr>
-              <a:lnSpc>
-                <a:spcPct val="125000"/>
-              </a:lnSpc>
-              <a:spcAft>
-                <a:spcPts val="1000"/>
-              </a:spcAft>
-              <a:defRPr sz="1400" b="0">
-                <a:solidFill>
-                  <a:srgbClr val="1C1E21"/>
-                </a:solidFill>
-              </a:defRPr>
-            </a:pPr>
-            <a:r>
-              <a:t>•  Injection — SQL, OS command, SSTI, NoSQL, path traversal</a:t>
-            </a:r>
-          </a:p>
-          <a:p>
-            <a:pPr>
-              <a:lnSpc>
-                <a:spcPct val="125000"/>
-              </a:lnSpc>
-              <a:spcAft>
-                <a:spcPts val="1000"/>
-              </a:spcAft>
-              <a:defRPr sz="1400" b="0">
-                <a:solidFill>
-                  <a:srgbClr val="1C1E21"/>
-                </a:solidFill>
-              </a:defRPr>
-            </a:pPr>
-            <a:r>
-              <a:t>•  Broken access control — IDOR, privilege escalation, missing function-level checks</a:t>
-            </a:r>
-          </a:p>
-          <a:p>
-            <a:pPr>
-              <a:lnSpc>
-                <a:spcPct val="125000"/>
-              </a:lnSpc>
-              <a:spcAft>
-                <a:spcPts val="1000"/>
-              </a:spcAft>
-              <a:defRPr sz="1400" b="0">
-                <a:solidFill>
-                  <a:srgbClr val="1C1E21"/>
-                </a:solidFill>
-              </a:defRPr>
-            </a:pPr>
-            <a:r>
-              <a:t>•  Cryptographic &amp; session failures — token entropy, cookie attribute hygiene</a:t>
-            </a:r>
-          </a:p>
-          <a:p>
-            <a:pPr>
-              <a:lnSpc>
-                <a:spcPct val="125000"/>
-              </a:lnSpc>
-              <a:spcAft>
-                <a:spcPts val="1000"/>
-              </a:spcAft>
-              <a:defRPr sz="1400" b="0">
-                <a:solidFill>
-                  <a:srgbClr val="1C1E21"/>
-                </a:solidFill>
-              </a:defRPr>
-            </a:pPr>
-            <a:r>
-              <a:t>•  Cross-site scripting — reflected / DOM / stored, real browser execution proof</a:t>
-            </a:r>
-          </a:p>
-          <a:p>
-            <a:pPr>
-              <a:lnSpc>
-                <a:spcPct val="125000"/>
-              </a:lnSpc>
-              <a:spcAft>
-                <a:spcPts val="1000"/>
-              </a:spcAft>
-              <a:defRPr sz="1400" b="0">
-                <a:solidFill>
-                  <a:srgbClr val="1C1E21"/>
-                </a:solidFill>
-              </a:defRPr>
-            </a:pPr>
-            <a:r>
-              <a:t>•  Security misconfiguration — headers, plaintext HTTP, version disclosure</a:t>
-            </a:r>
-          </a:p>
-          <a:p>
-            <a:pPr>
-              <a:lnSpc>
-                <a:spcPct val="125000"/>
-              </a:lnSpc>
-              <a:spcAft>
-                <a:spcPts val="1000"/>
-              </a:spcAft>
-              <a:defRPr sz="1400" b="0">
-                <a:solidFill>
-                  <a:srgbClr val="1C1E21"/>
-                </a:solidFill>
-              </a:defRPr>
-            </a:pPr>
-            <a:r>
-              <a:t>•  SSRF — real out-of-band callback verified</a:t>
-            </a:r>
-          </a:p>
-          <a:p>
-            <a:pPr>
-              <a:lnSpc>
-                <a:spcPct val="125000"/>
-              </a:lnSpc>
-              <a:spcAft>
-                <a:spcPts val="1000"/>
-              </a:spcAft>
-              <a:defRPr sz="1400" b="0">
-                <a:solidFill>
-                  <a:srgbClr val="1C1E21"/>
-                </a:solidFill>
-              </a:defRPr>
-            </a:pPr>
-            <a:r>
-              <a:t>•  Authentication failures — auth bypass, OAuth redirect-URI validation</a:t>
-            </a:r>
-          </a:p>
-          <a:p>
-            <a:pPr>
-              <a:lnSpc>
-                <a:spcPct val="125000"/>
-              </a:lnSpc>
-              <a:spcAft>
-                <a:spcPts val="1000"/>
-              </a:spcAft>
-              <a:defRPr sz="1400" b="0">
-                <a:solidFill>
-                  <a:srgbClr val="1C1E21"/>
-                </a:solidFill>
-              </a:defRPr>
-            </a:pPr>
-            <a:r>
-              <a:t>•  Software &amp; data integrity — insecure deserialization, prototype pollution</a:t>
-            </a:r>
-          </a:p>
-          <a:p>
-            <a:pPr>
-              <a:lnSpc>
-                <a:spcPct val="125000"/>
-              </a:lnSpc>
-              <a:spcAft>
-                <a:spcPts val="1000"/>
-              </a:spcAft>
-              <a:defRPr sz="1400" b="0">
-                <a:solidFill>
-                  <a:srgbClr val="1C1E21"/>
-                </a:solidFill>
-              </a:defRPr>
-            </a:pPr>
-            <a:r>
-              <a:t>•  XXE, GraphQL introspection/DoS surface</a:t>
-            </a:r>
-          </a:p>
-          <a:p>
-            <a:pPr>
-              <a:lnSpc>
-                <a:spcPct val="125000"/>
-              </a:lnSpc>
-              <a:spcAft>
-                <a:spcPts val="1000"/>
-              </a:spcAft>
-              <a:defRPr sz="1400" b="0">
-                <a:solidFill>
-                  <a:srgbClr val="1C1E21"/>
-                </a:solidFill>
-              </a:defRPr>
-            </a:pPr>
-            <a:r>
-              <a:t>•  File upload — dangerous extensions + image-polyglot bypass technique</a:t>
-            </a:r>
-          </a:p>
-          <a:p>
-            <a:pPr>
-              <a:lnSpc>
-                <a:spcPct val="125000"/>
-              </a:lnSpc>
-              <a:spcAft>
-                <a:spcPts val="1000"/>
-              </a:spcAft>
-              <a:defRPr sz="1400" b="0">
-                <a:solidFill>
-                  <a:srgbClr val="1C1E21"/>
-                </a:solidFill>
-              </a:defRPr>
-            </a:pPr>
-            <a:r>
-              <a:t>•  CSRF, CORS, clickjacking — with real browser-confirmed framability</a:t>
-            </a:r>
-          </a:p>
-          <a:p>
-            <a:pPr>
-              <a:lnSpc>
-                <a:spcPct val="125000"/>
-              </a:lnSpc>
-              <a:spcAft>
-                <a:spcPts val="1000"/>
-              </a:spcAft>
-              <a:defRPr sz="1400" b="0">
-                <a:solidFill>
-                  <a:srgbClr val="1C1E21"/>
-                </a:solidFill>
-              </a:defRPr>
-            </a:pPr>
-            <a:r>
-              <a:t>•  HTTP request smuggling &amp; cache poisoning/deception</a:t>
-            </a:r>
-          </a:p>
-          <a:p>
-            <a:pPr>
-              <a:lnSpc>
-                <a:spcPct val="125000"/>
-              </a:lnSpc>
-              <a:spcAft>
-                <a:spcPts val="1000"/>
-              </a:spcAft>
-              <a:defRPr sz="1400" b="0">
-                <a:solidFill>
-                  <a:srgbClr val="1C1E21"/>
-                </a:solidFill>
-              </a:defRPr>
-            </a:pPr>
-            <a:r>
-              <a:t>•  WebSocket security, business logic (race conditions, workflow, mass assignment)</a:t>
-            </a:r>
-          </a:p>
-        </p:txBody>
-      </p:sp>
+              <a:t>Bring Your Own LLM</a:t>
+            </a:r>
+          </a:p>
+        </p:txBody>
+      </p:sp>
+      <p:pic>
+        <p:nvPicPr>
+          <p:cNvPr id="5" name="Picture 4" descr="05_ai_provider_resolution.png"/>
+          <p:cNvPicPr>
+            <a:picLocks noChangeAspect="1"/>
+          </p:cNvPicPr>
+          <p:nvPr/>
+        </p:nvPicPr>
+        <p:blipFill>
+          <a:blip r:embed="rId2"/>
+          <a:stretch>
+            <a:fillRect/>
+          </a:stretch>
+        </p:blipFill>
+        <p:spPr>
+          <a:xfrm>
+            <a:off x="457200" y="1234440"/>
+            <a:ext cx="2848048" cy="4892040"/>
+          </a:xfrm>
+          <a:prstGeom prst="rect">
+            <a:avLst/>
+          </a:prstGeom>
+        </p:spPr>
+      </p:pic>
       <p:sp>
         <p:nvSpPr>
           <p:cNvPr id="6" name="TextBox 5"/>
@@ -3628,8 +3395,8 @@
         </p:nvSpPr>
         <p:spPr>
           <a:xfrm>
-            <a:off x="11094415" y="6400800"/>
-            <a:ext cx="822960" cy="320040"/>
+            <a:off x="548640" y="6172200"/>
+            <a:ext cx="11094415" cy="365760"/>
           </a:xfrm>
           <a:prstGeom prst="rect">
             <a:avLst/>
@@ -3642,6 +3409,41 @@
           </a:bodyPr>
           <a:lstStyle/>
           <a:p>
+            <a:pPr algn="ctr">
+              <a:defRPr sz="1100" i="1">
+                <a:solidFill>
+                  <a:srgbClr val="5B6270"/>
+                </a:solidFill>
+              </a:defRPr>
+            </a:pPr>
+            <a:r>
+              <a:t>Claude, OpenAI, Gemini, Grok, or any in-house OpenAI-compatible model — configured once in the UI. The backend automatically substitutes a cheaper or stronger same-family model for a handful of specific tasks, invisibly. A $2.00/scan hard cost cap is enforced underneath.</a:t>
+            </a:r>
+          </a:p>
+        </p:txBody>
+      </p:sp>
+      <p:sp>
+        <p:nvSpPr>
+          <p:cNvPr id="7" name="TextBox 6"/>
+          <p:cNvSpPr txBox="1"/>
+          <p:nvPr/>
+        </p:nvSpPr>
+        <p:spPr>
+          <a:xfrm>
+            <a:off x="11094415" y="6400800"/>
+            <a:ext cx="822960" cy="320040"/>
+          </a:xfrm>
+          <a:prstGeom prst="rect">
+            <a:avLst/>
+          </a:prstGeom>
+          <a:noFill/>
+        </p:spPr>
+        <p:txBody>
+          <a:bodyPr wrap="none">
+            <a:spAutoFit/>
+          </a:bodyPr>
+          <a:lstStyle/>
+          <a:p>
             <a:pPr algn="r">
               <a:defRPr sz="1000">
                 <a:solidFill>
@@ -3650,14 +3452,14 @@
               </a:defRPr>
             </a:pPr>
             <a:r>
-              <a:t>11</a:t>
-            </a:r>
-          </a:p>
-        </p:txBody>
-      </p:sp>
-      <p:sp>
-        <p:nvSpPr>
-          <p:cNvPr id="7" name="TextBox 6"/>
+              <a:t>10</a:t>
+            </a:r>
+          </a:p>
+        </p:txBody>
+      </p:sp>
+      <p:sp>
+        <p:nvSpPr>
+          <p:cNvPr id="8" name="TextBox 7"/>
           <p:cNvSpPr txBox="1"/>
           <p:nvPr/>
         </p:nvSpPr>
@@ -3790,7 +3592,7 @@
               </a:defRPr>
             </a:pPr>
             <a:r>
-              <a:t>BEYOND SINGLE FINDINGS</a:t>
+              <a:t>COVERAGE</a:t>
             </a:r>
           </a:p>
         </p:txBody>
@@ -3818,7 +3620,7 @@
           <a:lstStyle/>
           <a:p>
             <a:pPr>
-              <a:defRPr sz="2800" b="1">
+              <a:defRPr sz="2400" b="1">
                 <a:solidFill>
                   <a:srgbClr val="1C1E21"/>
                 </a:solidFill>
@@ -3826,7 +3628,7 @@
               </a:defRPr>
             </a:pPr>
             <a:r>
-              <a:t>Attack chains, retest &amp; rescan</a:t>
+              <a:t>OWASP Top 10 (2025) + PortSwigger Web Security Academy</a:t>
             </a:r>
           </a:p>
         </p:txBody>
@@ -3839,8 +3641,8 @@
         </p:nvSpPr>
         <p:spPr>
           <a:xfrm>
-            <a:off x="640080" y="1554480"/>
-            <a:ext cx="10911535" cy="4663440"/>
+            <a:off x="640080" y="1417320"/>
+            <a:ext cx="10911535" cy="4800600"/>
           </a:xfrm>
           <a:prstGeom prst="rect">
             <a:avLst/>
@@ -3860,50 +3662,14 @@
               <a:spcAft>
                 <a:spcPts val="1000"/>
               </a:spcAft>
-              <a:defRPr sz="1700" b="0">
+              <a:defRPr sz="1400" b="0">
                 <a:solidFill>
                   <a:srgbClr val="1C1E21"/>
                 </a:solidFill>
               </a:defRPr>
             </a:pPr>
             <a:r>
-              <a:t>•  Attack Chain Analysis</a:t>
-            </a:r>
-          </a:p>
-          <a:p>
-            <a:pPr>
-              <a:lnSpc>
-                <a:spcPct val="125000"/>
-              </a:lnSpc>
-              <a:spcAft>
-                <a:spcPts val="400"/>
-              </a:spcAft>
-              <a:defRPr sz="1400" b="0">
-                <a:solidFill>
-                  <a:srgbClr val="5B6270"/>
-                </a:solidFill>
-              </a:defRPr>
-            </a:pPr>
-            <a:r>
-              <a:t>‣  Runs after every other agent completes, looking for standalone findings that compose into a more severe, realistic attack path (e.g. reflected XSS + missing CSRF token → account takeover)</a:t>
-            </a:r>
-          </a:p>
-          <a:p>
-            <a:pPr>
-              <a:lnSpc>
-                <a:spcPct val="125000"/>
-              </a:lnSpc>
-              <a:spcAft>
-                <a:spcPts val="400"/>
-              </a:spcAft>
-              <a:defRPr sz="1400" b="0">
-                <a:solidFill>
-                  <a:srgbClr val="5B6270"/>
-                </a:solidFill>
-              </a:defRPr>
-            </a:pPr>
-            <a:r>
-              <a:t>‣  Goes through the same adversarial-validation discipline as individual findings — no rubber-stamping</a:t>
+              <a:t>•  Injection — SQL, OS command, SSTI, NoSQL, path traversal, CSV/formula injection</a:t>
             </a:r>
           </a:p>
           <a:p>
@@ -3914,32 +3680,14 @@
               <a:spcAft>
                 <a:spcPts val="1000"/>
               </a:spcAft>
-              <a:defRPr sz="1700" b="0">
+              <a:defRPr sz="1400" b="0">
                 <a:solidFill>
                   <a:srgbClr val="1C1E21"/>
                 </a:solidFill>
               </a:defRPr>
             </a:pPr>
             <a:r>
-              <a:t>•  Rescan</a:t>
-            </a:r>
-          </a:p>
-          <a:p>
-            <a:pPr>
-              <a:lnSpc>
-                <a:spcPct val="125000"/>
-              </a:lnSpc>
-              <a:spcAft>
-                <a:spcPts val="400"/>
-              </a:spcAft>
-              <a:defRPr sz="1400" b="0">
-                <a:solidFill>
-                  <a:srgbClr val="5B6270"/>
-                </a:solidFill>
-              </a:defRPr>
-            </a:pPr>
-            <a:r>
-              <a:t>‣  Full re-run, diffed against the prior scan: new findings, still_open, and fixed — human decisions like risk_accepted are never silently overridden</a:t>
+              <a:t>•  Broken access control — IDOR, privilege escalation, missing function-level checks</a:t>
             </a:r>
           </a:p>
           <a:p>
@@ -3950,14 +3698,14 @@
               <a:spcAft>
                 <a:spcPts val="1000"/>
               </a:spcAft>
-              <a:defRPr sz="1700" b="0">
+              <a:defRPr sz="1400" b="0">
                 <a:solidFill>
                   <a:srgbClr val="1C1E21"/>
                 </a:solidFill>
               </a:defRPr>
             </a:pPr>
             <a:r>
-              <a:t>•  Retest</a:t>
+              <a:t>•  Cryptographic &amp; session failures — token entropy, cookie attribute hygiene, session not invalidated on logout, weak password policy acceptance</a:t>
             </a:r>
           </a:p>
           <a:p>
@@ -3966,16 +3714,178 @@
                 <a:spcPct val="125000"/>
               </a:lnSpc>
               <a:spcAft>
-                <a:spcPts val="400"/>
+                <a:spcPts val="1000"/>
               </a:spcAft>
               <a:defRPr sz="1400" b="0">
                 <a:solidFill>
-                  <a:srgbClr val="5B6270"/>
-                </a:solidFill>
-              </a:defRPr>
-            </a:pPr>
-            <a:r>
-              <a:t>‣  Targeted, single-finding re-verification — "we just deployed a fix, did it work" — without paying for a full scan</a:t>
+                  <a:srgbClr val="1C1E21"/>
+                </a:solidFill>
+              </a:defRPr>
+            </a:pPr>
+            <a:r>
+              <a:t>•  Cross-site scripting — reflected / DOM / stored, real browser execution proof</a:t>
+            </a:r>
+          </a:p>
+          <a:p>
+            <a:pPr>
+              <a:lnSpc>
+                <a:spcPct val="125000"/>
+              </a:lnSpc>
+              <a:spcAft>
+                <a:spcPts val="1000"/>
+              </a:spcAft>
+              <a:defRPr sz="1400" b="0">
+                <a:solidFill>
+                  <a:srgbClr val="1C1E21"/>
+                </a:solidFill>
+              </a:defRPr>
+            </a:pPr>
+            <a:r>
+              <a:t>•  Security misconfiguration — headers, plaintext HTTP, version disclosure</a:t>
+            </a:r>
+          </a:p>
+          <a:p>
+            <a:pPr>
+              <a:lnSpc>
+                <a:spcPct val="125000"/>
+              </a:lnSpc>
+              <a:spcAft>
+                <a:spcPts val="1000"/>
+              </a:spcAft>
+              <a:defRPr sz="1400" b="0">
+                <a:solidFill>
+                  <a:srgbClr val="1C1E21"/>
+                </a:solidFill>
+              </a:defRPr>
+            </a:pPr>
+            <a:r>
+              <a:t>•  SSRF — real out-of-band callback verified</a:t>
+            </a:r>
+          </a:p>
+          <a:p>
+            <a:pPr>
+              <a:lnSpc>
+                <a:spcPct val="125000"/>
+              </a:lnSpc>
+              <a:spcAft>
+                <a:spcPts val="1000"/>
+              </a:spcAft>
+              <a:defRPr sz="1400" b="0">
+                <a:solidFill>
+                  <a:srgbClr val="1C1E21"/>
+                </a:solidFill>
+              </a:defRPr>
+            </a:pPr>
+            <a:r>
+              <a:t>•  Authentication failures — auth bypass, OAuth redirect-URI validation</a:t>
+            </a:r>
+          </a:p>
+          <a:p>
+            <a:pPr>
+              <a:lnSpc>
+                <a:spcPct val="125000"/>
+              </a:lnSpc>
+              <a:spcAft>
+                <a:spcPts val="1000"/>
+              </a:spcAft>
+              <a:defRPr sz="1400" b="0">
+                <a:solidFill>
+                  <a:srgbClr val="1C1E21"/>
+                </a:solidFill>
+              </a:defRPr>
+            </a:pPr>
+            <a:r>
+              <a:t>•  Software &amp; data integrity — insecure deserialization, prototype pollution, known-vulnerable client-side components (checked against OSV.dev)</a:t>
+            </a:r>
+          </a:p>
+          <a:p>
+            <a:pPr>
+              <a:lnSpc>
+                <a:spcPct val="125000"/>
+              </a:lnSpc>
+              <a:spcAft>
+                <a:spcPts val="1000"/>
+              </a:spcAft>
+              <a:defRPr sz="1400" b="0">
+                <a:solidFill>
+                  <a:srgbClr val="1C1E21"/>
+                </a:solidFill>
+              </a:defRPr>
+            </a:pPr>
+            <a:r>
+              <a:t>•  XXE, GraphQL introspection/DoS surface</a:t>
+            </a:r>
+          </a:p>
+          <a:p>
+            <a:pPr>
+              <a:lnSpc>
+                <a:spcPct val="125000"/>
+              </a:lnSpc>
+              <a:spcAft>
+                <a:spcPts val="1000"/>
+              </a:spcAft>
+              <a:defRPr sz="1400" b="0">
+                <a:solidFill>
+                  <a:srgbClr val="1C1E21"/>
+                </a:solidFill>
+              </a:defRPr>
+            </a:pPr>
+            <a:r>
+              <a:t>•  File upload — dangerous extensions + image-polyglot bypass technique</a:t>
+            </a:r>
+          </a:p>
+          <a:p>
+            <a:pPr>
+              <a:lnSpc>
+                <a:spcPct val="125000"/>
+              </a:lnSpc>
+              <a:spcAft>
+                <a:spcPts val="1000"/>
+              </a:spcAft>
+              <a:defRPr sz="1400" b="0">
+                <a:solidFill>
+                  <a:srgbClr val="1C1E21"/>
+                </a:solidFill>
+              </a:defRPr>
+            </a:pPr>
+            <a:r>
+              <a:t>•  CSRF, CORS, clickjacking — with real browser-confirmed framability</a:t>
+            </a:r>
+          </a:p>
+          <a:p>
+            <a:pPr>
+              <a:lnSpc>
+                <a:spcPct val="125000"/>
+              </a:lnSpc>
+              <a:spcAft>
+                <a:spcPts val="1000"/>
+              </a:spcAft>
+              <a:defRPr sz="1400" b="0">
+                <a:solidFill>
+                  <a:srgbClr val="1C1E21"/>
+                </a:solidFill>
+              </a:defRPr>
+            </a:pPr>
+            <a:r>
+              <a:t>•  HTTP request smuggling &amp; cache poisoning/deception</a:t>
+            </a:r>
+          </a:p>
+          <a:p>
+            <a:pPr>
+              <a:lnSpc>
+                <a:spcPct val="125000"/>
+              </a:lnSpc>
+              <a:spcAft>
+                <a:spcPts val="1000"/>
+              </a:spcAft>
+              <a:defRPr sz="1400" b="0">
+                <a:solidFill>
+                  <a:srgbClr val="1C1E21"/>
+                </a:solidFill>
+              </a:defRPr>
+            </a:pPr>
+            <a:r>
+              <a:t>•  WebSocket security, business logic (race conditions, workflow, mass assignment)</a:t>
             </a:r>
           </a:p>
         </p:txBody>
@@ -4010,7 +3920,7 @@
               </a:defRPr>
             </a:pPr>
             <a:r>
-              <a:t>12</a:t>
+              <a:t>11</a:t>
             </a:r>
           </a:p>
         </p:txBody>
@@ -4150,7 +4060,7 @@
               </a:defRPr>
             </a:pPr>
             <a:r>
-              <a:t>REPORTING</a:t>
+              <a:t>BEYOND SINGLE FINDINGS</a:t>
             </a:r>
           </a:p>
         </p:txBody>
@@ -4186,7 +4096,7 @@
               </a:defRPr>
             </a:pPr>
             <a:r>
-              <a:t>One dataset, every audience</a:t>
+              <a:t>Attack chains, retest &amp; rescan</a:t>
             </a:r>
           </a:p>
         </p:txBody>
@@ -4220,14 +4130,50 @@
               <a:spcAft>
                 <a:spcPts val="1000"/>
               </a:spcAft>
-              <a:defRPr sz="1800" b="0">
+              <a:defRPr sz="1700" b="0">
                 <a:solidFill>
                   <a:srgbClr val="1C1E21"/>
                 </a:solidFill>
               </a:defRPr>
             </a:pPr>
             <a:r>
-              <a:t>•  HTML, PDF, DOCX, CSV, and JSON exports — all generated from the same underlying Finding records</a:t>
+              <a:t>•  Attack Chain Analysis</a:t>
+            </a:r>
+          </a:p>
+          <a:p>
+            <a:pPr>
+              <a:lnSpc>
+                <a:spcPct val="125000"/>
+              </a:lnSpc>
+              <a:spcAft>
+                <a:spcPts val="400"/>
+              </a:spcAft>
+              <a:defRPr sz="1400" b="0">
+                <a:solidFill>
+                  <a:srgbClr val="5B6270"/>
+                </a:solidFill>
+              </a:defRPr>
+            </a:pPr>
+            <a:r>
+              <a:t>‣  Runs after every other agent completes, looking for standalone findings that compose into a more severe, realistic attack path (e.g. reflected XSS + missing CSRF token → account takeover)</a:t>
+            </a:r>
+          </a:p>
+          <a:p>
+            <a:pPr>
+              <a:lnSpc>
+                <a:spcPct val="125000"/>
+              </a:lnSpc>
+              <a:spcAft>
+                <a:spcPts val="400"/>
+              </a:spcAft>
+              <a:defRPr sz="1400" b="0">
+                <a:solidFill>
+                  <a:srgbClr val="5B6270"/>
+                </a:solidFill>
+              </a:defRPr>
+            </a:pPr>
+            <a:r>
+              <a:t>‣  Goes through the same adversarial-validation discipline as individual findings — no rubber-stamping</a:t>
             </a:r>
           </a:p>
           <a:p>
@@ -4238,14 +4184,32 @@
               <a:spcAft>
                 <a:spcPts val="1000"/>
               </a:spcAft>
-              <a:defRPr sz="1800" b="0">
+              <a:defRPr sz="1700" b="0">
                 <a:solidFill>
                   <a:srgbClr val="1C1E21"/>
                 </a:solidFill>
               </a:defRPr>
             </a:pPr>
             <a:r>
-              <a:t>•  Finding grouping — shared check types collapse into one section with full evidence for a representative sample, preventing runaway report length (one real scan: 291 findings, not 629 pages)</a:t>
+              <a:t>•  Rescan</a:t>
+            </a:r>
+          </a:p>
+          <a:p>
+            <a:pPr>
+              <a:lnSpc>
+                <a:spcPct val="125000"/>
+              </a:lnSpc>
+              <a:spcAft>
+                <a:spcPts val="400"/>
+              </a:spcAft>
+              <a:defRPr sz="1400" b="0">
+                <a:solidFill>
+                  <a:srgbClr val="5B6270"/>
+                </a:solidFill>
+              </a:defRPr>
+            </a:pPr>
+            <a:r>
+              <a:t>‣  Full re-run, diffed against the prior scan: new findings, still_open, and fixed — human decisions like risk_accepted are never silently overridden</a:t>
             </a:r>
           </a:p>
           <a:p>
@@ -4256,14 +4220,14 @@
               <a:spcAft>
                 <a:spcPts val="1000"/>
               </a:spcAft>
-              <a:defRPr sz="1800" b="0">
+              <a:defRPr sz="1700" b="0">
                 <a:solidFill>
                   <a:srgbClr val="1C1E21"/>
                 </a:solidFill>
               </a:defRPr>
             </a:pPr>
             <a:r>
-              <a:t>•  LLM-generated executive summary for non-technical stakeholders — generated once, cached</a:t>
+              <a:t>•  Retest</a:t>
             </a:r>
           </a:p>
           <a:p>
@@ -4272,34 +4236,16 @@
                 <a:spcPct val="125000"/>
               </a:lnSpc>
               <a:spcAft>
-                <a:spcPts val="1000"/>
+                <a:spcPts val="400"/>
               </a:spcAft>
-              <a:defRPr sz="1800" b="0">
-                <a:solidFill>
-                  <a:srgbClr val="1C1E21"/>
-                </a:solidFill>
-              </a:defRPr>
-            </a:pPr>
-            <a:r>
-              <a:t>•  Org branding — logo and primary color on every generated report</a:t>
-            </a:r>
-          </a:p>
-          <a:p>
-            <a:pPr>
-              <a:lnSpc>
-                <a:spcPct val="125000"/>
-              </a:lnSpc>
-              <a:spcAft>
-                <a:spcPts val="1000"/>
-              </a:spcAft>
-              <a:defRPr sz="1800" b="0">
-                <a:solidFill>
-                  <a:srgbClr val="1C1E21"/>
-                </a:solidFill>
-              </a:defRPr>
-            </a:pPr>
-            <a:r>
-              <a:t>•  A native, ported VGS report-builder workflow for teams that want manual curation</a:t>
+              <a:defRPr sz="1400" b="0">
+                <a:solidFill>
+                  <a:srgbClr val="5B6270"/>
+                </a:solidFill>
+              </a:defRPr>
+            </a:pPr>
+            <a:r>
+              <a:t>‣  Targeted, single-finding re-verification — "we just deployed a fix, did it work" — without paying for a full scan</a:t>
             </a:r>
           </a:p>
         </p:txBody>
@@ -4334,7 +4280,7 @@
               </a:defRPr>
             </a:pPr>
             <a:r>
-              <a:t>13</a:t>
+              <a:t>12</a:t>
             </a:r>
           </a:p>
         </p:txBody>
@@ -4474,7 +4420,7 @@
               </a:defRPr>
             </a:pPr>
             <a:r>
-              <a:t>VGS INTEGRATION</a:t>
+              <a:t>REPORTING</a:t>
             </a:r>
           </a:p>
         </p:txBody>
@@ -4510,125 +4456,21 @@
               </a:defRPr>
             </a:pPr>
             <a:r>
-              <a:t>Three complementary modes</a:t>
-            </a:r>
-          </a:p>
-        </p:txBody>
-      </p:sp>
-      <p:sp>
-        <p:nvSpPr>
-          <p:cNvPr id="5" name="Rounded Rectangle 4"/>
-          <p:cNvSpPr/>
-          <p:nvPr/>
-        </p:nvSpPr>
-        <p:spPr>
-          <a:xfrm>
-            <a:off x="548640" y="1600200"/>
-            <a:ext cx="3576218" cy="4206240"/>
-          </a:xfrm>
-          <a:prstGeom prst="roundRect">
-            <a:avLst/>
-          </a:prstGeom>
-          <a:solidFill>
-            <a:srgbClr val="F3EEFB"/>
-          </a:solidFill>
-          <a:ln w="15875">
-            <a:solidFill>
-              <a:srgbClr val="6D28D9"/>
-            </a:solidFill>
-          </a:ln>
-          <a:effectLst/>
-        </p:spPr>
-        <p:style>
-          <a:lnRef idx="1">
-            <a:schemeClr val="accent1"/>
-          </a:lnRef>
-          <a:fillRef idx="3">
-            <a:schemeClr val="accent1"/>
-          </a:fillRef>
-          <a:effectRef idx="2">
-            <a:schemeClr val="accent1"/>
-          </a:effectRef>
-          <a:fontRef idx="minor">
-            <a:schemeClr val="lt1"/>
-          </a:fontRef>
-        </p:style>
-        <p:txBody>
-          <a:bodyPr rtlCol="0" anchor="ctr" wrap="square" lIns="45720" rIns="45720"/>
-          <a:lstStyle/>
-          <a:p>
-            <a:pPr algn="ctr">
-              <a:defRPr sz="1300" b="0">
-                <a:solidFill>
-                  <a:srgbClr val="1C1E21"/>
-                </a:solidFill>
-              </a:defRPr>
-            </a:pPr>
-          </a:p>
-        </p:txBody>
-      </p:sp>
-      <p:sp>
-        <p:nvSpPr>
-          <p:cNvPr id="6" name="Rounded Rectangle 5"/>
-          <p:cNvSpPr/>
-          <p:nvPr/>
-        </p:nvSpPr>
-        <p:spPr>
-          <a:xfrm>
-            <a:off x="4307738" y="1600200"/>
-            <a:ext cx="3576218" cy="4206240"/>
-          </a:xfrm>
-          <a:prstGeom prst="roundRect">
-            <a:avLst/>
-          </a:prstGeom>
-          <a:solidFill>
-            <a:srgbClr val="F3EEFB"/>
-          </a:solidFill>
-          <a:ln w="15875">
-            <a:solidFill>
-              <a:srgbClr val="6D28D9"/>
-            </a:solidFill>
-          </a:ln>
-          <a:effectLst/>
-        </p:spPr>
-        <p:style>
-          <a:lnRef idx="1">
-            <a:schemeClr val="accent1"/>
-          </a:lnRef>
-          <a:fillRef idx="3">
-            <a:schemeClr val="accent1"/>
-          </a:fillRef>
-          <a:effectRef idx="2">
-            <a:schemeClr val="accent1"/>
-          </a:effectRef>
-          <a:fontRef idx="minor">
-            <a:schemeClr val="lt1"/>
-          </a:fontRef>
-        </p:style>
-        <p:txBody>
-          <a:bodyPr rtlCol="0" anchor="ctr" wrap="square" lIns="45720" rIns="45720"/>
-          <a:lstStyle/>
-          <a:p>
-            <a:pPr algn="ctr">
-              <a:defRPr sz="1300" b="0">
-                <a:solidFill>
-                  <a:srgbClr val="1C1E21"/>
-                </a:solidFill>
-              </a:defRPr>
-            </a:pPr>
-          </a:p>
-        </p:txBody>
-      </p:sp>
-      <p:sp>
-        <p:nvSpPr>
-          <p:cNvPr id="7" name="TextBox 6"/>
+              <a:t>One dataset, every audience</a:t>
+            </a:r>
+          </a:p>
+        </p:txBody>
+      </p:sp>
+      <p:sp>
+        <p:nvSpPr>
+          <p:cNvPr id="5" name="TextBox 4"/>
           <p:cNvSpPr txBox="1"/>
           <p:nvPr/>
         </p:nvSpPr>
         <p:spPr>
           <a:xfrm>
-            <a:off x="777240" y="1783080"/>
-            <a:ext cx="3119018" cy="3840480"/>
+            <a:off x="640080" y="1554480"/>
+            <a:ext cx="10911535" cy="4663440"/>
           </a:xfrm>
           <a:prstGeom prst="rect">
             <a:avLst/>
@@ -4642,144 +4484,99 @@
           <a:lstStyle/>
           <a:p>
             <a:pPr>
-              <a:defRPr b="1" sz="1800">
-                <a:solidFill>
-                  <a:srgbClr val="6D28D9"/>
-                </a:solidFill>
-              </a:defRPr>
-            </a:pPr>
-            <a:r>
-              <a:t>Decoupled Webhook Push</a:t>
-            </a:r>
-          </a:p>
-          <a:p>
-            <a:pPr>
+              <a:lnSpc>
+                <a:spcPct val="125000"/>
+              </a:lnSpc>
               <a:spcAft>
-                <a:spcPts val="800"/>
+                <a:spcPts val="1000"/>
               </a:spcAft>
-              <a:defRPr sz="1300"/>
-            </a:pPr>
-            <a:r>
-              <a:t>•  On scan completion, Verdikt POSTs findings to VGS's ingestion webhook</a:t>
-            </a:r>
-          </a:p>
-          <a:p>
-            <a:pPr>
+              <a:defRPr sz="1800" b="0">
+                <a:solidFill>
+                  <a:srgbClr val="1C1E21"/>
+                </a:solidFill>
+              </a:defRPr>
+            </a:pPr>
+            <a:r>
+              <a:t>•  HTML, PDF, DOCX, CSV, and JSON exports — all generated from the same underlying Finding records</a:t>
+            </a:r>
+          </a:p>
+          <a:p>
+            <a:pPr>
+              <a:lnSpc>
+                <a:spcPct val="125000"/>
+              </a:lnSpc>
               <a:spcAft>
-                <a:spcPts val="800"/>
+                <a:spcPts val="1000"/>
               </a:spcAft>
-              <a:defRPr sz="1300"/>
-            </a:pPr>
-            <a:r>
-              <a:t>•  Tagged source: ai-multi-agent</a:t>
-            </a:r>
-          </a:p>
-          <a:p>
-            <a:pPr>
+              <a:defRPr sz="1800" b="0">
+                <a:solidFill>
+                  <a:srgbClr val="1C1E21"/>
+                </a:solidFill>
+              </a:defRPr>
+            </a:pPr>
+            <a:r>
+              <a:t>•  Finding grouping — shared check types collapse into one section with full evidence for a representative sample, preventing runaway report length (one real scan: 291 findings, not 629 pages)</a:t>
+            </a:r>
+          </a:p>
+          <a:p>
+            <a:pPr>
+              <a:lnSpc>
+                <a:spcPct val="125000"/>
+              </a:lnSpc>
               <a:spcAft>
-                <a:spcPts val="800"/>
+                <a:spcPts val="1000"/>
               </a:spcAft>
-              <a:defRPr sz="1300"/>
-            </a:pPr>
-            <a:r>
-              <a:t>•  VGS stays system of record for governance/remediation</a:t>
-            </a:r>
-          </a:p>
-          <a:p>
-            <a:pPr>
+              <a:defRPr sz="1800" b="0">
+                <a:solidFill>
+                  <a:srgbClr val="1C1E21"/>
+                </a:solidFill>
+              </a:defRPr>
+            </a:pPr>
+            <a:r>
+              <a:t>•  LLM-generated executive summary for non-technical stakeholders — generated once, cached</a:t>
+            </a:r>
+          </a:p>
+          <a:p>
+            <a:pPr>
+              <a:lnSpc>
+                <a:spcPct val="125000"/>
+              </a:lnSpc>
               <a:spcAft>
-                <a:spcPts val="800"/>
+                <a:spcPts val="1000"/>
               </a:spcAft>
-              <a:defRPr sz="1300"/>
-            </a:pPr>
-            <a:r>
-              <a:t>•  Best-effort: a broken webhook never fails the scan</a:t>
-            </a:r>
-          </a:p>
-        </p:txBody>
-      </p:sp>
-      <p:sp>
-        <p:nvSpPr>
-          <p:cNvPr id="8" name="TextBox 7"/>
-          <p:cNvSpPr txBox="1"/>
-          <p:nvPr/>
-        </p:nvSpPr>
-        <p:spPr>
-          <a:xfrm>
-            <a:off x="4536338" y="1783080"/>
-            <a:ext cx="3119018" cy="3840480"/>
-          </a:xfrm>
-          <a:prstGeom prst="rect">
-            <a:avLst/>
-          </a:prstGeom>
-          <a:noFill/>
-        </p:spPr>
-        <p:txBody>
-          <a:bodyPr wrap="square">
-            <a:spAutoFit/>
-          </a:bodyPr>
-          <a:lstStyle/>
-          <a:p>
-            <a:pPr>
-              <a:defRPr b="1" sz="1800">
-                <a:solidFill>
-                  <a:srgbClr val="6D28D9"/>
-                </a:solidFill>
-              </a:defRPr>
-            </a:pPr>
-            <a:r>
-              <a:t>Native Report-Builder</a:t>
-            </a:r>
-          </a:p>
-          <a:p>
-            <a:pPr>
+              <a:defRPr sz="1800" b="0">
+                <a:solidFill>
+                  <a:srgbClr val="1C1E21"/>
+                </a:solidFill>
+              </a:defRPr>
+            </a:pPr>
+            <a:r>
+              <a:t>•  Org branding — logo and primary color on every generated report</a:t>
+            </a:r>
+          </a:p>
+          <a:p>
+            <a:pPr>
+              <a:lnSpc>
+                <a:spcPct val="125000"/>
+              </a:lnSpc>
               <a:spcAft>
-                <a:spcPts val="800"/>
+                <a:spcPts val="1000"/>
               </a:spcAft>
-              <a:defRPr sz="1300"/>
-            </a:pPr>
-            <a:r>
-              <a:t>•  VGS's manual workflow, ported into Verdikt as its own workspace</a:t>
-            </a:r>
-          </a:p>
-          <a:p>
-            <a:pPr>
-              <a:spcAft>
-                <a:spcPts val="800"/>
-              </a:spcAft>
-              <a:defRPr sz="1300"/>
-            </a:pPr>
-            <a:r>
-              <a:t>•  Vulnerability Picker: confirmed findings, auto-seeded and tracked</a:t>
-            </a:r>
-          </a:p>
-          <a:p>
-            <a:pPr>
-              <a:spcAft>
-                <a:spcPts val="800"/>
-              </a:spcAft>
-              <a:defRPr sz="1300"/>
-            </a:pPr>
-            <a:r>
-              <a:t>•  Delete or edit severity; "Load from PortSwigger" one-click pull</a:t>
-            </a:r>
-          </a:p>
-          <a:p>
-            <a:pPr>
-              <a:spcAft>
-                <a:spcPts val="800"/>
-              </a:spcAft>
-              <a:defRPr sz="1300"/>
-            </a:pPr>
-            <a:r>
-              <a:t>•  Generate Report: same DOCX shape as the original VGS tool</a:t>
-            </a:r>
-          </a:p>
-        </p:txBody>
-      </p:sp>
-      <p:sp>
-        <p:nvSpPr>
-          <p:cNvPr id="9" name="TextBox 8"/>
+              <a:defRPr sz="1800" b="0">
+                <a:solidFill>
+                  <a:srgbClr val="1C1E21"/>
+                </a:solidFill>
+              </a:defRPr>
+            </a:pPr>
+            <a:r>
+              <a:t>•  A native, ported VGS report-builder workflow for teams that want manual curation</a:t>
+            </a:r>
+          </a:p>
+        </p:txBody>
+      </p:sp>
+      <p:sp>
+        <p:nvSpPr>
+          <p:cNvPr id="6" name="TextBox 5"/>
           <p:cNvSpPr txBox="1"/>
           <p:nvPr/>
         </p:nvSpPr>
@@ -4807,14 +4604,14 @@
               </a:defRPr>
             </a:pPr>
             <a:r>
-              <a:t>14</a:t>
-            </a:r>
-          </a:p>
-        </p:txBody>
-      </p:sp>
-      <p:sp>
-        <p:nvSpPr>
-          <p:cNvPr id="10" name="TextBox 9"/>
+              <a:t>13</a:t>
+            </a:r>
+          </a:p>
+        </p:txBody>
+      </p:sp>
+      <p:sp>
+        <p:nvSpPr>
+          <p:cNvPr id="7" name="TextBox 6"/>
           <p:cNvSpPr txBox="1"/>
           <p:nvPr/>
         </p:nvSpPr>
@@ -4843,137 +4640,6 @@
             </a:pPr>
             <a:r>
               <a:t>Verdikt</a:t>
-            </a:r>
-          </a:p>
-        </p:txBody>
-      </p:sp>
-      <p:sp>
-        <p:nvSpPr>
-          <p:cNvPr id="6" name="Rounded Rectangle 5"/>
-          <p:cNvSpPr/>
-          <p:nvPr/>
-        </p:nvSpPr>
-        <p:spPr>
-          <a:xfrm>
-            <a:off x="8066836" y="1600200"/>
-            <a:ext cx="3576218" cy="4206240"/>
-          </a:xfrm>
-          <a:prstGeom prst="roundRect">
-            <a:avLst/>
-          </a:prstGeom>
-          <a:solidFill>
-            <a:srgbClr val="F3EEFB"/>
-          </a:solidFill>
-          <a:ln w="15875">
-            <a:solidFill>
-              <a:srgbClr val="6D28D9"/>
-            </a:solidFill>
-          </a:ln>
-          <a:effectLst/>
-        </p:spPr>
-        <p:style>
-          <a:lnRef idx="1">
-            <a:schemeClr val="accent1"/>
-          </a:lnRef>
-          <a:fillRef idx="3">
-            <a:schemeClr val="accent1"/>
-          </a:fillRef>
-          <a:effectRef idx="2">
-            <a:schemeClr val="accent1"/>
-          </a:effectRef>
-          <a:fontRef idx="minor">
-            <a:schemeClr val="lt1"/>
-          </a:fontRef>
-        </p:style>
-        <p:txBody>
-          <a:bodyPr rtlCol="0" anchor="ctr" wrap="square" lIns="45720" rIns="45720"/>
-          <a:lstStyle/>
-          <a:p>
-            <a:pPr algn="ctr">
-              <a:defRPr sz="1300" b="0">
-                <a:solidFill>
-                  <a:srgbClr val="1C1E21"/>
-                </a:solidFill>
-              </a:defRPr>
-            </a:pPr>
-          </a:p>
-        </p:txBody>
-      </p:sp>
-      <p:sp>
-        <p:nvSpPr>
-          <p:cNvPr id="8" name="TextBox 7"/>
-          <p:cNvSpPr txBox="1"/>
-          <p:nvPr/>
-        </p:nvSpPr>
-        <p:spPr>
-          <a:xfrm>
-            <a:off x="8295436" y="1783080"/>
-            <a:ext cx="3119018" cy="3840480"/>
-          </a:xfrm>
-          <a:prstGeom prst="rect">
-            <a:avLst/>
-          </a:prstGeom>
-          <a:noFill/>
-        </p:spPr>
-        <p:txBody>
-          <a:bodyPr wrap="square">
-            <a:spAutoFit/>
-          </a:bodyPr>
-          <a:lstStyle/>
-          <a:p>
-            <a:pPr>
-              <a:defRPr b="1" sz="1800">
-                <a:solidFill>
-                  <a:srgbClr val="6D28D9"/>
-                </a:solidFill>
-              </a:defRPr>
-            </a:pPr>
-            <a:r>
-              <a:t>Per-Scan-Run Export</a:t>
-            </a:r>
-          </a:p>
-          <a:p>
-            <a:pPr>
-              <a:spcAft>
-                <a:spcPts val="800"/>
-              </a:spcAft>
-              <a:defRPr sz="1300"/>
-            </a:pPr>
-            <a:r>
-              <a:t>•  One-click report.vgs.docx export scoped to a single scan run</a:t>
-            </a:r>
-          </a:p>
-          <a:p>
-            <a:pPr>
-              <a:spcAft>
-                <a:spcPts val="800"/>
-              </a:spcAft>
-              <a:defRPr sz="1300"/>
-            </a:pPr>
-            <a:r>
-              <a:t>•  Transient — not persisted or tracked like the workspace mode</a:t>
-            </a:r>
-          </a:p>
-          <a:p>
-            <a:pPr>
-              <a:spcAft>
-                <a:spcPts val="800"/>
-              </a:spcAft>
-              <a:defRPr sz="1300"/>
-            </a:pPr>
-            <a:r>
-              <a:t>•  For a quick handoff when a full workspace isn't needed</a:t>
-            </a:r>
-          </a:p>
-          <a:p>
-            <a:pPr>
-              <a:spcAft>
-                <a:spcPts val="800"/>
-              </a:spcAft>
-              <a:defRPr sz="1300"/>
-            </a:pPr>
-            <a:r>
-              <a:t>•  Same VGS-shaped DOCX output as the other two modes</a:t>
             </a:r>
           </a:p>
         </p:txBody>
@@ -5078,7 +4744,7 @@
               </a:defRPr>
             </a:pPr>
             <a:r>
-              <a:t>ENTERPRISE HARDENING</a:t>
+              <a:t>VGS INTEGRATION</a:t>
             </a:r>
           </a:p>
         </p:txBody>
@@ -5106,7 +4772,7 @@
           <a:lstStyle/>
           <a:p>
             <a:pPr>
-              <a:defRPr sz="2600" b="1">
+              <a:defRPr sz="2800" b="1">
                 <a:solidFill>
                   <a:srgbClr val="1C1E21"/>
                 </a:solidFill>
@@ -5114,21 +4780,125 @@
               </a:defRPr>
             </a:pPr>
             <a:r>
-              <a:t>Built for real organizations, not just demos</a:t>
-            </a:r>
-          </a:p>
-        </p:txBody>
-      </p:sp>
-      <p:sp>
-        <p:nvSpPr>
-          <p:cNvPr id="5" name="TextBox 4"/>
+              <a:t>Three complementary modes</a:t>
+            </a:r>
+          </a:p>
+        </p:txBody>
+      </p:sp>
+      <p:sp>
+        <p:nvSpPr>
+          <p:cNvPr id="5" name="Rounded Rectangle 4"/>
+          <p:cNvSpPr/>
+          <p:nvPr/>
+        </p:nvSpPr>
+        <p:spPr>
+          <a:xfrm>
+            <a:off x="548640" y="1600200"/>
+            <a:ext cx="3576218" cy="4206240"/>
+          </a:xfrm>
+          <a:prstGeom prst="roundRect">
+            <a:avLst/>
+          </a:prstGeom>
+          <a:solidFill>
+            <a:srgbClr val="F3EEFB"/>
+          </a:solidFill>
+          <a:ln w="15875">
+            <a:solidFill>
+              <a:srgbClr val="6D28D9"/>
+            </a:solidFill>
+          </a:ln>
+          <a:effectLst/>
+        </p:spPr>
+        <p:style>
+          <a:lnRef idx="1">
+            <a:schemeClr val="accent1"/>
+          </a:lnRef>
+          <a:fillRef idx="3">
+            <a:schemeClr val="accent1"/>
+          </a:fillRef>
+          <a:effectRef idx="2">
+            <a:schemeClr val="accent1"/>
+          </a:effectRef>
+          <a:fontRef idx="minor">
+            <a:schemeClr val="lt1"/>
+          </a:fontRef>
+        </p:style>
+        <p:txBody>
+          <a:bodyPr rtlCol="0" anchor="ctr" wrap="square" lIns="45720" rIns="45720"/>
+          <a:lstStyle/>
+          <a:p>
+            <a:pPr algn="ctr">
+              <a:defRPr sz="1300" b="0">
+                <a:solidFill>
+                  <a:srgbClr val="1C1E21"/>
+                </a:solidFill>
+              </a:defRPr>
+            </a:pPr>
+          </a:p>
+        </p:txBody>
+      </p:sp>
+      <p:sp>
+        <p:nvSpPr>
+          <p:cNvPr id="6" name="Rounded Rectangle 5"/>
+          <p:cNvSpPr/>
+          <p:nvPr/>
+        </p:nvSpPr>
+        <p:spPr>
+          <a:xfrm>
+            <a:off x="4307738" y="1600200"/>
+            <a:ext cx="3576218" cy="4206240"/>
+          </a:xfrm>
+          <a:prstGeom prst="roundRect">
+            <a:avLst/>
+          </a:prstGeom>
+          <a:solidFill>
+            <a:srgbClr val="F3EEFB"/>
+          </a:solidFill>
+          <a:ln w="15875">
+            <a:solidFill>
+              <a:srgbClr val="6D28D9"/>
+            </a:solidFill>
+          </a:ln>
+          <a:effectLst/>
+        </p:spPr>
+        <p:style>
+          <a:lnRef idx="1">
+            <a:schemeClr val="accent1"/>
+          </a:lnRef>
+          <a:fillRef idx="3">
+            <a:schemeClr val="accent1"/>
+          </a:fillRef>
+          <a:effectRef idx="2">
+            <a:schemeClr val="accent1"/>
+          </a:effectRef>
+          <a:fontRef idx="minor">
+            <a:schemeClr val="lt1"/>
+          </a:fontRef>
+        </p:style>
+        <p:txBody>
+          <a:bodyPr rtlCol="0" anchor="ctr" wrap="square" lIns="45720" rIns="45720"/>
+          <a:lstStyle/>
+          <a:p>
+            <a:pPr algn="ctr">
+              <a:defRPr sz="1300" b="0">
+                <a:solidFill>
+                  <a:srgbClr val="1C1E21"/>
+                </a:solidFill>
+              </a:defRPr>
+            </a:pPr>
+          </a:p>
+        </p:txBody>
+      </p:sp>
+      <p:sp>
+        <p:nvSpPr>
+          <p:cNvPr id="7" name="TextBox 6"/>
           <p:cNvSpPr txBox="1"/>
           <p:nvPr/>
         </p:nvSpPr>
         <p:spPr>
           <a:xfrm>
-            <a:off x="640080" y="1463040"/>
-            <a:ext cx="10911535" cy="4754880"/>
+            <a:off x="777240" y="1783080"/>
+            <a:ext cx="3119018" cy="3840480"/>
           </a:xfrm>
           <a:prstGeom prst="rect">
             <a:avLst/>
@@ -5142,135 +4912,144 @@
           <a:lstStyle/>
           <a:p>
             <a:pPr>
-              <a:lnSpc>
-                <a:spcPct val="125000"/>
-              </a:lnSpc>
+              <a:defRPr b="1" sz="1800">
+                <a:solidFill>
+                  <a:srgbClr val="6D28D9"/>
+                </a:solidFill>
+              </a:defRPr>
+            </a:pPr>
+            <a:r>
+              <a:t>Decoupled Webhook Push</a:t>
+            </a:r>
+          </a:p>
+          <a:p>
+            <a:pPr>
               <a:spcAft>
-                <a:spcPts val="1000"/>
+                <a:spcPts val="800"/>
               </a:spcAft>
-              <a:defRPr sz="1600" b="0">
-                <a:solidFill>
-                  <a:srgbClr val="1C1E21"/>
-                </a:solidFill>
-              </a:defRPr>
-            </a:pPr>
-            <a:r>
-              <a:t>•  RBAC — real DB-backed role_permissions table across 19 resource types; new roles are data changes</a:t>
-            </a:r>
-          </a:p>
-          <a:p>
-            <a:pPr>
-              <a:lnSpc>
-                <a:spcPct val="125000"/>
-              </a:lnSpc>
+              <a:defRPr sz="1300"/>
+            </a:pPr>
+            <a:r>
+              <a:t>•  On scan completion, Verdikt POSTs findings to VGS's ingestion webhook</a:t>
+            </a:r>
+          </a:p>
+          <a:p>
+            <a:pPr>
               <a:spcAft>
-                <a:spcPts val="1000"/>
+                <a:spcPts val="800"/>
               </a:spcAft>
-              <a:defRPr sz="1600" b="0">
-                <a:solidFill>
-                  <a:srgbClr val="1C1E21"/>
-                </a:solidFill>
-              </a:defRPr>
-            </a:pPr>
-            <a:r>
-              <a:t>•  SSO — SAML and OIDC, per-org, with configurable default role assignment</a:t>
-            </a:r>
-          </a:p>
-          <a:p>
-            <a:pPr>
-              <a:lnSpc>
-                <a:spcPct val="125000"/>
-              </a:lnSpc>
+              <a:defRPr sz="1300"/>
+            </a:pPr>
+            <a:r>
+              <a:t>•  Tagged source: ai-multi-agent</a:t>
+            </a:r>
+          </a:p>
+          <a:p>
+            <a:pPr>
               <a:spcAft>
-                <a:spcPts val="1000"/>
+                <a:spcPts val="800"/>
               </a:spcAft>
-              <a:defRPr sz="1600" b="0">
-                <a:solidFill>
-                  <a:srgbClr val="1C1E21"/>
-                </a:solidFill>
-              </a:defRPr>
-            </a:pPr>
-            <a:r>
-              <a:t>•  Ticketing &amp; notifications — Jira, Slack, Microsoft Teams, Outlook, plus a conversational Teams bot</a:t>
-            </a:r>
-          </a:p>
-          <a:p>
-            <a:pPr>
-              <a:lnSpc>
-                <a:spcPct val="125000"/>
-              </a:lnSpc>
+              <a:defRPr sz="1300"/>
+            </a:pPr>
+            <a:r>
+              <a:t>•  VGS stays system of record for governance/remediation</a:t>
+            </a:r>
+          </a:p>
+          <a:p>
+            <a:pPr>
               <a:spcAft>
-                <a:spcPts val="1000"/>
+                <a:spcPts val="800"/>
               </a:spcAft>
-              <a:defRPr sz="1600" b="0">
-                <a:solidFill>
-                  <a:srgbClr val="1C1E21"/>
-                </a:solidFill>
-              </a:defRPr>
-            </a:pPr>
-            <a:r>
-              <a:t>•  CMDB integration — generic, configurable REST client for any vendor's asset inventory</a:t>
-            </a:r>
-          </a:p>
-          <a:p>
-            <a:pPr>
-              <a:lnSpc>
-                <a:spcPct val="125000"/>
-              </a:lnSpc>
+              <a:defRPr sz="1300"/>
+            </a:pPr>
+            <a:r>
+              <a:t>•  Best-effort: a broken webhook never fails the scan</a:t>
+            </a:r>
+          </a:p>
+        </p:txBody>
+      </p:sp>
+      <p:sp>
+        <p:nvSpPr>
+          <p:cNvPr id="8" name="TextBox 7"/>
+          <p:cNvSpPr txBox="1"/>
+          <p:nvPr/>
+        </p:nvSpPr>
+        <p:spPr>
+          <a:xfrm>
+            <a:off x="4536338" y="1783080"/>
+            <a:ext cx="3119018" cy="3840480"/>
+          </a:xfrm>
+          <a:prstGeom prst="rect">
+            <a:avLst/>
+          </a:prstGeom>
+          <a:noFill/>
+        </p:spPr>
+        <p:txBody>
+          <a:bodyPr wrap="square">
+            <a:spAutoFit/>
+          </a:bodyPr>
+          <a:lstStyle/>
+          <a:p>
+            <a:pPr>
+              <a:defRPr b="1" sz="1800">
+                <a:solidFill>
+                  <a:srgbClr val="6D28D9"/>
+                </a:solidFill>
+              </a:defRPr>
+            </a:pPr>
+            <a:r>
+              <a:t>Native Report-Builder</a:t>
+            </a:r>
+          </a:p>
+          <a:p>
+            <a:pPr>
               <a:spcAft>
-                <a:spcPts val="1000"/>
+                <a:spcPts val="800"/>
               </a:spcAft>
-              <a:defRPr sz="1600" b="0">
-                <a:solidFill>
-                  <a:srgbClr val="1C1E21"/>
-                </a:solidFill>
-              </a:defRPr>
-            </a:pPr>
-            <a:r>
-              <a:t>•  API keys — long-lived, revocable tokens for CI/automation clients</a:t>
-            </a:r>
-          </a:p>
-          <a:p>
-            <a:pPr>
-              <a:lnSpc>
-                <a:spcPct val="125000"/>
-              </a:lnSpc>
+              <a:defRPr sz="1300"/>
+            </a:pPr>
+            <a:r>
+              <a:t>•  VGS's manual workflow, ported into Verdikt as its own workspace</a:t>
+            </a:r>
+          </a:p>
+          <a:p>
+            <a:pPr>
               <a:spcAft>
-                <a:spcPts val="1000"/>
+                <a:spcPts val="800"/>
               </a:spcAft>
-              <a:defRPr sz="1600" b="0">
-                <a:solidFill>
-                  <a:srgbClr val="1C1E21"/>
-                </a:solidFill>
-              </a:defRPr>
-            </a:pPr>
-            <a:r>
-              <a:t>•  Audit log — every state-changing action recorded with actor, action, resource, metadata</a:t>
-            </a:r>
-          </a:p>
-          <a:p>
-            <a:pPr>
-              <a:lnSpc>
-                <a:spcPct val="125000"/>
-              </a:lnSpc>
+              <a:defRPr sz="1300"/>
+            </a:pPr>
+            <a:r>
+              <a:t>•  Vulnerability Picker: confirmed findings, auto-seeded and tracked</a:t>
+            </a:r>
+          </a:p>
+          <a:p>
+            <a:pPr>
               <a:spcAft>
-                <a:spcPts val="1000"/>
+                <a:spcPts val="800"/>
               </a:spcAft>
-              <a:defRPr sz="1600" b="0">
-                <a:solidFill>
-                  <a:srgbClr val="1C1E21"/>
-                </a:solidFill>
-              </a:defRPr>
-            </a:pPr>
-            <a:r>
-              <a:t>•  Cost governor — a per-scan-run cap on estimated LLM spend, enforced automatically</a:t>
-            </a:r>
-          </a:p>
-        </p:txBody>
-      </p:sp>
-      <p:sp>
-        <p:nvSpPr>
-          <p:cNvPr id="6" name="TextBox 5"/>
+              <a:defRPr sz="1300"/>
+            </a:pPr>
+            <a:r>
+              <a:t>•  Delete or edit severity; "Load from PortSwigger" one-click pull</a:t>
+            </a:r>
+          </a:p>
+          <a:p>
+            <a:pPr>
+              <a:spcAft>
+                <a:spcPts val="800"/>
+              </a:spcAft>
+              <a:defRPr sz="1300"/>
+            </a:pPr>
+            <a:r>
+              <a:t>•  Generate Report: same DOCX shape as the original VGS tool</a:t>
+            </a:r>
+          </a:p>
+        </p:txBody>
+      </p:sp>
+      <p:sp>
+        <p:nvSpPr>
+          <p:cNvPr id="9" name="TextBox 8"/>
           <p:cNvSpPr txBox="1"/>
           <p:nvPr/>
         </p:nvSpPr>
@@ -5298,14 +5077,14 @@
               </a:defRPr>
             </a:pPr>
             <a:r>
-              <a:t>15</a:t>
-            </a:r>
-          </a:p>
-        </p:txBody>
-      </p:sp>
-      <p:sp>
-        <p:nvSpPr>
-          <p:cNvPr id="7" name="TextBox 6"/>
+              <a:t>14</a:t>
+            </a:r>
+          </a:p>
+        </p:txBody>
+      </p:sp>
+      <p:sp>
+        <p:nvSpPr>
+          <p:cNvPr id="10" name="TextBox 9"/>
           <p:cNvSpPr txBox="1"/>
           <p:nvPr/>
         </p:nvSpPr>
@@ -5334,6 +5113,137 @@
             </a:pPr>
             <a:r>
               <a:t>Verdikt</a:t>
+            </a:r>
+          </a:p>
+        </p:txBody>
+      </p:sp>
+      <p:sp>
+        <p:nvSpPr>
+          <p:cNvPr id="6" name="Rounded Rectangle 5"/>
+          <p:cNvSpPr/>
+          <p:nvPr/>
+        </p:nvSpPr>
+        <p:spPr>
+          <a:xfrm>
+            <a:off x="8066836" y="1600200"/>
+            <a:ext cx="3576218" cy="4206240"/>
+          </a:xfrm>
+          <a:prstGeom prst="roundRect">
+            <a:avLst/>
+          </a:prstGeom>
+          <a:solidFill>
+            <a:srgbClr val="F3EEFB"/>
+          </a:solidFill>
+          <a:ln w="15875">
+            <a:solidFill>
+              <a:srgbClr val="6D28D9"/>
+            </a:solidFill>
+          </a:ln>
+          <a:effectLst/>
+        </p:spPr>
+        <p:style>
+          <a:lnRef idx="1">
+            <a:schemeClr val="accent1"/>
+          </a:lnRef>
+          <a:fillRef idx="3">
+            <a:schemeClr val="accent1"/>
+          </a:fillRef>
+          <a:effectRef idx="2">
+            <a:schemeClr val="accent1"/>
+          </a:effectRef>
+          <a:fontRef idx="minor">
+            <a:schemeClr val="lt1"/>
+          </a:fontRef>
+        </p:style>
+        <p:txBody>
+          <a:bodyPr rtlCol="0" anchor="ctr" wrap="square" lIns="45720" rIns="45720"/>
+          <a:lstStyle/>
+          <a:p>
+            <a:pPr algn="ctr">
+              <a:defRPr sz="1300" b="0">
+                <a:solidFill>
+                  <a:srgbClr val="1C1E21"/>
+                </a:solidFill>
+              </a:defRPr>
+            </a:pPr>
+          </a:p>
+        </p:txBody>
+      </p:sp>
+      <p:sp>
+        <p:nvSpPr>
+          <p:cNvPr id="8" name="TextBox 7"/>
+          <p:cNvSpPr txBox="1"/>
+          <p:nvPr/>
+        </p:nvSpPr>
+        <p:spPr>
+          <a:xfrm>
+            <a:off x="8295436" y="1783080"/>
+            <a:ext cx="3119018" cy="3840480"/>
+          </a:xfrm>
+          <a:prstGeom prst="rect">
+            <a:avLst/>
+          </a:prstGeom>
+          <a:noFill/>
+        </p:spPr>
+        <p:txBody>
+          <a:bodyPr wrap="square">
+            <a:spAutoFit/>
+          </a:bodyPr>
+          <a:lstStyle/>
+          <a:p>
+            <a:pPr>
+              <a:defRPr b="1" sz="1800">
+                <a:solidFill>
+                  <a:srgbClr val="6D28D9"/>
+                </a:solidFill>
+              </a:defRPr>
+            </a:pPr>
+            <a:r>
+              <a:t>Per-Scan-Run Export</a:t>
+            </a:r>
+          </a:p>
+          <a:p>
+            <a:pPr>
+              <a:spcAft>
+                <a:spcPts val="800"/>
+              </a:spcAft>
+              <a:defRPr sz="1300"/>
+            </a:pPr>
+            <a:r>
+              <a:t>•  One-click report.vgs.docx export scoped to a single scan run</a:t>
+            </a:r>
+          </a:p>
+          <a:p>
+            <a:pPr>
+              <a:spcAft>
+                <a:spcPts val="800"/>
+              </a:spcAft>
+              <a:defRPr sz="1300"/>
+            </a:pPr>
+            <a:r>
+              <a:t>•  Transient — not persisted or tracked like the workspace mode</a:t>
+            </a:r>
+          </a:p>
+          <a:p>
+            <a:pPr>
+              <a:spcAft>
+                <a:spcPts val="800"/>
+              </a:spcAft>
+              <a:defRPr sz="1300"/>
+            </a:pPr>
+            <a:r>
+              <a:t>•  For a quick handoff when a full workspace isn't needed</a:t>
+            </a:r>
+          </a:p>
+          <a:p>
+            <a:pPr>
+              <a:spcAft>
+                <a:spcPts val="800"/>
+              </a:spcAft>
+              <a:defRPr sz="1300"/>
+            </a:pPr>
+            <a:r>
+              <a:t>•  Same VGS-shaped DOCX output as the other two modes</a:t>
             </a:r>
           </a:p>
         </p:txBody>
@@ -5438,7 +5348,7 @@
               </a:defRPr>
             </a:pPr>
             <a:r>
-              <a:t>CROSS-PLATFORM, ONE COMMAND</a:t>
+              <a:t>ENTERPRISE HARDENING</a:t>
             </a:r>
           </a:p>
         </p:txBody>
@@ -5451,7 +5361,7 @@
         </p:nvSpPr>
         <p:spPr>
           <a:xfrm>
-            <a:off x="548640" y="457200"/>
+            <a:off x="548640" y="411480"/>
             <a:ext cx="11094415" cy="822960"/>
           </a:xfrm>
           <a:prstGeom prst="rect">
@@ -5474,35 +5384,160 @@
               </a:defRPr>
             </a:pPr>
             <a:r>
-              <a:t>Deployment</a:t>
-            </a:r>
-          </a:p>
-        </p:txBody>
-      </p:sp>
-      <p:pic>
-        <p:nvPicPr>
-          <p:cNvPr id="5" name="Picture 4" descr="06_deployment_topology.png"/>
-          <p:cNvPicPr>
-            <a:picLocks noChangeAspect="1"/>
-          </p:cNvPicPr>
-          <p:nvPr/>
-        </p:nvPicPr>
-        <p:blipFill>
-          <a:blip r:embed="rId2"/>
-          <a:stretch>
-            <a:fillRect/>
-          </a:stretch>
-        </p:blipFill>
-        <p:spPr>
-          <a:xfrm>
-            <a:off x="457200" y="1234440"/>
-            <a:ext cx="12533854" cy="4892040"/>
-          </a:xfrm>
-          <a:prstGeom prst="rect">
-            <a:avLst/>
-          </a:prstGeom>
-        </p:spPr>
-      </p:pic>
+              <a:t>Built for real organizations, not just demos</a:t>
+            </a:r>
+          </a:p>
+        </p:txBody>
+      </p:sp>
+      <p:sp>
+        <p:nvSpPr>
+          <p:cNvPr id="5" name="TextBox 4"/>
+          <p:cNvSpPr txBox="1"/>
+          <p:nvPr/>
+        </p:nvSpPr>
+        <p:spPr>
+          <a:xfrm>
+            <a:off x="640080" y="1463040"/>
+            <a:ext cx="10911535" cy="4754880"/>
+          </a:xfrm>
+          <a:prstGeom prst="rect">
+            <a:avLst/>
+          </a:prstGeom>
+          <a:noFill/>
+        </p:spPr>
+        <p:txBody>
+          <a:bodyPr wrap="square">
+            <a:spAutoFit/>
+          </a:bodyPr>
+          <a:lstStyle/>
+          <a:p>
+            <a:pPr>
+              <a:lnSpc>
+                <a:spcPct val="125000"/>
+              </a:lnSpc>
+              <a:spcAft>
+                <a:spcPts val="1000"/>
+              </a:spcAft>
+              <a:defRPr sz="1600" b="0">
+                <a:solidFill>
+                  <a:srgbClr val="1C1E21"/>
+                </a:solidFill>
+              </a:defRPr>
+            </a:pPr>
+            <a:r>
+              <a:t>•  RBAC — real DB-backed role_permissions table across 19 resource types; new roles are data changes</a:t>
+            </a:r>
+          </a:p>
+          <a:p>
+            <a:pPr>
+              <a:lnSpc>
+                <a:spcPct val="125000"/>
+              </a:lnSpc>
+              <a:spcAft>
+                <a:spcPts val="1000"/>
+              </a:spcAft>
+              <a:defRPr sz="1600" b="0">
+                <a:solidFill>
+                  <a:srgbClr val="1C1E21"/>
+                </a:solidFill>
+              </a:defRPr>
+            </a:pPr>
+            <a:r>
+              <a:t>•  SSO — SAML and OIDC, per-org, with configurable default role assignment</a:t>
+            </a:r>
+          </a:p>
+          <a:p>
+            <a:pPr>
+              <a:lnSpc>
+                <a:spcPct val="125000"/>
+              </a:lnSpc>
+              <a:spcAft>
+                <a:spcPts val="1000"/>
+              </a:spcAft>
+              <a:defRPr sz="1600" b="0">
+                <a:solidFill>
+                  <a:srgbClr val="1C1E21"/>
+                </a:solidFill>
+              </a:defRPr>
+            </a:pPr>
+            <a:r>
+              <a:t>•  Ticketing &amp; notifications — Jira, Slack, Microsoft Teams, Outlook, plus a conversational Teams bot</a:t>
+            </a:r>
+          </a:p>
+          <a:p>
+            <a:pPr>
+              <a:lnSpc>
+                <a:spcPct val="125000"/>
+              </a:lnSpc>
+              <a:spcAft>
+                <a:spcPts val="1000"/>
+              </a:spcAft>
+              <a:defRPr sz="1600" b="0">
+                <a:solidFill>
+                  <a:srgbClr val="1C1E21"/>
+                </a:solidFill>
+              </a:defRPr>
+            </a:pPr>
+            <a:r>
+              <a:t>•  CMDB integration — generic, configurable REST client for any vendor's asset inventory</a:t>
+            </a:r>
+          </a:p>
+          <a:p>
+            <a:pPr>
+              <a:lnSpc>
+                <a:spcPct val="125000"/>
+              </a:lnSpc>
+              <a:spcAft>
+                <a:spcPts val="1000"/>
+              </a:spcAft>
+              <a:defRPr sz="1600" b="0">
+                <a:solidFill>
+                  <a:srgbClr val="1C1E21"/>
+                </a:solidFill>
+              </a:defRPr>
+            </a:pPr>
+            <a:r>
+              <a:t>•  API keys — long-lived, revocable tokens for CI/automation clients</a:t>
+            </a:r>
+          </a:p>
+          <a:p>
+            <a:pPr>
+              <a:lnSpc>
+                <a:spcPct val="125000"/>
+              </a:lnSpc>
+              <a:spcAft>
+                <a:spcPts val="1000"/>
+              </a:spcAft>
+              <a:defRPr sz="1600" b="0">
+                <a:solidFill>
+                  <a:srgbClr val="1C1E21"/>
+                </a:solidFill>
+              </a:defRPr>
+            </a:pPr>
+            <a:r>
+              <a:t>•  Audit log — every state-changing action recorded with actor, action, resource, metadata</a:t>
+            </a:r>
+          </a:p>
+          <a:p>
+            <a:pPr>
+              <a:lnSpc>
+                <a:spcPct val="125000"/>
+              </a:lnSpc>
+              <a:spcAft>
+                <a:spcPts val="1000"/>
+              </a:spcAft>
+              <a:defRPr sz="1600" b="0">
+                <a:solidFill>
+                  <a:srgbClr val="1C1E21"/>
+                </a:solidFill>
+              </a:defRPr>
+            </a:pPr>
+            <a:r>
+              <a:t>•  Cost governor — a per-scan-run cap on estimated LLM spend, enforced automatically</a:t>
+            </a:r>
+          </a:p>
+        </p:txBody>
+      </p:sp>
       <p:sp>
         <p:nvSpPr>
           <p:cNvPr id="6" name="TextBox 5"/>
@@ -5511,8 +5546,8 @@
         </p:nvSpPr>
         <p:spPr>
           <a:xfrm>
-            <a:off x="548640" y="6172200"/>
-            <a:ext cx="11094415" cy="365760"/>
+            <a:off x="11094415" y="6400800"/>
+            <a:ext cx="822960" cy="320040"/>
           </a:xfrm>
           <a:prstGeom prst="rect">
             <a:avLst/>
@@ -5525,41 +5560,6 @@
           </a:bodyPr>
           <a:lstStyle/>
           <a:p>
-            <a:pPr algn="ctr">
-              <a:defRPr sz="1100" i="1">
-                <a:solidFill>
-                  <a:srgbClr val="5B6270"/>
-                </a:solidFill>
-              </a:defRPr>
-            </a:pPr>
-            <a:r>
-              <a:t>docker compose up — verified end-to-end on a fresh environment; migrations run automatically; works identically on macOS, Linux, and Windows.</a:t>
-            </a:r>
-          </a:p>
-        </p:txBody>
-      </p:sp>
-      <p:sp>
-        <p:nvSpPr>
-          <p:cNvPr id="7" name="TextBox 6"/>
-          <p:cNvSpPr txBox="1"/>
-          <p:nvPr/>
-        </p:nvSpPr>
-        <p:spPr>
-          <a:xfrm>
-            <a:off x="11094415" y="6400800"/>
-            <a:ext cx="822960" cy="320040"/>
-          </a:xfrm>
-          <a:prstGeom prst="rect">
-            <a:avLst/>
-          </a:prstGeom>
-          <a:noFill/>
-        </p:spPr>
-        <p:txBody>
-          <a:bodyPr wrap="none">
-            <a:spAutoFit/>
-          </a:bodyPr>
-          <a:lstStyle/>
-          <a:p>
             <a:pPr algn="r">
               <a:defRPr sz="1000">
                 <a:solidFill>
@@ -5568,14 +5568,14 @@
               </a:defRPr>
             </a:pPr>
             <a:r>
-              <a:t>16</a:t>
-            </a:r>
-          </a:p>
-        </p:txBody>
-      </p:sp>
-      <p:sp>
-        <p:nvSpPr>
-          <p:cNvPr id="8" name="TextBox 7"/>
+              <a:t>15</a:t>
+            </a:r>
+          </a:p>
+        </p:txBody>
+      </p:sp>
+      <p:sp>
+        <p:nvSpPr>
+          <p:cNvPr id="7" name="TextBox 6"/>
           <p:cNvSpPr txBox="1"/>
           <p:nvPr/>
         </p:nvSpPr>
@@ -5708,7 +5708,7 @@
               </a:defRPr>
             </a:pPr>
             <a:r>
-              <a:t>BY THE NUMBERS</a:t>
+              <a:t>CROSS-PLATFORM, ONE COMMAND</a:t>
             </a:r>
           </a:p>
         </p:txBody>
@@ -5721,7 +5721,7 @@
         </p:nvSpPr>
         <p:spPr>
           <a:xfrm>
-            <a:off x="548640" y="411480"/>
+            <a:off x="548640" y="457200"/>
             <a:ext cx="11094415" cy="822960"/>
           </a:xfrm>
           <a:prstGeom prst="rect">
@@ -5736,7 +5736,7 @@
           <a:lstStyle/>
           <a:p>
             <a:pPr>
-              <a:defRPr sz="2800" b="1">
+              <a:defRPr sz="2600" b="1">
                 <a:solidFill>
                   <a:srgbClr val="1C1E21"/>
                 </a:solidFill>
@@ -5744,565 +5744,45 @@
               </a:defRPr>
             </a:pPr>
             <a:r>
-              <a:t>The codebase, counted — not estimated</a:t>
-            </a:r>
-          </a:p>
-        </p:txBody>
-      </p:sp>
-      <p:sp>
-        <p:nvSpPr>
-          <p:cNvPr id="5" name="Rounded Rectangle 4"/>
-          <p:cNvSpPr/>
-          <p:nvPr/>
-        </p:nvSpPr>
-        <p:spPr>
-          <a:xfrm>
-            <a:off x="457200" y="1737360"/>
-            <a:ext cx="2651760" cy="1554480"/>
-          </a:xfrm>
-          <a:prstGeom prst="roundRect">
-            <a:avLst/>
-          </a:prstGeom>
-          <a:solidFill>
-            <a:srgbClr val="F3EEFB"/>
-          </a:solidFill>
-          <a:ln w="15875">
-            <a:solidFill>
-              <a:srgbClr val="E3E5E9"/>
-            </a:solidFill>
-          </a:ln>
-          <a:effectLst/>
-        </p:spPr>
-        <p:style>
-          <a:lnRef idx="1">
-            <a:schemeClr val="accent1"/>
-          </a:lnRef>
-          <a:fillRef idx="3">
-            <a:schemeClr val="accent1"/>
-          </a:fillRef>
-          <a:effectRef idx="2">
-            <a:schemeClr val="accent1"/>
-          </a:effectRef>
-          <a:fontRef idx="minor">
-            <a:schemeClr val="lt1"/>
-          </a:fontRef>
-        </p:style>
-        <p:txBody>
-          <a:bodyPr rtlCol="0" anchor="ctr" wrap="square" lIns="45720" rIns="45720"/>
-          <a:lstStyle/>
-          <a:p>
-            <a:pPr algn="ctr">
-              <a:defRPr sz="3400" b="1">
-                <a:solidFill>
-                  <a:srgbClr val="6D28D9"/>
-                </a:solidFill>
-              </a:defRPr>
-            </a:pPr>
-            <a:r>
-              <a:t>48</a:t>
-            </a:r>
-          </a:p>
-          <a:p>
-            <a:pPr algn="ctr">
-              <a:defRPr sz="1200">
-                <a:solidFill>
-                  <a:srgbClr val="1C1E21"/>
-                </a:solidFill>
-              </a:defRPr>
-            </a:pPr>
-            <a:r>
-              <a:t>agent files</a:t>
-            </a:r>
-            <a:br/>
-            <a:r>
-              <a:t>(27 wired into the scan graph)</a:t>
-            </a:r>
-          </a:p>
-        </p:txBody>
-      </p:sp>
-      <p:sp>
-        <p:nvSpPr>
-          <p:cNvPr id="6" name="Rounded Rectangle 5"/>
-          <p:cNvSpPr/>
-          <p:nvPr/>
-        </p:nvSpPr>
-        <p:spPr>
-          <a:xfrm>
-            <a:off x="3246120" y="1737360"/>
-            <a:ext cx="2651760" cy="1554480"/>
-          </a:xfrm>
-          <a:prstGeom prst="roundRect">
-            <a:avLst/>
-          </a:prstGeom>
-          <a:solidFill>
-            <a:srgbClr val="F3EEFB"/>
-          </a:solidFill>
-          <a:ln w="15875">
-            <a:solidFill>
-              <a:srgbClr val="E3E5E9"/>
-            </a:solidFill>
-          </a:ln>
-          <a:effectLst/>
-        </p:spPr>
-        <p:style>
-          <a:lnRef idx="1">
-            <a:schemeClr val="accent1"/>
-          </a:lnRef>
-          <a:fillRef idx="3">
-            <a:schemeClr val="accent1"/>
-          </a:fillRef>
-          <a:effectRef idx="2">
-            <a:schemeClr val="accent1"/>
-          </a:effectRef>
-          <a:fontRef idx="minor">
-            <a:schemeClr val="lt1"/>
-          </a:fontRef>
-        </p:style>
-        <p:txBody>
-          <a:bodyPr rtlCol="0" anchor="ctr" wrap="square" lIns="45720" rIns="45720"/>
-          <a:lstStyle/>
-          <a:p>
-            <a:pPr algn="ctr">
-              <a:defRPr sz="3400" b="1">
-                <a:solidFill>
-                  <a:srgbClr val="6D28D9"/>
-                </a:solidFill>
-              </a:defRPr>
-            </a:pPr>
-            <a:r>
-              <a:t>30</a:t>
-            </a:r>
-          </a:p>
-          <a:p>
-            <a:pPr algn="ctr">
-              <a:defRPr sz="1200">
-                <a:solidFill>
-                  <a:srgbClr val="1C1E21"/>
-                </a:solidFill>
-              </a:defRPr>
-            </a:pPr>
-            <a:r>
-              <a:t>API route modules</a:t>
-            </a:r>
-          </a:p>
-        </p:txBody>
-      </p:sp>
-      <p:sp>
-        <p:nvSpPr>
-          <p:cNvPr id="7" name="Rounded Rectangle 6"/>
-          <p:cNvSpPr/>
-          <p:nvPr/>
-        </p:nvSpPr>
-        <p:spPr>
-          <a:xfrm>
-            <a:off x="6035040" y="1737360"/>
-            <a:ext cx="2651760" cy="1554480"/>
-          </a:xfrm>
-          <a:prstGeom prst="roundRect">
-            <a:avLst/>
-          </a:prstGeom>
-          <a:solidFill>
-            <a:srgbClr val="F3EEFB"/>
-          </a:solidFill>
-          <a:ln w="15875">
-            <a:solidFill>
-              <a:srgbClr val="E3E5E9"/>
-            </a:solidFill>
-          </a:ln>
-          <a:effectLst/>
-        </p:spPr>
-        <p:style>
-          <a:lnRef idx="1">
-            <a:schemeClr val="accent1"/>
-          </a:lnRef>
-          <a:fillRef idx="3">
-            <a:schemeClr val="accent1"/>
-          </a:fillRef>
-          <a:effectRef idx="2">
-            <a:schemeClr val="accent1"/>
-          </a:effectRef>
-          <a:fontRef idx="minor">
-            <a:schemeClr val="lt1"/>
-          </a:fontRef>
-        </p:style>
-        <p:txBody>
-          <a:bodyPr rtlCol="0" anchor="ctr" wrap="square" lIns="45720" rIns="45720"/>
-          <a:lstStyle/>
-          <a:p>
-            <a:pPr algn="ctr">
-              <a:defRPr sz="3400" b="1">
-                <a:solidFill>
-                  <a:srgbClr val="6D28D9"/>
-                </a:solidFill>
-              </a:defRPr>
-            </a:pPr>
-            <a:r>
-              <a:t>~34</a:t>
-            </a:r>
-          </a:p>
-          <a:p>
-            <a:pPr algn="ctr">
-              <a:defRPr sz="1200">
-                <a:solidFill>
-                  <a:srgbClr val="1C1E21"/>
-                </a:solidFill>
-              </a:defRPr>
-            </a:pPr>
-            <a:r>
-              <a:t>persisted data models</a:t>
-            </a:r>
-          </a:p>
-        </p:txBody>
-      </p:sp>
-      <p:sp>
-        <p:nvSpPr>
-          <p:cNvPr id="8" name="Rounded Rectangle 7"/>
-          <p:cNvSpPr/>
-          <p:nvPr/>
-        </p:nvSpPr>
-        <p:spPr>
-          <a:xfrm>
-            <a:off x="8823960" y="1737360"/>
-            <a:ext cx="2651760" cy="1554480"/>
-          </a:xfrm>
-          <a:prstGeom prst="roundRect">
-            <a:avLst/>
-          </a:prstGeom>
-          <a:solidFill>
-            <a:srgbClr val="F3EEFB"/>
-          </a:solidFill>
-          <a:ln w="15875">
-            <a:solidFill>
-              <a:srgbClr val="E3E5E9"/>
-            </a:solidFill>
-          </a:ln>
-          <a:effectLst/>
-        </p:spPr>
-        <p:style>
-          <a:lnRef idx="1">
-            <a:schemeClr val="accent1"/>
-          </a:lnRef>
-          <a:fillRef idx="3">
-            <a:schemeClr val="accent1"/>
-          </a:fillRef>
-          <a:effectRef idx="2">
-            <a:schemeClr val="accent1"/>
-          </a:effectRef>
-          <a:fontRef idx="minor">
-            <a:schemeClr val="lt1"/>
-          </a:fontRef>
-        </p:style>
-        <p:txBody>
-          <a:bodyPr rtlCol="0" anchor="ctr" wrap="square" lIns="45720" rIns="45720"/>
-          <a:lstStyle/>
-          <a:p>
-            <a:pPr algn="ctr">
-              <a:defRPr sz="3400" b="1">
-                <a:solidFill>
-                  <a:srgbClr val="6D28D9"/>
-                </a:solidFill>
-              </a:defRPr>
-            </a:pPr>
-            <a:r>
-              <a:t>9</a:t>
-            </a:r>
-          </a:p>
-          <a:p>
-            <a:pPr algn="ctr">
-              <a:defRPr sz="1200">
-                <a:solidFill>
-                  <a:srgbClr val="1C1E21"/>
-                </a:solidFill>
-              </a:defRPr>
-            </a:pPr>
-            <a:r>
-              <a:t>external integrations</a:t>
-            </a:r>
-          </a:p>
-        </p:txBody>
-      </p:sp>
-      <p:sp>
-        <p:nvSpPr>
-          <p:cNvPr id="9" name="Rounded Rectangle 8"/>
-          <p:cNvSpPr/>
-          <p:nvPr/>
-        </p:nvSpPr>
-        <p:spPr>
-          <a:xfrm>
-            <a:off x="457200" y="3474720"/>
-            <a:ext cx="2651760" cy="1554480"/>
-          </a:xfrm>
-          <a:prstGeom prst="roundRect">
-            <a:avLst/>
-          </a:prstGeom>
-          <a:solidFill>
-            <a:srgbClr val="F3EEFB"/>
-          </a:solidFill>
-          <a:ln w="15875">
-            <a:solidFill>
-              <a:srgbClr val="E3E5E9"/>
-            </a:solidFill>
-          </a:ln>
-          <a:effectLst/>
-        </p:spPr>
-        <p:style>
-          <a:lnRef idx="1">
-            <a:schemeClr val="accent1"/>
-          </a:lnRef>
-          <a:fillRef idx="3">
-            <a:schemeClr val="accent1"/>
-          </a:fillRef>
-          <a:effectRef idx="2">
-            <a:schemeClr val="accent1"/>
-          </a:effectRef>
-          <a:fontRef idx="minor">
-            <a:schemeClr val="lt1"/>
-          </a:fontRef>
-        </p:style>
-        <p:txBody>
-          <a:bodyPr rtlCol="0" anchor="ctr" wrap="square" lIns="45720" rIns="45720"/>
-          <a:lstStyle/>
-          <a:p>
-            <a:pPr algn="ctr">
-              <a:defRPr sz="3400" b="1">
-                <a:solidFill>
-                  <a:srgbClr val="6D28D9"/>
-                </a:solidFill>
-              </a:defRPr>
-            </a:pPr>
-            <a:r>
-              <a:t>36</a:t>
-            </a:r>
-          </a:p>
-          <a:p>
-            <a:pPr algn="ctr">
-              <a:defRPr sz="1200">
-                <a:solidFill>
-                  <a:srgbClr val="1C1E21"/>
-                </a:solidFill>
-              </a:defRPr>
-            </a:pPr>
-            <a:r>
-              <a:t>static check IDs</a:t>
-            </a:r>
-            <a:br/>
-            <a:r>
-              <a:t>across 14 YAML catalogs</a:t>
-            </a:r>
-          </a:p>
-        </p:txBody>
-      </p:sp>
-      <p:sp>
-        <p:nvSpPr>
-          <p:cNvPr id="10" name="Rounded Rectangle 9"/>
-          <p:cNvSpPr/>
-          <p:nvPr/>
-        </p:nvSpPr>
-        <p:spPr>
-          <a:xfrm>
-            <a:off x="3246120" y="3474720"/>
-            <a:ext cx="2651760" cy="1554480"/>
-          </a:xfrm>
-          <a:prstGeom prst="roundRect">
-            <a:avLst/>
-          </a:prstGeom>
-          <a:solidFill>
-            <a:srgbClr val="F3EEFB"/>
-          </a:solidFill>
-          <a:ln w="15875">
-            <a:solidFill>
-              <a:srgbClr val="E3E5E9"/>
-            </a:solidFill>
-          </a:ln>
-          <a:effectLst/>
-        </p:spPr>
-        <p:style>
-          <a:lnRef idx="1">
-            <a:schemeClr val="accent1"/>
-          </a:lnRef>
-          <a:fillRef idx="3">
-            <a:schemeClr val="accent1"/>
-          </a:fillRef>
-          <a:effectRef idx="2">
-            <a:schemeClr val="accent1"/>
-          </a:effectRef>
-          <a:fontRef idx="minor">
-            <a:schemeClr val="lt1"/>
-          </a:fontRef>
-        </p:style>
-        <p:txBody>
-          <a:bodyPr rtlCol="0" anchor="ctr" wrap="square" lIns="45720" rIns="45720"/>
-          <a:lstStyle/>
-          <a:p>
-            <a:pPr algn="ctr">
-              <a:defRPr sz="3400" b="1">
-                <a:solidFill>
-                  <a:srgbClr val="6D28D9"/>
-                </a:solidFill>
-              </a:defRPr>
-            </a:pPr>
-            <a:r>
-              <a:t>34</a:t>
-            </a:r>
-          </a:p>
-          <a:p>
-            <a:pPr algn="ctr">
-              <a:defRPr sz="1200">
-                <a:solidFill>
-                  <a:srgbClr val="1C1E21"/>
-                </a:solidFill>
-              </a:defRPr>
-            </a:pPr>
-            <a:r>
-              <a:t>Alembic migrations</a:t>
-            </a:r>
-          </a:p>
-        </p:txBody>
-      </p:sp>
-      <p:sp>
-        <p:nvSpPr>
-          <p:cNvPr id="11" name="Rounded Rectangle 10"/>
-          <p:cNvSpPr/>
-          <p:nvPr/>
-        </p:nvSpPr>
-        <p:spPr>
-          <a:xfrm>
-            <a:off x="6035040" y="3474720"/>
-            <a:ext cx="2651760" cy="1554480"/>
-          </a:xfrm>
-          <a:prstGeom prst="roundRect">
-            <a:avLst/>
-          </a:prstGeom>
-          <a:solidFill>
-            <a:srgbClr val="F3EEFB"/>
-          </a:solidFill>
-          <a:ln w="15875">
-            <a:solidFill>
-              <a:srgbClr val="E3E5E9"/>
-            </a:solidFill>
-          </a:ln>
-          <a:effectLst/>
-        </p:spPr>
-        <p:style>
-          <a:lnRef idx="1">
-            <a:schemeClr val="accent1"/>
-          </a:lnRef>
-          <a:fillRef idx="3">
-            <a:schemeClr val="accent1"/>
-          </a:fillRef>
-          <a:effectRef idx="2">
-            <a:schemeClr val="accent1"/>
-          </a:effectRef>
-          <a:fontRef idx="minor">
-            <a:schemeClr val="lt1"/>
-          </a:fontRef>
-        </p:style>
-        <p:txBody>
-          <a:bodyPr rtlCol="0" anchor="ctr" wrap="square" lIns="45720" rIns="45720"/>
-          <a:lstStyle/>
-          <a:p>
-            <a:pPr algn="ctr">
-              <a:defRPr sz="3400" b="1">
-                <a:solidFill>
-                  <a:srgbClr val="6D28D9"/>
-                </a:solidFill>
-              </a:defRPr>
-            </a:pPr>
-            <a:r>
-              <a:t>20×4</a:t>
-            </a:r>
-          </a:p>
-          <a:p>
-            <a:pPr algn="ctr">
-              <a:defRPr sz="1200">
-                <a:solidFill>
-                  <a:srgbClr val="1C1E21"/>
-                </a:solidFill>
-              </a:defRPr>
-            </a:pPr>
-            <a:r>
-              <a:t>RBAC resources × actions</a:t>
-            </a:r>
-          </a:p>
-        </p:txBody>
-      </p:sp>
-      <p:sp>
-        <p:nvSpPr>
-          <p:cNvPr id="12" name="Rounded Rectangle 11"/>
-          <p:cNvSpPr/>
-          <p:nvPr/>
-        </p:nvSpPr>
-        <p:spPr>
-          <a:xfrm>
-            <a:off x="8823960" y="3474720"/>
-            <a:ext cx="2651760" cy="1554480"/>
-          </a:xfrm>
-          <a:prstGeom prst="roundRect">
-            <a:avLst/>
-          </a:prstGeom>
-          <a:solidFill>
-            <a:srgbClr val="F3EEFB"/>
-          </a:solidFill>
-          <a:ln w="15875">
-            <a:solidFill>
-              <a:srgbClr val="E3E5E9"/>
-            </a:solidFill>
-          </a:ln>
-          <a:effectLst/>
-        </p:spPr>
-        <p:style>
-          <a:lnRef idx="1">
-            <a:schemeClr val="accent1"/>
-          </a:lnRef>
-          <a:fillRef idx="3">
-            <a:schemeClr val="accent1"/>
-          </a:fillRef>
-          <a:effectRef idx="2">
-            <a:schemeClr val="accent1"/>
-          </a:effectRef>
-          <a:fontRef idx="minor">
-            <a:schemeClr val="lt1"/>
-          </a:fontRef>
-        </p:style>
-        <p:txBody>
-          <a:bodyPr rtlCol="0" anchor="ctr" wrap="square" lIns="45720" rIns="45720"/>
-          <a:lstStyle/>
-          <a:p>
-            <a:pPr algn="ctr">
-              <a:defRPr sz="3400" b="1">
-                <a:solidFill>
-                  <a:srgbClr val="6D28D9"/>
-                </a:solidFill>
-              </a:defRPr>
-            </a:pPr>
-            <a:r>
-              <a:t>617</a:t>
-            </a:r>
-          </a:p>
-          <a:p>
-            <a:pPr algn="ctr">
-              <a:defRPr sz="1200">
-                <a:solidFill>
-                  <a:srgbClr val="1C1E21"/>
-                </a:solidFill>
-              </a:defRPr>
-            </a:pPr>
-            <a:r>
-              <a:t>tests across 111 files</a:t>
-            </a:r>
-          </a:p>
-        </p:txBody>
-      </p:sp>
-      <p:sp>
-        <p:nvSpPr>
-          <p:cNvPr id="13" name="TextBox 12"/>
+              <a:t>Deployment</a:t>
+            </a:r>
+          </a:p>
+        </p:txBody>
+      </p:sp>
+      <p:pic>
+        <p:nvPicPr>
+          <p:cNvPr id="5" name="Picture 4" descr="06_deployment_topology.png"/>
+          <p:cNvPicPr>
+            <a:picLocks noChangeAspect="1"/>
+          </p:cNvPicPr>
+          <p:nvPr/>
+        </p:nvPicPr>
+        <p:blipFill>
+          <a:blip r:embed="rId2"/>
+          <a:stretch>
+            <a:fillRect/>
+          </a:stretch>
+        </p:blipFill>
+        <p:spPr>
+          <a:xfrm>
+            <a:off x="457200" y="1234440"/>
+            <a:ext cx="12533854" cy="4892040"/>
+          </a:xfrm>
+          <a:prstGeom prst="rect">
+            <a:avLst/>
+          </a:prstGeom>
+        </p:spPr>
+      </p:pic>
+      <p:sp>
+        <p:nvSpPr>
+          <p:cNvPr id="6" name="TextBox 5"/>
           <p:cNvSpPr txBox="1"/>
           <p:nvPr/>
         </p:nvSpPr>
         <p:spPr>
           <a:xfrm>
-            <a:off x="548640" y="6035040"/>
-            <a:ext cx="11094415" cy="457200"/>
+            <a:off x="548640" y="6172200"/>
+            <a:ext cx="11094415" cy="365760"/>
           </a:xfrm>
           <a:prstGeom prst="rect">
             <a:avLst/>
@@ -6316,21 +5796,21 @@
           <a:lstStyle/>
           <a:p>
             <a:pPr algn="ctr">
-              <a:defRPr i="1" sz="1200">
+              <a:defRPr sz="1100" i="1">
                 <a:solidFill>
                   <a:srgbClr val="5B6270"/>
                 </a:solidFill>
               </a:defRPr>
             </a:pPr>
             <a:r>
-              <a:t>Verified by direct code inspection and by running the test collector — not estimated.</a:t>
-            </a:r>
-          </a:p>
-        </p:txBody>
-      </p:sp>
-      <p:sp>
-        <p:nvSpPr>
-          <p:cNvPr id="14" name="TextBox 13"/>
+              <a:t>docker compose up — verified end-to-end on a fresh environment; migrations run automatically; works identically on macOS, Linux, and Windows.</a:t>
+            </a:r>
+          </a:p>
+        </p:txBody>
+      </p:sp>
+      <p:sp>
+        <p:nvSpPr>
+          <p:cNvPr id="7" name="TextBox 6"/>
           <p:cNvSpPr txBox="1"/>
           <p:nvPr/>
         </p:nvSpPr>
@@ -6358,14 +5838,14 @@
               </a:defRPr>
             </a:pPr>
             <a:r>
-              <a:t>17</a:t>
-            </a:r>
-          </a:p>
-        </p:txBody>
-      </p:sp>
-      <p:sp>
-        <p:nvSpPr>
-          <p:cNvPr id="15" name="TextBox 14"/>
+              <a:t>16</a:t>
+            </a:r>
+          </a:p>
+        </p:txBody>
+      </p:sp>
+      <p:sp>
+        <p:nvSpPr>
+          <p:cNvPr id="8" name="TextBox 7"/>
           <p:cNvSpPr txBox="1"/>
           <p:nvPr/>
         </p:nvSpPr>
@@ -6498,7 +5978,7 @@
               </a:defRPr>
             </a:pPr>
             <a:r>
-              <a:t>AN HONEST LOOK</a:t>
+              <a:t>BY THE NUMBERS</a:t>
             </a:r>
           </a:p>
         </p:txBody>
@@ -6534,7 +6014,7 @@
               </a:defRPr>
             </a:pPr>
             <a:r>
-              <a:t>Spec vs. reality</a:t>
+              <a:t>The codebase, counted — not estimated</a:t>
             </a:r>
           </a:p>
         </p:txBody>
@@ -6547,8 +6027,8 @@
         </p:nvSpPr>
         <p:spPr>
           <a:xfrm>
-            <a:off x="548640" y="1554480"/>
-            <a:ext cx="5394960" cy="4480560"/>
+            <a:off x="457200" y="1737360"/>
+            <a:ext cx="2651760" cy="1554480"/>
           </a:xfrm>
           <a:prstGeom prst="roundRect">
             <a:avLst/>
@@ -6558,7 +6038,7 @@
           </a:solidFill>
           <a:ln w="15875">
             <a:solidFill>
-              <a:srgbClr val="6D28D9"/>
+              <a:srgbClr val="E3E5E9"/>
             </a:solidFill>
           </a:ln>
           <a:effectLst/>
@@ -6582,12 +6062,31 @@
           <a:lstStyle/>
           <a:p>
             <a:pPr algn="ctr">
-              <a:defRPr sz="1300" b="0">
+              <a:defRPr sz="3400" b="1">
+                <a:solidFill>
+                  <a:srgbClr val="6D28D9"/>
+                </a:solidFill>
+              </a:defRPr>
+            </a:pPr>
+            <a:r>
+              <a:t>52</a:t>
+            </a:r>
+          </a:p>
+          <a:p>
+            <a:pPr algn="ctr">
+              <a:defRPr sz="1200">
                 <a:solidFill>
                   <a:srgbClr val="1C1E21"/>
                 </a:solidFill>
               </a:defRPr>
             </a:pPr>
+            <a:r>
+              <a:t>agent files</a:t>
+            </a:r>
+            <a:br/>
+            <a:r>
+              <a:t>(31 wired into the scan graph)</a:t>
+            </a:r>
           </a:p>
         </p:txBody>
       </p:sp>
@@ -6599,8 +6098,8 @@
         </p:nvSpPr>
         <p:spPr>
           <a:xfrm>
-            <a:off x="6217920" y="1554480"/>
-            <a:ext cx="5394960" cy="4480560"/>
+            <a:off x="3246120" y="1737360"/>
+            <a:ext cx="2651760" cy="1554480"/>
           </a:xfrm>
           <a:prstGeom prst="roundRect">
             <a:avLst/>
@@ -6610,7 +6109,7 @@
           </a:solidFill>
           <a:ln w="15875">
             <a:solidFill>
-              <a:srgbClr val="6D28D9"/>
+              <a:srgbClr val="E3E5E9"/>
             </a:solidFill>
           </a:ln>
           <a:effectLst/>
@@ -6634,227 +6133,446 @@
           <a:lstStyle/>
           <a:p>
             <a:pPr algn="ctr">
-              <a:defRPr sz="1300" b="0">
+              <a:defRPr sz="3400" b="1">
+                <a:solidFill>
+                  <a:srgbClr val="6D28D9"/>
+                </a:solidFill>
+              </a:defRPr>
+            </a:pPr>
+            <a:r>
+              <a:t>30</a:t>
+            </a:r>
+          </a:p>
+          <a:p>
+            <a:pPr algn="ctr">
+              <a:defRPr sz="1200">
                 <a:solidFill>
                   <a:srgbClr val="1C1E21"/>
                 </a:solidFill>
               </a:defRPr>
             </a:pPr>
-          </a:p>
-        </p:txBody>
-      </p:sp>
-      <p:sp>
-        <p:nvSpPr>
-          <p:cNvPr id="7" name="TextBox 6"/>
+            <a:r>
+              <a:t>API route modules</a:t>
+            </a:r>
+          </a:p>
+        </p:txBody>
+      </p:sp>
+      <p:sp>
+        <p:nvSpPr>
+          <p:cNvPr id="7" name="Rounded Rectangle 6"/>
+          <p:cNvSpPr/>
+          <p:nvPr/>
+        </p:nvSpPr>
+        <p:spPr>
+          <a:xfrm>
+            <a:off x="6035040" y="1737360"/>
+            <a:ext cx="2651760" cy="1554480"/>
+          </a:xfrm>
+          <a:prstGeom prst="roundRect">
+            <a:avLst/>
+          </a:prstGeom>
+          <a:solidFill>
+            <a:srgbClr val="F3EEFB"/>
+          </a:solidFill>
+          <a:ln w="15875">
+            <a:solidFill>
+              <a:srgbClr val="E3E5E9"/>
+            </a:solidFill>
+          </a:ln>
+          <a:effectLst/>
+        </p:spPr>
+        <p:style>
+          <a:lnRef idx="1">
+            <a:schemeClr val="accent1"/>
+          </a:lnRef>
+          <a:fillRef idx="3">
+            <a:schemeClr val="accent1"/>
+          </a:fillRef>
+          <a:effectRef idx="2">
+            <a:schemeClr val="accent1"/>
+          </a:effectRef>
+          <a:fontRef idx="minor">
+            <a:schemeClr val="lt1"/>
+          </a:fontRef>
+        </p:style>
+        <p:txBody>
+          <a:bodyPr rtlCol="0" anchor="ctr" wrap="square" lIns="45720" rIns="45720"/>
+          <a:lstStyle/>
+          <a:p>
+            <a:pPr algn="ctr">
+              <a:defRPr sz="3400" b="1">
+                <a:solidFill>
+                  <a:srgbClr val="6D28D9"/>
+                </a:solidFill>
+              </a:defRPr>
+            </a:pPr>
+            <a:r>
+              <a:t>~34</a:t>
+            </a:r>
+          </a:p>
+          <a:p>
+            <a:pPr algn="ctr">
+              <a:defRPr sz="1200">
+                <a:solidFill>
+                  <a:srgbClr val="1C1E21"/>
+                </a:solidFill>
+              </a:defRPr>
+            </a:pPr>
+            <a:r>
+              <a:t>persisted data models</a:t>
+            </a:r>
+          </a:p>
+        </p:txBody>
+      </p:sp>
+      <p:sp>
+        <p:nvSpPr>
+          <p:cNvPr id="8" name="Rounded Rectangle 7"/>
+          <p:cNvSpPr/>
+          <p:nvPr/>
+        </p:nvSpPr>
+        <p:spPr>
+          <a:xfrm>
+            <a:off x="8823960" y="1737360"/>
+            <a:ext cx="2651760" cy="1554480"/>
+          </a:xfrm>
+          <a:prstGeom prst="roundRect">
+            <a:avLst/>
+          </a:prstGeom>
+          <a:solidFill>
+            <a:srgbClr val="F3EEFB"/>
+          </a:solidFill>
+          <a:ln w="15875">
+            <a:solidFill>
+              <a:srgbClr val="E3E5E9"/>
+            </a:solidFill>
+          </a:ln>
+          <a:effectLst/>
+        </p:spPr>
+        <p:style>
+          <a:lnRef idx="1">
+            <a:schemeClr val="accent1"/>
+          </a:lnRef>
+          <a:fillRef idx="3">
+            <a:schemeClr val="accent1"/>
+          </a:fillRef>
+          <a:effectRef idx="2">
+            <a:schemeClr val="accent1"/>
+          </a:effectRef>
+          <a:fontRef idx="minor">
+            <a:schemeClr val="lt1"/>
+          </a:fontRef>
+        </p:style>
+        <p:txBody>
+          <a:bodyPr rtlCol="0" anchor="ctr" wrap="square" lIns="45720" rIns="45720"/>
+          <a:lstStyle/>
+          <a:p>
+            <a:pPr algn="ctr">
+              <a:defRPr sz="3400" b="1">
+                <a:solidFill>
+                  <a:srgbClr val="6D28D9"/>
+                </a:solidFill>
+              </a:defRPr>
+            </a:pPr>
+            <a:r>
+              <a:t>10</a:t>
+            </a:r>
+          </a:p>
+          <a:p>
+            <a:pPr algn="ctr">
+              <a:defRPr sz="1200">
+                <a:solidFill>
+                  <a:srgbClr val="1C1E21"/>
+                </a:solidFill>
+              </a:defRPr>
+            </a:pPr>
+            <a:r>
+              <a:t>external integrations</a:t>
+            </a:r>
+          </a:p>
+        </p:txBody>
+      </p:sp>
+      <p:sp>
+        <p:nvSpPr>
+          <p:cNvPr id="9" name="Rounded Rectangle 8"/>
+          <p:cNvSpPr/>
+          <p:nvPr/>
+        </p:nvSpPr>
+        <p:spPr>
+          <a:xfrm>
+            <a:off x="457200" y="3474720"/>
+            <a:ext cx="2651760" cy="1554480"/>
+          </a:xfrm>
+          <a:prstGeom prst="roundRect">
+            <a:avLst/>
+          </a:prstGeom>
+          <a:solidFill>
+            <a:srgbClr val="F3EEFB"/>
+          </a:solidFill>
+          <a:ln w="15875">
+            <a:solidFill>
+              <a:srgbClr val="E3E5E9"/>
+            </a:solidFill>
+          </a:ln>
+          <a:effectLst/>
+        </p:spPr>
+        <p:style>
+          <a:lnRef idx="1">
+            <a:schemeClr val="accent1"/>
+          </a:lnRef>
+          <a:fillRef idx="3">
+            <a:schemeClr val="accent1"/>
+          </a:fillRef>
+          <a:effectRef idx="2">
+            <a:schemeClr val="accent1"/>
+          </a:effectRef>
+          <a:fontRef idx="minor">
+            <a:schemeClr val="lt1"/>
+          </a:fontRef>
+        </p:style>
+        <p:txBody>
+          <a:bodyPr rtlCol="0" anchor="ctr" wrap="square" lIns="45720" rIns="45720"/>
+          <a:lstStyle/>
+          <a:p>
+            <a:pPr algn="ctr">
+              <a:defRPr sz="3400" b="1">
+                <a:solidFill>
+                  <a:srgbClr val="6D28D9"/>
+                </a:solidFill>
+              </a:defRPr>
+            </a:pPr>
+            <a:r>
+              <a:t>39</a:t>
+            </a:r>
+          </a:p>
+          <a:p>
+            <a:pPr algn="ctr">
+              <a:defRPr sz="1200">
+                <a:solidFill>
+                  <a:srgbClr val="1C1E21"/>
+                </a:solidFill>
+              </a:defRPr>
+            </a:pPr>
+            <a:r>
+              <a:t>static check IDs</a:t>
+            </a:r>
+            <a:br/>
+            <a:r>
+              <a:t>across 18 YAML catalogs</a:t>
+            </a:r>
+          </a:p>
+        </p:txBody>
+      </p:sp>
+      <p:sp>
+        <p:nvSpPr>
+          <p:cNvPr id="10" name="Rounded Rectangle 9"/>
+          <p:cNvSpPr/>
+          <p:nvPr/>
+        </p:nvSpPr>
+        <p:spPr>
+          <a:xfrm>
+            <a:off x="3246120" y="3474720"/>
+            <a:ext cx="2651760" cy="1554480"/>
+          </a:xfrm>
+          <a:prstGeom prst="roundRect">
+            <a:avLst/>
+          </a:prstGeom>
+          <a:solidFill>
+            <a:srgbClr val="F3EEFB"/>
+          </a:solidFill>
+          <a:ln w="15875">
+            <a:solidFill>
+              <a:srgbClr val="E3E5E9"/>
+            </a:solidFill>
+          </a:ln>
+          <a:effectLst/>
+        </p:spPr>
+        <p:style>
+          <a:lnRef idx="1">
+            <a:schemeClr val="accent1"/>
+          </a:lnRef>
+          <a:fillRef idx="3">
+            <a:schemeClr val="accent1"/>
+          </a:fillRef>
+          <a:effectRef idx="2">
+            <a:schemeClr val="accent1"/>
+          </a:effectRef>
+          <a:fontRef idx="minor">
+            <a:schemeClr val="lt1"/>
+          </a:fontRef>
+        </p:style>
+        <p:txBody>
+          <a:bodyPr rtlCol="0" anchor="ctr" wrap="square" lIns="45720" rIns="45720"/>
+          <a:lstStyle/>
+          <a:p>
+            <a:pPr algn="ctr">
+              <a:defRPr sz="3400" b="1">
+                <a:solidFill>
+                  <a:srgbClr val="6D28D9"/>
+                </a:solidFill>
+              </a:defRPr>
+            </a:pPr>
+            <a:r>
+              <a:t>36</a:t>
+            </a:r>
+          </a:p>
+          <a:p>
+            <a:pPr algn="ctr">
+              <a:defRPr sz="1200">
+                <a:solidFill>
+                  <a:srgbClr val="1C1E21"/>
+                </a:solidFill>
+              </a:defRPr>
+            </a:pPr>
+            <a:r>
+              <a:t>Alembic migrations</a:t>
+            </a:r>
+          </a:p>
+        </p:txBody>
+      </p:sp>
+      <p:sp>
+        <p:nvSpPr>
+          <p:cNvPr id="11" name="Rounded Rectangle 10"/>
+          <p:cNvSpPr/>
+          <p:nvPr/>
+        </p:nvSpPr>
+        <p:spPr>
+          <a:xfrm>
+            <a:off x="6035040" y="3474720"/>
+            <a:ext cx="2651760" cy="1554480"/>
+          </a:xfrm>
+          <a:prstGeom prst="roundRect">
+            <a:avLst/>
+          </a:prstGeom>
+          <a:solidFill>
+            <a:srgbClr val="F3EEFB"/>
+          </a:solidFill>
+          <a:ln w="15875">
+            <a:solidFill>
+              <a:srgbClr val="E3E5E9"/>
+            </a:solidFill>
+          </a:ln>
+          <a:effectLst/>
+        </p:spPr>
+        <p:style>
+          <a:lnRef idx="1">
+            <a:schemeClr val="accent1"/>
+          </a:lnRef>
+          <a:fillRef idx="3">
+            <a:schemeClr val="accent1"/>
+          </a:fillRef>
+          <a:effectRef idx="2">
+            <a:schemeClr val="accent1"/>
+          </a:effectRef>
+          <a:fontRef idx="minor">
+            <a:schemeClr val="lt1"/>
+          </a:fontRef>
+        </p:style>
+        <p:txBody>
+          <a:bodyPr rtlCol="0" anchor="ctr" wrap="square" lIns="45720" rIns="45720"/>
+          <a:lstStyle/>
+          <a:p>
+            <a:pPr algn="ctr">
+              <a:defRPr sz="3400" b="1">
+                <a:solidFill>
+                  <a:srgbClr val="6D28D9"/>
+                </a:solidFill>
+              </a:defRPr>
+            </a:pPr>
+            <a:r>
+              <a:t>20×4</a:t>
+            </a:r>
+          </a:p>
+          <a:p>
+            <a:pPr algn="ctr">
+              <a:defRPr sz="1200">
+                <a:solidFill>
+                  <a:srgbClr val="1C1E21"/>
+                </a:solidFill>
+              </a:defRPr>
+            </a:pPr>
+            <a:r>
+              <a:t>RBAC resources × actions</a:t>
+            </a:r>
+          </a:p>
+        </p:txBody>
+      </p:sp>
+      <p:sp>
+        <p:nvSpPr>
+          <p:cNvPr id="12" name="Rounded Rectangle 11"/>
+          <p:cNvSpPr/>
+          <p:nvPr/>
+        </p:nvSpPr>
+        <p:spPr>
+          <a:xfrm>
+            <a:off x="8823960" y="3474720"/>
+            <a:ext cx="2651760" cy="1554480"/>
+          </a:xfrm>
+          <a:prstGeom prst="roundRect">
+            <a:avLst/>
+          </a:prstGeom>
+          <a:solidFill>
+            <a:srgbClr val="F3EEFB"/>
+          </a:solidFill>
+          <a:ln w="15875">
+            <a:solidFill>
+              <a:srgbClr val="E3E5E9"/>
+            </a:solidFill>
+          </a:ln>
+          <a:effectLst/>
+        </p:spPr>
+        <p:style>
+          <a:lnRef idx="1">
+            <a:schemeClr val="accent1"/>
+          </a:lnRef>
+          <a:fillRef idx="3">
+            <a:schemeClr val="accent1"/>
+          </a:fillRef>
+          <a:effectRef idx="2">
+            <a:schemeClr val="accent1"/>
+          </a:effectRef>
+          <a:fontRef idx="minor">
+            <a:schemeClr val="lt1"/>
+          </a:fontRef>
+        </p:style>
+        <p:txBody>
+          <a:bodyPr rtlCol="0" anchor="ctr" wrap="square" lIns="45720" rIns="45720"/>
+          <a:lstStyle/>
+          <a:p>
+            <a:pPr algn="ctr">
+              <a:defRPr sz="3400" b="1">
+                <a:solidFill>
+                  <a:srgbClr val="6D28D9"/>
+                </a:solidFill>
+              </a:defRPr>
+            </a:pPr>
+            <a:r>
+              <a:t>667</a:t>
+            </a:r>
+          </a:p>
+          <a:p>
+            <a:pPr algn="ctr">
+              <a:defRPr sz="1200">
+                <a:solidFill>
+                  <a:srgbClr val="1C1E21"/>
+                </a:solidFill>
+              </a:defRPr>
+            </a:pPr>
+            <a:r>
+              <a:t>tests across 119 files</a:t>
+            </a:r>
+          </a:p>
+        </p:txBody>
+      </p:sp>
+      <p:sp>
+        <p:nvSpPr>
+          <p:cNvPr id="13" name="TextBox 12"/>
           <p:cNvSpPr txBox="1"/>
           <p:nvPr/>
         </p:nvSpPr>
         <p:spPr>
           <a:xfrm>
-            <a:off x="777240" y="1737360"/>
-            <a:ext cx="4937760" cy="4114800"/>
-          </a:xfrm>
-          <a:prstGeom prst="rect">
-            <a:avLst/>
-          </a:prstGeom>
-          <a:noFill/>
-        </p:spPr>
-        <p:txBody>
-          <a:bodyPr wrap="square">
-            <a:spAutoFit/>
-          </a:bodyPr>
-          <a:lstStyle/>
-          <a:p>
-            <a:pPr>
-              <a:defRPr b="1" sz="1600">
-                <a:solidFill>
-                  <a:srgbClr val="6D28D9"/>
-                </a:solidFill>
-              </a:defRPr>
-            </a:pPr>
-            <a:r>
-              <a:t>Built less than originally specified</a:t>
-            </a:r>
-          </a:p>
-          <a:p>
-            <a:pPr>
-              <a:spcAft>
-                <a:spcPts val="700"/>
-              </a:spcAft>
-              <a:defRPr sz="1300"/>
-            </a:pPr>
-            <a:r>
-              <a:t>•  Pre-scan authorization gate — built, then fully removed</a:t>
-            </a:r>
-          </a:p>
-          <a:p>
-            <a:pPr>
-              <a:spcAft>
-                <a:spcPts val="700"/>
-              </a:spcAft>
-              <a:defRPr sz="1300"/>
-            </a:pPr>
-            <a:r>
-              <a:t>•  Human-in-the-loop approval checkpoints — not built</a:t>
-            </a:r>
-          </a:p>
-          <a:p>
-            <a:pPr>
-              <a:spcAft>
-                <a:spcPts val="700"/>
-              </a:spcAft>
-              <a:defRPr sz="1300"/>
-            </a:pPr>
-            <a:r>
-              <a:t>•  Smart Scan graph-level routing — only one narrow case (SSTI)</a:t>
-            </a:r>
-          </a:p>
-          <a:p>
-            <a:pPr>
-              <a:spcAft>
-                <a:spcPts val="700"/>
-              </a:spcAft>
-              <a:defRPr sz="1300"/>
-            </a:pPr>
-            <a:r>
-              <a:t>•  Per-task-type model routing — built, then reverted (twice)</a:t>
-            </a:r>
-          </a:p>
-          <a:p>
-            <a:pPr>
-              <a:spcAft>
-                <a:spcPts val="700"/>
-              </a:spcAft>
-              <a:defRPr sz="1300"/>
-            </a:pPr>
-            <a:r>
-              <a:t>•  Depth slider (Quick/Standard/Deep) — not built</a:t>
-            </a:r>
-          </a:p>
-          <a:p>
-            <a:pPr>
-              <a:spcAft>
-                <a:spcPts val="700"/>
-              </a:spcAft>
-              <a:defRPr sz="1300"/>
-            </a:pPr>
-            <a:r>
-              <a:t>•  Cross-credential-set result caching — not built</a:t>
-            </a:r>
-          </a:p>
-        </p:txBody>
-      </p:sp>
-      <p:sp>
-        <p:nvSpPr>
-          <p:cNvPr id="8" name="TextBox 7"/>
-          <p:cNvSpPr txBox="1"/>
-          <p:nvPr/>
-        </p:nvSpPr>
-        <p:spPr>
-          <a:xfrm>
-            <a:off x="6446520" y="1737360"/>
-            <a:ext cx="4937760" cy="4114800"/>
-          </a:xfrm>
-          <a:prstGeom prst="rect">
-            <a:avLst/>
-          </a:prstGeom>
-          <a:noFill/>
-        </p:spPr>
-        <p:txBody>
-          <a:bodyPr wrap="square">
-            <a:spAutoFit/>
-          </a:bodyPr>
-          <a:lstStyle/>
-          <a:p>
-            <a:pPr>
-              <a:defRPr b="1" sz="1600">
-                <a:solidFill>
-                  <a:srgbClr val="6D28D9"/>
-                </a:solidFill>
-              </a:defRPr>
-            </a:pPr>
-            <a:r>
-              <a:t>Built beyond what was specified</a:t>
-            </a:r>
-          </a:p>
-          <a:p>
-            <a:pPr>
-              <a:spcAft>
-                <a:spcPts val="700"/>
-              </a:spcAft>
-              <a:defRPr sz="1300"/>
-            </a:pPr>
-            <a:r>
-              <a:t>•  VGS integration — spec asked for webhook push only; shipped three modes (webhook, native workspace, per-scan-run export)</a:t>
-            </a:r>
-          </a:p>
-          <a:p>
-            <a:pPr>
-              <a:spcAft>
-                <a:spcPts val="700"/>
-              </a:spcAft>
-              <a:defRPr sz="1300"/>
-            </a:pPr>
-            <a:r>
-              <a:t>•  Image-polyglot file-upload bypass technique</a:t>
-            </a:r>
-          </a:p>
-          <a:p>
-            <a:pPr>
-              <a:spcAft>
-                <a:spcPts val="700"/>
-              </a:spcAft>
-              <a:defRPr sz="1300"/>
-            </a:pPr>
-            <a:r>
-              <a:t>•  "Load from PortSwigger" scraper integration</a:t>
-            </a:r>
-          </a:p>
-          <a:p>
-            <a:pPr>
-              <a:spcAft>
-                <a:spcPts val="700"/>
-              </a:spcAft>
-              <a:defRPr sz="1300"/>
-            </a:pPr>
-            <a:r>
-              <a:t>•  UI-only, per-org default AI provider configuration</a:t>
-            </a:r>
-          </a:p>
-          <a:p>
-            <a:pPr>
-              <a:spcAft>
-                <a:spcPts val="700"/>
-              </a:spcAft>
-              <a:defRPr sz="1300"/>
-            </a:pPr>
-            <a:r>
-              <a:t>•  A genuine conversational Microsoft Teams bot</a:t>
-            </a:r>
-          </a:p>
-          <a:p>
-            <a:pPr>
-              <a:spcAft>
-                <a:spcPts val="700"/>
-              </a:spcAft>
-              <a:defRPr sz="1300"/>
-            </a:pPr>
-            <a:r>
-              <a:t>•  Two independent ways to record a login macro — in-browser VNC stream and a standalone browser extension</a:t>
-            </a:r>
-          </a:p>
-        </p:txBody>
-      </p:sp>
-      <p:sp>
-        <p:nvSpPr>
-          <p:cNvPr id="9" name="TextBox 8"/>
-          <p:cNvSpPr txBox="1"/>
-          <p:nvPr/>
-        </p:nvSpPr>
-        <p:spPr>
-          <a:xfrm>
-            <a:off x="11094415" y="6400800"/>
-            <a:ext cx="822960" cy="320040"/>
+            <a:off x="548640" y="6035040"/>
+            <a:ext cx="11094415" cy="457200"/>
           </a:xfrm>
           <a:prstGeom prst="rect">
             <a:avLst/>
@@ -6867,6 +6585,41 @@
           </a:bodyPr>
           <a:lstStyle/>
           <a:p>
+            <a:pPr algn="ctr">
+              <a:defRPr i="1" sz="1200">
+                <a:solidFill>
+                  <a:srgbClr val="5B6270"/>
+                </a:solidFill>
+              </a:defRPr>
+            </a:pPr>
+            <a:r>
+              <a:t>Verified by direct code inspection and by running the test collector — not estimated.</a:t>
+            </a:r>
+          </a:p>
+        </p:txBody>
+      </p:sp>
+      <p:sp>
+        <p:nvSpPr>
+          <p:cNvPr id="14" name="TextBox 13"/>
+          <p:cNvSpPr txBox="1"/>
+          <p:nvPr/>
+        </p:nvSpPr>
+        <p:spPr>
+          <a:xfrm>
+            <a:off x="11094415" y="6400800"/>
+            <a:ext cx="822960" cy="320040"/>
+          </a:xfrm>
+          <a:prstGeom prst="rect">
+            <a:avLst/>
+          </a:prstGeom>
+          <a:noFill/>
+        </p:spPr>
+        <p:txBody>
+          <a:bodyPr wrap="none">
+            <a:spAutoFit/>
+          </a:bodyPr>
+          <a:lstStyle/>
+          <a:p>
             <a:pPr algn="r">
               <a:defRPr sz="1000">
                 <a:solidFill>
@@ -6875,14 +6628,14 @@
               </a:defRPr>
             </a:pPr>
             <a:r>
-              <a:t>18</a:t>
-            </a:r>
-          </a:p>
-        </p:txBody>
-      </p:sp>
-      <p:sp>
-        <p:nvSpPr>
-          <p:cNvPr id="10" name="TextBox 9"/>
+              <a:t>17</a:t>
+            </a:r>
+          </a:p>
+        </p:txBody>
+      </p:sp>
+      <p:sp>
+        <p:nvSpPr>
+          <p:cNvPr id="15" name="TextBox 14"/>
           <p:cNvSpPr txBox="1"/>
           <p:nvPr/>
         </p:nvSpPr>
@@ -7015,7 +6768,7 @@
               </a:defRPr>
             </a:pPr>
             <a:r>
-              <a:t>QUALITY</a:t>
+              <a:t>AN HONEST LOOK</a:t>
             </a:r>
           </a:p>
         </p:txBody>
@@ -7051,21 +6804,125 @@
               </a:defRPr>
             </a:pPr>
             <a:r>
-              <a:t>Testing discipline</a:t>
-            </a:r>
-          </a:p>
-        </p:txBody>
-      </p:sp>
-      <p:sp>
-        <p:nvSpPr>
-          <p:cNvPr id="5" name="TextBox 4"/>
+              <a:t>Spec vs. reality</a:t>
+            </a:r>
+          </a:p>
+        </p:txBody>
+      </p:sp>
+      <p:sp>
+        <p:nvSpPr>
+          <p:cNvPr id="5" name="Rounded Rectangle 4"/>
+          <p:cNvSpPr/>
+          <p:nvPr/>
+        </p:nvSpPr>
+        <p:spPr>
+          <a:xfrm>
+            <a:off x="548640" y="1554480"/>
+            <a:ext cx="5394960" cy="4480560"/>
+          </a:xfrm>
+          <a:prstGeom prst="roundRect">
+            <a:avLst/>
+          </a:prstGeom>
+          <a:solidFill>
+            <a:srgbClr val="F3EEFB"/>
+          </a:solidFill>
+          <a:ln w="15875">
+            <a:solidFill>
+              <a:srgbClr val="6D28D9"/>
+            </a:solidFill>
+          </a:ln>
+          <a:effectLst/>
+        </p:spPr>
+        <p:style>
+          <a:lnRef idx="1">
+            <a:schemeClr val="accent1"/>
+          </a:lnRef>
+          <a:fillRef idx="3">
+            <a:schemeClr val="accent1"/>
+          </a:fillRef>
+          <a:effectRef idx="2">
+            <a:schemeClr val="accent1"/>
+          </a:effectRef>
+          <a:fontRef idx="minor">
+            <a:schemeClr val="lt1"/>
+          </a:fontRef>
+        </p:style>
+        <p:txBody>
+          <a:bodyPr rtlCol="0" anchor="ctr" wrap="square" lIns="45720" rIns="45720"/>
+          <a:lstStyle/>
+          <a:p>
+            <a:pPr algn="ctr">
+              <a:defRPr sz="1300" b="0">
+                <a:solidFill>
+                  <a:srgbClr val="1C1E21"/>
+                </a:solidFill>
+              </a:defRPr>
+            </a:pPr>
+          </a:p>
+        </p:txBody>
+      </p:sp>
+      <p:sp>
+        <p:nvSpPr>
+          <p:cNvPr id="6" name="Rounded Rectangle 5"/>
+          <p:cNvSpPr/>
+          <p:nvPr/>
+        </p:nvSpPr>
+        <p:spPr>
+          <a:xfrm>
+            <a:off x="6217920" y="1554480"/>
+            <a:ext cx="5394960" cy="4480560"/>
+          </a:xfrm>
+          <a:prstGeom prst="roundRect">
+            <a:avLst/>
+          </a:prstGeom>
+          <a:solidFill>
+            <a:srgbClr val="F3EEFB"/>
+          </a:solidFill>
+          <a:ln w="15875">
+            <a:solidFill>
+              <a:srgbClr val="6D28D9"/>
+            </a:solidFill>
+          </a:ln>
+          <a:effectLst/>
+        </p:spPr>
+        <p:style>
+          <a:lnRef idx="1">
+            <a:schemeClr val="accent1"/>
+          </a:lnRef>
+          <a:fillRef idx="3">
+            <a:schemeClr val="accent1"/>
+          </a:fillRef>
+          <a:effectRef idx="2">
+            <a:schemeClr val="accent1"/>
+          </a:effectRef>
+          <a:fontRef idx="minor">
+            <a:schemeClr val="lt1"/>
+          </a:fontRef>
+        </p:style>
+        <p:txBody>
+          <a:bodyPr rtlCol="0" anchor="ctr" wrap="square" lIns="45720" rIns="45720"/>
+          <a:lstStyle/>
+          <a:p>
+            <a:pPr algn="ctr">
+              <a:defRPr sz="1300" b="0">
+                <a:solidFill>
+                  <a:srgbClr val="1C1E21"/>
+                </a:solidFill>
+              </a:defRPr>
+            </a:pPr>
+          </a:p>
+        </p:txBody>
+      </p:sp>
+      <p:sp>
+        <p:nvSpPr>
+          <p:cNvPr id="7" name="TextBox 6"/>
           <p:cNvSpPr txBox="1"/>
           <p:nvPr/>
         </p:nvSpPr>
         <p:spPr>
           <a:xfrm>
-            <a:off x="640080" y="1645920"/>
-            <a:ext cx="10911535" cy="4572000"/>
+            <a:off x="777240" y="1737360"/>
+            <a:ext cx="4937760" cy="4114800"/>
           </a:xfrm>
           <a:prstGeom prst="rect">
             <a:avLst/>
@@ -7079,81 +6936,188 @@
           <a:lstStyle/>
           <a:p>
             <a:pPr>
-              <a:lnSpc>
-                <a:spcPct val="125000"/>
-              </a:lnSpc>
+              <a:defRPr b="1" sz="1600">
+                <a:solidFill>
+                  <a:srgbClr val="6D28D9"/>
+                </a:solidFill>
+              </a:defRPr>
+            </a:pPr>
+            <a:r>
+              <a:t>Built less than originally specified</a:t>
+            </a:r>
+          </a:p>
+          <a:p>
+            <a:pPr>
               <a:spcAft>
-                <a:spcPts val="1000"/>
+                <a:spcPts val="700"/>
               </a:spcAft>
-              <a:defRPr sz="1800" b="0">
-                <a:solidFill>
-                  <a:srgbClr val="1C1E21"/>
-                </a:solidFill>
-              </a:defRPr>
-            </a:pPr>
-            <a:r>
-              <a:t>•  617 tests across 111 files, confirmed via pytest --collect-only — real fixtures over mocks: local HTTP servers, a real headless browser, real cryptographic round-trips</a:t>
-            </a:r>
-          </a:p>
-          <a:p>
-            <a:pPr>
-              <a:lnSpc>
-                <a:spcPct val="125000"/>
-              </a:lnSpc>
+              <a:defRPr sz="1300"/>
+            </a:pPr>
+            <a:r>
+              <a:t>•  Pre-scan authorization gate — built, then fully removed</a:t>
+            </a:r>
+          </a:p>
+          <a:p>
+            <a:pPr>
               <a:spcAft>
-                <a:spcPts val="1000"/>
+                <a:spcPts val="700"/>
               </a:spcAft>
-              <a:defRPr sz="1800" b="0">
-                <a:solidFill>
-                  <a:srgbClr val="1C1E21"/>
-                </a:solidFill>
-              </a:defRPr>
-            </a:pPr>
-            <a:r>
-              <a:t>•  Live-validated against OWASP Juice Shop and a real DVWA instance across all four security levels</a:t>
-            </a:r>
-          </a:p>
-          <a:p>
-            <a:pPr>
-              <a:lnSpc>
-                <a:spcPct val="125000"/>
-              </a:lnSpc>
+              <a:defRPr sz="1300"/>
+            </a:pPr>
+            <a:r>
+              <a:t>•  Human-in-the-loop approval checkpoints — not built</a:t>
+            </a:r>
+          </a:p>
+          <a:p>
+            <a:pPr>
               <a:spcAft>
-                <a:spcPts val="1000"/>
+                <a:spcPts val="700"/>
               </a:spcAft>
-              <a:defRPr sz="1800" b="0">
-                <a:solidFill>
-                  <a:srgbClr val="1C1E21"/>
-                </a:solidFill>
-              </a:defRPr>
-            </a:pPr>
-            <a:r>
-              <a:t>•  DVWA "Impossible" correctly produces zero injection/XSS findings; "Medium" correctly yields confirmed SQLi and command injection through the full pipeline</a:t>
-            </a:r>
-          </a:p>
-          <a:p>
-            <a:pPr>
-              <a:lnSpc>
-                <a:spcPct val="125000"/>
-              </a:lnSpc>
+              <a:defRPr sz="1300"/>
+            </a:pPr>
+            <a:r>
+              <a:t>•  Smart Scan graph-level routing — only one narrow case (SSTI)</a:t>
+            </a:r>
+          </a:p>
+          <a:p>
+            <a:pPr>
               <a:spcAft>
-                <a:spcPts val="1000"/>
+                <a:spcPts val="700"/>
               </a:spcAft>
-              <a:defRPr sz="1800" b="0">
-                <a:solidFill>
-                  <a:srgbClr val="1C1E21"/>
-                </a:solidFill>
-              </a:defRPr>
-            </a:pPr>
-            <a:r>
-              <a:t>•  Every bug fix in this system's history was root-caused against a real, running target — not inferred from a stack trace alone</a:t>
-            </a:r>
-          </a:p>
-        </p:txBody>
-      </p:sp>
-      <p:sp>
-        <p:nvSpPr>
-          <p:cNvPr id="6" name="TextBox 5"/>
+              <a:defRPr sz="1300"/>
+            </a:pPr>
+            <a:r>
+              <a:t>•  Orchestration engine — LangGraph, not Temporal.io (the spec's primary recommendation)</a:t>
+            </a:r>
+          </a:p>
+          <a:p>
+            <a:pPr>
+              <a:spcAft>
+                <a:spcPts val="700"/>
+              </a:spcAft>
+              <a:defRPr sz="1300"/>
+            </a:pPr>
+            <a:r>
+              <a:t>•  Depth slider (Quick/Standard/Deep) — not built</a:t>
+            </a:r>
+          </a:p>
+          <a:p>
+            <a:pPr>
+              <a:spcAft>
+                <a:spcPts val="700"/>
+              </a:spcAft>
+              <a:defRPr sz="1300"/>
+            </a:pPr>
+            <a:r>
+              <a:t>•  Cross-credential-set result caching — not built</a:t>
+            </a:r>
+          </a:p>
+        </p:txBody>
+      </p:sp>
+      <p:sp>
+        <p:nvSpPr>
+          <p:cNvPr id="8" name="TextBox 7"/>
+          <p:cNvSpPr txBox="1"/>
+          <p:nvPr/>
+        </p:nvSpPr>
+        <p:spPr>
+          <a:xfrm>
+            <a:off x="6446520" y="1737360"/>
+            <a:ext cx="4937760" cy="4114800"/>
+          </a:xfrm>
+          <a:prstGeom prst="rect">
+            <a:avLst/>
+          </a:prstGeom>
+          <a:noFill/>
+        </p:spPr>
+        <p:txBody>
+          <a:bodyPr wrap="square">
+            <a:spAutoFit/>
+          </a:bodyPr>
+          <a:lstStyle/>
+          <a:p>
+            <a:pPr>
+              <a:defRPr b="1" sz="1600">
+                <a:solidFill>
+                  <a:srgbClr val="6D28D9"/>
+                </a:solidFill>
+              </a:defRPr>
+            </a:pPr>
+            <a:r>
+              <a:t>Built beyond what was specified</a:t>
+            </a:r>
+          </a:p>
+          <a:p>
+            <a:pPr>
+              <a:spcAft>
+                <a:spcPts val="700"/>
+              </a:spcAft>
+              <a:defRPr sz="1300"/>
+            </a:pPr>
+            <a:r>
+              <a:t>•  VGS integration — spec asked for webhook push only; shipped three modes (webhook, native workspace, per-scan-run export)</a:t>
+            </a:r>
+          </a:p>
+          <a:p>
+            <a:pPr>
+              <a:spcAft>
+                <a:spcPts val="700"/>
+              </a:spcAft>
+              <a:defRPr sz="1300"/>
+            </a:pPr>
+            <a:r>
+              <a:t>•  Image-polyglot file-upload bypass technique</a:t>
+            </a:r>
+          </a:p>
+          <a:p>
+            <a:pPr>
+              <a:spcAft>
+                <a:spcPts val="700"/>
+              </a:spcAft>
+              <a:defRPr sz="1300"/>
+            </a:pPr>
+            <a:r>
+              <a:t>•  "Load from PortSwigger" scraper integration</a:t>
+            </a:r>
+          </a:p>
+          <a:p>
+            <a:pPr>
+              <a:spcAft>
+                <a:spcPts val="700"/>
+              </a:spcAft>
+              <a:defRPr sz="1300"/>
+            </a:pPr>
+            <a:r>
+              <a:t>•  UI-only, per-org default AI provider configuration</a:t>
+            </a:r>
+          </a:p>
+          <a:p>
+            <a:pPr>
+              <a:spcAft>
+                <a:spcPts val="700"/>
+              </a:spcAft>
+              <a:defRPr sz="1300"/>
+            </a:pPr>
+            <a:r>
+              <a:t>•  A genuine conversational Microsoft Teams bot</a:t>
+            </a:r>
+          </a:p>
+          <a:p>
+            <a:pPr>
+              <a:spcAft>
+                <a:spcPts val="700"/>
+              </a:spcAft>
+              <a:defRPr sz="1300"/>
+            </a:pPr>
+            <a:r>
+              <a:t>•  Two independent login-macro recorders, four checks ported from a sibling DAST project, and (2nd attempt) automatic, zero-config per-task model tiering</a:t>
+            </a:r>
+          </a:p>
+        </p:txBody>
+      </p:sp>
+      <p:sp>
+        <p:nvSpPr>
+          <p:cNvPr id="9" name="TextBox 8"/>
           <p:cNvSpPr txBox="1"/>
           <p:nvPr/>
         </p:nvSpPr>
@@ -7181,14 +7145,14 @@
               </a:defRPr>
             </a:pPr>
             <a:r>
-              <a:t>19</a:t>
-            </a:r>
-          </a:p>
-        </p:txBody>
-      </p:sp>
-      <p:sp>
-        <p:nvSpPr>
-          <p:cNvPr id="7" name="TextBox 6"/>
+              <a:t>18</a:t>
+            </a:r>
+          </a:p>
+        </p:txBody>
+      </p:sp>
+      <p:sp>
+        <p:nvSpPr>
+          <p:cNvPr id="10" name="TextBox 9"/>
           <p:cNvSpPr txBox="1"/>
           <p:nvPr/>
         </p:nvSpPr>
@@ -7321,7 +7285,7 @@
               </a:defRPr>
             </a:pPr>
             <a:r>
-              <a:t>ROADMAP</a:t>
+              <a:t>QUALITY</a:t>
             </a:r>
           </a:p>
         </p:txBody>
@@ -7357,7 +7321,7 @@
               </a:defRPr>
             </a:pPr>
             <a:r>
-              <a:t>What's next</a:t>
+              <a:t>Testing discipline</a:t>
             </a:r>
           </a:p>
         </p:txBody>
@@ -7398,7 +7362,7 @@
               </a:defRPr>
             </a:pPr>
             <a:r>
-              <a:t>•  Build out Smart Scan's graph-level routing — use the fingerprint to actually skip irrelevant node scheduling, not just display it</a:t>
+              <a:t>•  667 tests across 119 files, confirmed via pytest --collect-only — real fixtures over mocks: local HTTP servers, a real headless browser, real cryptographic round-trips</a:t>
             </a:r>
           </a:p>
           <a:p>
@@ -7416,7 +7380,7 @@
               </a:defRPr>
             </a:pPr>
             <a:r>
-              <a:t>•  A depth/intensity profile (Quick / Standard / Deep) as a scan-trigger option</a:t>
+              <a:t>•  Live-validated against OWASP Juice Shop and a real DVWA instance across all four security levels</a:t>
             </a:r>
           </a:p>
           <a:p>
@@ -7434,7 +7398,7 @@
               </a:defRPr>
             </a:pPr>
             <a:r>
-              <a:t>•  Per-task-type model routing — tried and reverted once already; revisit only if a concrete case emerges</a:t>
+              <a:t>•  DVWA "Impossible" correctly produces zero injection/XSS findings; "Medium" correctly yields confirmed SQLi and command injection through the full pipeline</a:t>
             </a:r>
           </a:p>
           <a:p>
@@ -7452,25 +7416,7 @@
               </a:defRPr>
             </a:pPr>
             <a:r>
-              <a:t>•  A more sophisticated file-upload bypass technique, chaining into a standalone RCE proof</a:t>
-            </a:r>
-          </a:p>
-          <a:p>
-            <a:pPr>
-              <a:lnSpc>
-                <a:spcPct val="125000"/>
-              </a:lnSpc>
-              <a:spcAft>
-                <a:spcPts val="1000"/>
-              </a:spcAft>
-              <a:defRPr sz="1800" b="0">
-                <a:solidFill>
-                  <a:srgbClr val="1C1E21"/>
-                </a:solidFill>
-              </a:defRPr>
-            </a:pPr>
-            <a:r>
-              <a:t>•  Configurable human-in-the-loop approval checkpoints for the most invasive check categories</a:t>
+              <a:t>•  Every bug fix in this system's history was root-caused against a real, running target — not inferred from a stack trace alone</a:t>
             </a:r>
           </a:p>
         </p:txBody>
@@ -7505,7 +7451,7 @@
               </a:defRPr>
             </a:pPr>
             <a:r>
-              <a:t>20</a:t>
+              <a:t>19</a:t>
             </a:r>
           </a:p>
         </p:txBody>
@@ -7758,7 +7704,7 @@
               </a:defRPr>
             </a:pPr>
             <a:r>
-              <a:t>•  System architecture &amp; the 24-node scanning engine</a:t>
+              <a:t>•  System architecture &amp; the 31-node scanning engine</a:t>
             </a:r>
           </a:p>
           <a:p>
@@ -7955,7 +7901,7 @@
     <p:bg>
       <p:bgPr>
         <a:solidFill>
-          <a:srgbClr val="6D28D9"/>
+          <a:srgbClr val="FFFFFF"/>
         </a:solidFill>
         <a:effectLst/>
       </p:bgPr>
@@ -7969,14 +7915,58 @@
       <p:grpSpPr/>
       <p:sp>
         <p:nvSpPr>
-          <p:cNvPr id="2" name="TextBox 1"/>
+          <p:cNvPr id="2" name="Rectangle 1"/>
+          <p:cNvSpPr/>
+          <p:nvPr/>
+        </p:nvSpPr>
+        <p:spPr>
+          <a:xfrm>
+            <a:off x="0" y="0"/>
+            <a:ext cx="12191695" cy="128016"/>
+          </a:xfrm>
+          <a:prstGeom prst="rect">
+            <a:avLst/>
+          </a:prstGeom>
+          <a:solidFill>
+            <a:srgbClr val="6D28D9"/>
+          </a:solidFill>
+          <a:ln>
+            <a:noFill/>
+          </a:ln>
+          <a:effectLst/>
+        </p:spPr>
+        <p:style>
+          <a:lnRef idx="1">
+            <a:schemeClr val="accent1"/>
+          </a:lnRef>
+          <a:fillRef idx="3">
+            <a:schemeClr val="accent1"/>
+          </a:fillRef>
+          <a:effectRef idx="2">
+            <a:schemeClr val="accent1"/>
+          </a:effectRef>
+          <a:fontRef idx="minor">
+            <a:schemeClr val="lt1"/>
+          </a:fontRef>
+        </p:style>
+        <p:txBody>
+          <a:bodyPr rtlCol="0" anchor="ctr"/>
+          <a:lstStyle/>
+          <a:p>
+            <a:pPr algn="ctr"/>
+          </a:p>
+        </p:txBody>
+      </p:sp>
+      <p:sp>
+        <p:nvSpPr>
+          <p:cNvPr id="3" name="TextBox 2"/>
           <p:cNvSpPr txBox="1"/>
           <p:nvPr/>
         </p:nvSpPr>
         <p:spPr>
           <a:xfrm>
-            <a:off x="914400" y="2560320"/>
-            <a:ext cx="10332720" cy="1097280"/>
+            <a:off x="548640" y="164592"/>
+            <a:ext cx="7315200" cy="320040"/>
           </a:xfrm>
           <a:prstGeom prst="rect">
             <a:avLst/>
@@ -7990,28 +7980,177 @@
           <a:lstStyle/>
           <a:p>
             <a:pPr>
-              <a:defRPr sz="4800" b="1">
-                <a:solidFill>
-                  <a:srgbClr val="FFFFFF"/>
-                </a:solidFill>
-              </a:defRPr>
-            </a:pPr>
-            <a:r>
-              <a:t>Thank you</a:t>
-            </a:r>
-          </a:p>
-        </p:txBody>
-      </p:sp>
-      <p:sp>
-        <p:nvSpPr>
-          <p:cNvPr id="3" name="TextBox 2"/>
+              <a:defRPr sz="1200" b="1">
+                <a:solidFill>
+                  <a:srgbClr val="6D28D9"/>
+                </a:solidFill>
+              </a:defRPr>
+            </a:pPr>
+            <a:r>
+              <a:t>ROADMAP</a:t>
+            </a:r>
+          </a:p>
+        </p:txBody>
+      </p:sp>
+      <p:sp>
+        <p:nvSpPr>
+          <p:cNvPr id="4" name="TextBox 3"/>
           <p:cNvSpPr txBox="1"/>
           <p:nvPr/>
         </p:nvSpPr>
         <p:spPr>
           <a:xfrm>
-            <a:off x="914400" y="3566160"/>
-            <a:ext cx="10332720" cy="731520"/>
+            <a:off x="548640" y="411480"/>
+            <a:ext cx="11094415" cy="822960"/>
+          </a:xfrm>
+          <a:prstGeom prst="rect">
+            <a:avLst/>
+          </a:prstGeom>
+          <a:noFill/>
+        </p:spPr>
+        <p:txBody>
+          <a:bodyPr wrap="square">
+            <a:spAutoFit/>
+          </a:bodyPr>
+          <a:lstStyle/>
+          <a:p>
+            <a:pPr>
+              <a:defRPr sz="2800" b="1">
+                <a:solidFill>
+                  <a:srgbClr val="1C1E21"/>
+                </a:solidFill>
+                <a:latin typeface="Calibri"/>
+              </a:defRPr>
+            </a:pPr>
+            <a:r>
+              <a:t>What's next</a:t>
+            </a:r>
+          </a:p>
+        </p:txBody>
+      </p:sp>
+      <p:sp>
+        <p:nvSpPr>
+          <p:cNvPr id="5" name="TextBox 4"/>
+          <p:cNvSpPr txBox="1"/>
+          <p:nvPr/>
+        </p:nvSpPr>
+        <p:spPr>
+          <a:xfrm>
+            <a:off x="640080" y="1645920"/>
+            <a:ext cx="10911535" cy="4572000"/>
+          </a:xfrm>
+          <a:prstGeom prst="rect">
+            <a:avLst/>
+          </a:prstGeom>
+          <a:noFill/>
+        </p:spPr>
+        <p:txBody>
+          <a:bodyPr wrap="square">
+            <a:spAutoFit/>
+          </a:bodyPr>
+          <a:lstStyle/>
+          <a:p>
+            <a:pPr>
+              <a:lnSpc>
+                <a:spcPct val="125000"/>
+              </a:lnSpc>
+              <a:spcAft>
+                <a:spcPts val="1000"/>
+              </a:spcAft>
+              <a:defRPr sz="1800" b="0">
+                <a:solidFill>
+                  <a:srgbClr val="1C1E21"/>
+                </a:solidFill>
+              </a:defRPr>
+            </a:pPr>
+            <a:r>
+              <a:t>•  Build out Smart Scan's graph-level routing — use the fingerprint to actually skip irrelevant node scheduling, not just display it</a:t>
+            </a:r>
+          </a:p>
+          <a:p>
+            <a:pPr>
+              <a:lnSpc>
+                <a:spcPct val="125000"/>
+              </a:lnSpc>
+              <a:spcAft>
+                <a:spcPts val="1000"/>
+              </a:spcAft>
+              <a:defRPr sz="1800" b="0">
+                <a:solidFill>
+                  <a:srgbClr val="1C1E21"/>
+                </a:solidFill>
+              </a:defRPr>
+            </a:pPr>
+            <a:r>
+              <a:t>•  A depth/intensity profile (Quick / Standard / Deep) as a scan-trigger option</a:t>
+            </a:r>
+          </a:p>
+          <a:p>
+            <a:pPr>
+              <a:lnSpc>
+                <a:spcPct val="125000"/>
+              </a:lnSpc>
+              <a:spcAft>
+                <a:spcPts val="1000"/>
+              </a:spcAft>
+              <a:defRPr sz="1800" b="0">
+                <a:solidFill>
+                  <a:srgbClr val="1C1E21"/>
+                </a:solidFill>
+              </a:defRPr>
+            </a:pPr>
+            <a:r>
+              <a:t>•  Extend automatic model tiering to Gemini once its 3.x naming stabilizes past the October 2026 retirement of the 2.5 line</a:t>
+            </a:r>
+          </a:p>
+          <a:p>
+            <a:pPr>
+              <a:lnSpc>
+                <a:spcPct val="125000"/>
+              </a:lnSpc>
+              <a:spcAft>
+                <a:spcPts val="1000"/>
+              </a:spcAft>
+              <a:defRPr sz="1800" b="0">
+                <a:solidFill>
+                  <a:srgbClr val="1C1E21"/>
+                </a:solidFill>
+              </a:defRPr>
+            </a:pPr>
+            <a:r>
+              <a:t>•  A more sophisticated file-upload bypass technique, chaining into a standalone RCE proof</a:t>
+            </a:r>
+          </a:p>
+          <a:p>
+            <a:pPr>
+              <a:lnSpc>
+                <a:spcPct val="125000"/>
+              </a:lnSpc>
+              <a:spcAft>
+                <a:spcPts val="1000"/>
+              </a:spcAft>
+              <a:defRPr sz="1800" b="0">
+                <a:solidFill>
+                  <a:srgbClr val="1C1E21"/>
+                </a:solidFill>
+              </a:defRPr>
+            </a:pPr>
+            <a:r>
+              <a:t>•  Configurable human-in-the-loop approval checkpoints for the most invasive check categories</a:t>
+            </a:r>
+          </a:p>
+        </p:txBody>
+      </p:sp>
+      <p:sp>
+        <p:nvSpPr>
+          <p:cNvPr id="6" name="TextBox 5"/>
+          <p:cNvSpPr txBox="1"/>
+          <p:nvPr/>
+        </p:nvSpPr>
+        <p:spPr>
+          <a:xfrm>
+            <a:off x="11094415" y="6400800"/>
+            <a:ext cx="822960" cy="320040"/>
           </a:xfrm>
           <a:prstGeom prst="rect">
             <a:avLst/>
@@ -8024,15 +8163,50 @@
           </a:bodyPr>
           <a:lstStyle/>
           <a:p>
-            <a:pPr>
-              <a:defRPr sz="2000">
-                <a:solidFill>
-                  <a:srgbClr val="F3EEFB"/>
-                </a:solidFill>
-              </a:defRPr>
-            </a:pPr>
-            <a:r>
-              <a:t>Questions &amp; discussion</a:t>
+            <a:pPr algn="r">
+              <a:defRPr sz="1000">
+                <a:solidFill>
+                  <a:srgbClr val="5B6270"/>
+                </a:solidFill>
+              </a:defRPr>
+            </a:pPr>
+            <a:r>
+              <a:t>20</a:t>
+            </a:r>
+          </a:p>
+        </p:txBody>
+      </p:sp>
+      <p:sp>
+        <p:nvSpPr>
+          <p:cNvPr id="7" name="TextBox 6"/>
+          <p:cNvSpPr txBox="1"/>
+          <p:nvPr/>
+        </p:nvSpPr>
+        <p:spPr>
+          <a:xfrm>
+            <a:off x="548640" y="6400800"/>
+            <a:ext cx="2743200" cy="320040"/>
+          </a:xfrm>
+          <a:prstGeom prst="rect">
+            <a:avLst/>
+          </a:prstGeom>
+          <a:noFill/>
+        </p:spPr>
+        <p:txBody>
+          <a:bodyPr wrap="none">
+            <a:spAutoFit/>
+          </a:bodyPr>
+          <a:lstStyle/>
+          <a:p>
+            <a:pPr>
+              <a:defRPr sz="1000">
+                <a:solidFill>
+                  <a:srgbClr val="5B6270"/>
+                </a:solidFill>
+              </a:defRPr>
+            </a:pPr>
+            <a:r>
+              <a:t>Verdikt</a:t>
             </a:r>
           </a:p>
         </p:txBody>
@@ -8129,7 +8303,7 @@
               </a:defRPr>
             </a:pPr>
             <a:r>
-              <a:t>APP INFO</a:t>
+              <a:t>COMMON QUESTIONS</a:t>
             </a:r>
           </a:p>
         </p:txBody>
@@ -8165,7 +8339,7 @@
               </a:defRPr>
             </a:pPr>
             <a:r>
-              <a:t>What it's built with</a:t>
+              <a:t>FAQ</a:t>
             </a:r>
           </a:p>
         </p:txBody>
@@ -8194,109 +8368,91 @@
           <a:p>
             <a:pPr>
               <a:lnSpc>
-                <a:spcPct val="120000"/>
+                <a:spcPct val="115000"/>
               </a:lnSpc>
               <a:spcAft>
-                <a:spcPts val="900"/>
+                <a:spcPts val="700"/>
               </a:spcAft>
-              <a:defRPr sz="1600" b="0">
+              <a:defRPr sz="1400" b="0">
                 <a:solidFill>
                   <a:srgbClr val="1C1E21"/>
                 </a:solidFill>
               </a:defRPr>
             </a:pPr>
             <a:r>
-              <a:t>•  Frontend — Vite + React + TypeScript + TanStack Query + React Router + Tailwind CSS</a:t>
+              <a:t>•  How does crawling work? — A Playwright-driven crawler discovers pages/forms/API calls within scope; uploaded traffic (HAR/Burp/Zest) supplements live crawling, it doesn't replace it.</a:t>
             </a:r>
           </a:p>
           <a:p>
             <a:pPr>
               <a:lnSpc>
-                <a:spcPct val="120000"/>
+                <a:spcPct val="115000"/>
               </a:lnSpc>
               <a:spcAft>
-                <a:spcPts val="900"/>
+                <a:spcPts val="700"/>
               </a:spcAft>
-              <a:defRPr sz="1600" b="0">
+              <a:defRPr sz="1400" b="0">
                 <a:solidFill>
                   <a:srgbClr val="1C1E21"/>
                 </a:solidFill>
               </a:defRPr>
             </a:pPr>
             <a:r>
-              <a:t>•  Backend — Python 3.11+, FastAPI, SQLAlchemy 2.0 (async), Alembic, served via uv</a:t>
+              <a:t>•  How are vulnerabilities found, and what does AI actually do? — Deterministic HTTP-level probes run first; AI only triages results and helps craft context-aware payloads. AI never single-handedly confirms a finding.</a:t>
             </a:r>
           </a:p>
           <a:p>
             <a:pPr>
               <a:lnSpc>
-                <a:spcPct val="120000"/>
+                <a:spcPct val="115000"/>
               </a:lnSpc>
               <a:spcAft>
-                <a:spcPts val="900"/>
+                <a:spcPts val="700"/>
               </a:spcAft>
-              <a:defRPr sz="1600" b="0">
+              <a:defRPr sz="1400" b="0">
                 <a:solidFill>
                   <a:srgbClr val="1C1E21"/>
                 </a:solidFill>
               </a:defRPr>
             </a:pPr>
             <a:r>
-              <a:t>•  Database — PostgreSQL (dialect-agnostic ORM; test suite runs on ephemeral SQLite)</a:t>
+              <a:t>•  How is this different from WebInspect or Checkmarx? — Those are single-pass deterministic scanners; Verdikt pairs the same deterministic probing with LLM-assisted triage and adversarial validation, so only confirmed findings reach a report.</a:t>
             </a:r>
           </a:p>
           <a:p>
             <a:pPr>
               <a:lnSpc>
-                <a:spcPct val="120000"/>
+                <a:spcPct val="115000"/>
               </a:lnSpc>
               <a:spcAft>
-                <a:spcPts val="900"/>
+                <a:spcPts val="700"/>
               </a:spcAft>
-              <a:defRPr sz="1600" b="0">
+              <a:defRPr sz="1400" b="0">
                 <a:solidFill>
                   <a:srgbClr val="1C1E21"/>
                 </a:solidFill>
               </a:defRPr>
             </a:pPr>
             <a:r>
-              <a:t>•  AI layer — LangGraph 27-node multi-agent scan DAG; pluggable Claude/OpenAI/Gemini/Grok/custom-endpoint providers</a:t>
+              <a:t>•  If I upload traffic, does it still crawl the live site? — Yes — uploaded traffic and live crawling both run and combine into one scope.</a:t>
             </a:r>
           </a:p>
           <a:p>
             <a:pPr>
               <a:lnSpc>
-                <a:spcPct val="120000"/>
+                <a:spcPct val="115000"/>
               </a:lnSpc>
               <a:spcAft>
-                <a:spcPts val="900"/>
+                <a:spcPts val="700"/>
               </a:spcAft>
-              <a:defRPr sz="1600" b="0">
+              <a:defRPr sz="1400" b="0">
                 <a:solidFill>
                   <a:srgbClr val="1C1E21"/>
                 </a:solidFill>
               </a:defRPr>
             </a:pPr>
             <a:r>
-              <a:t>•  Browser automation — Playwright (Chromium) for real execution proofs and login-macro recording, streamed live via a Docker-hosted VNC stack</a:t>
-            </a:r>
-          </a:p>
-          <a:p>
-            <a:pPr>
-              <a:lnSpc>
-                <a:spcPct val="120000"/>
-              </a:lnSpc>
-              <a:spcAft>
-                <a:spcPts val="900"/>
-              </a:spcAft>
-              <a:defRPr sz="1600" b="0">
-                <a:solidFill>
-                  <a:srgbClr val="1C1E21"/>
-                </a:solidFill>
-              </a:defRPr>
-            </a:pPr>
-            <a:r>
-              <a:t>•  Deployment &amp; integrations — Docker Compose end to end; Jira/Slack/Teams/Outlook/Burp/CMDB/VGS/SSO integrations, plus a standalone browser extension for native setups</a:t>
+              <a:t>•  What's the architecture, and why AI if scans are deterministic? — A 31-node LangGraph DAG per scan: deterministic probe → AI triage → deterministic re-execution → adversarial AI validation. AI expands and interprets; it never decides alone.</a:t>
             </a:r>
           </a:p>
         </p:txBody>
@@ -8331,7 +8487,7 @@
               </a:defRPr>
             </a:pPr>
             <a:r>
-              <a:t>6</a:t>
+              <a:t>21</a:t>
             </a:r>
           </a:p>
         </p:txBody>
@@ -8382,6 +8538,14 @@
 <file path=ppt/slides/slide22.xml><?xml version="1.0" encoding="utf-8"?>
 <p:sld xmlns:a="http://schemas.openxmlformats.org/drawingml/2006/main" xmlns:p="http://schemas.openxmlformats.org/presentationml/2006/main" xmlns:r="http://schemas.openxmlformats.org/officeDocument/2006/relationships">
   <p:cSld>
+    <p:bg>
+      <p:bgPr>
+        <a:solidFill>
+          <a:srgbClr val="6D28D9"/>
+        </a:solidFill>
+        <a:effectLst/>
+      </p:bgPr>
+    </p:bg>
     <p:spTree>
       <p:nvGrpSpPr>
         <p:cNvPr id="1" name=""/>
@@ -8391,58 +8555,14 @@
       <p:grpSpPr/>
       <p:sp>
         <p:nvSpPr>
-          <p:cNvPr id="2" name="Rectangle 1"/>
-          <p:cNvSpPr/>
-          <p:nvPr/>
-        </p:nvSpPr>
-        <p:spPr>
-          <a:xfrm>
-            <a:off x="0" y="0"/>
-            <a:ext cx="12191695" cy="128016"/>
-          </a:xfrm>
-          <a:prstGeom prst="rect">
-            <a:avLst/>
-          </a:prstGeom>
-          <a:solidFill>
-            <a:srgbClr val="6D28D9"/>
-          </a:solidFill>
-          <a:ln>
-            <a:noFill/>
-          </a:ln>
-          <a:effectLst/>
-        </p:spPr>
-        <p:style>
-          <a:lnRef idx="1">
-            <a:schemeClr val="accent1"/>
-          </a:lnRef>
-          <a:fillRef idx="3">
-            <a:schemeClr val="accent1"/>
-          </a:fillRef>
-          <a:effectRef idx="2">
-            <a:schemeClr val="accent1"/>
-          </a:effectRef>
-          <a:fontRef idx="minor">
-            <a:schemeClr val="lt1"/>
-          </a:fontRef>
-        </p:style>
-        <p:txBody>
-          <a:bodyPr rtlCol="0" anchor="ctr"/>
-          <a:lstStyle/>
-          <a:p>
-            <a:pPr algn="ctr"/>
-          </a:p>
-        </p:txBody>
-      </p:sp>
-      <p:sp>
-        <p:nvSpPr>
-          <p:cNvPr id="3" name="TextBox 2"/>
+          <p:cNvPr id="2" name="TextBox 1"/>
           <p:cNvSpPr txBox="1"/>
           <p:nvPr/>
         </p:nvSpPr>
         <p:spPr>
           <a:xfrm>
-            <a:off x="548640" y="164592"/>
-            <a:ext cx="7315200" cy="320040"/>
+            <a:off x="914400" y="2560320"/>
+            <a:ext cx="10332720" cy="1097280"/>
           </a:xfrm>
           <a:prstGeom prst="rect">
             <a:avLst/>
@@ -8456,177 +8576,28 @@
           <a:lstStyle/>
           <a:p>
             <a:pPr>
-              <a:defRPr sz="1200" b="1">
-                <a:solidFill>
-                  <a:srgbClr val="6D28D9"/>
-                </a:solidFill>
-              </a:defRPr>
-            </a:pPr>
-            <a:r>
-              <a:t>COMMON QUESTIONS</a:t>
-            </a:r>
-          </a:p>
-        </p:txBody>
-      </p:sp>
-      <p:sp>
-        <p:nvSpPr>
-          <p:cNvPr id="4" name="TextBox 3"/>
+              <a:defRPr sz="4800" b="1">
+                <a:solidFill>
+                  <a:srgbClr val="FFFFFF"/>
+                </a:solidFill>
+              </a:defRPr>
+            </a:pPr>
+            <a:r>
+              <a:t>Thank you</a:t>
+            </a:r>
+          </a:p>
+        </p:txBody>
+      </p:sp>
+      <p:sp>
+        <p:nvSpPr>
+          <p:cNvPr id="3" name="TextBox 2"/>
           <p:cNvSpPr txBox="1"/>
           <p:nvPr/>
         </p:nvSpPr>
         <p:spPr>
           <a:xfrm>
-            <a:off x="548640" y="411480"/>
-            <a:ext cx="11094415" cy="822960"/>
-          </a:xfrm>
-          <a:prstGeom prst="rect">
-            <a:avLst/>
-          </a:prstGeom>
-          <a:noFill/>
-        </p:spPr>
-        <p:txBody>
-          <a:bodyPr wrap="square">
-            <a:spAutoFit/>
-          </a:bodyPr>
-          <a:lstStyle/>
-          <a:p>
-            <a:pPr>
-              <a:defRPr sz="2800" b="1">
-                <a:solidFill>
-                  <a:srgbClr val="1C1E21"/>
-                </a:solidFill>
-                <a:latin typeface="Calibri"/>
-              </a:defRPr>
-            </a:pPr>
-            <a:r>
-              <a:t>FAQ</a:t>
-            </a:r>
-          </a:p>
-        </p:txBody>
-      </p:sp>
-      <p:sp>
-        <p:nvSpPr>
-          <p:cNvPr id="5" name="TextBox 4"/>
-          <p:cNvSpPr txBox="1"/>
-          <p:nvPr/>
-        </p:nvSpPr>
-        <p:spPr>
-          <a:xfrm>
-            <a:off x="640080" y="1645920"/>
-            <a:ext cx="10911535" cy="4572000"/>
-          </a:xfrm>
-          <a:prstGeom prst="rect">
-            <a:avLst/>
-          </a:prstGeom>
-          <a:noFill/>
-        </p:spPr>
-        <p:txBody>
-          <a:bodyPr wrap="square">
-            <a:spAutoFit/>
-          </a:bodyPr>
-          <a:lstStyle/>
-          <a:p>
-            <a:pPr>
-              <a:lnSpc>
-                <a:spcPct val="115000"/>
-              </a:lnSpc>
-              <a:spcAft>
-                <a:spcPts val="700"/>
-              </a:spcAft>
-              <a:defRPr sz="1400" b="0">
-                <a:solidFill>
-                  <a:srgbClr val="1C1E21"/>
-                </a:solidFill>
-              </a:defRPr>
-            </a:pPr>
-            <a:r>
-              <a:t>•  How does crawling work? — A Playwright-driven crawler discovers pages/forms/API calls within scope; uploaded traffic (HAR/Burp/Zest) supplements live crawling, it doesn't replace it.</a:t>
-            </a:r>
-          </a:p>
-          <a:p>
-            <a:pPr>
-              <a:lnSpc>
-                <a:spcPct val="115000"/>
-              </a:lnSpc>
-              <a:spcAft>
-                <a:spcPts val="700"/>
-              </a:spcAft>
-              <a:defRPr sz="1400" b="0">
-                <a:solidFill>
-                  <a:srgbClr val="1C1E21"/>
-                </a:solidFill>
-              </a:defRPr>
-            </a:pPr>
-            <a:r>
-              <a:t>•  How are vulnerabilities found, and what does AI actually do? — Deterministic HTTP-level probes run first; AI only triages results and helps craft context-aware payloads. AI never single-handedly confirms a finding.</a:t>
-            </a:r>
-          </a:p>
-          <a:p>
-            <a:pPr>
-              <a:lnSpc>
-                <a:spcPct val="115000"/>
-              </a:lnSpc>
-              <a:spcAft>
-                <a:spcPts val="700"/>
-              </a:spcAft>
-              <a:defRPr sz="1400" b="0">
-                <a:solidFill>
-                  <a:srgbClr val="1C1E21"/>
-                </a:solidFill>
-              </a:defRPr>
-            </a:pPr>
-            <a:r>
-              <a:t>•  How is this different from WebInspect or Checkmarx? — Those are single-pass deterministic scanners; Verdikt pairs the same deterministic probing with LLM-assisted triage and adversarial validation, so only confirmed findings reach a report.</a:t>
-            </a:r>
-          </a:p>
-          <a:p>
-            <a:pPr>
-              <a:lnSpc>
-                <a:spcPct val="115000"/>
-              </a:lnSpc>
-              <a:spcAft>
-                <a:spcPts val="700"/>
-              </a:spcAft>
-              <a:defRPr sz="1400" b="0">
-                <a:solidFill>
-                  <a:srgbClr val="1C1E21"/>
-                </a:solidFill>
-              </a:defRPr>
-            </a:pPr>
-            <a:r>
-              <a:t>•  If I upload traffic, does it still crawl the live site? — Yes — uploaded traffic and live crawling both run and combine into one scope.</a:t>
-            </a:r>
-          </a:p>
-          <a:p>
-            <a:pPr>
-              <a:lnSpc>
-                <a:spcPct val="115000"/>
-              </a:lnSpc>
-              <a:spcAft>
-                <a:spcPts val="700"/>
-              </a:spcAft>
-              <a:defRPr sz="1400" b="0">
-                <a:solidFill>
-                  <a:srgbClr val="1C1E21"/>
-                </a:solidFill>
-              </a:defRPr>
-            </a:pPr>
-            <a:r>
-              <a:t>•  What's the architecture, and why AI if scans are deterministic? — A 27-node LangGraph DAG per scan: deterministic probe → AI triage → deterministic re-execution → adversarial AI validation. AI expands and interprets; it never decides alone.</a:t>
-            </a:r>
-          </a:p>
-        </p:txBody>
-      </p:sp>
-      <p:sp>
-        <p:nvSpPr>
-          <p:cNvPr id="6" name="TextBox 5"/>
-          <p:cNvSpPr txBox="1"/>
-          <p:nvPr/>
-        </p:nvSpPr>
-        <p:spPr>
-          <a:xfrm>
-            <a:off x="11094415" y="6400800"/>
-            <a:ext cx="822960" cy="320040"/>
+            <a:off x="914400" y="3566160"/>
+            <a:ext cx="10332720" cy="731520"/>
           </a:xfrm>
           <a:prstGeom prst="rect">
             <a:avLst/>
@@ -8639,50 +8610,15 @@
           </a:bodyPr>
           <a:lstStyle/>
           <a:p>
-            <a:pPr algn="r">
-              <a:defRPr sz="1000">
-                <a:solidFill>
-                  <a:srgbClr val="5B6270"/>
-                </a:solidFill>
-              </a:defRPr>
-            </a:pPr>
-            <a:r>
-              <a:t>21</a:t>
-            </a:r>
-          </a:p>
-        </p:txBody>
-      </p:sp>
-      <p:sp>
-        <p:nvSpPr>
-          <p:cNvPr id="7" name="TextBox 6"/>
-          <p:cNvSpPr txBox="1"/>
-          <p:nvPr/>
-        </p:nvSpPr>
-        <p:spPr>
-          <a:xfrm>
-            <a:off x="548640" y="6400800"/>
-            <a:ext cx="2743200" cy="320040"/>
-          </a:xfrm>
-          <a:prstGeom prst="rect">
-            <a:avLst/>
-          </a:prstGeom>
-          <a:noFill/>
-        </p:spPr>
-        <p:txBody>
-          <a:bodyPr wrap="none">
-            <a:spAutoFit/>
-          </a:bodyPr>
-          <a:lstStyle/>
-          <a:p>
-            <a:pPr>
-              <a:defRPr sz="1000">
-                <a:solidFill>
-                  <a:srgbClr val="5B6270"/>
-                </a:solidFill>
-              </a:defRPr>
-            </a:pPr>
-            <a:r>
-              <a:t>Verdikt</a:t>
+            <a:pPr>
+              <a:defRPr sz="2000">
+                <a:solidFill>
+                  <a:srgbClr val="F3EEFB"/>
+                </a:solidFill>
+              </a:defRPr>
+            </a:pPr>
+            <a:r>
+              <a:t>Questions &amp; discussion</a:t>
             </a:r>
           </a:p>
         </p:txBody>
@@ -9278,7 +9214,7 @@
               </a:defRPr>
             </a:pPr>
             <a:r>
-              <a:t>24 narrow, purpose-built detection agents each own one vulnerability class, run as parallel nodes in a LangGraph DAG, and use the cheapest technique that reliably confirms that class.</a:t>
+              <a:t>31 narrow, purpose-built detection agents each own one vulnerability class, run as parallel nodes in a LangGraph DAG, and use the cheapest technique that reliably confirms that class.</a:t>
             </a:r>
           </a:p>
         </p:txBody>
@@ -9814,14 +9750,6 @@
 <file path=ppt/slides/slide6.xml><?xml version="1.0" encoding="utf-8"?>
 <p:sld xmlns:a="http://schemas.openxmlformats.org/drawingml/2006/main" xmlns:p="http://schemas.openxmlformats.org/presentationml/2006/main" xmlns:r="http://schemas.openxmlformats.org/officeDocument/2006/relationships">
   <p:cSld>
-    <p:bg>
-      <p:bgPr>
-        <a:solidFill>
-          <a:srgbClr val="FFFFFF"/>
-        </a:solidFill>
-        <a:effectLst/>
-      </p:bgPr>
-    </p:bg>
     <p:spTree>
       <p:nvGrpSpPr>
         <p:cNvPr id="1" name=""/>
@@ -9903,7 +9831,7 @@
               </a:defRPr>
             </a:pPr>
             <a:r>
-              <a:t>MULTI-AGENT SCANNING ENGINE</a:t>
+              <a:t>APP INFO</a:t>
             </a:r>
           </a:p>
         </p:txBody>
@@ -9939,617 +9867,145 @@
               </a:defRPr>
             </a:pPr>
             <a:r>
-              <a:t>27 detection agents in the scan graph</a:t>
-            </a:r>
-          </a:p>
-        </p:txBody>
-      </p:sp>
-      <p:sp>
-        <p:nvSpPr>
-          <p:cNvPr id="5" name="Rounded Rectangle 4"/>
-          <p:cNvSpPr/>
-          <p:nvPr/>
-        </p:nvSpPr>
-        <p:spPr>
-          <a:xfrm>
-            <a:off x="502920" y="1554480"/>
-            <a:ext cx="3657600" cy="1234440"/>
-          </a:xfrm>
-          <a:prstGeom prst="roundRect">
-            <a:avLst/>
-          </a:prstGeom>
-          <a:solidFill>
-            <a:srgbClr val="F3EEFB"/>
-          </a:solidFill>
-          <a:ln w="15875">
-            <a:solidFill>
-              <a:srgbClr val="E3E5E9"/>
-            </a:solidFill>
-          </a:ln>
-          <a:effectLst/>
-        </p:spPr>
-        <p:style>
-          <a:lnRef idx="1">
-            <a:schemeClr val="accent1"/>
-          </a:lnRef>
-          <a:fillRef idx="3">
-            <a:schemeClr val="accent1"/>
-          </a:fillRef>
-          <a:effectRef idx="2">
-            <a:schemeClr val="accent1"/>
-          </a:effectRef>
-          <a:fontRef idx="minor">
-            <a:schemeClr val="lt1"/>
-          </a:fontRef>
-        </p:style>
-        <p:txBody>
-          <a:bodyPr rtlCol="0" anchor="ctr" wrap="square" lIns="45720" rIns="45720"/>
-          <a:lstStyle/>
-          <a:p>
-            <a:pPr algn="l">
-              <a:defRPr sz="1400" b="1">
-                <a:solidFill>
-                  <a:srgbClr val="6D28D9"/>
-                </a:solidFill>
-              </a:defRPr>
-            </a:pPr>
-            <a:r>
-              <a:t>Injection</a:t>
-            </a:r>
-          </a:p>
-          <a:p>
-            <a:pPr algn="l">
-              <a:defRPr sz="1100">
+              <a:t>What it's built with</a:t>
+            </a:r>
+          </a:p>
+        </p:txBody>
+      </p:sp>
+      <p:sp>
+        <p:nvSpPr>
+          <p:cNvPr id="5" name="TextBox 4"/>
+          <p:cNvSpPr txBox="1"/>
+          <p:nvPr/>
+        </p:nvSpPr>
+        <p:spPr>
+          <a:xfrm>
+            <a:off x="640080" y="1645920"/>
+            <a:ext cx="10911535" cy="4572000"/>
+          </a:xfrm>
+          <a:prstGeom prst="rect">
+            <a:avLst/>
+          </a:prstGeom>
+          <a:noFill/>
+        </p:spPr>
+        <p:txBody>
+          <a:bodyPr wrap="square">
+            <a:spAutoFit/>
+          </a:bodyPr>
+          <a:lstStyle/>
+          <a:p>
+            <a:pPr>
+              <a:lnSpc>
+                <a:spcPct val="120000"/>
+              </a:lnSpc>
+              <a:spcAft>
+                <a:spcPts val="900"/>
+              </a:spcAft>
+              <a:defRPr sz="1600" b="0">
                 <a:solidFill>
                   <a:srgbClr val="1C1E21"/>
                 </a:solidFill>
               </a:defRPr>
             </a:pPr>
             <a:r>
-              <a:t>SQLi, OS command injection, SSTI, path traversal, NoSQLi</a:t>
-            </a:r>
-          </a:p>
-        </p:txBody>
-      </p:sp>
-      <p:sp>
-        <p:nvSpPr>
-          <p:cNvPr id="6" name="Rounded Rectangle 5"/>
-          <p:cNvSpPr/>
-          <p:nvPr/>
-        </p:nvSpPr>
-        <p:spPr>
-          <a:xfrm>
-            <a:off x="4297680" y="1554480"/>
-            <a:ext cx="3657600" cy="1234440"/>
-          </a:xfrm>
-          <a:prstGeom prst="roundRect">
-            <a:avLst/>
-          </a:prstGeom>
-          <a:solidFill>
-            <a:srgbClr val="F3EEFB"/>
-          </a:solidFill>
-          <a:ln w="15875">
-            <a:solidFill>
-              <a:srgbClr val="E3E5E9"/>
-            </a:solidFill>
-          </a:ln>
-          <a:effectLst/>
-        </p:spPr>
-        <p:style>
-          <a:lnRef idx="1">
-            <a:schemeClr val="accent1"/>
-          </a:lnRef>
-          <a:fillRef idx="3">
-            <a:schemeClr val="accent1"/>
-          </a:fillRef>
-          <a:effectRef idx="2">
-            <a:schemeClr val="accent1"/>
-          </a:effectRef>
-          <a:fontRef idx="minor">
-            <a:schemeClr val="lt1"/>
-          </a:fontRef>
-        </p:style>
-        <p:txBody>
-          <a:bodyPr rtlCol="0" anchor="ctr" wrap="square" lIns="45720" rIns="45720"/>
-          <a:lstStyle/>
-          <a:p>
-            <a:pPr algn="l">
-              <a:defRPr sz="1400" b="1">
-                <a:solidFill>
-                  <a:srgbClr val="6D28D9"/>
-                </a:solidFill>
-              </a:defRPr>
-            </a:pPr>
-            <a:r>
-              <a:t>XSS</a:t>
-            </a:r>
-          </a:p>
-          <a:p>
-            <a:pPr algn="l">
-              <a:defRPr sz="1100">
+              <a:t>•  Frontend — Vite + React + TypeScript + TanStack Query + React Router + Tailwind CSS</a:t>
+            </a:r>
+          </a:p>
+          <a:p>
+            <a:pPr>
+              <a:lnSpc>
+                <a:spcPct val="120000"/>
+              </a:lnSpc>
+              <a:spcAft>
+                <a:spcPts val="900"/>
+              </a:spcAft>
+              <a:defRPr sz="1600" b="0">
                 <a:solidFill>
                   <a:srgbClr val="1C1E21"/>
                 </a:solidFill>
               </a:defRPr>
             </a:pPr>
             <a:r>
-              <a:t>Reflected, DOM-based, stored — with real browser execution proof</a:t>
-            </a:r>
-          </a:p>
-        </p:txBody>
-      </p:sp>
-      <p:sp>
-        <p:nvSpPr>
-          <p:cNvPr id="7" name="Rounded Rectangle 6"/>
-          <p:cNvSpPr/>
-          <p:nvPr/>
-        </p:nvSpPr>
-        <p:spPr>
-          <a:xfrm>
-            <a:off x="8092440" y="1554480"/>
-            <a:ext cx="3657600" cy="1234440"/>
-          </a:xfrm>
-          <a:prstGeom prst="roundRect">
-            <a:avLst/>
-          </a:prstGeom>
-          <a:solidFill>
-            <a:srgbClr val="F3EEFB"/>
-          </a:solidFill>
-          <a:ln w="15875">
-            <a:solidFill>
-              <a:srgbClr val="E3E5E9"/>
-            </a:solidFill>
-          </a:ln>
-          <a:effectLst/>
-        </p:spPr>
-        <p:style>
-          <a:lnRef idx="1">
-            <a:schemeClr val="accent1"/>
-          </a:lnRef>
-          <a:fillRef idx="3">
-            <a:schemeClr val="accent1"/>
-          </a:fillRef>
-          <a:effectRef idx="2">
-            <a:schemeClr val="accent1"/>
-          </a:effectRef>
-          <a:fontRef idx="minor">
-            <a:schemeClr val="lt1"/>
-          </a:fontRef>
-        </p:style>
-        <p:txBody>
-          <a:bodyPr rtlCol="0" anchor="ctr" wrap="square" lIns="45720" rIns="45720"/>
-          <a:lstStyle/>
-          <a:p>
-            <a:pPr algn="l">
-              <a:defRPr sz="1400" b="1">
-                <a:solidFill>
-                  <a:srgbClr val="6D28D9"/>
-                </a:solidFill>
-              </a:defRPr>
-            </a:pPr>
-            <a:r>
-              <a:t>Access &amp; Auth</a:t>
-            </a:r>
-          </a:p>
-          <a:p>
-            <a:pPr algn="l">
-              <a:defRPr sz="1100">
+              <a:t>•  Backend — Python 3.11+, FastAPI, SQLAlchemy 2.0 (async), Alembic, served via uv</a:t>
+            </a:r>
+          </a:p>
+          <a:p>
+            <a:pPr>
+              <a:lnSpc>
+                <a:spcPct val="120000"/>
+              </a:lnSpc>
+              <a:spcAft>
+                <a:spcPts val="900"/>
+              </a:spcAft>
+              <a:defRPr sz="1600" b="0">
                 <a:solidFill>
                   <a:srgbClr val="1C1E21"/>
                 </a:solidFill>
               </a:defRPr>
             </a:pPr>
             <a:r>
-              <a:t>Access control, auth bypass, OAuth redirect validation</a:t>
-            </a:r>
-          </a:p>
-        </p:txBody>
-      </p:sp>
-      <p:sp>
-        <p:nvSpPr>
-          <p:cNvPr id="8" name="Rounded Rectangle 7"/>
-          <p:cNvSpPr/>
-          <p:nvPr/>
-        </p:nvSpPr>
-        <p:spPr>
-          <a:xfrm>
-            <a:off x="502920" y="2898648"/>
-            <a:ext cx="3657600" cy="1234440"/>
-          </a:xfrm>
-          <a:prstGeom prst="roundRect">
-            <a:avLst/>
-          </a:prstGeom>
-          <a:solidFill>
-            <a:srgbClr val="F3EEFB"/>
-          </a:solidFill>
-          <a:ln w="15875">
-            <a:solidFill>
-              <a:srgbClr val="E3E5E9"/>
-            </a:solidFill>
-          </a:ln>
-          <a:effectLst/>
-        </p:spPr>
-        <p:style>
-          <a:lnRef idx="1">
-            <a:schemeClr val="accent1"/>
-          </a:lnRef>
-          <a:fillRef idx="3">
-            <a:schemeClr val="accent1"/>
-          </a:fillRef>
-          <a:effectRef idx="2">
-            <a:schemeClr val="accent1"/>
-          </a:effectRef>
-          <a:fontRef idx="minor">
-            <a:schemeClr val="lt1"/>
-          </a:fontRef>
-        </p:style>
-        <p:txBody>
-          <a:bodyPr rtlCol="0" anchor="ctr" wrap="square" lIns="45720" rIns="45720"/>
-          <a:lstStyle/>
-          <a:p>
-            <a:pPr algn="l">
-              <a:defRPr sz="1400" b="1">
-                <a:solidFill>
-                  <a:srgbClr val="6D28D9"/>
-                </a:solidFill>
-              </a:defRPr>
-            </a:pPr>
-            <a:r>
-              <a:t>Business Logic</a:t>
-            </a:r>
-          </a:p>
-          <a:p>
-            <a:pPr algn="l">
-              <a:defRPr sz="1100">
+              <a:t>•  Database — PostgreSQL (dialect-agnostic ORM; test suite runs on ephemeral SQLite)</a:t>
+            </a:r>
+          </a:p>
+          <a:p>
+            <a:pPr>
+              <a:lnSpc>
+                <a:spcPct val="120000"/>
+              </a:lnSpc>
+              <a:spcAft>
+                <a:spcPts val="900"/>
+              </a:spcAft>
+              <a:defRPr sz="1600" b="0">
                 <a:solidFill>
                   <a:srgbClr val="1C1E21"/>
                 </a:solidFill>
               </a:defRPr>
             </a:pPr>
             <a:r>
-              <a:t>IDOR, race conditions, workflow bypass, mass assignment</a:t>
-            </a:r>
-          </a:p>
-        </p:txBody>
-      </p:sp>
-      <p:sp>
-        <p:nvSpPr>
-          <p:cNvPr id="9" name="Rounded Rectangle 8"/>
-          <p:cNvSpPr/>
-          <p:nvPr/>
-        </p:nvSpPr>
-        <p:spPr>
-          <a:xfrm>
-            <a:off x="4297680" y="2898648"/>
-            <a:ext cx="3657600" cy="1234440"/>
-          </a:xfrm>
-          <a:prstGeom prst="roundRect">
-            <a:avLst/>
-          </a:prstGeom>
-          <a:solidFill>
-            <a:srgbClr val="F3EEFB"/>
-          </a:solidFill>
-          <a:ln w="15875">
-            <a:solidFill>
-              <a:srgbClr val="E3E5E9"/>
-            </a:solidFill>
-          </a:ln>
-          <a:effectLst/>
-        </p:spPr>
-        <p:style>
-          <a:lnRef idx="1">
-            <a:schemeClr val="accent1"/>
-          </a:lnRef>
-          <a:fillRef idx="3">
-            <a:schemeClr val="accent1"/>
-          </a:fillRef>
-          <a:effectRef idx="2">
-            <a:schemeClr val="accent1"/>
-          </a:effectRef>
-          <a:fontRef idx="minor">
-            <a:schemeClr val="lt1"/>
-          </a:fontRef>
-        </p:style>
-        <p:txBody>
-          <a:bodyPr rtlCol="0" anchor="ctr" wrap="square" lIns="45720" rIns="45720"/>
-          <a:lstStyle/>
-          <a:p>
-            <a:pPr algn="l">
-              <a:defRPr sz="1400" b="1">
-                <a:solidFill>
-                  <a:srgbClr val="6D28D9"/>
-                </a:solidFill>
-              </a:defRPr>
-            </a:pPr>
-            <a:r>
-              <a:t>Request Integrity</a:t>
-            </a:r>
-          </a:p>
-          <a:p>
-            <a:pPr algn="l">
-              <a:defRPr sz="1100">
+              <a:t>•  AI layer — LangGraph 31-node multi-agent scan DAG; pluggable Claude/OpenAI/Gemini/Grok/custom-endpoint providers, with automatic per-task model tiering applied invisibly underneath</a:t>
+            </a:r>
+          </a:p>
+          <a:p>
+            <a:pPr>
+              <a:lnSpc>
+                <a:spcPct val="120000"/>
+              </a:lnSpc>
+              <a:spcAft>
+                <a:spcPts val="900"/>
+              </a:spcAft>
+              <a:defRPr sz="1600" b="0">
                 <a:solidFill>
                   <a:srgbClr val="1C1E21"/>
                 </a:solidFill>
               </a:defRPr>
             </a:pPr>
             <a:r>
-              <a:t>CSRF, CORS, host header, request smuggling, cache poisoning</a:t>
-            </a:r>
-          </a:p>
-        </p:txBody>
-      </p:sp>
-      <p:sp>
-        <p:nvSpPr>
-          <p:cNvPr id="10" name="Rounded Rectangle 9"/>
-          <p:cNvSpPr/>
-          <p:nvPr/>
-        </p:nvSpPr>
-        <p:spPr>
-          <a:xfrm>
-            <a:off x="8092440" y="2898648"/>
-            <a:ext cx="3657600" cy="1234440"/>
-          </a:xfrm>
-          <a:prstGeom prst="roundRect">
-            <a:avLst/>
-          </a:prstGeom>
-          <a:solidFill>
-            <a:srgbClr val="F3EEFB"/>
-          </a:solidFill>
-          <a:ln w="15875">
-            <a:solidFill>
-              <a:srgbClr val="E3E5E9"/>
-            </a:solidFill>
-          </a:ln>
-          <a:effectLst/>
-        </p:spPr>
-        <p:style>
-          <a:lnRef idx="1">
-            <a:schemeClr val="accent1"/>
-          </a:lnRef>
-          <a:fillRef idx="3">
-            <a:schemeClr val="accent1"/>
-          </a:fillRef>
-          <a:effectRef idx="2">
-            <a:schemeClr val="accent1"/>
-          </a:effectRef>
-          <a:fontRef idx="minor">
-            <a:schemeClr val="lt1"/>
-          </a:fontRef>
-        </p:style>
-        <p:txBody>
-          <a:bodyPr rtlCol="0" anchor="ctr" wrap="square" lIns="45720" rIns="45720"/>
-          <a:lstStyle/>
-          <a:p>
-            <a:pPr algn="l">
-              <a:defRPr sz="1400" b="1">
-                <a:solidFill>
-                  <a:srgbClr val="6D28D9"/>
-                </a:solidFill>
-              </a:defRPr>
-            </a:pPr>
-            <a:r>
-              <a:t>Client &amp; Framework</a:t>
-            </a:r>
-          </a:p>
-          <a:p>
-            <a:pPr algn="l">
-              <a:defRPr sz="1100">
+              <a:t>•  Browser automation — Playwright (Chromium) for real execution proofs and login-macro recording, streamed live via a Docker-hosted VNC stack</a:t>
+            </a:r>
+          </a:p>
+          <a:p>
+            <a:pPr>
+              <a:lnSpc>
+                <a:spcPct val="120000"/>
+              </a:lnSpc>
+              <a:spcAft>
+                <a:spcPts val="900"/>
+              </a:spcAft>
+              <a:defRPr sz="1600" b="0">
                 <a:solidFill>
                   <a:srgbClr val="1C1E21"/>
                 </a:solidFill>
               </a:defRPr>
             </a:pPr>
             <a:r>
-              <a:t>Clickjacking, prototype pollution, GraphQL, WebSocket security</a:t>
-            </a:r>
-          </a:p>
-        </p:txBody>
-      </p:sp>
-      <p:sp>
-        <p:nvSpPr>
-          <p:cNvPr id="11" name="Rounded Rectangle 10"/>
-          <p:cNvSpPr/>
-          <p:nvPr/>
-        </p:nvSpPr>
-        <p:spPr>
-          <a:xfrm>
-            <a:off x="502920" y="4242816"/>
-            <a:ext cx="3657600" cy="1234440"/>
-          </a:xfrm>
-          <a:prstGeom prst="roundRect">
-            <a:avLst/>
-          </a:prstGeom>
-          <a:solidFill>
-            <a:srgbClr val="F3EEFB"/>
-          </a:solidFill>
-          <a:ln w="15875">
-            <a:solidFill>
-              <a:srgbClr val="E3E5E9"/>
-            </a:solidFill>
-          </a:ln>
-          <a:effectLst/>
-        </p:spPr>
-        <p:style>
-          <a:lnRef idx="1">
-            <a:schemeClr val="accent1"/>
-          </a:lnRef>
-          <a:fillRef idx="3">
-            <a:schemeClr val="accent1"/>
-          </a:fillRef>
-          <a:effectRef idx="2">
-            <a:schemeClr val="accent1"/>
-          </a:effectRef>
-          <a:fontRef idx="minor">
-            <a:schemeClr val="lt1"/>
-          </a:fontRef>
-        </p:style>
-        <p:txBody>
-          <a:bodyPr rtlCol="0" anchor="ctr" wrap="square" lIns="45720" rIns="45720"/>
-          <a:lstStyle/>
-          <a:p>
-            <a:pPr algn="l">
-              <a:defRPr sz="1400" b="1">
-                <a:solidFill>
-                  <a:srgbClr val="6D28D9"/>
-                </a:solidFill>
-              </a:defRPr>
-            </a:pPr>
-            <a:r>
-              <a:t>Data Handling</a:t>
-            </a:r>
-          </a:p>
-          <a:p>
-            <a:pPr algn="l">
-              <a:defRPr sz="1100">
-                <a:solidFill>
-                  <a:srgbClr val="1C1E21"/>
-                </a:solidFill>
-              </a:defRPr>
-            </a:pPr>
-            <a:r>
-              <a:t>XXE, insecure deserialization, file upload incl. polyglot bypass</a:t>
-            </a:r>
-          </a:p>
-        </p:txBody>
-      </p:sp>
-      <p:sp>
-        <p:nvSpPr>
-          <p:cNvPr id="12" name="Rounded Rectangle 11"/>
-          <p:cNvSpPr/>
-          <p:nvPr/>
-        </p:nvSpPr>
-        <p:spPr>
-          <a:xfrm>
-            <a:off x="4297680" y="4242816"/>
-            <a:ext cx="3657600" cy="1234440"/>
-          </a:xfrm>
-          <a:prstGeom prst="roundRect">
-            <a:avLst/>
-          </a:prstGeom>
-          <a:solidFill>
-            <a:srgbClr val="F3EEFB"/>
-          </a:solidFill>
-          <a:ln w="15875">
-            <a:solidFill>
-              <a:srgbClr val="E3E5E9"/>
-            </a:solidFill>
-          </a:ln>
-          <a:effectLst/>
-        </p:spPr>
-        <p:style>
-          <a:lnRef idx="1">
-            <a:schemeClr val="accent1"/>
-          </a:lnRef>
-          <a:fillRef idx="3">
-            <a:schemeClr val="accent1"/>
-          </a:fillRef>
-          <a:effectRef idx="2">
-            <a:schemeClr val="accent1"/>
-          </a:effectRef>
-          <a:fontRef idx="minor">
-            <a:schemeClr val="lt1"/>
-          </a:fontRef>
-        </p:style>
-        <p:txBody>
-          <a:bodyPr rtlCol="0" anchor="ctr" wrap="square" lIns="45720" rIns="45720"/>
-          <a:lstStyle/>
-          <a:p>
-            <a:pPr algn="l">
-              <a:defRPr sz="1400" b="1">
-                <a:solidFill>
-                  <a:srgbClr val="6D28D9"/>
-                </a:solidFill>
-              </a:defRPr>
-            </a:pPr>
-            <a:r>
-              <a:t>Network</a:t>
-            </a:r>
-          </a:p>
-          <a:p>
-            <a:pPr algn="l">
-              <a:defRPr sz="1100">
-                <a:solidFill>
-                  <a:srgbClr val="1C1E21"/>
-                </a:solidFill>
-              </a:defRPr>
-            </a:pPr>
-            <a:r>
-              <a:t>SSRF with real out-of-band callback proof</a:t>
-            </a:r>
-          </a:p>
-        </p:txBody>
-      </p:sp>
-      <p:sp>
-        <p:nvSpPr>
-          <p:cNvPr id="13" name="Rounded Rectangle 12"/>
-          <p:cNvSpPr/>
-          <p:nvPr/>
-        </p:nvSpPr>
-        <p:spPr>
-          <a:xfrm>
-            <a:off x="8092440" y="4242816"/>
-            <a:ext cx="3657600" cy="1234440"/>
-          </a:xfrm>
-          <a:prstGeom prst="roundRect">
-            <a:avLst/>
-          </a:prstGeom>
-          <a:solidFill>
-            <a:srgbClr val="F3EEFB"/>
-          </a:solidFill>
-          <a:ln w="15875">
-            <a:solidFill>
-              <a:srgbClr val="E3E5E9"/>
-            </a:solidFill>
-          </a:ln>
-          <a:effectLst/>
-        </p:spPr>
-        <p:style>
-          <a:lnRef idx="1">
-            <a:schemeClr val="accent1"/>
-          </a:lnRef>
-          <a:fillRef idx="3">
-            <a:schemeClr val="accent1"/>
-          </a:fillRef>
-          <a:effectRef idx="2">
-            <a:schemeClr val="accent1"/>
-          </a:effectRef>
-          <a:fontRef idx="minor">
-            <a:schemeClr val="lt1"/>
-          </a:fontRef>
-        </p:style>
-        <p:txBody>
-          <a:bodyPr rtlCol="0" anchor="ctr" wrap="square" lIns="45720" rIns="45720"/>
-          <a:lstStyle/>
-          <a:p>
-            <a:pPr algn="l">
-              <a:defRPr sz="1400" b="1">
-                <a:solidFill>
-                  <a:srgbClr val="6D28D9"/>
-                </a:solidFill>
-              </a:defRPr>
-            </a:pPr>
-            <a:r>
-              <a:t>Config &amp; Disclosure</a:t>
-            </a:r>
-          </a:p>
-          <a:p>
-            <a:pPr algn="l">
-              <a:defRPr sz="1100">
-                <a:solidFill>
-                  <a:srgbClr val="1C1E21"/>
-                </a:solidFill>
-              </a:defRPr>
-            </a:pPr>
-            <a:r>
-              <a:t>Security headers, HSTS, cookie flags, version disclosure</a:t>
-            </a:r>
-          </a:p>
-        </p:txBody>
-      </p:sp>
-      <p:sp>
-        <p:nvSpPr>
-          <p:cNvPr id="14" name="TextBox 13"/>
+              <a:t>•  Deployment &amp; integrations — Docker Compose end to end; Jira/Slack/Teams/Outlook/Burp/CMDB/VGS/SSO integrations, plus a standalone browser extension for native setups</a:t>
+            </a:r>
+          </a:p>
+        </p:txBody>
+      </p:sp>
+      <p:sp>
+        <p:nvSpPr>
+          <p:cNvPr id="6" name="TextBox 5"/>
           <p:cNvSpPr txBox="1"/>
           <p:nvPr/>
         </p:nvSpPr>
@@ -10577,14 +10033,14 @@
               </a:defRPr>
             </a:pPr>
             <a:r>
-              <a:t>7</a:t>
-            </a:r>
-          </a:p>
-        </p:txBody>
-      </p:sp>
-      <p:sp>
-        <p:nvSpPr>
-          <p:cNvPr id="15" name="TextBox 14"/>
+              <a:t>6</a:t>
+            </a:r>
+          </a:p>
+        </p:txBody>
+      </p:sp>
+      <p:sp>
+        <p:nvSpPr>
+          <p:cNvPr id="7" name="TextBox 6"/>
           <p:cNvSpPr txBox="1"/>
           <p:nvPr/>
         </p:nvSpPr>
@@ -10717,7 +10173,7 @@
               </a:defRPr>
             </a:pPr>
             <a:r>
-              <a:t>MULTI-AGENT PIPELINE</a:t>
+              <a:t>MULTI-AGENT SCANNING ENGINE</a:t>
             </a:r>
           </a:p>
         </p:txBody>
@@ -10730,7 +10186,7 @@
         </p:nvSpPr>
         <p:spPr>
           <a:xfrm>
-            <a:off x="548640" y="457200"/>
+            <a:off x="548640" y="411480"/>
             <a:ext cx="11094415" cy="822960"/>
           </a:xfrm>
           <a:prstGeom prst="rect">
@@ -10745,7 +10201,7 @@
           <a:lstStyle/>
           <a:p>
             <a:pPr>
-              <a:defRPr sz="2600" b="1">
+              <a:defRPr sz="2800" b="1">
                 <a:solidFill>
                   <a:srgbClr val="1C1E21"/>
                 </a:solidFill>
@@ -10753,45 +10209,624 @@
               </a:defRPr>
             </a:pPr>
             <a:r>
-              <a:t>Scan Lifecycle</a:t>
-            </a:r>
-          </a:p>
-        </p:txBody>
-      </p:sp>
-      <p:pic>
-        <p:nvPicPr>
-          <p:cNvPr id="5" name="Picture 4" descr="03_scan_lifecycle.png"/>
-          <p:cNvPicPr>
-            <a:picLocks noChangeAspect="1"/>
-          </p:cNvPicPr>
-          <p:nvPr/>
-        </p:nvPicPr>
-        <p:blipFill>
-          <a:blip r:embed="rId2"/>
-          <a:stretch>
-            <a:fillRect/>
-          </a:stretch>
-        </p:blipFill>
-        <p:spPr>
-          <a:xfrm>
-            <a:off x="457200" y="1234440"/>
-            <a:ext cx="4929768" cy="4892040"/>
-          </a:xfrm>
-          <a:prstGeom prst="rect">
-            <a:avLst/>
-          </a:prstGeom>
-        </p:spPr>
-      </p:pic>
-      <p:sp>
-        <p:nvSpPr>
-          <p:cNvPr id="6" name="TextBox 5"/>
+              <a:t>31 detection agents in the scan graph</a:t>
+            </a:r>
+          </a:p>
+        </p:txBody>
+      </p:sp>
+      <p:sp>
+        <p:nvSpPr>
+          <p:cNvPr id="5" name="Rounded Rectangle 4"/>
+          <p:cNvSpPr/>
+          <p:nvPr/>
+        </p:nvSpPr>
+        <p:spPr>
+          <a:xfrm>
+            <a:off x="502920" y="1554480"/>
+            <a:ext cx="3657600" cy="1234440"/>
+          </a:xfrm>
+          <a:prstGeom prst="roundRect">
+            <a:avLst/>
+          </a:prstGeom>
+          <a:solidFill>
+            <a:srgbClr val="F3EEFB"/>
+          </a:solidFill>
+          <a:ln w="15875">
+            <a:solidFill>
+              <a:srgbClr val="E3E5E9"/>
+            </a:solidFill>
+          </a:ln>
+          <a:effectLst/>
+        </p:spPr>
+        <p:style>
+          <a:lnRef idx="1">
+            <a:schemeClr val="accent1"/>
+          </a:lnRef>
+          <a:fillRef idx="3">
+            <a:schemeClr val="accent1"/>
+          </a:fillRef>
+          <a:effectRef idx="2">
+            <a:schemeClr val="accent1"/>
+          </a:effectRef>
+          <a:fontRef idx="minor">
+            <a:schemeClr val="lt1"/>
+          </a:fontRef>
+        </p:style>
+        <p:txBody>
+          <a:bodyPr rtlCol="0" anchor="ctr" wrap="square" lIns="45720" rIns="45720"/>
+          <a:lstStyle/>
+          <a:p>
+            <a:pPr algn="l">
+              <a:defRPr sz="1400" b="1">
+                <a:solidFill>
+                  <a:srgbClr val="6D28D9"/>
+                </a:solidFill>
+              </a:defRPr>
+            </a:pPr>
+            <a:r>
+              <a:t>Injection</a:t>
+            </a:r>
+          </a:p>
+          <a:p>
+            <a:pPr algn="l">
+              <a:defRPr sz="1100">
+                <a:solidFill>
+                  <a:srgbClr val="1C1E21"/>
+                </a:solidFill>
+              </a:defRPr>
+            </a:pPr>
+            <a:r>
+              <a:t>SQLi, OS command injection, SSTI, path traversal, NoSQLi, CSV/formula injection</a:t>
+            </a:r>
+          </a:p>
+        </p:txBody>
+      </p:sp>
+      <p:sp>
+        <p:nvSpPr>
+          <p:cNvPr id="6" name="Rounded Rectangle 5"/>
+          <p:cNvSpPr/>
+          <p:nvPr/>
+        </p:nvSpPr>
+        <p:spPr>
+          <a:xfrm>
+            <a:off x="4297680" y="1554480"/>
+            <a:ext cx="3657600" cy="1234440"/>
+          </a:xfrm>
+          <a:prstGeom prst="roundRect">
+            <a:avLst/>
+          </a:prstGeom>
+          <a:solidFill>
+            <a:srgbClr val="F3EEFB"/>
+          </a:solidFill>
+          <a:ln w="15875">
+            <a:solidFill>
+              <a:srgbClr val="E3E5E9"/>
+            </a:solidFill>
+          </a:ln>
+          <a:effectLst/>
+        </p:spPr>
+        <p:style>
+          <a:lnRef idx="1">
+            <a:schemeClr val="accent1"/>
+          </a:lnRef>
+          <a:fillRef idx="3">
+            <a:schemeClr val="accent1"/>
+          </a:fillRef>
+          <a:effectRef idx="2">
+            <a:schemeClr val="accent1"/>
+          </a:effectRef>
+          <a:fontRef idx="minor">
+            <a:schemeClr val="lt1"/>
+          </a:fontRef>
+        </p:style>
+        <p:txBody>
+          <a:bodyPr rtlCol="0" anchor="ctr" wrap="square" lIns="45720" rIns="45720"/>
+          <a:lstStyle/>
+          <a:p>
+            <a:pPr algn="l">
+              <a:defRPr sz="1400" b="1">
+                <a:solidFill>
+                  <a:srgbClr val="6D28D9"/>
+                </a:solidFill>
+              </a:defRPr>
+            </a:pPr>
+            <a:r>
+              <a:t>XSS</a:t>
+            </a:r>
+          </a:p>
+          <a:p>
+            <a:pPr algn="l">
+              <a:defRPr sz="1100">
+                <a:solidFill>
+                  <a:srgbClr val="1C1E21"/>
+                </a:solidFill>
+              </a:defRPr>
+            </a:pPr>
+            <a:r>
+              <a:t>Reflected, DOM-based, stored — with real browser execution proof</a:t>
+            </a:r>
+          </a:p>
+        </p:txBody>
+      </p:sp>
+      <p:sp>
+        <p:nvSpPr>
+          <p:cNvPr id="7" name="Rounded Rectangle 6"/>
+          <p:cNvSpPr/>
+          <p:nvPr/>
+        </p:nvSpPr>
+        <p:spPr>
+          <a:xfrm>
+            <a:off x="8092440" y="1554480"/>
+            <a:ext cx="3657600" cy="1234440"/>
+          </a:xfrm>
+          <a:prstGeom prst="roundRect">
+            <a:avLst/>
+          </a:prstGeom>
+          <a:solidFill>
+            <a:srgbClr val="F3EEFB"/>
+          </a:solidFill>
+          <a:ln w="15875">
+            <a:solidFill>
+              <a:srgbClr val="E3E5E9"/>
+            </a:solidFill>
+          </a:ln>
+          <a:effectLst/>
+        </p:spPr>
+        <p:style>
+          <a:lnRef idx="1">
+            <a:schemeClr val="accent1"/>
+          </a:lnRef>
+          <a:fillRef idx="3">
+            <a:schemeClr val="accent1"/>
+          </a:fillRef>
+          <a:effectRef idx="2">
+            <a:schemeClr val="accent1"/>
+          </a:effectRef>
+          <a:fontRef idx="minor">
+            <a:schemeClr val="lt1"/>
+          </a:fontRef>
+        </p:style>
+        <p:txBody>
+          <a:bodyPr rtlCol="0" anchor="ctr" wrap="square" lIns="45720" rIns="45720"/>
+          <a:lstStyle/>
+          <a:p>
+            <a:pPr algn="l">
+              <a:defRPr sz="1400" b="1">
+                <a:solidFill>
+                  <a:srgbClr val="6D28D9"/>
+                </a:solidFill>
+              </a:defRPr>
+            </a:pPr>
+            <a:r>
+              <a:t>Access &amp; Auth</a:t>
+            </a:r>
+          </a:p>
+          <a:p>
+            <a:pPr algn="l">
+              <a:defRPr sz="1100">
+                <a:solidFill>
+                  <a:srgbClr val="1C1E21"/>
+                </a:solidFill>
+              </a:defRPr>
+            </a:pPr>
+            <a:r>
+              <a:t>Access control, auth bypass, OAuth redirect validation, session invalidation, weak password policy</a:t>
+            </a:r>
+          </a:p>
+        </p:txBody>
+      </p:sp>
+      <p:sp>
+        <p:nvSpPr>
+          <p:cNvPr id="8" name="Rounded Rectangle 7"/>
+          <p:cNvSpPr/>
+          <p:nvPr/>
+        </p:nvSpPr>
+        <p:spPr>
+          <a:xfrm>
+            <a:off x="502920" y="2898648"/>
+            <a:ext cx="3657600" cy="1234440"/>
+          </a:xfrm>
+          <a:prstGeom prst="roundRect">
+            <a:avLst/>
+          </a:prstGeom>
+          <a:solidFill>
+            <a:srgbClr val="F3EEFB"/>
+          </a:solidFill>
+          <a:ln w="15875">
+            <a:solidFill>
+              <a:srgbClr val="E3E5E9"/>
+            </a:solidFill>
+          </a:ln>
+          <a:effectLst/>
+        </p:spPr>
+        <p:style>
+          <a:lnRef idx="1">
+            <a:schemeClr val="accent1"/>
+          </a:lnRef>
+          <a:fillRef idx="3">
+            <a:schemeClr val="accent1"/>
+          </a:fillRef>
+          <a:effectRef idx="2">
+            <a:schemeClr val="accent1"/>
+          </a:effectRef>
+          <a:fontRef idx="minor">
+            <a:schemeClr val="lt1"/>
+          </a:fontRef>
+        </p:style>
+        <p:txBody>
+          <a:bodyPr rtlCol="0" anchor="ctr" wrap="square" lIns="45720" rIns="45720"/>
+          <a:lstStyle/>
+          <a:p>
+            <a:pPr algn="l">
+              <a:defRPr sz="1400" b="1">
+                <a:solidFill>
+                  <a:srgbClr val="6D28D9"/>
+                </a:solidFill>
+              </a:defRPr>
+            </a:pPr>
+            <a:r>
+              <a:t>Business Logic</a:t>
+            </a:r>
+          </a:p>
+          <a:p>
+            <a:pPr algn="l">
+              <a:defRPr sz="1100">
+                <a:solidFill>
+                  <a:srgbClr val="1C1E21"/>
+                </a:solidFill>
+              </a:defRPr>
+            </a:pPr>
+            <a:r>
+              <a:t>IDOR, race conditions, workflow bypass, mass assignment</a:t>
+            </a:r>
+          </a:p>
+        </p:txBody>
+      </p:sp>
+      <p:sp>
+        <p:nvSpPr>
+          <p:cNvPr id="9" name="Rounded Rectangle 8"/>
+          <p:cNvSpPr/>
+          <p:nvPr/>
+        </p:nvSpPr>
+        <p:spPr>
+          <a:xfrm>
+            <a:off x="4297680" y="2898648"/>
+            <a:ext cx="3657600" cy="1234440"/>
+          </a:xfrm>
+          <a:prstGeom prst="roundRect">
+            <a:avLst/>
+          </a:prstGeom>
+          <a:solidFill>
+            <a:srgbClr val="F3EEFB"/>
+          </a:solidFill>
+          <a:ln w="15875">
+            <a:solidFill>
+              <a:srgbClr val="E3E5E9"/>
+            </a:solidFill>
+          </a:ln>
+          <a:effectLst/>
+        </p:spPr>
+        <p:style>
+          <a:lnRef idx="1">
+            <a:schemeClr val="accent1"/>
+          </a:lnRef>
+          <a:fillRef idx="3">
+            <a:schemeClr val="accent1"/>
+          </a:fillRef>
+          <a:effectRef idx="2">
+            <a:schemeClr val="accent1"/>
+          </a:effectRef>
+          <a:fontRef idx="minor">
+            <a:schemeClr val="lt1"/>
+          </a:fontRef>
+        </p:style>
+        <p:txBody>
+          <a:bodyPr rtlCol="0" anchor="ctr" wrap="square" lIns="45720" rIns="45720"/>
+          <a:lstStyle/>
+          <a:p>
+            <a:pPr algn="l">
+              <a:defRPr sz="1400" b="1">
+                <a:solidFill>
+                  <a:srgbClr val="6D28D9"/>
+                </a:solidFill>
+              </a:defRPr>
+            </a:pPr>
+            <a:r>
+              <a:t>Request Integrity</a:t>
+            </a:r>
+          </a:p>
+          <a:p>
+            <a:pPr algn="l">
+              <a:defRPr sz="1100">
+                <a:solidFill>
+                  <a:srgbClr val="1C1E21"/>
+                </a:solidFill>
+              </a:defRPr>
+            </a:pPr>
+            <a:r>
+              <a:t>CSRF, CORS, host header, request smuggling, cache poisoning</a:t>
+            </a:r>
+          </a:p>
+        </p:txBody>
+      </p:sp>
+      <p:sp>
+        <p:nvSpPr>
+          <p:cNvPr id="10" name="Rounded Rectangle 9"/>
+          <p:cNvSpPr/>
+          <p:nvPr/>
+        </p:nvSpPr>
+        <p:spPr>
+          <a:xfrm>
+            <a:off x="8092440" y="2898648"/>
+            <a:ext cx="3657600" cy="1234440"/>
+          </a:xfrm>
+          <a:prstGeom prst="roundRect">
+            <a:avLst/>
+          </a:prstGeom>
+          <a:solidFill>
+            <a:srgbClr val="F3EEFB"/>
+          </a:solidFill>
+          <a:ln w="15875">
+            <a:solidFill>
+              <a:srgbClr val="E3E5E9"/>
+            </a:solidFill>
+          </a:ln>
+          <a:effectLst/>
+        </p:spPr>
+        <p:style>
+          <a:lnRef idx="1">
+            <a:schemeClr val="accent1"/>
+          </a:lnRef>
+          <a:fillRef idx="3">
+            <a:schemeClr val="accent1"/>
+          </a:fillRef>
+          <a:effectRef idx="2">
+            <a:schemeClr val="accent1"/>
+          </a:effectRef>
+          <a:fontRef idx="minor">
+            <a:schemeClr val="lt1"/>
+          </a:fontRef>
+        </p:style>
+        <p:txBody>
+          <a:bodyPr rtlCol="0" anchor="ctr" wrap="square" lIns="45720" rIns="45720"/>
+          <a:lstStyle/>
+          <a:p>
+            <a:pPr algn="l">
+              <a:defRPr sz="1400" b="1">
+                <a:solidFill>
+                  <a:srgbClr val="6D28D9"/>
+                </a:solidFill>
+              </a:defRPr>
+            </a:pPr>
+            <a:r>
+              <a:t>Client &amp; Framework</a:t>
+            </a:r>
+          </a:p>
+          <a:p>
+            <a:pPr algn="l">
+              <a:defRPr sz="1100">
+                <a:solidFill>
+                  <a:srgbClr val="1C1E21"/>
+                </a:solidFill>
+              </a:defRPr>
+            </a:pPr>
+            <a:r>
+              <a:t>Clickjacking, prototype pollution, GraphQL, WebSocket security, known-vulnerable JS components</a:t>
+            </a:r>
+          </a:p>
+        </p:txBody>
+      </p:sp>
+      <p:sp>
+        <p:nvSpPr>
+          <p:cNvPr id="11" name="Rounded Rectangle 10"/>
+          <p:cNvSpPr/>
+          <p:nvPr/>
+        </p:nvSpPr>
+        <p:spPr>
+          <a:xfrm>
+            <a:off x="502920" y="4242816"/>
+            <a:ext cx="3657600" cy="1234440"/>
+          </a:xfrm>
+          <a:prstGeom prst="roundRect">
+            <a:avLst/>
+          </a:prstGeom>
+          <a:solidFill>
+            <a:srgbClr val="F3EEFB"/>
+          </a:solidFill>
+          <a:ln w="15875">
+            <a:solidFill>
+              <a:srgbClr val="E3E5E9"/>
+            </a:solidFill>
+          </a:ln>
+          <a:effectLst/>
+        </p:spPr>
+        <p:style>
+          <a:lnRef idx="1">
+            <a:schemeClr val="accent1"/>
+          </a:lnRef>
+          <a:fillRef idx="3">
+            <a:schemeClr val="accent1"/>
+          </a:fillRef>
+          <a:effectRef idx="2">
+            <a:schemeClr val="accent1"/>
+          </a:effectRef>
+          <a:fontRef idx="minor">
+            <a:schemeClr val="lt1"/>
+          </a:fontRef>
+        </p:style>
+        <p:txBody>
+          <a:bodyPr rtlCol="0" anchor="ctr" wrap="square" lIns="45720" rIns="45720"/>
+          <a:lstStyle/>
+          <a:p>
+            <a:pPr algn="l">
+              <a:defRPr sz="1400" b="1">
+                <a:solidFill>
+                  <a:srgbClr val="6D28D9"/>
+                </a:solidFill>
+              </a:defRPr>
+            </a:pPr>
+            <a:r>
+              <a:t>Data Handling</a:t>
+            </a:r>
+          </a:p>
+          <a:p>
+            <a:pPr algn="l">
+              <a:defRPr sz="1100">
+                <a:solidFill>
+                  <a:srgbClr val="1C1E21"/>
+                </a:solidFill>
+              </a:defRPr>
+            </a:pPr>
+            <a:r>
+              <a:t>XXE, insecure deserialization, file upload incl. polyglot bypass</a:t>
+            </a:r>
+          </a:p>
+        </p:txBody>
+      </p:sp>
+      <p:sp>
+        <p:nvSpPr>
+          <p:cNvPr id="12" name="Rounded Rectangle 11"/>
+          <p:cNvSpPr/>
+          <p:nvPr/>
+        </p:nvSpPr>
+        <p:spPr>
+          <a:xfrm>
+            <a:off x="4297680" y="4242816"/>
+            <a:ext cx="3657600" cy="1234440"/>
+          </a:xfrm>
+          <a:prstGeom prst="roundRect">
+            <a:avLst/>
+          </a:prstGeom>
+          <a:solidFill>
+            <a:srgbClr val="F3EEFB"/>
+          </a:solidFill>
+          <a:ln w="15875">
+            <a:solidFill>
+              <a:srgbClr val="E3E5E9"/>
+            </a:solidFill>
+          </a:ln>
+          <a:effectLst/>
+        </p:spPr>
+        <p:style>
+          <a:lnRef idx="1">
+            <a:schemeClr val="accent1"/>
+          </a:lnRef>
+          <a:fillRef idx="3">
+            <a:schemeClr val="accent1"/>
+          </a:fillRef>
+          <a:effectRef idx="2">
+            <a:schemeClr val="accent1"/>
+          </a:effectRef>
+          <a:fontRef idx="minor">
+            <a:schemeClr val="lt1"/>
+          </a:fontRef>
+        </p:style>
+        <p:txBody>
+          <a:bodyPr rtlCol="0" anchor="ctr" wrap="square" lIns="45720" rIns="45720"/>
+          <a:lstStyle/>
+          <a:p>
+            <a:pPr algn="l">
+              <a:defRPr sz="1400" b="1">
+                <a:solidFill>
+                  <a:srgbClr val="6D28D9"/>
+                </a:solidFill>
+              </a:defRPr>
+            </a:pPr>
+            <a:r>
+              <a:t>Network</a:t>
+            </a:r>
+          </a:p>
+          <a:p>
+            <a:pPr algn="l">
+              <a:defRPr sz="1100">
+                <a:solidFill>
+                  <a:srgbClr val="1C1E21"/>
+                </a:solidFill>
+              </a:defRPr>
+            </a:pPr>
+            <a:r>
+              <a:t>SSRF with real out-of-band callback proof</a:t>
+            </a:r>
+          </a:p>
+        </p:txBody>
+      </p:sp>
+      <p:sp>
+        <p:nvSpPr>
+          <p:cNvPr id="13" name="Rounded Rectangle 12"/>
+          <p:cNvSpPr/>
+          <p:nvPr/>
+        </p:nvSpPr>
+        <p:spPr>
+          <a:xfrm>
+            <a:off x="8092440" y="4242816"/>
+            <a:ext cx="3657600" cy="1234440"/>
+          </a:xfrm>
+          <a:prstGeom prst="roundRect">
+            <a:avLst/>
+          </a:prstGeom>
+          <a:solidFill>
+            <a:srgbClr val="F3EEFB"/>
+          </a:solidFill>
+          <a:ln w="15875">
+            <a:solidFill>
+              <a:srgbClr val="E3E5E9"/>
+            </a:solidFill>
+          </a:ln>
+          <a:effectLst/>
+        </p:spPr>
+        <p:style>
+          <a:lnRef idx="1">
+            <a:schemeClr val="accent1"/>
+          </a:lnRef>
+          <a:fillRef idx="3">
+            <a:schemeClr val="accent1"/>
+          </a:fillRef>
+          <a:effectRef idx="2">
+            <a:schemeClr val="accent1"/>
+          </a:effectRef>
+          <a:fontRef idx="minor">
+            <a:schemeClr val="lt1"/>
+          </a:fontRef>
+        </p:style>
+        <p:txBody>
+          <a:bodyPr rtlCol="0" anchor="ctr" wrap="square" lIns="45720" rIns="45720"/>
+          <a:lstStyle/>
+          <a:p>
+            <a:pPr algn="l">
+              <a:defRPr sz="1400" b="1">
+                <a:solidFill>
+                  <a:srgbClr val="6D28D9"/>
+                </a:solidFill>
+              </a:defRPr>
+            </a:pPr>
+            <a:r>
+              <a:t>Config &amp; Disclosure</a:t>
+            </a:r>
+          </a:p>
+          <a:p>
+            <a:pPr algn="l">
+              <a:defRPr sz="1100">
+                <a:solidFill>
+                  <a:srgbClr val="1C1E21"/>
+                </a:solidFill>
+              </a:defRPr>
+            </a:pPr>
+            <a:r>
+              <a:t>Security headers, HSTS, cookie flags, version disclosure</a:t>
+            </a:r>
+          </a:p>
+        </p:txBody>
+      </p:sp>
+      <p:sp>
+        <p:nvSpPr>
+          <p:cNvPr id="14" name="TextBox 13"/>
           <p:cNvSpPr txBox="1"/>
           <p:nvPr/>
         </p:nvSpPr>
         <p:spPr>
           <a:xfrm>
-            <a:off x="548640" y="6172200"/>
-            <a:ext cx="11094415" cy="365760"/>
+            <a:off x="11094415" y="6400800"/>
+            <a:ext cx="822960" cy="320040"/>
           </a:xfrm>
           <a:prstGeom prst="rect">
             <a:avLst/>
@@ -10804,41 +10839,6 @@
           </a:bodyPr>
           <a:lstStyle/>
           <a:p>
-            <a:pPr algn="ctr">
-              <a:defRPr sz="1100" i="1">
-                <a:solidFill>
-                  <a:srgbClr val="5B6270"/>
-                </a:solidFill>
-              </a:defRPr>
-            </a:pPr>
-            <a:r>
-              <a:t>The real, verified 24-node graph — zero conditional edges, every node always runs. chain_analysis is a 25th step that runs after the graph completes.</a:t>
-            </a:r>
-          </a:p>
-        </p:txBody>
-      </p:sp>
-      <p:sp>
-        <p:nvSpPr>
-          <p:cNvPr id="7" name="TextBox 6"/>
-          <p:cNvSpPr txBox="1"/>
-          <p:nvPr/>
-        </p:nvSpPr>
-        <p:spPr>
-          <a:xfrm>
-            <a:off x="11094415" y="6400800"/>
-            <a:ext cx="822960" cy="320040"/>
-          </a:xfrm>
-          <a:prstGeom prst="rect">
-            <a:avLst/>
-          </a:prstGeom>
-          <a:noFill/>
-        </p:spPr>
-        <p:txBody>
-          <a:bodyPr wrap="none">
-            <a:spAutoFit/>
-          </a:bodyPr>
-          <a:lstStyle/>
-          <a:p>
             <a:pPr algn="r">
               <a:defRPr sz="1000">
                 <a:solidFill>
@@ -10847,14 +10847,14 @@
               </a:defRPr>
             </a:pPr>
             <a:r>
-              <a:t>8</a:t>
-            </a:r>
-          </a:p>
-        </p:txBody>
-      </p:sp>
-      <p:sp>
-        <p:nvSpPr>
-          <p:cNvPr id="8" name="TextBox 7"/>
+              <a:t>7</a:t>
+            </a:r>
+          </a:p>
+        </p:txBody>
+      </p:sp>
+      <p:sp>
+        <p:nvSpPr>
+          <p:cNvPr id="15" name="TextBox 14"/>
           <p:cNvSpPr txBox="1"/>
           <p:nvPr/>
         </p:nvSpPr>
@@ -10987,7 +10987,7 @@
               </a:defRPr>
             </a:pPr>
             <a:r>
-              <a:t>QUALITY BAR</a:t>
+              <a:t>MULTI-AGENT PIPELINE</a:t>
             </a:r>
           </a:p>
         </p:txBody>
@@ -11023,14 +11023,14 @@
               </a:defRPr>
             </a:pPr>
             <a:r>
-              <a:t>Confirmed-Only Findings</a:t>
+              <a:t>Scan Lifecycle</a:t>
             </a:r>
           </a:p>
         </p:txBody>
       </p:sp>
       <p:pic>
         <p:nvPicPr>
-          <p:cNvPr id="5" name="Picture 4" descr="04_confirmed_only_findings.png"/>
+          <p:cNvPr id="5" name="Picture 4" descr="03_scan_lifecycle.png"/>
           <p:cNvPicPr>
             <a:picLocks noChangeAspect="1"/>
           </p:cNvPicPr>
@@ -11045,7 +11045,7 @@
         <p:spPr>
           <a:xfrm>
             <a:off x="457200" y="1234440"/>
-            <a:ext cx="19081390" cy="4892040"/>
+            <a:ext cx="4929768" cy="4892040"/>
           </a:xfrm>
           <a:prstGeom prst="rect">
             <a:avLst/>
@@ -11082,7 +11082,7 @@
               </a:defRPr>
             </a:pPr>
             <a:r>
-              <a:t>A candidate must survive deterministic re-execution and adversarial LLM validation before it becomes a Finding — or it becomes a human-reviewed candidate.</a:t>
+              <a:t>The real, verified 31-node graph — zero conditional edges, every node always runs. chain_analysis is a 32nd step that runs after the graph completes.</a:t>
             </a:r>
           </a:p>
         </p:txBody>
@@ -11117,7 +11117,7 @@
               </a:defRPr>
             </a:pPr>
             <a:r>
-              <a:t>9</a:t>
+              <a:t>8</a:t>
             </a:r>
           </a:p>
         </p:txBody>
@@ -11257,7 +11257,7 @@
               </a:defRPr>
             </a:pPr>
             <a:r>
-              <a:t>AI PROVIDER ABSTRACTION</a:t>
+              <a:t>QUALITY BAR</a:t>
             </a:r>
           </a:p>
         </p:txBody>
@@ -11293,14 +11293,14 @@
               </a:defRPr>
             </a:pPr>
             <a:r>
-              <a:t>Bring Your Own LLM</a:t>
+              <a:t>Confirmed-Only Findings</a:t>
             </a:r>
           </a:p>
         </p:txBody>
       </p:sp>
       <p:pic>
         <p:nvPicPr>
-          <p:cNvPr id="5" name="Picture 4" descr="05_ai_provider_resolution.png"/>
+          <p:cNvPr id="5" name="Picture 4" descr="04_confirmed_only_findings.png"/>
           <p:cNvPicPr>
             <a:picLocks noChangeAspect="1"/>
           </p:cNvPicPr>
@@ -11315,7 +11315,7 @@
         <p:spPr>
           <a:xfrm>
             <a:off x="457200" y="1234440"/>
-            <a:ext cx="2848048" cy="4892040"/>
+            <a:ext cx="19081390" cy="4892040"/>
           </a:xfrm>
           <a:prstGeom prst="rect">
             <a:avLst/>
@@ -11352,7 +11352,7 @@
               </a:defRPr>
             </a:pPr>
             <a:r>
-              <a:t>Claude, OpenAI, Gemini, Grok, or any in-house OpenAI-compatible model — configured once in the UI. A $2.00/scan hard cost cap is enforced underneath.</a:t>
+              <a:t>A candidate must survive deterministic re-execution and adversarial LLM validation before it becomes a Finding — or it becomes a human-reviewed candidate.</a:t>
             </a:r>
           </a:p>
         </p:txBody>
@@ -11387,7 +11387,7 @@
               </a:defRPr>
             </a:pPr>
             <a:r>
-              <a:t>10</a:t>
+              <a:t>9</a:t>
             </a:r>
           </a:p>
         </p:txBody>

--- a/docs/architecture-overview/Verdikt_Presentation.pptx
+++ b/docs/architecture-overview/Verdikt_Presentation.pptx
@@ -20,6 +20,7 @@
     <p:sldId id="267" r:id="rId18"/>
     <p:sldId id="268" r:id="rId19"/>
     <p:sldId id="269" r:id="rId20"/>
+    <p:sldId id="278" r:id="rId29"/>
     <p:sldId id="270" r:id="rId21"/>
     <p:sldId id="271" r:id="rId22"/>
     <p:sldId id="272" r:id="rId23"/>
@@ -3888,6 +3889,42 @@
               <a:t>•  WebSocket security, business logic (race conditions, workflow, mass assignment)</a:t>
             </a:r>
           </a:p>
+          <a:p>
+            <a:pPr>
+              <a:lnSpc>
+                <a:spcPct val="125000"/>
+              </a:lnSpc>
+              <a:spcAft>
+                <a:spcPts val="1000"/>
+              </a:spcAft>
+              <a:defRPr sz="1400" b="0">
+                <a:solidFill>
+                  <a:srgbClr val="1C1E21"/>
+                </a:solidFill>
+              </a:defRPr>
+            </a:pPr>
+            <a:r>
+              <a:t>•  LLM / Chatbot Pentest — OWASP LLM Top 10 2026 + Agentic Top 10 2026: prompt injection, hidden-context extraction, improper output handling, excessive agency, unexpected code execution</a:t>
+            </a:r>
+          </a:p>
+          <a:p>
+            <a:pPr>
+              <a:lnSpc>
+                <a:spcPct val="125000"/>
+              </a:lnSpc>
+              <a:spcAft>
+                <a:spcPts val="1000"/>
+              </a:spcAft>
+              <a:defRPr sz="1400" b="0">
+                <a:solidFill>
+                  <a:srgbClr val="1C1E21"/>
+                </a:solidFill>
+              </a:defRPr>
+            </a:pPr>
+            <a:r>
+              <a:t>•  API-specific &amp; CSP — deprecated API version data exposure, open redirect, JSONP-callback CSP bypass</a:t>
+            </a:r>
+          </a:p>
         </p:txBody>
       </p:sp>
       <p:sp>
@@ -5619,14 +5656,6 @@
 <file path=ppt/slides/slide16.xml><?xml version="1.0" encoding="utf-8"?>
 <p:sld xmlns:a="http://schemas.openxmlformats.org/drawingml/2006/main" xmlns:p="http://schemas.openxmlformats.org/presentationml/2006/main" xmlns:r="http://schemas.openxmlformats.org/officeDocument/2006/relationships">
   <p:cSld>
-    <p:bg>
-      <p:bgPr>
-        <a:solidFill>
-          <a:srgbClr val="FFFFFF"/>
-        </a:solidFill>
-        <a:effectLst/>
-      </p:bgPr>
-    </p:bg>
     <p:spTree>
       <p:nvGrpSpPr>
         <p:cNvPr id="1" name=""/>
@@ -5708,7 +5737,7 @@
               </a:defRPr>
             </a:pPr>
             <a:r>
-              <a:t>CROSS-PLATFORM, ONE COMMAND</a:t>
+              <a:t>DATA HANDLING &amp; SECURITY</a:t>
             </a:r>
           </a:p>
         </p:txBody>
@@ -5721,7 +5750,7 @@
         </p:nvSpPr>
         <p:spPr>
           <a:xfrm>
-            <a:off x="548640" y="457200"/>
+            <a:off x="548640" y="411480"/>
             <a:ext cx="11094415" cy="822960"/>
           </a:xfrm>
           <a:prstGeom prst="rect">
@@ -5744,35 +5773,160 @@
               </a:defRPr>
             </a:pPr>
             <a:r>
-              <a:t>Deployment</a:t>
-            </a:r>
-          </a:p>
-        </p:txBody>
-      </p:sp>
-      <p:pic>
-        <p:nvPicPr>
-          <p:cNvPr id="5" name="Picture 4" descr="06_deployment_topology.png"/>
-          <p:cNvPicPr>
-            <a:picLocks noChangeAspect="1"/>
-          </p:cNvPicPr>
-          <p:nvPr/>
-        </p:nvPicPr>
-        <p:blipFill>
-          <a:blip r:embed="rId2"/>
-          <a:stretch>
-            <a:fillRect/>
-          </a:stretch>
-        </p:blipFill>
-        <p:spPr>
-          <a:xfrm>
-            <a:off x="457200" y="1234440"/>
-            <a:ext cx="12533854" cy="4892040"/>
-          </a:xfrm>
-          <a:prstGeom prst="rect">
-            <a:avLst/>
-          </a:prstGeom>
-        </p:spPr>
-      </p:pic>
+              <a:t>What leaves your infrastructure, and what doesn't</a:t>
+            </a:r>
+          </a:p>
+        </p:txBody>
+      </p:sp>
+      <p:sp>
+        <p:nvSpPr>
+          <p:cNvPr id="5" name="TextBox 4"/>
+          <p:cNvSpPr txBox="1"/>
+          <p:nvPr/>
+        </p:nvSpPr>
+        <p:spPr>
+          <a:xfrm>
+            <a:off x="640080" y="1463040"/>
+            <a:ext cx="10911535" cy="4754880"/>
+          </a:xfrm>
+          <a:prstGeom prst="rect">
+            <a:avLst/>
+          </a:prstGeom>
+          <a:noFill/>
+        </p:spPr>
+        <p:txBody>
+          <a:bodyPr wrap="square">
+            <a:spAutoFit/>
+          </a:bodyPr>
+          <a:lstStyle/>
+          <a:p>
+            <a:pPr>
+              <a:lnSpc>
+                <a:spcPct val="125000"/>
+              </a:lnSpc>
+              <a:spcAft>
+                <a:spcPts val="1000"/>
+              </a:spcAft>
+              <a:defRPr sz="1600" b="0">
+                <a:solidFill>
+                  <a:srgbClr val="1C1E21"/>
+                </a:solidFill>
+              </a:defRPr>
+            </a:pPr>
+            <a:r>
+              <a:t>•  Multi-tenant isolation — every org_id-scoped resource chain (Project → Version → ScanRun → Finding) is enforced at the query layer, not just the UI</a:t>
+            </a:r>
+          </a:p>
+          <a:p>
+            <a:pPr>
+              <a:lnSpc>
+                <a:spcPct val="125000"/>
+              </a:lnSpc>
+              <a:spcAft>
+                <a:spcPts val="1000"/>
+              </a:spcAft>
+              <a:defRPr sz="1600" b="0">
+                <a:solidFill>
+                  <a:srgbClr val="1C1E21"/>
+                </a:solidFill>
+              </a:defRPr>
+            </a:pPr>
+            <a:r>
+              <a:t>•  Scope enforcement — ScopedHttpClient blocks any request outside a Version's declared scope; a scan can't wander off or exfiltrate to unauthorized infrastructure</a:t>
+            </a:r>
+          </a:p>
+          <a:p>
+            <a:pPr>
+              <a:lnSpc>
+                <a:spcPct val="125000"/>
+              </a:lnSpc>
+              <a:spcAft>
+                <a:spcPts val="1000"/>
+              </a:spcAft>
+              <a:defRPr sz="1600" b="0">
+                <a:solidFill>
+                  <a:srgbClr val="1C1E21"/>
+                </a:solidFill>
+              </a:defRPr>
+            </a:pPr>
+            <a:r>
+              <a:t>•  Credential encryption — every stored secret envelope-encrypted via KMS before touching the database; plaintext never logged or echoed back</a:t>
+            </a:r>
+          </a:p>
+          <a:p>
+            <a:pPr>
+              <a:lnSpc>
+                <a:spcPct val="125000"/>
+              </a:lnSpc>
+              <a:spcAft>
+                <a:spcPts val="1000"/>
+              </a:spcAft>
+              <a:defRPr sz="1600" b="0">
+                <a:solidFill>
+                  <a:srgbClr val="1C1E21"/>
+                </a:solidFill>
+              </a:defRPr>
+            </a:pPr>
+            <a:r>
+              <a:t>•  The one real third-party data flow — AI-assisted triage sends truncated request/response snippets to whichever LLM provider is configured for that scan</a:t>
+            </a:r>
+          </a:p>
+          <a:p>
+            <a:pPr>
+              <a:lnSpc>
+                <a:spcPct val="125000"/>
+              </a:lnSpc>
+              <a:spcAft>
+                <a:spcPts val="1000"/>
+              </a:spcAft>
+              <a:defRPr sz="1600" b="0">
+                <a:solidFill>
+                  <a:srgbClr val="1C1E21"/>
+                </a:solidFill>
+              </a:defRPr>
+            </a:pPr>
+            <a:r>
+              <a:t>•  Close it off entirely — point the AI provider at a self-hosted/on-prem endpoint, or run with no AI provider at all; deterministic checks (most of the catalog) still produce real, confirmed findings</a:t>
+            </a:r>
+          </a:p>
+          <a:p>
+            <a:pPr>
+              <a:lnSpc>
+                <a:spcPct val="125000"/>
+              </a:lnSpc>
+              <a:spcAft>
+                <a:spcPts val="1000"/>
+              </a:spcAft>
+              <a:defRPr sz="1600" b="0">
+                <a:solidFill>
+                  <a:srgbClr val="1C1E21"/>
+                </a:solidFill>
+              </a:defRPr>
+            </a:pPr>
+            <a:r>
+              <a:t>•  Evidence storage — screenshots and captured traffic go to local disk or S3, under the deploying organization's own infrastructure</a:t>
+            </a:r>
+          </a:p>
+          <a:p>
+            <a:pPr>
+              <a:lnSpc>
+                <a:spcPct val="125000"/>
+              </a:lnSpc>
+              <a:spcAft>
+                <a:spcPts val="1000"/>
+              </a:spcAft>
+              <a:defRPr sz="1600" b="0">
+                <a:solidFill>
+                  <a:srgbClr val="1C1E21"/>
+                </a:solidFill>
+              </a:defRPr>
+            </a:pPr>
+            <a:r>
+              <a:t>•  No telemetry — no analytics/telemetry SDK of any kind anywhere in the codebase</a:t>
+            </a:r>
+          </a:p>
+        </p:txBody>
+      </p:sp>
       <p:sp>
         <p:nvSpPr>
           <p:cNvPr id="6" name="TextBox 5"/>
@@ -5781,8 +5935,8 @@
         </p:nvSpPr>
         <p:spPr>
           <a:xfrm>
-            <a:off x="548640" y="6172200"/>
-            <a:ext cx="11094415" cy="365760"/>
+            <a:off x="11094415" y="6400800"/>
+            <a:ext cx="822960" cy="320040"/>
           </a:xfrm>
           <a:prstGeom prst="rect">
             <a:avLst/>
@@ -5795,41 +5949,6 @@
           </a:bodyPr>
           <a:lstStyle/>
           <a:p>
-            <a:pPr algn="ctr">
-              <a:defRPr sz="1100" i="1">
-                <a:solidFill>
-                  <a:srgbClr val="5B6270"/>
-                </a:solidFill>
-              </a:defRPr>
-            </a:pPr>
-            <a:r>
-              <a:t>docker compose up — verified end-to-end on a fresh environment; migrations run automatically; works identically on macOS, Linux, and Windows.</a:t>
-            </a:r>
-          </a:p>
-        </p:txBody>
-      </p:sp>
-      <p:sp>
-        <p:nvSpPr>
-          <p:cNvPr id="7" name="TextBox 6"/>
-          <p:cNvSpPr txBox="1"/>
-          <p:nvPr/>
-        </p:nvSpPr>
-        <p:spPr>
-          <a:xfrm>
-            <a:off x="11094415" y="6400800"/>
-            <a:ext cx="822960" cy="320040"/>
-          </a:xfrm>
-          <a:prstGeom prst="rect">
-            <a:avLst/>
-          </a:prstGeom>
-          <a:noFill/>
-        </p:spPr>
-        <p:txBody>
-          <a:bodyPr wrap="none">
-            <a:spAutoFit/>
-          </a:bodyPr>
-          <a:lstStyle/>
-          <a:p>
             <a:pPr algn="r">
               <a:defRPr sz="1000">
                 <a:solidFill>
@@ -5845,7 +5964,7 @@
       </p:sp>
       <p:sp>
         <p:nvSpPr>
-          <p:cNvPr id="8" name="TextBox 7"/>
+          <p:cNvPr id="7" name="TextBox 6"/>
           <p:cNvSpPr txBox="1"/>
           <p:nvPr/>
         </p:nvSpPr>
@@ -5978,7 +6097,7 @@
               </a:defRPr>
             </a:pPr>
             <a:r>
-              <a:t>BY THE NUMBERS</a:t>
+              <a:t>CROSS-PLATFORM, ONE COMMAND</a:t>
             </a:r>
           </a:p>
         </p:txBody>
@@ -5991,7 +6110,7 @@
         </p:nvSpPr>
         <p:spPr>
           <a:xfrm>
-            <a:off x="548640" y="411480"/>
+            <a:off x="548640" y="457200"/>
             <a:ext cx="11094415" cy="822960"/>
           </a:xfrm>
           <a:prstGeom prst="rect">
@@ -6006,7 +6125,7 @@
           <a:lstStyle/>
           <a:p>
             <a:pPr>
-              <a:defRPr sz="2800" b="1">
+              <a:defRPr sz="2600" b="1">
                 <a:solidFill>
                   <a:srgbClr val="1C1E21"/>
                 </a:solidFill>
@@ -6014,565 +6133,45 @@
               </a:defRPr>
             </a:pPr>
             <a:r>
-              <a:t>The codebase, counted — not estimated</a:t>
-            </a:r>
-          </a:p>
-        </p:txBody>
-      </p:sp>
-      <p:sp>
-        <p:nvSpPr>
-          <p:cNvPr id="5" name="Rounded Rectangle 4"/>
-          <p:cNvSpPr/>
-          <p:nvPr/>
-        </p:nvSpPr>
-        <p:spPr>
-          <a:xfrm>
-            <a:off x="457200" y="1737360"/>
-            <a:ext cx="2651760" cy="1554480"/>
-          </a:xfrm>
-          <a:prstGeom prst="roundRect">
-            <a:avLst/>
-          </a:prstGeom>
-          <a:solidFill>
-            <a:srgbClr val="F3EEFB"/>
-          </a:solidFill>
-          <a:ln w="15875">
-            <a:solidFill>
-              <a:srgbClr val="E3E5E9"/>
-            </a:solidFill>
-          </a:ln>
-          <a:effectLst/>
-        </p:spPr>
-        <p:style>
-          <a:lnRef idx="1">
-            <a:schemeClr val="accent1"/>
-          </a:lnRef>
-          <a:fillRef idx="3">
-            <a:schemeClr val="accent1"/>
-          </a:fillRef>
-          <a:effectRef idx="2">
-            <a:schemeClr val="accent1"/>
-          </a:effectRef>
-          <a:fontRef idx="minor">
-            <a:schemeClr val="lt1"/>
-          </a:fontRef>
-        </p:style>
-        <p:txBody>
-          <a:bodyPr rtlCol="0" anchor="ctr" wrap="square" lIns="45720" rIns="45720"/>
-          <a:lstStyle/>
-          <a:p>
-            <a:pPr algn="ctr">
-              <a:defRPr sz="3400" b="1">
-                <a:solidFill>
-                  <a:srgbClr val="6D28D9"/>
-                </a:solidFill>
-              </a:defRPr>
-            </a:pPr>
-            <a:r>
-              <a:t>52</a:t>
-            </a:r>
-          </a:p>
-          <a:p>
-            <a:pPr algn="ctr">
-              <a:defRPr sz="1200">
-                <a:solidFill>
-                  <a:srgbClr val="1C1E21"/>
-                </a:solidFill>
-              </a:defRPr>
-            </a:pPr>
-            <a:r>
-              <a:t>agent files</a:t>
-            </a:r>
-            <a:br/>
-            <a:r>
-              <a:t>(31 wired into the scan graph)</a:t>
-            </a:r>
-          </a:p>
-        </p:txBody>
-      </p:sp>
-      <p:sp>
-        <p:nvSpPr>
-          <p:cNvPr id="6" name="Rounded Rectangle 5"/>
-          <p:cNvSpPr/>
-          <p:nvPr/>
-        </p:nvSpPr>
-        <p:spPr>
-          <a:xfrm>
-            <a:off x="3246120" y="1737360"/>
-            <a:ext cx="2651760" cy="1554480"/>
-          </a:xfrm>
-          <a:prstGeom prst="roundRect">
-            <a:avLst/>
-          </a:prstGeom>
-          <a:solidFill>
-            <a:srgbClr val="F3EEFB"/>
-          </a:solidFill>
-          <a:ln w="15875">
-            <a:solidFill>
-              <a:srgbClr val="E3E5E9"/>
-            </a:solidFill>
-          </a:ln>
-          <a:effectLst/>
-        </p:spPr>
-        <p:style>
-          <a:lnRef idx="1">
-            <a:schemeClr val="accent1"/>
-          </a:lnRef>
-          <a:fillRef idx="3">
-            <a:schemeClr val="accent1"/>
-          </a:fillRef>
-          <a:effectRef idx="2">
-            <a:schemeClr val="accent1"/>
-          </a:effectRef>
-          <a:fontRef idx="minor">
-            <a:schemeClr val="lt1"/>
-          </a:fontRef>
-        </p:style>
-        <p:txBody>
-          <a:bodyPr rtlCol="0" anchor="ctr" wrap="square" lIns="45720" rIns="45720"/>
-          <a:lstStyle/>
-          <a:p>
-            <a:pPr algn="ctr">
-              <a:defRPr sz="3400" b="1">
-                <a:solidFill>
-                  <a:srgbClr val="6D28D9"/>
-                </a:solidFill>
-              </a:defRPr>
-            </a:pPr>
-            <a:r>
-              <a:t>30</a:t>
-            </a:r>
-          </a:p>
-          <a:p>
-            <a:pPr algn="ctr">
-              <a:defRPr sz="1200">
-                <a:solidFill>
-                  <a:srgbClr val="1C1E21"/>
-                </a:solidFill>
-              </a:defRPr>
-            </a:pPr>
-            <a:r>
-              <a:t>API route modules</a:t>
-            </a:r>
-          </a:p>
-        </p:txBody>
-      </p:sp>
-      <p:sp>
-        <p:nvSpPr>
-          <p:cNvPr id="7" name="Rounded Rectangle 6"/>
-          <p:cNvSpPr/>
-          <p:nvPr/>
-        </p:nvSpPr>
-        <p:spPr>
-          <a:xfrm>
-            <a:off x="6035040" y="1737360"/>
-            <a:ext cx="2651760" cy="1554480"/>
-          </a:xfrm>
-          <a:prstGeom prst="roundRect">
-            <a:avLst/>
-          </a:prstGeom>
-          <a:solidFill>
-            <a:srgbClr val="F3EEFB"/>
-          </a:solidFill>
-          <a:ln w="15875">
-            <a:solidFill>
-              <a:srgbClr val="E3E5E9"/>
-            </a:solidFill>
-          </a:ln>
-          <a:effectLst/>
-        </p:spPr>
-        <p:style>
-          <a:lnRef idx="1">
-            <a:schemeClr val="accent1"/>
-          </a:lnRef>
-          <a:fillRef idx="3">
-            <a:schemeClr val="accent1"/>
-          </a:fillRef>
-          <a:effectRef idx="2">
-            <a:schemeClr val="accent1"/>
-          </a:effectRef>
-          <a:fontRef idx="minor">
-            <a:schemeClr val="lt1"/>
-          </a:fontRef>
-        </p:style>
-        <p:txBody>
-          <a:bodyPr rtlCol="0" anchor="ctr" wrap="square" lIns="45720" rIns="45720"/>
-          <a:lstStyle/>
-          <a:p>
-            <a:pPr algn="ctr">
-              <a:defRPr sz="3400" b="1">
-                <a:solidFill>
-                  <a:srgbClr val="6D28D9"/>
-                </a:solidFill>
-              </a:defRPr>
-            </a:pPr>
-            <a:r>
-              <a:t>~34</a:t>
-            </a:r>
-          </a:p>
-          <a:p>
-            <a:pPr algn="ctr">
-              <a:defRPr sz="1200">
-                <a:solidFill>
-                  <a:srgbClr val="1C1E21"/>
-                </a:solidFill>
-              </a:defRPr>
-            </a:pPr>
-            <a:r>
-              <a:t>persisted data models</a:t>
-            </a:r>
-          </a:p>
-        </p:txBody>
-      </p:sp>
-      <p:sp>
-        <p:nvSpPr>
-          <p:cNvPr id="8" name="Rounded Rectangle 7"/>
-          <p:cNvSpPr/>
-          <p:nvPr/>
-        </p:nvSpPr>
-        <p:spPr>
-          <a:xfrm>
-            <a:off x="8823960" y="1737360"/>
-            <a:ext cx="2651760" cy="1554480"/>
-          </a:xfrm>
-          <a:prstGeom prst="roundRect">
-            <a:avLst/>
-          </a:prstGeom>
-          <a:solidFill>
-            <a:srgbClr val="F3EEFB"/>
-          </a:solidFill>
-          <a:ln w="15875">
-            <a:solidFill>
-              <a:srgbClr val="E3E5E9"/>
-            </a:solidFill>
-          </a:ln>
-          <a:effectLst/>
-        </p:spPr>
-        <p:style>
-          <a:lnRef idx="1">
-            <a:schemeClr val="accent1"/>
-          </a:lnRef>
-          <a:fillRef idx="3">
-            <a:schemeClr val="accent1"/>
-          </a:fillRef>
-          <a:effectRef idx="2">
-            <a:schemeClr val="accent1"/>
-          </a:effectRef>
-          <a:fontRef idx="minor">
-            <a:schemeClr val="lt1"/>
-          </a:fontRef>
-        </p:style>
-        <p:txBody>
-          <a:bodyPr rtlCol="0" anchor="ctr" wrap="square" lIns="45720" rIns="45720"/>
-          <a:lstStyle/>
-          <a:p>
-            <a:pPr algn="ctr">
-              <a:defRPr sz="3400" b="1">
-                <a:solidFill>
-                  <a:srgbClr val="6D28D9"/>
-                </a:solidFill>
-              </a:defRPr>
-            </a:pPr>
-            <a:r>
-              <a:t>10</a:t>
-            </a:r>
-          </a:p>
-          <a:p>
-            <a:pPr algn="ctr">
-              <a:defRPr sz="1200">
-                <a:solidFill>
-                  <a:srgbClr val="1C1E21"/>
-                </a:solidFill>
-              </a:defRPr>
-            </a:pPr>
-            <a:r>
-              <a:t>external integrations</a:t>
-            </a:r>
-          </a:p>
-        </p:txBody>
-      </p:sp>
-      <p:sp>
-        <p:nvSpPr>
-          <p:cNvPr id="9" name="Rounded Rectangle 8"/>
-          <p:cNvSpPr/>
-          <p:nvPr/>
-        </p:nvSpPr>
-        <p:spPr>
-          <a:xfrm>
-            <a:off x="457200" y="3474720"/>
-            <a:ext cx="2651760" cy="1554480"/>
-          </a:xfrm>
-          <a:prstGeom prst="roundRect">
-            <a:avLst/>
-          </a:prstGeom>
-          <a:solidFill>
-            <a:srgbClr val="F3EEFB"/>
-          </a:solidFill>
-          <a:ln w="15875">
-            <a:solidFill>
-              <a:srgbClr val="E3E5E9"/>
-            </a:solidFill>
-          </a:ln>
-          <a:effectLst/>
-        </p:spPr>
-        <p:style>
-          <a:lnRef idx="1">
-            <a:schemeClr val="accent1"/>
-          </a:lnRef>
-          <a:fillRef idx="3">
-            <a:schemeClr val="accent1"/>
-          </a:fillRef>
-          <a:effectRef idx="2">
-            <a:schemeClr val="accent1"/>
-          </a:effectRef>
-          <a:fontRef idx="minor">
-            <a:schemeClr val="lt1"/>
-          </a:fontRef>
-        </p:style>
-        <p:txBody>
-          <a:bodyPr rtlCol="0" anchor="ctr" wrap="square" lIns="45720" rIns="45720"/>
-          <a:lstStyle/>
-          <a:p>
-            <a:pPr algn="ctr">
-              <a:defRPr sz="3400" b="1">
-                <a:solidFill>
-                  <a:srgbClr val="6D28D9"/>
-                </a:solidFill>
-              </a:defRPr>
-            </a:pPr>
-            <a:r>
-              <a:t>39</a:t>
-            </a:r>
-          </a:p>
-          <a:p>
-            <a:pPr algn="ctr">
-              <a:defRPr sz="1200">
-                <a:solidFill>
-                  <a:srgbClr val="1C1E21"/>
-                </a:solidFill>
-              </a:defRPr>
-            </a:pPr>
-            <a:r>
-              <a:t>static check IDs</a:t>
-            </a:r>
-            <a:br/>
-            <a:r>
-              <a:t>across 18 YAML catalogs</a:t>
-            </a:r>
-          </a:p>
-        </p:txBody>
-      </p:sp>
-      <p:sp>
-        <p:nvSpPr>
-          <p:cNvPr id="10" name="Rounded Rectangle 9"/>
-          <p:cNvSpPr/>
-          <p:nvPr/>
-        </p:nvSpPr>
-        <p:spPr>
-          <a:xfrm>
-            <a:off x="3246120" y="3474720"/>
-            <a:ext cx="2651760" cy="1554480"/>
-          </a:xfrm>
-          <a:prstGeom prst="roundRect">
-            <a:avLst/>
-          </a:prstGeom>
-          <a:solidFill>
-            <a:srgbClr val="F3EEFB"/>
-          </a:solidFill>
-          <a:ln w="15875">
-            <a:solidFill>
-              <a:srgbClr val="E3E5E9"/>
-            </a:solidFill>
-          </a:ln>
-          <a:effectLst/>
-        </p:spPr>
-        <p:style>
-          <a:lnRef idx="1">
-            <a:schemeClr val="accent1"/>
-          </a:lnRef>
-          <a:fillRef idx="3">
-            <a:schemeClr val="accent1"/>
-          </a:fillRef>
-          <a:effectRef idx="2">
-            <a:schemeClr val="accent1"/>
-          </a:effectRef>
-          <a:fontRef idx="minor">
-            <a:schemeClr val="lt1"/>
-          </a:fontRef>
-        </p:style>
-        <p:txBody>
-          <a:bodyPr rtlCol="0" anchor="ctr" wrap="square" lIns="45720" rIns="45720"/>
-          <a:lstStyle/>
-          <a:p>
-            <a:pPr algn="ctr">
-              <a:defRPr sz="3400" b="1">
-                <a:solidFill>
-                  <a:srgbClr val="6D28D9"/>
-                </a:solidFill>
-              </a:defRPr>
-            </a:pPr>
-            <a:r>
-              <a:t>36</a:t>
-            </a:r>
-          </a:p>
-          <a:p>
-            <a:pPr algn="ctr">
-              <a:defRPr sz="1200">
-                <a:solidFill>
-                  <a:srgbClr val="1C1E21"/>
-                </a:solidFill>
-              </a:defRPr>
-            </a:pPr>
-            <a:r>
-              <a:t>Alembic migrations</a:t>
-            </a:r>
-          </a:p>
-        </p:txBody>
-      </p:sp>
-      <p:sp>
-        <p:nvSpPr>
-          <p:cNvPr id="11" name="Rounded Rectangle 10"/>
-          <p:cNvSpPr/>
-          <p:nvPr/>
-        </p:nvSpPr>
-        <p:spPr>
-          <a:xfrm>
-            <a:off x="6035040" y="3474720"/>
-            <a:ext cx="2651760" cy="1554480"/>
-          </a:xfrm>
-          <a:prstGeom prst="roundRect">
-            <a:avLst/>
-          </a:prstGeom>
-          <a:solidFill>
-            <a:srgbClr val="F3EEFB"/>
-          </a:solidFill>
-          <a:ln w="15875">
-            <a:solidFill>
-              <a:srgbClr val="E3E5E9"/>
-            </a:solidFill>
-          </a:ln>
-          <a:effectLst/>
-        </p:spPr>
-        <p:style>
-          <a:lnRef idx="1">
-            <a:schemeClr val="accent1"/>
-          </a:lnRef>
-          <a:fillRef idx="3">
-            <a:schemeClr val="accent1"/>
-          </a:fillRef>
-          <a:effectRef idx="2">
-            <a:schemeClr val="accent1"/>
-          </a:effectRef>
-          <a:fontRef idx="minor">
-            <a:schemeClr val="lt1"/>
-          </a:fontRef>
-        </p:style>
-        <p:txBody>
-          <a:bodyPr rtlCol="0" anchor="ctr" wrap="square" lIns="45720" rIns="45720"/>
-          <a:lstStyle/>
-          <a:p>
-            <a:pPr algn="ctr">
-              <a:defRPr sz="3400" b="1">
-                <a:solidFill>
-                  <a:srgbClr val="6D28D9"/>
-                </a:solidFill>
-              </a:defRPr>
-            </a:pPr>
-            <a:r>
-              <a:t>20×4</a:t>
-            </a:r>
-          </a:p>
-          <a:p>
-            <a:pPr algn="ctr">
-              <a:defRPr sz="1200">
-                <a:solidFill>
-                  <a:srgbClr val="1C1E21"/>
-                </a:solidFill>
-              </a:defRPr>
-            </a:pPr>
-            <a:r>
-              <a:t>RBAC resources × actions</a:t>
-            </a:r>
-          </a:p>
-        </p:txBody>
-      </p:sp>
-      <p:sp>
-        <p:nvSpPr>
-          <p:cNvPr id="12" name="Rounded Rectangle 11"/>
-          <p:cNvSpPr/>
-          <p:nvPr/>
-        </p:nvSpPr>
-        <p:spPr>
-          <a:xfrm>
-            <a:off x="8823960" y="3474720"/>
-            <a:ext cx="2651760" cy="1554480"/>
-          </a:xfrm>
-          <a:prstGeom prst="roundRect">
-            <a:avLst/>
-          </a:prstGeom>
-          <a:solidFill>
-            <a:srgbClr val="F3EEFB"/>
-          </a:solidFill>
-          <a:ln w="15875">
-            <a:solidFill>
-              <a:srgbClr val="E3E5E9"/>
-            </a:solidFill>
-          </a:ln>
-          <a:effectLst/>
-        </p:spPr>
-        <p:style>
-          <a:lnRef idx="1">
-            <a:schemeClr val="accent1"/>
-          </a:lnRef>
-          <a:fillRef idx="3">
-            <a:schemeClr val="accent1"/>
-          </a:fillRef>
-          <a:effectRef idx="2">
-            <a:schemeClr val="accent1"/>
-          </a:effectRef>
-          <a:fontRef idx="minor">
-            <a:schemeClr val="lt1"/>
-          </a:fontRef>
-        </p:style>
-        <p:txBody>
-          <a:bodyPr rtlCol="0" anchor="ctr" wrap="square" lIns="45720" rIns="45720"/>
-          <a:lstStyle/>
-          <a:p>
-            <a:pPr algn="ctr">
-              <a:defRPr sz="3400" b="1">
-                <a:solidFill>
-                  <a:srgbClr val="6D28D9"/>
-                </a:solidFill>
-              </a:defRPr>
-            </a:pPr>
-            <a:r>
-              <a:t>667</a:t>
-            </a:r>
-          </a:p>
-          <a:p>
-            <a:pPr algn="ctr">
-              <a:defRPr sz="1200">
-                <a:solidFill>
-                  <a:srgbClr val="1C1E21"/>
-                </a:solidFill>
-              </a:defRPr>
-            </a:pPr>
-            <a:r>
-              <a:t>tests across 119 files</a:t>
-            </a:r>
-          </a:p>
-        </p:txBody>
-      </p:sp>
-      <p:sp>
-        <p:nvSpPr>
-          <p:cNvPr id="13" name="TextBox 12"/>
+              <a:t>Deployment</a:t>
+            </a:r>
+          </a:p>
+        </p:txBody>
+      </p:sp>
+      <p:pic>
+        <p:nvPicPr>
+          <p:cNvPr id="5" name="Picture 4" descr="06_deployment_topology.png"/>
+          <p:cNvPicPr>
+            <a:picLocks noChangeAspect="1"/>
+          </p:cNvPicPr>
+          <p:nvPr/>
+        </p:nvPicPr>
+        <p:blipFill>
+          <a:blip r:embed="rId2"/>
+          <a:stretch>
+            <a:fillRect/>
+          </a:stretch>
+        </p:blipFill>
+        <p:spPr>
+          <a:xfrm>
+            <a:off x="457200" y="1234440"/>
+            <a:ext cx="12533854" cy="4892040"/>
+          </a:xfrm>
+          <a:prstGeom prst="rect">
+            <a:avLst/>
+          </a:prstGeom>
+        </p:spPr>
+      </p:pic>
+      <p:sp>
+        <p:nvSpPr>
+          <p:cNvPr id="6" name="TextBox 5"/>
           <p:cNvSpPr txBox="1"/>
           <p:nvPr/>
         </p:nvSpPr>
         <p:spPr>
           <a:xfrm>
-            <a:off x="548640" y="6035040"/>
-            <a:ext cx="11094415" cy="457200"/>
+            <a:off x="548640" y="6172200"/>
+            <a:ext cx="11094415" cy="365760"/>
           </a:xfrm>
           <a:prstGeom prst="rect">
             <a:avLst/>
@@ -6586,21 +6185,21 @@
           <a:lstStyle/>
           <a:p>
             <a:pPr algn="ctr">
-              <a:defRPr i="1" sz="1200">
+              <a:defRPr sz="1100" i="1">
                 <a:solidFill>
                   <a:srgbClr val="5B6270"/>
                 </a:solidFill>
               </a:defRPr>
             </a:pPr>
             <a:r>
-              <a:t>Verified by direct code inspection and by running the test collector — not estimated.</a:t>
-            </a:r>
-          </a:p>
-        </p:txBody>
-      </p:sp>
-      <p:sp>
-        <p:nvSpPr>
-          <p:cNvPr id="14" name="TextBox 13"/>
+              <a:t>docker compose up — verified end-to-end on a fresh environment; migrations run automatically; works identically on macOS, Linux, and Windows.</a:t>
+            </a:r>
+          </a:p>
+        </p:txBody>
+      </p:sp>
+      <p:sp>
+        <p:nvSpPr>
+          <p:cNvPr id="7" name="TextBox 6"/>
           <p:cNvSpPr txBox="1"/>
           <p:nvPr/>
         </p:nvSpPr>
@@ -6635,7 +6234,7 @@
       </p:sp>
       <p:sp>
         <p:nvSpPr>
-          <p:cNvPr id="15" name="TextBox 14"/>
+          <p:cNvPr id="8" name="TextBox 7"/>
           <p:cNvSpPr txBox="1"/>
           <p:nvPr/>
         </p:nvSpPr>
@@ -6768,7 +6367,7 @@
               </a:defRPr>
             </a:pPr>
             <a:r>
-              <a:t>AN HONEST LOOK</a:t>
+              <a:t>BY THE NUMBERS</a:t>
             </a:r>
           </a:p>
         </p:txBody>
@@ -6804,7 +6403,7 @@
               </a:defRPr>
             </a:pPr>
             <a:r>
-              <a:t>Spec vs. reality</a:t>
+              <a:t>The codebase, counted — not estimated</a:t>
             </a:r>
           </a:p>
         </p:txBody>
@@ -6817,8 +6416,8 @@
         </p:nvSpPr>
         <p:spPr>
           <a:xfrm>
-            <a:off x="548640" y="1554480"/>
-            <a:ext cx="5394960" cy="4480560"/>
+            <a:off x="457200" y="1737360"/>
+            <a:ext cx="2651760" cy="1554480"/>
           </a:xfrm>
           <a:prstGeom prst="roundRect">
             <a:avLst/>
@@ -6828,7 +6427,7 @@
           </a:solidFill>
           <a:ln w="15875">
             <a:solidFill>
-              <a:srgbClr val="6D28D9"/>
+              <a:srgbClr val="E3E5E9"/>
             </a:solidFill>
           </a:ln>
           <a:effectLst/>
@@ -6852,12 +6451,31 @@
           <a:lstStyle/>
           <a:p>
             <a:pPr algn="ctr">
-              <a:defRPr sz="1300" b="0">
+              <a:defRPr sz="3400" b="1">
+                <a:solidFill>
+                  <a:srgbClr val="6D28D9"/>
+                </a:solidFill>
+              </a:defRPr>
+            </a:pPr>
+            <a:r>
+              <a:t>57</a:t>
+            </a:r>
+          </a:p>
+          <a:p>
+            <a:pPr algn="ctr">
+              <a:defRPr sz="1200">
                 <a:solidFill>
                   <a:srgbClr val="1C1E21"/>
                 </a:solidFill>
               </a:defRPr>
             </a:pPr>
+            <a:r>
+              <a:t>agent files</a:t>
+            </a:r>
+            <a:br/>
+            <a:r>
+              <a:t>(35 wired into the scan graph)</a:t>
+            </a:r>
           </a:p>
         </p:txBody>
       </p:sp>
@@ -6869,8 +6487,8 @@
         </p:nvSpPr>
         <p:spPr>
           <a:xfrm>
-            <a:off x="6217920" y="1554480"/>
-            <a:ext cx="5394960" cy="4480560"/>
+            <a:off x="3246120" y="1737360"/>
+            <a:ext cx="2651760" cy="1554480"/>
           </a:xfrm>
           <a:prstGeom prst="roundRect">
             <a:avLst/>
@@ -6880,7 +6498,7 @@
           </a:solidFill>
           <a:ln w="15875">
             <a:solidFill>
-              <a:srgbClr val="6D28D9"/>
+              <a:srgbClr val="E3E5E9"/>
             </a:solidFill>
           </a:ln>
           <a:effectLst/>
@@ -6904,227 +6522,446 @@
           <a:lstStyle/>
           <a:p>
             <a:pPr algn="ctr">
-              <a:defRPr sz="1300" b="0">
+              <a:defRPr sz="3400" b="1">
+                <a:solidFill>
+                  <a:srgbClr val="6D28D9"/>
+                </a:solidFill>
+              </a:defRPr>
+            </a:pPr>
+            <a:r>
+              <a:t>32</a:t>
+            </a:r>
+          </a:p>
+          <a:p>
+            <a:pPr algn="ctr">
+              <a:defRPr sz="1200">
                 <a:solidFill>
                   <a:srgbClr val="1C1E21"/>
                 </a:solidFill>
               </a:defRPr>
             </a:pPr>
-          </a:p>
-        </p:txBody>
-      </p:sp>
-      <p:sp>
-        <p:nvSpPr>
-          <p:cNvPr id="7" name="TextBox 6"/>
+            <a:r>
+              <a:t>API route modules</a:t>
+            </a:r>
+          </a:p>
+        </p:txBody>
+      </p:sp>
+      <p:sp>
+        <p:nvSpPr>
+          <p:cNvPr id="7" name="Rounded Rectangle 6"/>
+          <p:cNvSpPr/>
+          <p:nvPr/>
+        </p:nvSpPr>
+        <p:spPr>
+          <a:xfrm>
+            <a:off x="6035040" y="1737360"/>
+            <a:ext cx="2651760" cy="1554480"/>
+          </a:xfrm>
+          <a:prstGeom prst="roundRect">
+            <a:avLst/>
+          </a:prstGeom>
+          <a:solidFill>
+            <a:srgbClr val="F3EEFB"/>
+          </a:solidFill>
+          <a:ln w="15875">
+            <a:solidFill>
+              <a:srgbClr val="E3E5E9"/>
+            </a:solidFill>
+          </a:ln>
+          <a:effectLst/>
+        </p:spPr>
+        <p:style>
+          <a:lnRef idx="1">
+            <a:schemeClr val="accent1"/>
+          </a:lnRef>
+          <a:fillRef idx="3">
+            <a:schemeClr val="accent1"/>
+          </a:fillRef>
+          <a:effectRef idx="2">
+            <a:schemeClr val="accent1"/>
+          </a:effectRef>
+          <a:fontRef idx="minor">
+            <a:schemeClr val="lt1"/>
+          </a:fontRef>
+        </p:style>
+        <p:txBody>
+          <a:bodyPr rtlCol="0" anchor="ctr" wrap="square" lIns="45720" rIns="45720"/>
+          <a:lstStyle/>
+          <a:p>
+            <a:pPr algn="ctr">
+              <a:defRPr sz="3400" b="1">
+                <a:solidFill>
+                  <a:srgbClr val="6D28D9"/>
+                </a:solidFill>
+              </a:defRPr>
+            </a:pPr>
+            <a:r>
+              <a:t>36</a:t>
+            </a:r>
+          </a:p>
+          <a:p>
+            <a:pPr algn="ctr">
+              <a:defRPr sz="1200">
+                <a:solidFill>
+                  <a:srgbClr val="1C1E21"/>
+                </a:solidFill>
+              </a:defRPr>
+            </a:pPr>
+            <a:r>
+              <a:t>persisted data models</a:t>
+            </a:r>
+          </a:p>
+        </p:txBody>
+      </p:sp>
+      <p:sp>
+        <p:nvSpPr>
+          <p:cNvPr id="8" name="Rounded Rectangle 7"/>
+          <p:cNvSpPr/>
+          <p:nvPr/>
+        </p:nvSpPr>
+        <p:spPr>
+          <a:xfrm>
+            <a:off x="8823960" y="1737360"/>
+            <a:ext cx="2651760" cy="1554480"/>
+          </a:xfrm>
+          <a:prstGeom prst="roundRect">
+            <a:avLst/>
+          </a:prstGeom>
+          <a:solidFill>
+            <a:srgbClr val="F3EEFB"/>
+          </a:solidFill>
+          <a:ln w="15875">
+            <a:solidFill>
+              <a:srgbClr val="E3E5E9"/>
+            </a:solidFill>
+          </a:ln>
+          <a:effectLst/>
+        </p:spPr>
+        <p:style>
+          <a:lnRef idx="1">
+            <a:schemeClr val="accent1"/>
+          </a:lnRef>
+          <a:fillRef idx="3">
+            <a:schemeClr val="accent1"/>
+          </a:fillRef>
+          <a:effectRef idx="2">
+            <a:schemeClr val="accent1"/>
+          </a:effectRef>
+          <a:fontRef idx="minor">
+            <a:schemeClr val="lt1"/>
+          </a:fontRef>
+        </p:style>
+        <p:txBody>
+          <a:bodyPr rtlCol="0" anchor="ctr" wrap="square" lIns="45720" rIns="45720"/>
+          <a:lstStyle/>
+          <a:p>
+            <a:pPr algn="ctr">
+              <a:defRPr sz="3400" b="1">
+                <a:solidFill>
+                  <a:srgbClr val="6D28D9"/>
+                </a:solidFill>
+              </a:defRPr>
+            </a:pPr>
+            <a:r>
+              <a:t>10</a:t>
+            </a:r>
+          </a:p>
+          <a:p>
+            <a:pPr algn="ctr">
+              <a:defRPr sz="1200">
+                <a:solidFill>
+                  <a:srgbClr val="1C1E21"/>
+                </a:solidFill>
+              </a:defRPr>
+            </a:pPr>
+            <a:r>
+              <a:t>external integrations</a:t>
+            </a:r>
+          </a:p>
+        </p:txBody>
+      </p:sp>
+      <p:sp>
+        <p:nvSpPr>
+          <p:cNvPr id="9" name="Rounded Rectangle 8"/>
+          <p:cNvSpPr/>
+          <p:nvPr/>
+        </p:nvSpPr>
+        <p:spPr>
+          <a:xfrm>
+            <a:off x="457200" y="3474720"/>
+            <a:ext cx="2651760" cy="1554480"/>
+          </a:xfrm>
+          <a:prstGeom prst="roundRect">
+            <a:avLst/>
+          </a:prstGeom>
+          <a:solidFill>
+            <a:srgbClr val="F3EEFB"/>
+          </a:solidFill>
+          <a:ln w="15875">
+            <a:solidFill>
+              <a:srgbClr val="E3E5E9"/>
+            </a:solidFill>
+          </a:ln>
+          <a:effectLst/>
+        </p:spPr>
+        <p:style>
+          <a:lnRef idx="1">
+            <a:schemeClr val="accent1"/>
+          </a:lnRef>
+          <a:fillRef idx="3">
+            <a:schemeClr val="accent1"/>
+          </a:fillRef>
+          <a:effectRef idx="2">
+            <a:schemeClr val="accent1"/>
+          </a:effectRef>
+          <a:fontRef idx="minor">
+            <a:schemeClr val="lt1"/>
+          </a:fontRef>
+        </p:style>
+        <p:txBody>
+          <a:bodyPr rtlCol="0" anchor="ctr" wrap="square" lIns="45720" rIns="45720"/>
+          <a:lstStyle/>
+          <a:p>
+            <a:pPr algn="ctr">
+              <a:defRPr sz="3400" b="1">
+                <a:solidFill>
+                  <a:srgbClr val="6D28D9"/>
+                </a:solidFill>
+              </a:defRPr>
+            </a:pPr>
+            <a:r>
+              <a:t>47</a:t>
+            </a:r>
+          </a:p>
+          <a:p>
+            <a:pPr algn="ctr">
+              <a:defRPr sz="1200">
+                <a:solidFill>
+                  <a:srgbClr val="1C1E21"/>
+                </a:solidFill>
+              </a:defRPr>
+            </a:pPr>
+            <a:r>
+              <a:t>static check IDs</a:t>
+            </a:r>
+            <a:br/>
+            <a:r>
+              <a:t>across 22 YAML catalogs</a:t>
+            </a:r>
+          </a:p>
+        </p:txBody>
+      </p:sp>
+      <p:sp>
+        <p:nvSpPr>
+          <p:cNvPr id="10" name="Rounded Rectangle 9"/>
+          <p:cNvSpPr/>
+          <p:nvPr/>
+        </p:nvSpPr>
+        <p:spPr>
+          <a:xfrm>
+            <a:off x="3246120" y="3474720"/>
+            <a:ext cx="2651760" cy="1554480"/>
+          </a:xfrm>
+          <a:prstGeom prst="roundRect">
+            <a:avLst/>
+          </a:prstGeom>
+          <a:solidFill>
+            <a:srgbClr val="F3EEFB"/>
+          </a:solidFill>
+          <a:ln w="15875">
+            <a:solidFill>
+              <a:srgbClr val="E3E5E9"/>
+            </a:solidFill>
+          </a:ln>
+          <a:effectLst/>
+        </p:spPr>
+        <p:style>
+          <a:lnRef idx="1">
+            <a:schemeClr val="accent1"/>
+          </a:lnRef>
+          <a:fillRef idx="3">
+            <a:schemeClr val="accent1"/>
+          </a:fillRef>
+          <a:effectRef idx="2">
+            <a:schemeClr val="accent1"/>
+          </a:effectRef>
+          <a:fontRef idx="minor">
+            <a:schemeClr val="lt1"/>
+          </a:fontRef>
+        </p:style>
+        <p:txBody>
+          <a:bodyPr rtlCol="0" anchor="ctr" wrap="square" lIns="45720" rIns="45720"/>
+          <a:lstStyle/>
+          <a:p>
+            <a:pPr algn="ctr">
+              <a:defRPr sz="3400" b="1">
+                <a:solidFill>
+                  <a:srgbClr val="6D28D9"/>
+                </a:solidFill>
+              </a:defRPr>
+            </a:pPr>
+            <a:r>
+              <a:t>39</a:t>
+            </a:r>
+          </a:p>
+          <a:p>
+            <a:pPr algn="ctr">
+              <a:defRPr sz="1200">
+                <a:solidFill>
+                  <a:srgbClr val="1C1E21"/>
+                </a:solidFill>
+              </a:defRPr>
+            </a:pPr>
+            <a:r>
+              <a:t>Alembic migrations</a:t>
+            </a:r>
+          </a:p>
+        </p:txBody>
+      </p:sp>
+      <p:sp>
+        <p:nvSpPr>
+          <p:cNvPr id="11" name="Rounded Rectangle 10"/>
+          <p:cNvSpPr/>
+          <p:nvPr/>
+        </p:nvSpPr>
+        <p:spPr>
+          <a:xfrm>
+            <a:off x="6035040" y="3474720"/>
+            <a:ext cx="2651760" cy="1554480"/>
+          </a:xfrm>
+          <a:prstGeom prst="roundRect">
+            <a:avLst/>
+          </a:prstGeom>
+          <a:solidFill>
+            <a:srgbClr val="F3EEFB"/>
+          </a:solidFill>
+          <a:ln w="15875">
+            <a:solidFill>
+              <a:srgbClr val="E3E5E9"/>
+            </a:solidFill>
+          </a:ln>
+          <a:effectLst/>
+        </p:spPr>
+        <p:style>
+          <a:lnRef idx="1">
+            <a:schemeClr val="accent1"/>
+          </a:lnRef>
+          <a:fillRef idx="3">
+            <a:schemeClr val="accent1"/>
+          </a:fillRef>
+          <a:effectRef idx="2">
+            <a:schemeClr val="accent1"/>
+          </a:effectRef>
+          <a:fontRef idx="minor">
+            <a:schemeClr val="lt1"/>
+          </a:fontRef>
+        </p:style>
+        <p:txBody>
+          <a:bodyPr rtlCol="0" anchor="ctr" wrap="square" lIns="45720" rIns="45720"/>
+          <a:lstStyle/>
+          <a:p>
+            <a:pPr algn="ctr">
+              <a:defRPr sz="3400" b="1">
+                <a:solidFill>
+                  <a:srgbClr val="6D28D9"/>
+                </a:solidFill>
+              </a:defRPr>
+            </a:pPr>
+            <a:r>
+              <a:t>21×4</a:t>
+            </a:r>
+          </a:p>
+          <a:p>
+            <a:pPr algn="ctr">
+              <a:defRPr sz="1200">
+                <a:solidFill>
+                  <a:srgbClr val="1C1E21"/>
+                </a:solidFill>
+              </a:defRPr>
+            </a:pPr>
+            <a:r>
+              <a:t>RBAC resources × actions</a:t>
+            </a:r>
+          </a:p>
+        </p:txBody>
+      </p:sp>
+      <p:sp>
+        <p:nvSpPr>
+          <p:cNvPr id="12" name="Rounded Rectangle 11"/>
+          <p:cNvSpPr/>
+          <p:nvPr/>
+        </p:nvSpPr>
+        <p:spPr>
+          <a:xfrm>
+            <a:off x="8823960" y="3474720"/>
+            <a:ext cx="2651760" cy="1554480"/>
+          </a:xfrm>
+          <a:prstGeom prst="roundRect">
+            <a:avLst/>
+          </a:prstGeom>
+          <a:solidFill>
+            <a:srgbClr val="F3EEFB"/>
+          </a:solidFill>
+          <a:ln w="15875">
+            <a:solidFill>
+              <a:srgbClr val="E3E5E9"/>
+            </a:solidFill>
+          </a:ln>
+          <a:effectLst/>
+        </p:spPr>
+        <p:style>
+          <a:lnRef idx="1">
+            <a:schemeClr val="accent1"/>
+          </a:lnRef>
+          <a:fillRef idx="3">
+            <a:schemeClr val="accent1"/>
+          </a:fillRef>
+          <a:effectRef idx="2">
+            <a:schemeClr val="accent1"/>
+          </a:effectRef>
+          <a:fontRef idx="minor">
+            <a:schemeClr val="lt1"/>
+          </a:fontRef>
+        </p:style>
+        <p:txBody>
+          <a:bodyPr rtlCol="0" anchor="ctr" wrap="square" lIns="45720" rIns="45720"/>
+          <a:lstStyle/>
+          <a:p>
+            <a:pPr algn="ctr">
+              <a:defRPr sz="3400" b="1">
+                <a:solidFill>
+                  <a:srgbClr val="6D28D9"/>
+                </a:solidFill>
+              </a:defRPr>
+            </a:pPr>
+            <a:r>
+              <a:t>721</a:t>
+            </a:r>
+          </a:p>
+          <a:p>
+            <a:pPr algn="ctr">
+              <a:defRPr sz="1200">
+                <a:solidFill>
+                  <a:srgbClr val="1C1E21"/>
+                </a:solidFill>
+              </a:defRPr>
+            </a:pPr>
+            <a:r>
+              <a:t>tests across 126 files</a:t>
+            </a:r>
+          </a:p>
+        </p:txBody>
+      </p:sp>
+      <p:sp>
+        <p:nvSpPr>
+          <p:cNvPr id="13" name="TextBox 12"/>
           <p:cNvSpPr txBox="1"/>
           <p:nvPr/>
         </p:nvSpPr>
         <p:spPr>
           <a:xfrm>
-            <a:off x="777240" y="1737360"/>
-            <a:ext cx="4937760" cy="4114800"/>
-          </a:xfrm>
-          <a:prstGeom prst="rect">
-            <a:avLst/>
-          </a:prstGeom>
-          <a:noFill/>
-        </p:spPr>
-        <p:txBody>
-          <a:bodyPr wrap="square">
-            <a:spAutoFit/>
-          </a:bodyPr>
-          <a:lstStyle/>
-          <a:p>
-            <a:pPr>
-              <a:defRPr b="1" sz="1600">
-                <a:solidFill>
-                  <a:srgbClr val="6D28D9"/>
-                </a:solidFill>
-              </a:defRPr>
-            </a:pPr>
-            <a:r>
-              <a:t>Built less than originally specified</a:t>
-            </a:r>
-          </a:p>
-          <a:p>
-            <a:pPr>
-              <a:spcAft>
-                <a:spcPts val="700"/>
-              </a:spcAft>
-              <a:defRPr sz="1300"/>
-            </a:pPr>
-            <a:r>
-              <a:t>•  Pre-scan authorization gate — built, then fully removed</a:t>
-            </a:r>
-          </a:p>
-          <a:p>
-            <a:pPr>
-              <a:spcAft>
-                <a:spcPts val="700"/>
-              </a:spcAft>
-              <a:defRPr sz="1300"/>
-            </a:pPr>
-            <a:r>
-              <a:t>•  Human-in-the-loop approval checkpoints — not built</a:t>
-            </a:r>
-          </a:p>
-          <a:p>
-            <a:pPr>
-              <a:spcAft>
-                <a:spcPts val="700"/>
-              </a:spcAft>
-              <a:defRPr sz="1300"/>
-            </a:pPr>
-            <a:r>
-              <a:t>•  Smart Scan graph-level routing — only one narrow case (SSTI)</a:t>
-            </a:r>
-          </a:p>
-          <a:p>
-            <a:pPr>
-              <a:spcAft>
-                <a:spcPts val="700"/>
-              </a:spcAft>
-              <a:defRPr sz="1300"/>
-            </a:pPr>
-            <a:r>
-              <a:t>•  Orchestration engine — LangGraph, not Temporal.io (the spec's primary recommendation)</a:t>
-            </a:r>
-          </a:p>
-          <a:p>
-            <a:pPr>
-              <a:spcAft>
-                <a:spcPts val="700"/>
-              </a:spcAft>
-              <a:defRPr sz="1300"/>
-            </a:pPr>
-            <a:r>
-              <a:t>•  Depth slider (Quick/Standard/Deep) — not built</a:t>
-            </a:r>
-          </a:p>
-          <a:p>
-            <a:pPr>
-              <a:spcAft>
-                <a:spcPts val="700"/>
-              </a:spcAft>
-              <a:defRPr sz="1300"/>
-            </a:pPr>
-            <a:r>
-              <a:t>•  Cross-credential-set result caching — not built</a:t>
-            </a:r>
-          </a:p>
-        </p:txBody>
-      </p:sp>
-      <p:sp>
-        <p:nvSpPr>
-          <p:cNvPr id="8" name="TextBox 7"/>
-          <p:cNvSpPr txBox="1"/>
-          <p:nvPr/>
-        </p:nvSpPr>
-        <p:spPr>
-          <a:xfrm>
-            <a:off x="6446520" y="1737360"/>
-            <a:ext cx="4937760" cy="4114800"/>
-          </a:xfrm>
-          <a:prstGeom prst="rect">
-            <a:avLst/>
-          </a:prstGeom>
-          <a:noFill/>
-        </p:spPr>
-        <p:txBody>
-          <a:bodyPr wrap="square">
-            <a:spAutoFit/>
-          </a:bodyPr>
-          <a:lstStyle/>
-          <a:p>
-            <a:pPr>
-              <a:defRPr b="1" sz="1600">
-                <a:solidFill>
-                  <a:srgbClr val="6D28D9"/>
-                </a:solidFill>
-              </a:defRPr>
-            </a:pPr>
-            <a:r>
-              <a:t>Built beyond what was specified</a:t>
-            </a:r>
-          </a:p>
-          <a:p>
-            <a:pPr>
-              <a:spcAft>
-                <a:spcPts val="700"/>
-              </a:spcAft>
-              <a:defRPr sz="1300"/>
-            </a:pPr>
-            <a:r>
-              <a:t>•  VGS integration — spec asked for webhook push only; shipped three modes (webhook, native workspace, per-scan-run export)</a:t>
-            </a:r>
-          </a:p>
-          <a:p>
-            <a:pPr>
-              <a:spcAft>
-                <a:spcPts val="700"/>
-              </a:spcAft>
-              <a:defRPr sz="1300"/>
-            </a:pPr>
-            <a:r>
-              <a:t>•  Image-polyglot file-upload bypass technique</a:t>
-            </a:r>
-          </a:p>
-          <a:p>
-            <a:pPr>
-              <a:spcAft>
-                <a:spcPts val="700"/>
-              </a:spcAft>
-              <a:defRPr sz="1300"/>
-            </a:pPr>
-            <a:r>
-              <a:t>•  "Load from PortSwigger" scraper integration</a:t>
-            </a:r>
-          </a:p>
-          <a:p>
-            <a:pPr>
-              <a:spcAft>
-                <a:spcPts val="700"/>
-              </a:spcAft>
-              <a:defRPr sz="1300"/>
-            </a:pPr>
-            <a:r>
-              <a:t>•  UI-only, per-org default AI provider configuration</a:t>
-            </a:r>
-          </a:p>
-          <a:p>
-            <a:pPr>
-              <a:spcAft>
-                <a:spcPts val="700"/>
-              </a:spcAft>
-              <a:defRPr sz="1300"/>
-            </a:pPr>
-            <a:r>
-              <a:t>•  A genuine conversational Microsoft Teams bot</a:t>
-            </a:r>
-          </a:p>
-          <a:p>
-            <a:pPr>
-              <a:spcAft>
-                <a:spcPts val="700"/>
-              </a:spcAft>
-              <a:defRPr sz="1300"/>
-            </a:pPr>
-            <a:r>
-              <a:t>•  Two independent login-macro recorders, four checks ported from a sibling DAST project, and (2nd attempt) automatic, zero-config per-task model tiering</a:t>
-            </a:r>
-          </a:p>
-        </p:txBody>
-      </p:sp>
-      <p:sp>
-        <p:nvSpPr>
-          <p:cNvPr id="9" name="TextBox 8"/>
-          <p:cNvSpPr txBox="1"/>
-          <p:nvPr/>
-        </p:nvSpPr>
-        <p:spPr>
-          <a:xfrm>
-            <a:off x="11094415" y="6400800"/>
-            <a:ext cx="822960" cy="320040"/>
+            <a:off x="548640" y="6035040"/>
+            <a:ext cx="11094415" cy="457200"/>
           </a:xfrm>
           <a:prstGeom prst="rect">
             <a:avLst/>
@@ -7137,6 +6974,41 @@
           </a:bodyPr>
           <a:lstStyle/>
           <a:p>
+            <a:pPr algn="ctr">
+              <a:defRPr i="1" sz="1200">
+                <a:solidFill>
+                  <a:srgbClr val="5B6270"/>
+                </a:solidFill>
+              </a:defRPr>
+            </a:pPr>
+            <a:r>
+              <a:t>Verified by direct code inspection and by running the test collector — not estimated.</a:t>
+            </a:r>
+          </a:p>
+        </p:txBody>
+      </p:sp>
+      <p:sp>
+        <p:nvSpPr>
+          <p:cNvPr id="14" name="TextBox 13"/>
+          <p:cNvSpPr txBox="1"/>
+          <p:nvPr/>
+        </p:nvSpPr>
+        <p:spPr>
+          <a:xfrm>
+            <a:off x="11094415" y="6400800"/>
+            <a:ext cx="822960" cy="320040"/>
+          </a:xfrm>
+          <a:prstGeom prst="rect">
+            <a:avLst/>
+          </a:prstGeom>
+          <a:noFill/>
+        </p:spPr>
+        <p:txBody>
+          <a:bodyPr wrap="none">
+            <a:spAutoFit/>
+          </a:bodyPr>
+          <a:lstStyle/>
+          <a:p>
             <a:pPr algn="r">
               <a:defRPr sz="1000">
                 <a:solidFill>
@@ -7152,7 +7024,7 @@
       </p:sp>
       <p:sp>
         <p:nvSpPr>
-          <p:cNvPr id="10" name="TextBox 9"/>
+          <p:cNvPr id="15" name="TextBox 14"/>
           <p:cNvSpPr txBox="1"/>
           <p:nvPr/>
         </p:nvSpPr>
@@ -7285,7 +7157,7 @@
               </a:defRPr>
             </a:pPr>
             <a:r>
-              <a:t>QUALITY</a:t>
+              <a:t>AN HONEST LOOK</a:t>
             </a:r>
           </a:p>
         </p:txBody>
@@ -7321,21 +7193,125 @@
               </a:defRPr>
             </a:pPr>
             <a:r>
-              <a:t>Testing discipline</a:t>
-            </a:r>
-          </a:p>
-        </p:txBody>
-      </p:sp>
-      <p:sp>
-        <p:nvSpPr>
-          <p:cNvPr id="5" name="TextBox 4"/>
+              <a:t>Spec vs. reality</a:t>
+            </a:r>
+          </a:p>
+        </p:txBody>
+      </p:sp>
+      <p:sp>
+        <p:nvSpPr>
+          <p:cNvPr id="5" name="Rounded Rectangle 4"/>
+          <p:cNvSpPr/>
+          <p:nvPr/>
+        </p:nvSpPr>
+        <p:spPr>
+          <a:xfrm>
+            <a:off x="548640" y="1554480"/>
+            <a:ext cx="5394960" cy="4480560"/>
+          </a:xfrm>
+          <a:prstGeom prst="roundRect">
+            <a:avLst/>
+          </a:prstGeom>
+          <a:solidFill>
+            <a:srgbClr val="F3EEFB"/>
+          </a:solidFill>
+          <a:ln w="15875">
+            <a:solidFill>
+              <a:srgbClr val="6D28D9"/>
+            </a:solidFill>
+          </a:ln>
+          <a:effectLst/>
+        </p:spPr>
+        <p:style>
+          <a:lnRef idx="1">
+            <a:schemeClr val="accent1"/>
+          </a:lnRef>
+          <a:fillRef idx="3">
+            <a:schemeClr val="accent1"/>
+          </a:fillRef>
+          <a:effectRef idx="2">
+            <a:schemeClr val="accent1"/>
+          </a:effectRef>
+          <a:fontRef idx="minor">
+            <a:schemeClr val="lt1"/>
+          </a:fontRef>
+        </p:style>
+        <p:txBody>
+          <a:bodyPr rtlCol="0" anchor="ctr" wrap="square" lIns="45720" rIns="45720"/>
+          <a:lstStyle/>
+          <a:p>
+            <a:pPr algn="ctr">
+              <a:defRPr sz="1300" b="0">
+                <a:solidFill>
+                  <a:srgbClr val="1C1E21"/>
+                </a:solidFill>
+              </a:defRPr>
+            </a:pPr>
+          </a:p>
+        </p:txBody>
+      </p:sp>
+      <p:sp>
+        <p:nvSpPr>
+          <p:cNvPr id="6" name="Rounded Rectangle 5"/>
+          <p:cNvSpPr/>
+          <p:nvPr/>
+        </p:nvSpPr>
+        <p:spPr>
+          <a:xfrm>
+            <a:off x="6217920" y="1554480"/>
+            <a:ext cx="5394960" cy="4480560"/>
+          </a:xfrm>
+          <a:prstGeom prst="roundRect">
+            <a:avLst/>
+          </a:prstGeom>
+          <a:solidFill>
+            <a:srgbClr val="F3EEFB"/>
+          </a:solidFill>
+          <a:ln w="15875">
+            <a:solidFill>
+              <a:srgbClr val="6D28D9"/>
+            </a:solidFill>
+          </a:ln>
+          <a:effectLst/>
+        </p:spPr>
+        <p:style>
+          <a:lnRef idx="1">
+            <a:schemeClr val="accent1"/>
+          </a:lnRef>
+          <a:fillRef idx="3">
+            <a:schemeClr val="accent1"/>
+          </a:fillRef>
+          <a:effectRef idx="2">
+            <a:schemeClr val="accent1"/>
+          </a:effectRef>
+          <a:fontRef idx="minor">
+            <a:schemeClr val="lt1"/>
+          </a:fontRef>
+        </p:style>
+        <p:txBody>
+          <a:bodyPr rtlCol="0" anchor="ctr" wrap="square" lIns="45720" rIns="45720"/>
+          <a:lstStyle/>
+          <a:p>
+            <a:pPr algn="ctr">
+              <a:defRPr sz="1300" b="0">
+                <a:solidFill>
+                  <a:srgbClr val="1C1E21"/>
+                </a:solidFill>
+              </a:defRPr>
+            </a:pPr>
+          </a:p>
+        </p:txBody>
+      </p:sp>
+      <p:sp>
+        <p:nvSpPr>
+          <p:cNvPr id="7" name="TextBox 6"/>
           <p:cNvSpPr txBox="1"/>
           <p:nvPr/>
         </p:nvSpPr>
         <p:spPr>
           <a:xfrm>
-            <a:off x="640080" y="1645920"/>
-            <a:ext cx="10911535" cy="4572000"/>
+            <a:off x="777240" y="1737360"/>
+            <a:ext cx="4937760" cy="4114800"/>
           </a:xfrm>
           <a:prstGeom prst="rect">
             <a:avLst/>
@@ -7349,81 +7325,188 @@
           <a:lstStyle/>
           <a:p>
             <a:pPr>
-              <a:lnSpc>
-                <a:spcPct val="125000"/>
-              </a:lnSpc>
+              <a:defRPr b="1" sz="1600">
+                <a:solidFill>
+                  <a:srgbClr val="6D28D9"/>
+                </a:solidFill>
+              </a:defRPr>
+            </a:pPr>
+            <a:r>
+              <a:t>Built less than originally specified</a:t>
+            </a:r>
+          </a:p>
+          <a:p>
+            <a:pPr>
               <a:spcAft>
-                <a:spcPts val="1000"/>
+                <a:spcPts val="700"/>
               </a:spcAft>
-              <a:defRPr sz="1800" b="0">
-                <a:solidFill>
-                  <a:srgbClr val="1C1E21"/>
-                </a:solidFill>
-              </a:defRPr>
-            </a:pPr>
-            <a:r>
-              <a:t>•  667 tests across 119 files, confirmed via pytest --collect-only — real fixtures over mocks: local HTTP servers, a real headless browser, real cryptographic round-trips</a:t>
-            </a:r>
-          </a:p>
-          <a:p>
-            <a:pPr>
-              <a:lnSpc>
-                <a:spcPct val="125000"/>
-              </a:lnSpc>
+              <a:defRPr sz="1300"/>
+            </a:pPr>
+            <a:r>
+              <a:t>•  Pre-scan authorization gate — built, then fully removed</a:t>
+            </a:r>
+          </a:p>
+          <a:p>
+            <a:pPr>
               <a:spcAft>
-                <a:spcPts val="1000"/>
+                <a:spcPts val="700"/>
               </a:spcAft>
-              <a:defRPr sz="1800" b="0">
-                <a:solidFill>
-                  <a:srgbClr val="1C1E21"/>
-                </a:solidFill>
-              </a:defRPr>
-            </a:pPr>
-            <a:r>
-              <a:t>•  Live-validated against OWASP Juice Shop and a real DVWA instance across all four security levels</a:t>
-            </a:r>
-          </a:p>
-          <a:p>
-            <a:pPr>
-              <a:lnSpc>
-                <a:spcPct val="125000"/>
-              </a:lnSpc>
+              <a:defRPr sz="1300"/>
+            </a:pPr>
+            <a:r>
+              <a:t>•  Human-in-the-loop approval checkpoints — not built</a:t>
+            </a:r>
+          </a:p>
+          <a:p>
+            <a:pPr>
               <a:spcAft>
-                <a:spcPts val="1000"/>
+                <a:spcPts val="700"/>
               </a:spcAft>
-              <a:defRPr sz="1800" b="0">
-                <a:solidFill>
-                  <a:srgbClr val="1C1E21"/>
-                </a:solidFill>
-              </a:defRPr>
-            </a:pPr>
-            <a:r>
-              <a:t>•  DVWA "Impossible" correctly produces zero injection/XSS findings; "Medium" correctly yields confirmed SQLi and command injection through the full pipeline</a:t>
-            </a:r>
-          </a:p>
-          <a:p>
-            <a:pPr>
-              <a:lnSpc>
-                <a:spcPct val="125000"/>
-              </a:lnSpc>
+              <a:defRPr sz="1300"/>
+            </a:pPr>
+            <a:r>
+              <a:t>•  Smart Scan graph-level routing — only one narrow case (SSTI)</a:t>
+            </a:r>
+          </a:p>
+          <a:p>
+            <a:pPr>
               <a:spcAft>
-                <a:spcPts val="1000"/>
+                <a:spcPts val="700"/>
               </a:spcAft>
-              <a:defRPr sz="1800" b="0">
-                <a:solidFill>
-                  <a:srgbClr val="1C1E21"/>
-                </a:solidFill>
-              </a:defRPr>
-            </a:pPr>
-            <a:r>
-              <a:t>•  Every bug fix in this system's history was root-caused against a real, running target — not inferred from a stack trace alone</a:t>
-            </a:r>
-          </a:p>
-        </p:txBody>
-      </p:sp>
-      <p:sp>
-        <p:nvSpPr>
-          <p:cNvPr id="6" name="TextBox 5"/>
+              <a:defRPr sz="1300"/>
+            </a:pPr>
+            <a:r>
+              <a:t>•  Orchestration engine — LangGraph, not Temporal.io (the spec's primary recommendation)</a:t>
+            </a:r>
+          </a:p>
+          <a:p>
+            <a:pPr>
+              <a:spcAft>
+                <a:spcPts val="700"/>
+              </a:spcAft>
+              <a:defRPr sz="1300"/>
+            </a:pPr>
+            <a:r>
+              <a:t>•  Depth slider (Quick/Standard/Deep) — not built</a:t>
+            </a:r>
+          </a:p>
+          <a:p>
+            <a:pPr>
+              <a:spcAft>
+                <a:spcPts val="700"/>
+              </a:spcAft>
+              <a:defRPr sz="1300"/>
+            </a:pPr>
+            <a:r>
+              <a:t>•  Cross-credential-set result caching — not built</a:t>
+            </a:r>
+          </a:p>
+        </p:txBody>
+      </p:sp>
+      <p:sp>
+        <p:nvSpPr>
+          <p:cNvPr id="8" name="TextBox 7"/>
+          <p:cNvSpPr txBox="1"/>
+          <p:nvPr/>
+        </p:nvSpPr>
+        <p:spPr>
+          <a:xfrm>
+            <a:off x="6446520" y="1737360"/>
+            <a:ext cx="4937760" cy="4114800"/>
+          </a:xfrm>
+          <a:prstGeom prst="rect">
+            <a:avLst/>
+          </a:prstGeom>
+          <a:noFill/>
+        </p:spPr>
+        <p:txBody>
+          <a:bodyPr wrap="square">
+            <a:spAutoFit/>
+          </a:bodyPr>
+          <a:lstStyle/>
+          <a:p>
+            <a:pPr>
+              <a:defRPr b="1" sz="1600">
+                <a:solidFill>
+                  <a:srgbClr val="6D28D9"/>
+                </a:solidFill>
+              </a:defRPr>
+            </a:pPr>
+            <a:r>
+              <a:t>Built beyond what was specified</a:t>
+            </a:r>
+          </a:p>
+          <a:p>
+            <a:pPr>
+              <a:spcAft>
+                <a:spcPts val="700"/>
+              </a:spcAft>
+              <a:defRPr sz="1300"/>
+            </a:pPr>
+            <a:r>
+              <a:t>•  VGS integration — spec asked for webhook push only; shipped three modes (webhook, native workspace, per-scan-run export)</a:t>
+            </a:r>
+          </a:p>
+          <a:p>
+            <a:pPr>
+              <a:spcAft>
+                <a:spcPts val="700"/>
+              </a:spcAft>
+              <a:defRPr sz="1300"/>
+            </a:pPr>
+            <a:r>
+              <a:t>•  Image-polyglot file-upload bypass technique</a:t>
+            </a:r>
+          </a:p>
+          <a:p>
+            <a:pPr>
+              <a:spcAft>
+                <a:spcPts val="700"/>
+              </a:spcAft>
+              <a:defRPr sz="1300"/>
+            </a:pPr>
+            <a:r>
+              <a:t>•  "Load from PortSwigger" scraper integration</a:t>
+            </a:r>
+          </a:p>
+          <a:p>
+            <a:pPr>
+              <a:spcAft>
+                <a:spcPts val="700"/>
+              </a:spcAft>
+              <a:defRPr sz="1300"/>
+            </a:pPr>
+            <a:r>
+              <a:t>•  UI-only, per-org default AI provider configuration</a:t>
+            </a:r>
+          </a:p>
+          <a:p>
+            <a:pPr>
+              <a:spcAft>
+                <a:spcPts val="700"/>
+              </a:spcAft>
+              <a:defRPr sz="1300"/>
+            </a:pPr>
+            <a:r>
+              <a:t>•  A genuine conversational Microsoft Teams bot</a:t>
+            </a:r>
+          </a:p>
+          <a:p>
+            <a:pPr>
+              <a:spcAft>
+                <a:spcPts val="700"/>
+              </a:spcAft>
+              <a:defRPr sz="1300"/>
+            </a:pPr>
+            <a:r>
+              <a:t>•  Two independent login-macro recorders, four checks ported from a sibling DAST project, and (2nd attempt) automatic, zero-config per-task model tiering</a:t>
+            </a:r>
+          </a:p>
+        </p:txBody>
+      </p:sp>
+      <p:sp>
+        <p:nvSpPr>
+          <p:cNvPr id="9" name="TextBox 8"/>
           <p:cNvSpPr txBox="1"/>
           <p:nvPr/>
         </p:nvSpPr>
@@ -7458,7 +7541,7 @@
       </p:sp>
       <p:sp>
         <p:nvSpPr>
-          <p:cNvPr id="7" name="TextBox 6"/>
+          <p:cNvPr id="10" name="TextBox 9"/>
           <p:cNvSpPr txBox="1"/>
           <p:nvPr/>
         </p:nvSpPr>
@@ -7776,7 +7859,7 @@
               </a:defRPr>
             </a:pPr>
             <a:r>
-              <a:t>•  VGS integration, enterprise hardening, and deployment</a:t>
+              <a:t>•  VGS integration, enterprise hardening, data handling &amp; security, and deployment</a:t>
             </a:r>
           </a:p>
           <a:p>
@@ -7987,7 +8070,7 @@
               </a:defRPr>
             </a:pPr>
             <a:r>
-              <a:t>ROADMAP</a:t>
+              <a:t>QUALITY</a:t>
             </a:r>
           </a:p>
         </p:txBody>
@@ -8023,7 +8106,7 @@
               </a:defRPr>
             </a:pPr>
             <a:r>
-              <a:t>What's next</a:t>
+              <a:t>Testing discipline</a:t>
             </a:r>
           </a:p>
         </p:txBody>
@@ -8064,7 +8147,7 @@
               </a:defRPr>
             </a:pPr>
             <a:r>
-              <a:t>•  Build out Smart Scan's graph-level routing — use the fingerprint to actually skip irrelevant node scheduling, not just display it</a:t>
+              <a:t>•  667 tests across 119 files, confirmed via pytest --collect-only — real fixtures over mocks: local HTTP servers, a real headless browser, real cryptographic round-trips</a:t>
             </a:r>
           </a:p>
           <a:p>
@@ -8082,7 +8165,7 @@
               </a:defRPr>
             </a:pPr>
             <a:r>
-              <a:t>•  A depth/intensity profile (Quick / Standard / Deep) as a scan-trigger option</a:t>
+              <a:t>•  Live-validated against OWASP Juice Shop and a real DVWA instance across all four security levels</a:t>
             </a:r>
           </a:p>
           <a:p>
@@ -8100,7 +8183,7 @@
               </a:defRPr>
             </a:pPr>
             <a:r>
-              <a:t>•  Extend automatic model tiering to Gemini once its 3.x naming stabilizes past the October 2026 retirement of the 2.5 line</a:t>
+              <a:t>•  DVWA "Impossible" correctly produces zero injection/XSS findings; "Medium" correctly yields confirmed SQLi and command injection through the full pipeline</a:t>
             </a:r>
           </a:p>
           <a:p>
@@ -8118,25 +8201,7 @@
               </a:defRPr>
             </a:pPr>
             <a:r>
-              <a:t>•  A more sophisticated file-upload bypass technique, chaining into a standalone RCE proof</a:t>
-            </a:r>
-          </a:p>
-          <a:p>
-            <a:pPr>
-              <a:lnSpc>
-                <a:spcPct val="125000"/>
-              </a:lnSpc>
-              <a:spcAft>
-                <a:spcPts val="1000"/>
-              </a:spcAft>
-              <a:defRPr sz="1800" b="0">
-                <a:solidFill>
-                  <a:srgbClr val="1C1E21"/>
-                </a:solidFill>
-              </a:defRPr>
-            </a:pPr>
-            <a:r>
-              <a:t>•  Configurable human-in-the-loop approval checkpoints for the most invasive check categories</a:t>
+              <a:t>•  Every bug fix in this system's history was root-caused against a real, running target — not inferred from a stack trace alone</a:t>
             </a:r>
           </a:p>
         </p:txBody>
@@ -8222,6 +8287,14 @@
 <file path=ppt/slides/slide21.xml><?xml version="1.0" encoding="utf-8"?>
 <p:sld xmlns:a="http://schemas.openxmlformats.org/drawingml/2006/main" xmlns:p="http://schemas.openxmlformats.org/presentationml/2006/main" xmlns:r="http://schemas.openxmlformats.org/officeDocument/2006/relationships">
   <p:cSld>
+    <p:bg>
+      <p:bgPr>
+        <a:solidFill>
+          <a:srgbClr val="FFFFFF"/>
+        </a:solidFill>
+        <a:effectLst/>
+      </p:bgPr>
+    </p:bg>
     <p:spTree>
       <p:nvGrpSpPr>
         <p:cNvPr id="1" name=""/>
@@ -8303,7 +8376,7 @@
               </a:defRPr>
             </a:pPr>
             <a:r>
-              <a:t>COMMON QUESTIONS</a:t>
+              <a:t>ROADMAP</a:t>
             </a:r>
           </a:p>
         </p:txBody>
@@ -8339,7 +8412,7 @@
               </a:defRPr>
             </a:pPr>
             <a:r>
-              <a:t>FAQ</a:t>
+              <a:t>What's next</a:t>
             </a:r>
           </a:p>
         </p:txBody>
@@ -8368,91 +8441,127 @@
           <a:p>
             <a:pPr>
               <a:lnSpc>
-                <a:spcPct val="115000"/>
+                <a:spcPct val="125000"/>
               </a:lnSpc>
               <a:spcAft>
-                <a:spcPts val="700"/>
+                <a:spcPts val="1000"/>
               </a:spcAft>
-              <a:defRPr sz="1400" b="0">
+              <a:defRPr sz="1800" b="0">
                 <a:solidFill>
                   <a:srgbClr val="1C1E21"/>
                 </a:solidFill>
               </a:defRPr>
             </a:pPr>
             <a:r>
-              <a:t>•  How does crawling work? — A Playwright-driven crawler discovers pages/forms/API calls within scope; uploaded traffic (HAR/Burp/Zest) supplements live crawling, it doesn't replace it.</a:t>
+              <a:t>•  Build out Smart Scan's graph-level routing — use the fingerprint to actually skip irrelevant node scheduling, not just display it</a:t>
             </a:r>
           </a:p>
           <a:p>
             <a:pPr>
               <a:lnSpc>
-                <a:spcPct val="115000"/>
+                <a:spcPct val="125000"/>
               </a:lnSpc>
               <a:spcAft>
-                <a:spcPts val="700"/>
+                <a:spcPts val="1000"/>
               </a:spcAft>
-              <a:defRPr sz="1400" b="0">
+              <a:defRPr sz="1800" b="0">
                 <a:solidFill>
                   <a:srgbClr val="1C1E21"/>
                 </a:solidFill>
               </a:defRPr>
             </a:pPr>
             <a:r>
-              <a:t>•  How are vulnerabilities found, and what does AI actually do? — Deterministic HTTP-level probes run first; AI only triages results and helps craft context-aware payloads. AI never single-handedly confirms a finding.</a:t>
+              <a:t>•  A depth/intensity profile (Quick / Standard / Deep) as a scan-trigger option</a:t>
             </a:r>
           </a:p>
           <a:p>
             <a:pPr>
               <a:lnSpc>
-                <a:spcPct val="115000"/>
+                <a:spcPct val="125000"/>
               </a:lnSpc>
               <a:spcAft>
-                <a:spcPts val="700"/>
+                <a:spcPts val="1000"/>
               </a:spcAft>
-              <a:defRPr sz="1400" b="0">
+              <a:defRPr sz="1800" b="0">
                 <a:solidFill>
                   <a:srgbClr val="1C1E21"/>
                 </a:solidFill>
               </a:defRPr>
             </a:pPr>
             <a:r>
-              <a:t>•  How is this different from WebInspect or Checkmarx? — Those are single-pass deterministic scanners; Verdikt pairs the same deterministic probing with LLM-assisted triage and adversarial validation, so only confirmed findings reach a report.</a:t>
+              <a:t>•  Extend automatic model tiering to Gemini once its 3.x naming stabilizes past the October 2026 retirement of the 2.5 line</a:t>
             </a:r>
           </a:p>
           <a:p>
             <a:pPr>
               <a:lnSpc>
-                <a:spcPct val="115000"/>
+                <a:spcPct val="125000"/>
               </a:lnSpc>
               <a:spcAft>
-                <a:spcPts val="700"/>
+                <a:spcPts val="1000"/>
               </a:spcAft>
-              <a:defRPr sz="1400" b="0">
+              <a:defRPr sz="1800" b="0">
                 <a:solidFill>
                   <a:srgbClr val="1C1E21"/>
                 </a:solidFill>
               </a:defRPr>
             </a:pPr>
             <a:r>
-              <a:t>•  If I upload traffic, does it still crawl the live site? — Yes — uploaded traffic and live crawling both run and combine into one scope.</a:t>
+              <a:t>•  A more sophisticated file-upload bypass technique, chaining into a standalone RCE proof</a:t>
             </a:r>
           </a:p>
           <a:p>
             <a:pPr>
               <a:lnSpc>
-                <a:spcPct val="115000"/>
+                <a:spcPct val="125000"/>
               </a:lnSpc>
               <a:spcAft>
-                <a:spcPts val="700"/>
+                <a:spcPts val="1000"/>
               </a:spcAft>
-              <a:defRPr sz="1400" b="0">
+              <a:defRPr sz="1800" b="0">
                 <a:solidFill>
                   <a:srgbClr val="1C1E21"/>
                 </a:solidFill>
               </a:defRPr>
             </a:pPr>
             <a:r>
-              <a:t>•  What's the architecture, and why AI if scans are deterministic? — A 31-node LangGraph DAG per scan: deterministic probe → AI triage → deterministic re-execution → adversarial AI validation. AI expands and interprets; it never decides alone.</a:t>
+              <a:t>•  Configurable human-in-the-loop approval checkpoints for the most invasive check categories</a:t>
+            </a:r>
+          </a:p>
+          <a:p>
+            <a:pPr>
+              <a:lnSpc>
+                <a:spcPct val="125000"/>
+              </a:lnSpc>
+              <a:spcAft>
+                <a:spcPts val="1000"/>
+              </a:spcAft>
+              <a:defRPr sz="1800" b="0">
+                <a:solidFill>
+                  <a:srgbClr val="1C1E21"/>
+                </a:solidFill>
+              </a:defRPr>
+            </a:pPr>
+            <a:r>
+              <a:t>•  ASI02 Tool Misuse's malicious-argument-to-a-real-tool-call half — deferred pending tool/function-manifest introspection to design against</a:t>
+            </a:r>
+          </a:p>
+          <a:p>
+            <a:pPr>
+              <a:lnSpc>
+                <a:spcPct val="125000"/>
+              </a:lnSpc>
+              <a:spcAft>
+                <a:spcPts val="1000"/>
+              </a:spcAft>
+              <a:defRPr sz="1800" b="0">
+                <a:solidFill>
+                  <a:srgbClr val="1C1E21"/>
+                </a:solidFill>
+              </a:defRPr>
+            </a:pPr>
+            <a:r>
+              <a:t>•  Indirect prompt injection via RAG-corpus poisoning for the Chatbot Pentest capability — deferred pending a safe, generic way to plant content into a target's retrieval corpus</a:t>
             </a:r>
           </a:p>
         </p:txBody>
@@ -8536,6 +8645,358 @@
 </file>
 
 <file path=ppt/slides/slide22.xml><?xml version="1.0" encoding="utf-8"?>
+<p:sld xmlns:a="http://schemas.openxmlformats.org/drawingml/2006/main" xmlns:p="http://schemas.openxmlformats.org/presentationml/2006/main" xmlns:r="http://schemas.openxmlformats.org/officeDocument/2006/relationships">
+  <p:cSld>
+    <p:spTree>
+      <p:nvGrpSpPr>
+        <p:cNvPr id="1" name=""/>
+        <p:cNvGrpSpPr/>
+        <p:nvPr/>
+      </p:nvGrpSpPr>
+      <p:grpSpPr/>
+      <p:sp>
+        <p:nvSpPr>
+          <p:cNvPr id="2" name="Rectangle 1"/>
+          <p:cNvSpPr/>
+          <p:nvPr/>
+        </p:nvSpPr>
+        <p:spPr>
+          <a:xfrm>
+            <a:off x="0" y="0"/>
+            <a:ext cx="12191695" cy="128016"/>
+          </a:xfrm>
+          <a:prstGeom prst="rect">
+            <a:avLst/>
+          </a:prstGeom>
+          <a:solidFill>
+            <a:srgbClr val="6D28D9"/>
+          </a:solidFill>
+          <a:ln>
+            <a:noFill/>
+          </a:ln>
+          <a:effectLst/>
+        </p:spPr>
+        <p:style>
+          <a:lnRef idx="1">
+            <a:schemeClr val="accent1"/>
+          </a:lnRef>
+          <a:fillRef idx="3">
+            <a:schemeClr val="accent1"/>
+          </a:fillRef>
+          <a:effectRef idx="2">
+            <a:schemeClr val="accent1"/>
+          </a:effectRef>
+          <a:fontRef idx="minor">
+            <a:schemeClr val="lt1"/>
+          </a:fontRef>
+        </p:style>
+        <p:txBody>
+          <a:bodyPr rtlCol="0" anchor="ctr"/>
+          <a:lstStyle/>
+          <a:p>
+            <a:pPr algn="ctr"/>
+          </a:p>
+        </p:txBody>
+      </p:sp>
+      <p:sp>
+        <p:nvSpPr>
+          <p:cNvPr id="3" name="TextBox 2"/>
+          <p:cNvSpPr txBox="1"/>
+          <p:nvPr/>
+        </p:nvSpPr>
+        <p:spPr>
+          <a:xfrm>
+            <a:off x="548640" y="164592"/>
+            <a:ext cx="7315200" cy="320040"/>
+          </a:xfrm>
+          <a:prstGeom prst="rect">
+            <a:avLst/>
+          </a:prstGeom>
+          <a:noFill/>
+        </p:spPr>
+        <p:txBody>
+          <a:bodyPr wrap="none">
+            <a:spAutoFit/>
+          </a:bodyPr>
+          <a:lstStyle/>
+          <a:p>
+            <a:pPr>
+              <a:defRPr sz="1200" b="1">
+                <a:solidFill>
+                  <a:srgbClr val="6D28D9"/>
+                </a:solidFill>
+              </a:defRPr>
+            </a:pPr>
+            <a:r>
+              <a:t>COMMON QUESTIONS</a:t>
+            </a:r>
+          </a:p>
+        </p:txBody>
+      </p:sp>
+      <p:sp>
+        <p:nvSpPr>
+          <p:cNvPr id="4" name="TextBox 3"/>
+          <p:cNvSpPr txBox="1"/>
+          <p:nvPr/>
+        </p:nvSpPr>
+        <p:spPr>
+          <a:xfrm>
+            <a:off x="548640" y="411480"/>
+            <a:ext cx="11094415" cy="822960"/>
+          </a:xfrm>
+          <a:prstGeom prst="rect">
+            <a:avLst/>
+          </a:prstGeom>
+          <a:noFill/>
+        </p:spPr>
+        <p:txBody>
+          <a:bodyPr wrap="square">
+            <a:spAutoFit/>
+          </a:bodyPr>
+          <a:lstStyle/>
+          <a:p>
+            <a:pPr>
+              <a:defRPr sz="2800" b="1">
+                <a:solidFill>
+                  <a:srgbClr val="1C1E21"/>
+                </a:solidFill>
+                <a:latin typeface="Calibri"/>
+              </a:defRPr>
+            </a:pPr>
+            <a:r>
+              <a:t>FAQ</a:t>
+            </a:r>
+          </a:p>
+        </p:txBody>
+      </p:sp>
+      <p:sp>
+        <p:nvSpPr>
+          <p:cNvPr id="5" name="TextBox 4"/>
+          <p:cNvSpPr txBox="1"/>
+          <p:nvPr/>
+        </p:nvSpPr>
+        <p:spPr>
+          <a:xfrm>
+            <a:off x="640080" y="1645920"/>
+            <a:ext cx="10911535" cy="4572000"/>
+          </a:xfrm>
+          <a:prstGeom prst="rect">
+            <a:avLst/>
+          </a:prstGeom>
+          <a:noFill/>
+        </p:spPr>
+        <p:txBody>
+          <a:bodyPr wrap="square">
+            <a:spAutoFit/>
+          </a:bodyPr>
+          <a:lstStyle/>
+          <a:p>
+            <a:pPr>
+              <a:lnSpc>
+                <a:spcPct val="115000"/>
+              </a:lnSpc>
+              <a:spcAft>
+                <a:spcPts val="700"/>
+              </a:spcAft>
+              <a:defRPr sz="1400" b="0">
+                <a:solidFill>
+                  <a:srgbClr val="1C1E21"/>
+                </a:solidFill>
+              </a:defRPr>
+            </a:pPr>
+            <a:r>
+              <a:t>•  How does crawling work? — A Playwright-driven crawler discovers pages/forms/API calls within scope; uploaded traffic (HAR/Burp/Zest) supplements live crawling, it doesn't replace it.</a:t>
+            </a:r>
+          </a:p>
+          <a:p>
+            <a:pPr>
+              <a:lnSpc>
+                <a:spcPct val="115000"/>
+              </a:lnSpc>
+              <a:spcAft>
+                <a:spcPts val="700"/>
+              </a:spcAft>
+              <a:defRPr sz="1400" b="0">
+                <a:solidFill>
+                  <a:srgbClr val="1C1E21"/>
+                </a:solidFill>
+              </a:defRPr>
+            </a:pPr>
+            <a:r>
+              <a:t>•  How are vulnerabilities found, and what does AI actually do? — Deterministic HTTP-level probes run first; AI only triages results and helps craft context-aware payloads. AI never single-handedly confirms a finding.</a:t>
+            </a:r>
+          </a:p>
+          <a:p>
+            <a:pPr>
+              <a:lnSpc>
+                <a:spcPct val="115000"/>
+              </a:lnSpc>
+              <a:spcAft>
+                <a:spcPts val="700"/>
+              </a:spcAft>
+              <a:defRPr sz="1400" b="0">
+                <a:solidFill>
+                  <a:srgbClr val="1C1E21"/>
+                </a:solidFill>
+              </a:defRPr>
+            </a:pPr>
+            <a:r>
+              <a:t>•  How is this different from WebInspect or Checkmarx? — Those are single-pass deterministic scanners; Verdikt pairs the same deterministic probing with LLM-assisted triage and adversarial validation, so only confirmed findings reach a report.</a:t>
+            </a:r>
+          </a:p>
+          <a:p>
+            <a:pPr>
+              <a:lnSpc>
+                <a:spcPct val="115000"/>
+              </a:lnSpc>
+              <a:spcAft>
+                <a:spcPts val="700"/>
+              </a:spcAft>
+              <a:defRPr sz="1400" b="0">
+                <a:solidFill>
+                  <a:srgbClr val="1C1E21"/>
+                </a:solidFill>
+              </a:defRPr>
+            </a:pPr>
+            <a:r>
+              <a:t>•  If I upload traffic, does it still crawl the live site? — Yes — uploaded traffic and live crawling both run and combine into one scope.</a:t>
+            </a:r>
+          </a:p>
+          <a:p>
+            <a:pPr>
+              <a:lnSpc>
+                <a:spcPct val="115000"/>
+              </a:lnSpc>
+              <a:spcAft>
+                <a:spcPts val="700"/>
+              </a:spcAft>
+              <a:defRPr sz="1400" b="0">
+                <a:solidFill>
+                  <a:srgbClr val="1C1E21"/>
+                </a:solidFill>
+              </a:defRPr>
+            </a:pPr>
+            <a:r>
+              <a:t>•  What's the architecture, and why AI if scans are deterministic? — A 31-node LangGraph DAG per scan: deterministic probe → AI triage → deterministic re-execution → adversarial AI validation. AI expands and interprets; it never decides alone.</a:t>
+            </a:r>
+          </a:p>
+          <a:p>
+            <a:pPr>
+              <a:lnSpc>
+                <a:spcPct val="115000"/>
+              </a:lnSpc>
+              <a:spcAft>
+                <a:spcPts val="700"/>
+              </a:spcAft>
+              <a:defRPr sz="1400" b="0">
+                <a:solidFill>
+                  <a:srgbClr val="1C1E21"/>
+                </a:solidFill>
+              </a:defRPr>
+            </a:pPr>
+            <a:r>
+              <a:t>•  Can Verdikt test a chatbot or LLM-backed app? — Yes — configure a ChatbotTarget and it's checked for prompt injection, hidden-context extraction, improper output handling, excessive agency, and code execution, the same conversational text-in/text-out safety envelope as every other AI-judged check.</a:t>
+            </a:r>
+          </a:p>
+          <a:p>
+            <a:pPr>
+              <a:lnSpc>
+                <a:spcPct val="115000"/>
+              </a:lnSpc>
+              <a:spcAft>
+                <a:spcPts val="700"/>
+              </a:spcAft>
+              <a:defRPr sz="1400" b="0">
+                <a:solidFill>
+                  <a:srgbClr val="1C1E21"/>
+                </a:solidFill>
+              </a:defRPr>
+            </a:pPr>
+            <a:r>
+              <a:t>•  Can I save a custom auth header on a credential? — Yes — extra_headers forces a static header (e.g. X-API-Key) onto every request for that credential, layered on top of any login type including a recorded macro, not just bearer tokens.</a:t>
+            </a:r>
+          </a:p>
+        </p:txBody>
+      </p:sp>
+      <p:sp>
+        <p:nvSpPr>
+          <p:cNvPr id="6" name="TextBox 5"/>
+          <p:cNvSpPr txBox="1"/>
+          <p:nvPr/>
+        </p:nvSpPr>
+        <p:spPr>
+          <a:xfrm>
+            <a:off x="11094415" y="6400800"/>
+            <a:ext cx="822960" cy="320040"/>
+          </a:xfrm>
+          <a:prstGeom prst="rect">
+            <a:avLst/>
+          </a:prstGeom>
+          <a:noFill/>
+        </p:spPr>
+        <p:txBody>
+          <a:bodyPr wrap="none">
+            <a:spAutoFit/>
+          </a:bodyPr>
+          <a:lstStyle/>
+          <a:p>
+            <a:pPr algn="r">
+              <a:defRPr sz="1000">
+                <a:solidFill>
+                  <a:srgbClr val="5B6270"/>
+                </a:solidFill>
+              </a:defRPr>
+            </a:pPr>
+            <a:r>
+              <a:t>22</a:t>
+            </a:r>
+          </a:p>
+        </p:txBody>
+      </p:sp>
+      <p:sp>
+        <p:nvSpPr>
+          <p:cNvPr id="7" name="TextBox 6"/>
+          <p:cNvSpPr txBox="1"/>
+          <p:nvPr/>
+        </p:nvSpPr>
+        <p:spPr>
+          <a:xfrm>
+            <a:off x="548640" y="6400800"/>
+            <a:ext cx="2743200" cy="320040"/>
+          </a:xfrm>
+          <a:prstGeom prst="rect">
+            <a:avLst/>
+          </a:prstGeom>
+          <a:noFill/>
+        </p:spPr>
+        <p:txBody>
+          <a:bodyPr wrap="none">
+            <a:spAutoFit/>
+          </a:bodyPr>
+          <a:lstStyle/>
+          <a:p>
+            <a:pPr>
+              <a:defRPr sz="1000">
+                <a:solidFill>
+                  <a:srgbClr val="5B6270"/>
+                </a:solidFill>
+              </a:defRPr>
+            </a:pPr>
+            <a:r>
+              <a:t>Verdikt</a:t>
+            </a:r>
+          </a:p>
+        </p:txBody>
+      </p:sp>
+    </p:spTree>
+  </p:cSld>
+  <p:clrMapOvr>
+    <a:masterClrMapping/>
+  </p:clrMapOvr>
+</p:sld>
+</file>
+
+<file path=ppt/slides/slide23.xml><?xml version="1.0" encoding="utf-8"?>
 <p:sld xmlns:a="http://schemas.openxmlformats.org/drawingml/2006/main" xmlns:p="http://schemas.openxmlformats.org/presentationml/2006/main" xmlns:r="http://schemas.openxmlformats.org/officeDocument/2006/relationships">
   <p:cSld>
     <p:bg>
@@ -10209,7 +10670,7 @@
               </a:defRPr>
             </a:pPr>
             <a:r>
-              <a:t>31 detection agents in the scan graph</a:t>
+              <a:t>35 detection agents in the scan graph</a:t>
             </a:r>
           </a:p>
         </p:txBody>

--- a/docs/architecture-overview/Verdikt_Presentation.pptx
+++ b/docs/architecture-overview/Verdikt_Presentation.pptx
@@ -27,6 +27,8 @@
     <p:sldId id="273" r:id="rId24"/>
     <p:sldId id="274" r:id="rId25"/>
     <p:sldId id="277" r:id="rId28"/>
+    <p:sldId id="279" r:id="rId30"/>
+    <p:sldId id="280" r:id="rId31"/>
     <p:sldId id="275" r:id="rId26"/>
   </p:sldIdLst>
   <p:sldSz cx="12191695" cy="6858000" type="screen4x3"/>
@@ -9080,6 +9082,1171 @@
             </a:pPr>
             <a:r>
               <a:t>Questions &amp; discussion</a:t>
+            </a:r>
+          </a:p>
+        </p:txBody>
+      </p:sp>
+    </p:spTree>
+  </p:cSld>
+  <p:clrMapOvr>
+    <a:masterClrMapping/>
+  </p:clrMapOvr>
+</p:sld>
+</file>
+
+<file path=ppt/slides/slide24.xml><?xml version="1.0" encoding="utf-8"?>
+<p:sld xmlns:a="http://schemas.openxmlformats.org/drawingml/2006/main" xmlns:p="http://schemas.openxmlformats.org/presentationml/2006/main" xmlns:r="http://schemas.openxmlformats.org/officeDocument/2006/relationships">
+  <p:cSld>
+    <p:spTree>
+      <p:nvGrpSpPr>
+        <p:cNvPr id="1" name=""/>
+        <p:cNvGrpSpPr/>
+        <p:nvPr/>
+      </p:nvGrpSpPr>
+      <p:grpSpPr/>
+      <p:sp>
+        <p:nvSpPr>
+          <p:cNvPr id="2" name="Rectangle 1"/>
+          <p:cNvSpPr/>
+          <p:nvPr/>
+        </p:nvSpPr>
+        <p:spPr>
+          <a:xfrm>
+            <a:off x="0" y="0"/>
+            <a:ext cx="12191695" cy="128016"/>
+          </a:xfrm>
+          <a:prstGeom prst="rect">
+            <a:avLst/>
+          </a:prstGeom>
+          <a:solidFill>
+            <a:srgbClr val="6D28D9"/>
+          </a:solidFill>
+          <a:ln>
+            <a:noFill/>
+          </a:ln>
+          <a:effectLst/>
+        </p:spPr>
+        <p:style>
+          <a:lnRef idx="1">
+            <a:schemeClr val="accent1"/>
+          </a:lnRef>
+          <a:fillRef idx="3">
+            <a:schemeClr val="accent1"/>
+          </a:fillRef>
+          <a:effectRef idx="2">
+            <a:schemeClr val="accent1"/>
+          </a:effectRef>
+          <a:fontRef idx="minor">
+            <a:schemeClr val="lt1"/>
+          </a:fontRef>
+        </p:style>
+        <p:txBody>
+          <a:bodyPr rtlCol="0" anchor="ctr"/>
+          <a:lstStyle/>
+          <a:p>
+            <a:pPr algn="ctr"/>
+          </a:p>
+        </p:txBody>
+      </p:sp>
+      <p:sp>
+        <p:nvSpPr>
+          <p:cNvPr id="3" name="TextBox 2"/>
+          <p:cNvSpPr txBox="1"/>
+          <p:nvPr/>
+        </p:nvSpPr>
+        <p:spPr>
+          <a:xfrm>
+            <a:off x="548640" y="164592"/>
+            <a:ext cx="7315200" cy="320040"/>
+          </a:xfrm>
+          <a:prstGeom prst="rect">
+            <a:avLst/>
+          </a:prstGeom>
+          <a:noFill/>
+        </p:spPr>
+        <p:txBody>
+          <a:bodyPr wrap="none">
+            <a:spAutoFit/>
+          </a:bodyPr>
+          <a:lstStyle/>
+          <a:p>
+            <a:r>
+              <a:rPr sz="1300" b="1">
+                <a:solidFill>
+                  <a:srgbClr val="6D28D9"/>
+                </a:solidFill>
+                <a:latin typeface="Calibri"/>
+              </a:rPr>
+              <a:t>A SECOND EXECUTION MODE</a:t>
+            </a:r>
+          </a:p>
+        </p:txBody>
+      </p:sp>
+      <p:sp>
+        <p:nvSpPr>
+          <p:cNvPr id="4" name="TextBox 3"/>
+          <p:cNvSpPr txBox="1"/>
+          <p:nvPr/>
+        </p:nvSpPr>
+        <p:spPr>
+          <a:xfrm>
+            <a:off x="548640" y="457200"/>
+            <a:ext cx="11094415" cy="822960"/>
+          </a:xfrm>
+          <a:prstGeom prst="rect">
+            <a:avLst/>
+          </a:prstGeom>
+          <a:noFill/>
+        </p:spPr>
+        <p:txBody>
+          <a:bodyPr wrap="none">
+            <a:spAutoFit/>
+          </a:bodyPr>
+          <a:lstStyle/>
+          <a:p>
+            <a:r>
+              <a:rPr sz="3000" b="1">
+                <a:solidFill>
+                  <a:srgbClr val="1C1E21"/>
+                </a:solidFill>
+                <a:latin typeface="Calibri"/>
+              </a:rPr>
+              <a:t>AI-Driven Autonomous Pentest</a:t>
+            </a:r>
+          </a:p>
+        </p:txBody>
+      </p:sp>
+      <p:sp>
+        <p:nvSpPr>
+          <p:cNvPr id="5" name="TextBox 4"/>
+          <p:cNvSpPr txBox="1"/>
+          <p:nvPr/>
+        </p:nvSpPr>
+        <p:spPr>
+          <a:xfrm>
+            <a:off x="11094415" y="6400800"/>
+            <a:ext cx="822960" cy="320040"/>
+          </a:xfrm>
+          <a:prstGeom prst="rect">
+            <a:avLst/>
+          </a:prstGeom>
+          <a:noFill/>
+        </p:spPr>
+        <p:txBody>
+          <a:bodyPr wrap="none">
+            <a:spAutoFit/>
+          </a:bodyPr>
+          <a:lstStyle/>
+          <a:p>
+            <a:r>
+              <a:rPr sz="1100">
+                <a:solidFill>
+                  <a:srgbClr val="5B6270"/>
+                </a:solidFill>
+              </a:rPr>
+              <a:t>24</a:t>
+            </a:r>
+          </a:p>
+        </p:txBody>
+      </p:sp>
+      <p:sp>
+        <p:nvSpPr>
+          <p:cNvPr id="6" name="TextBox 5"/>
+          <p:cNvSpPr txBox="1"/>
+          <p:nvPr/>
+        </p:nvSpPr>
+        <p:spPr>
+          <a:xfrm>
+            <a:off x="548640" y="6400800"/>
+            <a:ext cx="2743200" cy="320040"/>
+          </a:xfrm>
+          <a:prstGeom prst="rect">
+            <a:avLst/>
+          </a:prstGeom>
+          <a:noFill/>
+        </p:spPr>
+        <p:txBody>
+          <a:bodyPr wrap="none">
+            <a:spAutoFit/>
+          </a:bodyPr>
+          <a:lstStyle/>
+          <a:p>
+            <a:r>
+              <a:rPr sz="1100" b="1">
+                <a:solidFill>
+                  <a:srgbClr val="6D28D9"/>
+                </a:solidFill>
+              </a:rPr>
+              <a:t>Verdikt</a:t>
+            </a:r>
+          </a:p>
+        </p:txBody>
+      </p:sp>
+      <p:sp>
+        <p:nvSpPr>
+          <p:cNvPr id="7" name="TextBox 6"/>
+          <p:cNvSpPr txBox="1"/>
+          <p:nvPr/>
+        </p:nvSpPr>
+        <p:spPr>
+          <a:xfrm>
+            <a:off x="548640" y="1400000"/>
+            <a:ext cx="5800000" cy="4800000"/>
+          </a:xfrm>
+          <a:prstGeom prst="rect">
+            <a:avLst/>
+          </a:prstGeom>
+          <a:noFill/>
+        </p:spPr>
+        <p:txBody>
+          <a:bodyPr wrap="square">
+            <a:spAutoFit/>
+          </a:bodyPr>
+          <a:lstStyle/>
+          <a:p>
+            <a:pPr>
+              <a:spcAft>
+                <a:spcPts val="1600"/>
+              </a:spcAft>
+            </a:pPr>
+            <a:r>
+              <a:rPr sz="1600">
+                <a:solidFill>
+                  <a:srgbClr val="1C1E21"/>
+                </a:solidFill>
+                <a:latin typeface="Calibri"/>
+              </a:rPr>
+              <a:t>•  Sits alongside the 35-node deterministic DAG — doesn't replace it</a:t>
+            </a:r>
+          </a:p>
+          <a:p>
+            <a:pPr>
+              <a:spcAft>
+                <a:spcPts val="1600"/>
+              </a:spcAft>
+            </a:pPr>
+            <a:r>
+              <a:rPr sz="1600">
+                <a:solidFill>
+                  <a:srgbClr val="1C1E21"/>
+                </a:solidFill>
+                <a:latin typeface="Calibri"/>
+              </a:rPr>
+              <a:t>•  A real LLM decides turn by turn what to investigate, with genuine shell tool-calling (curl, nmap, sqlmap, nikto, ffuf)</a:t>
+            </a:r>
+          </a:p>
+          <a:p>
+            <a:pPr>
+              <a:spcAft>
+                <a:spcPts val="1600"/>
+              </a:spcAft>
+            </a:pPr>
+            <a:r>
+              <a:rPr sz="1600">
+                <a:solidFill>
+                  <a:srgbClr val="1C1E21"/>
+                </a:solidFill>
+                <a:latin typeface="Calibri"/>
+              </a:rPr>
+              <a:t>•  Runs inside an isolated, network-restricted sandbox — Docker socket lives in a separate sidecar, never the main backend</a:t>
+            </a:r>
+          </a:p>
+          <a:p>
+            <a:pPr>
+              <a:spcAft>
+                <a:spcPts val="1600"/>
+              </a:spcAft>
+            </a:pPr>
+            <a:r>
+              <a:rPr sz="1600">
+                <a:solidFill>
+                  <a:srgbClr val="1C1E21"/>
+                </a:solidFill>
+                <a:latin typeface="Calibri"/>
+              </a:rPr>
+              <a:t>•  iptables egress allow-list, live-verified to block a raw nmap SYN scan even when the model is explicitly told to try</a:t>
+            </a:r>
+          </a:p>
+          <a:p>
+            <a:pPr>
+              <a:spcAft>
+                <a:spcPts val="1600"/>
+              </a:spcAft>
+            </a:pPr>
+            <a:r>
+              <a:rPr sz="1600">
+                <a:solidFill>
+                  <a:srgbClr val="1C1E21"/>
+                </a:solidFill>
+                <a:latin typeface="Calibri"/>
+              </a:rPr>
+              <a:t>•  Every finding requires real request/response evidence — the same “never guess a finding into existence” discipline as every deterministic check</a:t>
+            </a:r>
+          </a:p>
+        </p:txBody>
+      </p:sp>
+      <p:sp>
+        <p:nvSpPr>
+          <p:cNvPr id="8" name="Rounded Rectangle 7"/>
+          <p:cNvSpPr/>
+          <p:nvPr/>
+        </p:nvSpPr>
+        <p:spPr>
+          <a:xfrm>
+            <a:off x="6900000" y="1400000"/>
+            <a:ext cx="5200000" cy="4800000"/>
+          </a:xfrm>
+          <a:prstGeom prst="roundRect">
+            <a:avLst/>
+          </a:prstGeom>
+          <a:solidFill>
+            <a:srgbClr val="F8F7FC"/>
+          </a:solidFill>
+          <a:ln>
+            <a:noFill/>
+          </a:ln>
+          <a:effectLst/>
+        </p:spPr>
+        <p:style>
+          <a:lnRef idx="1">
+            <a:schemeClr val="accent1"/>
+          </a:lnRef>
+          <a:fillRef idx="3">
+            <a:schemeClr val="accent1"/>
+          </a:fillRef>
+          <a:effectRef idx="2">
+            <a:schemeClr val="accent1"/>
+          </a:effectRef>
+          <a:fontRef idx="minor">
+            <a:schemeClr val="lt1"/>
+          </a:fontRef>
+        </p:style>
+        <p:txBody>
+          <a:bodyPr rtlCol="0" anchor="ctr"/>
+          <a:lstStyle/>
+          <a:p>
+            <a:pPr algn="ctr"/>
+          </a:p>
+        </p:txBody>
+      </p:sp>
+      <p:sp>
+        <p:nvSpPr>
+          <p:cNvPr id="9" name="TextBox 8"/>
+          <p:cNvSpPr txBox="1"/>
+          <p:nvPr/>
+        </p:nvSpPr>
+        <p:spPr>
+          <a:xfrm>
+            <a:off x="7150000" y="1600000"/>
+            <a:ext cx="4700000" cy="4400000"/>
+          </a:xfrm>
+          <a:prstGeom prst="rect">
+            <a:avLst/>
+          </a:prstGeom>
+          <a:noFill/>
+        </p:spPr>
+        <p:txBody>
+          <a:bodyPr wrap="square">
+            <a:spAutoFit/>
+          </a:bodyPr>
+          <a:lstStyle/>
+          <a:p>
+            <a:r>
+              <a:rPr sz="1500" b="1">
+                <a:solidFill>
+                  <a:srgbClr val="6D28D9"/>
+                </a:solidFill>
+              </a:rPr>
+              <a:t>Built directly in response to user feedback:</a:t>
+            </a:r>
+          </a:p>
+          <a:p>
+            <a:pPr>
+              <a:spcBef>
+                <a:spcPts val="1000"/>
+              </a:spcBef>
+            </a:pPr>
+            <a:r>
+              <a:rPr i="1" sz="1500">
+                <a:solidFill>
+                  <a:srgbClr val="1C1E21"/>
+                </a:solidFill>
+              </a:rPr>
+              <a:t>“I wanted AI to perform a pentest, not a deterministic scan.”</a:t>
+            </a:r>
+          </a:p>
+        </p:txBody>
+      </p:sp>
+    </p:spTree>
+  </p:cSld>
+  <p:clrMapOvr>
+    <a:masterClrMapping/>
+  </p:clrMapOvr>
+</p:sld>
+</file>
+
+<file path=ppt/slides/slide25.xml><?xml version="1.0" encoding="utf-8"?>
+<p:sld xmlns:a="http://schemas.openxmlformats.org/drawingml/2006/main" xmlns:p="http://schemas.openxmlformats.org/presentationml/2006/main" xmlns:r="http://schemas.openxmlformats.org/officeDocument/2006/relationships">
+  <p:cSld>
+    <p:spTree>
+      <p:nvGrpSpPr>
+        <p:cNvPr id="1" name=""/>
+        <p:cNvGrpSpPr/>
+        <p:nvPr/>
+      </p:nvGrpSpPr>
+      <p:grpSpPr/>
+      <p:sp>
+        <p:nvSpPr>
+          <p:cNvPr id="2" name="Rectangle 1"/>
+          <p:cNvSpPr/>
+          <p:nvPr/>
+        </p:nvSpPr>
+        <p:spPr>
+          <a:xfrm>
+            <a:off x="0" y="0"/>
+            <a:ext cx="12191695" cy="128016"/>
+          </a:xfrm>
+          <a:prstGeom prst="rect">
+            <a:avLst/>
+          </a:prstGeom>
+          <a:solidFill>
+            <a:srgbClr val="6D28D9"/>
+          </a:solidFill>
+          <a:ln>
+            <a:noFill/>
+          </a:ln>
+          <a:effectLst/>
+        </p:spPr>
+        <p:style>
+          <a:lnRef idx="1">
+            <a:schemeClr val="accent1"/>
+          </a:lnRef>
+          <a:fillRef idx="3">
+            <a:schemeClr val="accent1"/>
+          </a:fillRef>
+          <a:effectRef idx="2">
+            <a:schemeClr val="accent1"/>
+          </a:effectRef>
+          <a:fontRef idx="minor">
+            <a:schemeClr val="lt1"/>
+          </a:fontRef>
+        </p:style>
+        <p:txBody>
+          <a:bodyPr rtlCol="0" anchor="ctr"/>
+          <a:lstStyle/>
+          <a:p>
+            <a:pPr algn="ctr"/>
+          </a:p>
+        </p:txBody>
+      </p:sp>
+      <p:sp>
+        <p:nvSpPr>
+          <p:cNvPr id="3" name="TextBox 2"/>
+          <p:cNvSpPr txBox="1"/>
+          <p:nvPr/>
+        </p:nvSpPr>
+        <p:spPr>
+          <a:xfrm>
+            <a:off x="548640" y="164592"/>
+            <a:ext cx="7315200" cy="320040"/>
+          </a:xfrm>
+          <a:prstGeom prst="rect">
+            <a:avLst/>
+          </a:prstGeom>
+          <a:noFill/>
+        </p:spPr>
+        <p:txBody>
+          <a:bodyPr wrap="none">
+            <a:spAutoFit/>
+          </a:bodyPr>
+          <a:lstStyle/>
+          <a:p>
+            <a:r>
+              <a:rPr sz="1300" b="1">
+                <a:solidFill>
+                  <a:srgbClr val="6D28D9"/>
+                </a:solidFill>
+                <a:latin typeface="Calibri"/>
+              </a:rPr>
+              <a:t>LIVE RESULTS</a:t>
+            </a:r>
+          </a:p>
+        </p:txBody>
+      </p:sp>
+      <p:sp>
+        <p:nvSpPr>
+          <p:cNvPr id="4" name="TextBox 3"/>
+          <p:cNvSpPr txBox="1"/>
+          <p:nvPr/>
+        </p:nvSpPr>
+        <p:spPr>
+          <a:xfrm>
+            <a:off x="548640" y="457200"/>
+            <a:ext cx="11094415" cy="822960"/>
+          </a:xfrm>
+          <a:prstGeom prst="rect">
+            <a:avLst/>
+          </a:prstGeom>
+          <a:noFill/>
+        </p:spPr>
+        <p:txBody>
+          <a:bodyPr wrap="none">
+            <a:spAutoFit/>
+          </a:bodyPr>
+          <a:lstStyle/>
+          <a:p>
+            <a:r>
+              <a:rPr sz="3000" b="1">
+                <a:solidFill>
+                  <a:srgbClr val="1C1E21"/>
+                </a:solidFill>
+                <a:latin typeface="Calibri"/>
+              </a:rPr>
+              <a:t>Real Findings, and an Honest Reliability Finding</a:t>
+            </a:r>
+          </a:p>
+        </p:txBody>
+      </p:sp>
+      <p:sp>
+        <p:nvSpPr>
+          <p:cNvPr id="5" name="TextBox 4"/>
+          <p:cNvSpPr txBox="1"/>
+          <p:nvPr/>
+        </p:nvSpPr>
+        <p:spPr>
+          <a:xfrm>
+            <a:off x="11094415" y="6400800"/>
+            <a:ext cx="822960" cy="320040"/>
+          </a:xfrm>
+          <a:prstGeom prst="rect">
+            <a:avLst/>
+          </a:prstGeom>
+          <a:noFill/>
+        </p:spPr>
+        <p:txBody>
+          <a:bodyPr wrap="none">
+            <a:spAutoFit/>
+          </a:bodyPr>
+          <a:lstStyle/>
+          <a:p>
+            <a:r>
+              <a:rPr sz="1100">
+                <a:solidFill>
+                  <a:srgbClr val="5B6270"/>
+                </a:solidFill>
+              </a:rPr>
+              <a:t>25</a:t>
+            </a:r>
+          </a:p>
+        </p:txBody>
+      </p:sp>
+      <p:sp>
+        <p:nvSpPr>
+          <p:cNvPr id="6" name="TextBox 5"/>
+          <p:cNvSpPr txBox="1"/>
+          <p:nvPr/>
+        </p:nvSpPr>
+        <p:spPr>
+          <a:xfrm>
+            <a:off x="548640" y="6400800"/>
+            <a:ext cx="2743200" cy="320040"/>
+          </a:xfrm>
+          <a:prstGeom prst="rect">
+            <a:avLst/>
+          </a:prstGeom>
+          <a:noFill/>
+        </p:spPr>
+        <p:txBody>
+          <a:bodyPr wrap="none">
+            <a:spAutoFit/>
+          </a:bodyPr>
+          <a:lstStyle/>
+          <a:p>
+            <a:r>
+              <a:rPr sz="1100" b="1">
+                <a:solidFill>
+                  <a:srgbClr val="6D28D9"/>
+                </a:solidFill>
+              </a:rPr>
+              <a:t>Verdikt</a:t>
+            </a:r>
+          </a:p>
+        </p:txBody>
+      </p:sp>
+      <p:sp>
+        <p:nvSpPr>
+          <p:cNvPr id="7" name="Rounded Rectangle 6"/>
+          <p:cNvSpPr/>
+          <p:nvPr/>
+        </p:nvSpPr>
+        <p:spPr>
+          <a:xfrm>
+            <a:off x="548640" y="1350000"/>
+            <a:ext cx="11094415" cy="700000"/>
+          </a:xfrm>
+          <a:prstGeom prst="roundRect">
+            <a:avLst/>
+          </a:prstGeom>
+          <a:solidFill>
+            <a:srgbClr val="F8F7FC"/>
+          </a:solidFill>
+          <a:ln>
+            <a:noFill/>
+          </a:ln>
+          <a:effectLst/>
+        </p:spPr>
+        <p:style>
+          <a:lnRef idx="1">
+            <a:schemeClr val="accent1"/>
+          </a:lnRef>
+          <a:fillRef idx="3">
+            <a:schemeClr val="accent1"/>
+          </a:fillRef>
+          <a:effectRef idx="2">
+            <a:schemeClr val="accent1"/>
+          </a:effectRef>
+          <a:fontRef idx="minor">
+            <a:schemeClr val="lt1"/>
+          </a:fontRef>
+        </p:style>
+        <p:txBody>
+          <a:bodyPr rtlCol="0" anchor="ctr"/>
+          <a:lstStyle/>
+          <a:p>
+            <a:pPr algn="ctr"/>
+          </a:p>
+        </p:txBody>
+      </p:sp>
+      <p:sp>
+        <p:nvSpPr>
+          <p:cNvPr id="8" name="Rounded Rectangle 7"/>
+          <p:cNvSpPr/>
+          <p:nvPr/>
+        </p:nvSpPr>
+        <p:spPr>
+          <a:xfrm>
+            <a:off x="700000" y="1525000"/>
+            <a:ext cx="1100000" cy="350000"/>
+          </a:xfrm>
+          <a:prstGeom prst="roundRect">
+            <a:avLst/>
+          </a:prstGeom>
+          <a:solidFill>
+            <a:srgbClr val="FEE2E2"/>
+          </a:solidFill>
+          <a:ln>
+            <a:noFill/>
+          </a:ln>
+          <a:effectLst/>
+        </p:spPr>
+        <p:style>
+          <a:lnRef idx="1">
+            <a:schemeClr val="accent1"/>
+          </a:lnRef>
+          <a:fillRef idx="3">
+            <a:schemeClr val="accent1"/>
+          </a:fillRef>
+          <a:effectRef idx="2">
+            <a:schemeClr val="accent1"/>
+          </a:effectRef>
+          <a:fontRef idx="minor">
+            <a:schemeClr val="lt1"/>
+          </a:fontRef>
+        </p:style>
+        <p:txBody>
+          <a:bodyPr rtlCol="0" anchor="ctr" lIns="0" rIns="0"/>
+          <a:lstStyle/>
+          <a:p>
+            <a:pPr algn="ctr"/>
+            <a:r>
+              <a:rPr sz="1200" b="1">
+                <a:solidFill>
+                  <a:srgbClr val="7F1D1D"/>
+                </a:solidFill>
+              </a:rPr>
+              <a:t>Critical</a:t>
+            </a:r>
+          </a:p>
+        </p:txBody>
+      </p:sp>
+      <p:sp>
+        <p:nvSpPr>
+          <p:cNvPr id="9" name="TextBox 8"/>
+          <p:cNvSpPr txBox="1"/>
+          <p:nvPr/>
+        </p:nvSpPr>
+        <p:spPr>
+          <a:xfrm>
+            <a:off x="2100000" y="1350000"/>
+            <a:ext cx="6000000" cy="700000"/>
+          </a:xfrm>
+          <a:prstGeom prst="rect">
+            <a:avLst/>
+          </a:prstGeom>
+          <a:noFill/>
+        </p:spPr>
+        <p:txBody>
+          <a:bodyPr wrap="none" anchor="ctr">
+            <a:spAutoFit/>
+          </a:bodyPr>
+          <a:lstStyle/>
+          <a:p>
+            <a:r>
+              <a:rPr sz="1500" b="1">
+                <a:solidFill>
+                  <a:srgbClr val="1C1E21"/>
+                </a:solidFill>
+              </a:rPr>
+              <a:t>SQL injection auth bypass + IDOR</a:t>
+            </a:r>
+          </a:p>
+        </p:txBody>
+      </p:sp>
+      <p:sp>
+        <p:nvSpPr>
+          <p:cNvPr id="10" name="TextBox 9"/>
+          <p:cNvSpPr txBox="1"/>
+          <p:nvPr/>
+        </p:nvSpPr>
+        <p:spPr>
+          <a:xfrm>
+            <a:off x="8300000" y="1350000"/>
+            <a:ext cx="3200000" cy="700000"/>
+          </a:xfrm>
+          <a:prstGeom prst="rect">
+            <a:avLst/>
+          </a:prstGeom>
+          <a:noFill/>
+        </p:spPr>
+        <p:txBody>
+          <a:bodyPr wrap="none" anchor="ctr">
+            <a:spAutoFit/>
+          </a:bodyPr>
+          <a:lstStyle/>
+          <a:p>
+            <a:r>
+              <a:rPr sz="1300">
+                <a:solidFill>
+                  <a:srgbClr val="5B6270"/>
+                </a:solidFill>
+              </a:rPr>
+              <a:t>demo.testfire.net</a:t>
+            </a:r>
+          </a:p>
+        </p:txBody>
+      </p:sp>
+      <p:sp>
+        <p:nvSpPr>
+          <p:cNvPr id="11" name="Rounded Rectangle 10"/>
+          <p:cNvSpPr/>
+          <p:nvPr/>
+        </p:nvSpPr>
+        <p:spPr>
+          <a:xfrm>
+            <a:off x="548640" y="2170000"/>
+            <a:ext cx="11094415" cy="700000"/>
+          </a:xfrm>
+          <a:prstGeom prst="roundRect">
+            <a:avLst/>
+          </a:prstGeom>
+          <a:solidFill>
+            <a:srgbClr val="F8F7FC"/>
+          </a:solidFill>
+          <a:ln>
+            <a:noFill/>
+          </a:ln>
+          <a:effectLst/>
+        </p:spPr>
+        <p:style>
+          <a:lnRef idx="1">
+            <a:schemeClr val="accent1"/>
+          </a:lnRef>
+          <a:fillRef idx="3">
+            <a:schemeClr val="accent1"/>
+          </a:fillRef>
+          <a:effectRef idx="2">
+            <a:schemeClr val="accent1"/>
+          </a:effectRef>
+          <a:fontRef idx="minor">
+            <a:schemeClr val="lt1"/>
+          </a:fontRef>
+        </p:style>
+        <p:txBody>
+          <a:bodyPr rtlCol="0" anchor="ctr"/>
+          <a:lstStyle/>
+          <a:p>
+            <a:pPr algn="ctr"/>
+          </a:p>
+        </p:txBody>
+      </p:sp>
+      <p:sp>
+        <p:nvSpPr>
+          <p:cNvPr id="12" name="Rounded Rectangle 11"/>
+          <p:cNvSpPr/>
+          <p:nvPr/>
+        </p:nvSpPr>
+        <p:spPr>
+          <a:xfrm>
+            <a:off x="700000" y="2345000"/>
+            <a:ext cx="1100000" cy="350000"/>
+          </a:xfrm>
+          <a:prstGeom prst="roundRect">
+            <a:avLst/>
+          </a:prstGeom>
+          <a:solidFill>
+            <a:srgbClr val="FEE2E2"/>
+          </a:solidFill>
+          <a:ln>
+            <a:noFill/>
+          </a:ln>
+          <a:effectLst/>
+        </p:spPr>
+        <p:style>
+          <a:lnRef idx="1">
+            <a:schemeClr val="accent1"/>
+          </a:lnRef>
+          <a:fillRef idx="3">
+            <a:schemeClr val="accent1"/>
+          </a:fillRef>
+          <a:effectRef idx="2">
+            <a:schemeClr val="accent1"/>
+          </a:effectRef>
+          <a:fontRef idx="minor">
+            <a:schemeClr val="lt1"/>
+          </a:fontRef>
+        </p:style>
+        <p:txBody>
+          <a:bodyPr rtlCol="0" anchor="ctr" lIns="0" rIns="0"/>
+          <a:lstStyle/>
+          <a:p>
+            <a:pPr algn="ctr"/>
+            <a:r>
+              <a:rPr sz="1200" b="1">
+                <a:solidFill>
+                  <a:srgbClr val="7F1D1D"/>
+                </a:solidFill>
+              </a:rPr>
+              <a:t>High</a:t>
+            </a:r>
+          </a:p>
+        </p:txBody>
+      </p:sp>
+      <p:sp>
+        <p:nvSpPr>
+          <p:cNvPr id="13" name="TextBox 12"/>
+          <p:cNvSpPr txBox="1"/>
+          <p:nvPr/>
+        </p:nvSpPr>
+        <p:spPr>
+          <a:xfrm>
+            <a:off x="2100000" y="2170000"/>
+            <a:ext cx="6000000" cy="700000"/>
+          </a:xfrm>
+          <a:prstGeom prst="rect">
+            <a:avLst/>
+          </a:prstGeom>
+          <a:noFill/>
+        </p:spPr>
+        <p:txBody>
+          <a:bodyPr wrap="none" anchor="ctr">
+            <a:spAutoFit/>
+          </a:bodyPr>
+          <a:lstStyle/>
+          <a:p>
+            <a:r>
+              <a:rPr sz="1500" b="1">
+                <a:solidFill>
+                  <a:srgbClr val="1C1E21"/>
+                </a:solidFill>
+              </a:rPr>
+              <a:t>Reflected XSS, screenshot-verified</a:t>
+            </a:r>
+          </a:p>
+        </p:txBody>
+      </p:sp>
+      <p:sp>
+        <p:nvSpPr>
+          <p:cNvPr id="14" name="TextBox 13"/>
+          <p:cNvSpPr txBox="1"/>
+          <p:nvPr/>
+        </p:nvSpPr>
+        <p:spPr>
+          <a:xfrm>
+            <a:off x="8300000" y="2170000"/>
+            <a:ext cx="3200000" cy="700000"/>
+          </a:xfrm>
+          <a:prstGeom prst="rect">
+            <a:avLst/>
+          </a:prstGeom>
+          <a:noFill/>
+        </p:spPr>
+        <p:txBody>
+          <a:bodyPr wrap="none" anchor="ctr">
+            <a:spAutoFit/>
+          </a:bodyPr>
+          <a:lstStyle/>
+          <a:p>
+            <a:r>
+              <a:rPr sz="1300">
+                <a:solidFill>
+                  <a:srgbClr val="5B6270"/>
+                </a:solidFill>
+              </a:rPr>
+              <a:t>demo.testfire.net</a:t>
+            </a:r>
+          </a:p>
+        </p:txBody>
+      </p:sp>
+      <p:sp>
+        <p:nvSpPr>
+          <p:cNvPr id="15" name="Rounded Rectangle 14"/>
+          <p:cNvSpPr/>
+          <p:nvPr/>
+        </p:nvSpPr>
+        <p:spPr>
+          <a:xfrm>
+            <a:off x="548640" y="2990000"/>
+            <a:ext cx="11094415" cy="700000"/>
+          </a:xfrm>
+          <a:prstGeom prst="roundRect">
+            <a:avLst/>
+          </a:prstGeom>
+          <a:solidFill>
+            <a:srgbClr val="F8F7FC"/>
+          </a:solidFill>
+          <a:ln>
+            <a:noFill/>
+          </a:ln>
+          <a:effectLst/>
+        </p:spPr>
+        <p:style>
+          <a:lnRef idx="1">
+            <a:schemeClr val="accent1"/>
+          </a:lnRef>
+          <a:fillRef idx="3">
+            <a:schemeClr val="accent1"/>
+          </a:fillRef>
+          <a:effectRef idx="2">
+            <a:schemeClr val="accent1"/>
+          </a:effectRef>
+          <a:fontRef idx="minor">
+            <a:schemeClr val="lt1"/>
+          </a:fontRef>
+        </p:style>
+        <p:txBody>
+          <a:bodyPr rtlCol="0" anchor="ctr"/>
+          <a:lstStyle/>
+          <a:p>
+            <a:pPr algn="ctr"/>
+          </a:p>
+        </p:txBody>
+      </p:sp>
+      <p:sp>
+        <p:nvSpPr>
+          <p:cNvPr id="16" name="Rounded Rectangle 15"/>
+          <p:cNvSpPr/>
+          <p:nvPr/>
+        </p:nvSpPr>
+        <p:spPr>
+          <a:xfrm>
+            <a:off x="700000" y="3165000"/>
+            <a:ext cx="1100000" cy="350000"/>
+          </a:xfrm>
+          <a:prstGeom prst="roundRect">
+            <a:avLst/>
+          </a:prstGeom>
+          <a:solidFill>
+            <a:srgbClr val="FEE2E2"/>
+          </a:solidFill>
+          <a:ln>
+            <a:noFill/>
+          </a:ln>
+          <a:effectLst/>
+        </p:spPr>
+        <p:style>
+          <a:lnRef idx="1">
+            <a:schemeClr val="accent1"/>
+          </a:lnRef>
+          <a:fillRef idx="3">
+            <a:schemeClr val="accent1"/>
+          </a:fillRef>
+          <a:effectRef idx="2">
+            <a:schemeClr val="accent1"/>
+          </a:effectRef>
+          <a:fontRef idx="minor">
+            <a:schemeClr val="lt1"/>
+          </a:fontRef>
+        </p:style>
+        <p:txBody>
+          <a:bodyPr rtlCol="0" anchor="ctr" lIns="0" rIns="0"/>
+          <a:lstStyle/>
+          <a:p>
+            <a:pPr algn="ctr"/>
+            <a:r>
+              <a:rPr sz="1200" b="1">
+                <a:solidFill>
+                  <a:srgbClr val="7F1D1D"/>
+                </a:solidFill>
+              </a:rPr>
+              <a:t>Critical</a:t>
+            </a:r>
+          </a:p>
+        </p:txBody>
+      </p:sp>
+      <p:sp>
+        <p:nvSpPr>
+          <p:cNvPr id="17" name="TextBox 16"/>
+          <p:cNvSpPr txBox="1"/>
+          <p:nvPr/>
+        </p:nvSpPr>
+        <p:spPr>
+          <a:xfrm>
+            <a:off x="2100000" y="2990000"/>
+            <a:ext cx="6000000" cy="700000"/>
+          </a:xfrm>
+          <a:prstGeom prst="rect">
+            <a:avLst/>
+          </a:prstGeom>
+          <a:noFill/>
+        </p:spPr>
+        <p:txBody>
+          <a:bodyPr wrap="none" anchor="ctr">
+            <a:spAutoFit/>
+          </a:bodyPr>
+          <a:lstStyle/>
+          <a:p>
+            <a:r>
+              <a:rPr sz="1500" b="1">
+                <a:solidFill>
+                  <a:srgbClr val="1C1E21"/>
+                </a:solidFill>
+              </a:rPr>
+              <a:t>Blind SQLi + command injection (bypassing filters)</a:t>
+            </a:r>
+          </a:p>
+        </p:txBody>
+      </p:sp>
+      <p:sp>
+        <p:nvSpPr>
+          <p:cNvPr id="18" name="TextBox 17"/>
+          <p:cNvSpPr txBox="1"/>
+          <p:nvPr/>
+        </p:nvSpPr>
+        <p:spPr>
+          <a:xfrm>
+            <a:off x="8300000" y="2990000"/>
+            <a:ext cx="3200000" cy="700000"/>
+          </a:xfrm>
+          <a:prstGeom prst="rect">
+            <a:avLst/>
+          </a:prstGeom>
+          <a:noFill/>
+        </p:spPr>
+        <p:txBody>
+          <a:bodyPr wrap="none" anchor="ctr">
+            <a:spAutoFit/>
+          </a:bodyPr>
+          <a:lstStyle/>
+          <a:p>
+            <a:r>
+              <a:rPr sz="1300">
+                <a:solidFill>
+                  <a:srgbClr val="5B6270"/>
+                </a:solidFill>
+              </a:rPr>
+              <a:t>DVWA — 24-session sweep</a:t>
+            </a:r>
+          </a:p>
+        </p:txBody>
+      </p:sp>
+      <p:sp>
+        <p:nvSpPr>
+          <p:cNvPr id="19" name="Rounded Rectangle 18"/>
+          <p:cNvSpPr/>
+          <p:nvPr/>
+        </p:nvSpPr>
+        <p:spPr>
+          <a:xfrm>
+            <a:off x="548640" y="3960000"/>
+            <a:ext cx="11094415" cy="2200000"/>
+          </a:xfrm>
+          <a:prstGeom prst="roundRect">
+            <a:avLst/>
+          </a:prstGeom>
+          <a:solidFill>
+            <a:srgbClr val="FFEDD5"/>
+          </a:solidFill>
+          <a:ln>
+            <a:noFill/>
+          </a:ln>
+          <a:effectLst/>
+        </p:spPr>
+        <p:style>
+          <a:lnRef idx="1">
+            <a:schemeClr val="accent1"/>
+          </a:lnRef>
+          <a:fillRef idx="3">
+            <a:schemeClr val="accent1"/>
+          </a:fillRef>
+          <a:effectRef idx="2">
+            <a:schemeClr val="accent1"/>
+          </a:effectRef>
+          <a:fontRef idx="minor">
+            <a:schemeClr val="lt1"/>
+          </a:fontRef>
+        </p:style>
+        <p:txBody>
+          <a:bodyPr rtlCol="0" anchor="ctr"/>
+          <a:lstStyle/>
+          <a:p>
+            <a:pPr algn="ctr"/>
+          </a:p>
+        </p:txBody>
+      </p:sp>
+      <p:sp>
+        <p:nvSpPr>
+          <p:cNvPr id="20" name="TextBox 19"/>
+          <p:cNvSpPr txBox="1"/>
+          <p:nvPr/>
+        </p:nvSpPr>
+        <p:spPr>
+          <a:xfrm>
+            <a:off x="750000" y="4130000"/>
+            <a:ext cx="10700000" cy="1900000"/>
+          </a:xfrm>
+          <a:prstGeom prst="rect">
+            <a:avLst/>
+          </a:prstGeom>
+          <a:noFill/>
+        </p:spPr>
+        <p:txBody>
+          <a:bodyPr wrap="square">
+            <a:spAutoFit/>
+          </a:bodyPr>
+          <a:lstStyle/>
+          <a:p>
+            <a:r>
+              <a:rPr sz="1500" b="1">
+                <a:solidFill>
+                  <a:srgbClr val="92400E"/>
+                </a:solidFill>
+              </a:rPr>
+              <a:t>Honest finding: the dominant cause of a missed vulnerability wasn't investigation quality</a:t>
+            </a:r>
+          </a:p>
+          <a:p>
+            <a:pPr>
+              <a:spcBef>
+                <a:spcPts val="800"/>
+              </a:spcBef>
+            </a:pPr>
+            <a:r>
+              <a:rPr sz="1300">
+                <a:solidFill>
+                  <a:srgbClr val="1C1E21"/>
+                </a:solidFill>
+              </a:rPr>
+              <a:t>A 24-session DVWA sweep found most zero-finding sessions never even reached the vulnerability — they lost a fragile, multi-step CSRF-token login sequence. The identified fix: pre-authenticate the sandbox using the existing, already-proven credential/login mechanism before the model's turn budget starts.</a:t>
             </a:r>
           </a:p>
         </p:txBody>
